--- a/pp.pptx
+++ b/pp.pptx
@@ -2,116 +2,21 @@
 <file path=ppt/presentation.xml><?xml version="1.0" encoding="utf-8"?>
 <p:presentation xmlns:p="http://schemas.openxmlformats.org/presentationml/2006/main">
   <p:sldMasterIdLst>
-    <p:sldMasterId xmlns:r="http://schemas.openxmlformats.org/officeDocument/2006/relationships" id="2147483648" r:id="Rbf97d6bd7e8f4c42"/>
+    <p:sldMasterId xmlns:r="http://schemas.openxmlformats.org/officeDocument/2006/relationships" id="2147483648" r:id="Rbfcd794661bd455d"/>
   </p:sldMasterIdLst>
   <p:notesMasterIdLst>
-    <p:notesMasterId xmlns:r="http://schemas.openxmlformats.org/officeDocument/2006/relationships" r:id="R0e2b894aa8a645d3"/>
+    <p:notesMasterId xmlns:r="http://schemas.openxmlformats.org/officeDocument/2006/relationships" r:id="Raf29fc2823804975"/>
   </p:notesMasterIdLst>
   <p:sldIdLst>
-    <p:sldId xmlns:r="http://schemas.openxmlformats.org/officeDocument/2006/relationships" id="256" r:id="Rf0dd9f7b8a64441e"/>
-    <p:sldId xmlns:r="http://schemas.openxmlformats.org/officeDocument/2006/relationships" id="257" r:id="R8e50eaaa5e5a438d"/>
-    <p:sldId xmlns:r="http://schemas.openxmlformats.org/officeDocument/2006/relationships" id="258" r:id="R0624b67c847d4a1d"/>
-    <p:sldId xmlns:r="http://schemas.openxmlformats.org/officeDocument/2006/relationships" id="259" r:id="R4ea4ecad69dc4d8c"/>
-    <p:sldId xmlns:r="http://schemas.openxmlformats.org/officeDocument/2006/relationships" id="260" r:id="Rc2f1a501ebb447f9"/>
-    <p:sldId xmlns:r="http://schemas.openxmlformats.org/officeDocument/2006/relationships" id="261" r:id="Rd7cfae04d4cd447e"/>
+    <p:sldId xmlns:r="http://schemas.openxmlformats.org/officeDocument/2006/relationships" id="256" r:id="R6e915d1fa85e4df9"/>
+    <p:sldId xmlns:r="http://schemas.openxmlformats.org/officeDocument/2006/relationships" id="257" r:id="R53c4554dbeab426d"/>
+    <p:sldId xmlns:r="http://schemas.openxmlformats.org/officeDocument/2006/relationships" id="258" r:id="R62e6c2fcb64945cd"/>
+    <p:sldId xmlns:r="http://schemas.openxmlformats.org/officeDocument/2006/relationships" id="259" r:id="R570ca5d0d5ba4a9e"/>
+    <p:sldId xmlns:r="http://schemas.openxmlformats.org/officeDocument/2006/relationships" id="260" r:id="R3b2c49fd91ff4118"/>
+    <p:sldId xmlns:r="http://schemas.openxmlformats.org/officeDocument/2006/relationships" id="261" r:id="R3811f40d3f424e3f"/>
   </p:sldIdLst>
   <p:sldSz cx="12192000" cy="6858000"/>
   <p:notesSz cx="6858000" cy="9144000"/>
-  <p:defaultTextStyle>
-    <a:defPPr xmlns:a="http://schemas.openxmlformats.org/drawingml/2006/main">
-      <a:defRPr lang="en-US"/>
-    </a:defPPr>
-    <a:lvl1pPr xmlns:a="http://schemas.openxmlformats.org/drawingml/2006/main" marL="0" indent="0" algn="l" defTabSz="914400">
-      <a:defRPr sz="1800" kern="1200">
-        <a:solidFill>
-          <a:schemeClr val="tx1"/>
-        </a:solidFill>
-        <a:latin typeface="+mn-lt"/>
-        <a:ea typeface="+mn-ea"/>
-        <a:cs typeface="+mn-cs"/>
-      </a:defRPr>
-    </a:lvl1pPr>
-    <a:lvl2pPr xmlns:a="http://schemas.openxmlformats.org/drawingml/2006/main" marL="457200" indent="0" algn="l" defTabSz="914400">
-      <a:defRPr sz="1800" kern="1200">
-        <a:solidFill>
-          <a:schemeClr val="tx1"/>
-        </a:solidFill>
-        <a:latin typeface="+mn-lt"/>
-        <a:ea typeface="+mn-ea"/>
-        <a:cs typeface="+mn-cs"/>
-      </a:defRPr>
-    </a:lvl2pPr>
-    <a:lvl3pPr xmlns:a="http://schemas.openxmlformats.org/drawingml/2006/main" marL="914400" indent="0" algn="l" defTabSz="914400">
-      <a:defRPr sz="1800" kern="1200">
-        <a:solidFill>
-          <a:schemeClr val="tx1"/>
-        </a:solidFill>
-        <a:latin typeface="+mn-lt"/>
-        <a:ea typeface="+mn-ea"/>
-        <a:cs typeface="+mn-cs"/>
-      </a:defRPr>
-    </a:lvl3pPr>
-    <a:lvl4pPr xmlns:a="http://schemas.openxmlformats.org/drawingml/2006/main" marL="1371600" indent="0" algn="l" defTabSz="914400">
-      <a:defRPr sz="1800" kern="1200">
-        <a:solidFill>
-          <a:schemeClr val="tx1"/>
-        </a:solidFill>
-        <a:latin typeface="+mn-lt"/>
-        <a:ea typeface="+mn-ea"/>
-        <a:cs typeface="+mn-cs"/>
-      </a:defRPr>
-    </a:lvl4pPr>
-    <a:lvl5pPr xmlns:a="http://schemas.openxmlformats.org/drawingml/2006/main" marL="1828800" indent="0" algn="l" defTabSz="914400">
-      <a:defRPr sz="1800" kern="1200">
-        <a:solidFill>
-          <a:schemeClr val="tx1"/>
-        </a:solidFill>
-        <a:latin typeface="+mn-lt"/>
-        <a:ea typeface="+mn-ea"/>
-        <a:cs typeface="+mn-cs"/>
-      </a:defRPr>
-    </a:lvl5pPr>
-    <a:lvl6pPr xmlns:a="http://schemas.openxmlformats.org/drawingml/2006/main" marL="2286000" indent="0" algn="l" defTabSz="914400">
-      <a:defRPr sz="1800" kern="1200">
-        <a:solidFill>
-          <a:schemeClr val="tx1"/>
-        </a:solidFill>
-        <a:latin typeface="+mn-lt"/>
-        <a:ea typeface="+mn-ea"/>
-        <a:cs typeface="+mn-cs"/>
-      </a:defRPr>
-    </a:lvl6pPr>
-    <a:lvl7pPr xmlns:a="http://schemas.openxmlformats.org/drawingml/2006/main" marL="2743200" indent="0" algn="l" defTabSz="914400">
-      <a:defRPr sz="1800" kern="1200">
-        <a:solidFill>
-          <a:schemeClr val="tx1"/>
-        </a:solidFill>
-        <a:latin typeface="+mn-lt"/>
-        <a:ea typeface="+mn-ea"/>
-        <a:cs typeface="+mn-cs"/>
-      </a:defRPr>
-    </a:lvl7pPr>
-    <a:lvl8pPr xmlns:a="http://schemas.openxmlformats.org/drawingml/2006/main" marL="3200400" indent="0" algn="l" defTabSz="914400">
-      <a:defRPr sz="1800" kern="1200">
-        <a:solidFill>
-          <a:schemeClr val="tx1"/>
-        </a:solidFill>
-        <a:latin typeface="+mn-lt"/>
-        <a:ea typeface="+mn-ea"/>
-        <a:cs typeface="+mn-cs"/>
-      </a:defRPr>
-    </a:lvl8pPr>
-    <a:lvl9pPr xmlns:a="http://schemas.openxmlformats.org/drawingml/2006/main" marL="3657600" indent="0" algn="l" defTabSz="914400">
-      <a:defRPr sz="1800" kern="1200">
-        <a:solidFill>
-          <a:schemeClr val="tx1"/>
-        </a:solidFill>
-        <a:latin typeface="+mn-lt"/>
-        <a:ea typeface="+mn-ea"/>
-        <a:cs typeface="+mn-cs"/>
-      </a:defRPr>
-    </a:lvl9pPr>
-  </p:defaultTextStyle>
 </p:presentation>
 </file>
 
@@ -315,12 +220,58 @@
         <a:solidFill>
           <a:schemeClr val="phClr"/>
         </a:solidFill>
-        <a:solidFill>
-          <a:schemeClr val="dk1"/>
-        </a:solidFill>
-        <a:solidFill>
-          <a:schemeClr val="accent1"/>
-        </a:solidFill>
+        <a:gradFill>
+          <a:gsLst>
+            <a:gs pos="0">
+              <a:schemeClr val="phClr">
+                <a:tint val="67000"/>
+                <a:lumMod val="110000"/>
+                <a:satMod val="105000"/>
+              </a:schemeClr>
+            </a:gs>
+            <a:gs pos="50000">
+              <a:schemeClr val="phClr">
+                <a:tint val="73000"/>
+                <a:lumMod val="105000"/>
+                <a:satMod val="103000"/>
+              </a:schemeClr>
+            </a:gs>
+            <a:gs pos="100000">
+              <a:schemeClr val="phClr">
+                <a:tint val="81000"/>
+                <a:lumMod val="105000"/>
+                <a:satMod val="109000"/>
+              </a:schemeClr>
+            </a:gs>
+          </a:gsLst>
+          <a:lin ang="5400000" scaled="0"/>
+        </a:gradFill>
+        <a:gradFill>
+          <a:gsLst>
+            <a:gs pos="0">
+              <a:schemeClr val="phClr">
+                <a:tint val="94000"/>
+                <a:lumMod val="102000"/>
+                <a:satMod val="103000"/>
+              </a:schemeClr>
+            </a:gs>
+            <a:gs pos="50000">
+              <a:schemeClr val="phClr">
+                <a:shade val="100000"/>
+                <a:lumMod val="100000"/>
+                <a:satMod val="110000"/>
+              </a:schemeClr>
+            </a:gs>
+            <a:gs pos="100000">
+              <a:schemeClr val="phClr">
+                <a:shade val="78000"/>
+                <a:lumMod val="99000"/>
+                <a:satMod val="120000"/>
+              </a:schemeClr>
+            </a:gs>
+          </a:gsLst>
+          <a:lin ang="5400000" scaled="0"/>
+        </a:gradFill>
       </a:fillStyleLst>
       <a:lnStyleLst>
         <a:ln w="12700">
@@ -890,7 +841,7 @@
   </p:cSld>
   <p:clrMap bg1="lt1" tx1="dk1" bg2="lt2" tx2="dk2" accent1="accent1" accent2="accent2" accent3="accent3" accent4="accent4" accent5="accent5" accent6="accent6" hlink="hlink" folHlink="folHlink"/>
   <p:sldLayoutIdLst>
-    <p:sldLayoutId xmlns:r="http://schemas.openxmlformats.org/officeDocument/2006/relationships" id="2147483649" r:id="R1ff2fc279db14e6c"/>
+    <p:sldLayoutId xmlns:r="http://schemas.openxmlformats.org/officeDocument/2006/relationships" id="2147483649" r:id="Rac2e964e1f7b4342"/>
   </p:sldLayoutIdLst>
   <p:txStyles>
     <p:titleStyle>
@@ -1230,12 +1181,58 @@
         <a:solidFill>
           <a:schemeClr val="phClr"/>
         </a:solidFill>
-        <a:solidFill>
-          <a:schemeClr val="dk1"/>
-        </a:solidFill>
-        <a:solidFill>
-          <a:schemeClr val="accent1"/>
-        </a:solidFill>
+        <a:gradFill>
+          <a:gsLst>
+            <a:gs pos="0">
+              <a:schemeClr val="phClr">
+                <a:tint val="67000"/>
+                <a:lumMod val="110000"/>
+                <a:satMod val="105000"/>
+              </a:schemeClr>
+            </a:gs>
+            <a:gs pos="50000">
+              <a:schemeClr val="phClr">
+                <a:tint val="73000"/>
+                <a:lumMod val="105000"/>
+                <a:satMod val="103000"/>
+              </a:schemeClr>
+            </a:gs>
+            <a:gs pos="100000">
+              <a:schemeClr val="phClr">
+                <a:tint val="81000"/>
+                <a:lumMod val="105000"/>
+                <a:satMod val="109000"/>
+              </a:schemeClr>
+            </a:gs>
+          </a:gsLst>
+          <a:lin ang="5400000" scaled="0"/>
+        </a:gradFill>
+        <a:gradFill>
+          <a:gsLst>
+            <a:gs pos="0">
+              <a:schemeClr val="phClr">
+                <a:tint val="94000"/>
+                <a:lumMod val="102000"/>
+                <a:satMod val="103000"/>
+              </a:schemeClr>
+            </a:gs>
+            <a:gs pos="50000">
+              <a:schemeClr val="phClr">
+                <a:shade val="100000"/>
+                <a:lumMod val="100000"/>
+                <a:satMod val="110000"/>
+              </a:schemeClr>
+            </a:gs>
+            <a:gs pos="100000">
+              <a:schemeClr val="phClr">
+                <a:shade val="78000"/>
+                <a:lumMod val="99000"/>
+                <a:satMod val="120000"/>
+              </a:schemeClr>
+            </a:gs>
+          </a:gsLst>
+          <a:lin ang="5400000" scaled="0"/>
+        </a:gradFill>
       </a:fillStyleLst>
       <a:lnStyleLst>
         <a:ln w="12700">
@@ -1385,10 +1382,10 @@
       </p:grpSpPr>
       <p:sp>
         <p:nvSpPr>
-          <p:cNvPr id="1" name="">
-            <a:extLst xmlns:a="http://schemas.openxmlformats.org/drawingml/2006/main">
-              <a:ext uri="{FF2B5EF4-FFF2-40B4-BE49-F238E27FC236}">
-                <a16:creationId xmlns:a16="http://schemas.microsoft.com/office/drawing/2014/main" id="{05663EA5-EAEC-4944-9715-9BA2EB392F27}"/>
+          <p:cNvPr id="30" name="">
+            <a:extLst xmlns:a="http://schemas.openxmlformats.org/drawingml/2006/main">
+              <a:ext uri="{FF2B5EF4-FFF2-40B4-BE49-F238E27FC236}">
+                <a16:creationId xmlns:a16="http://schemas.microsoft.com/office/drawing/2014/main" id="{704EA4F5-E323-4A0D-AA7F-B45EAE9DAC4A}"/>
               </a:ext>
             </a:extLst>
           </p:cNvPr>
@@ -1409,11 +1406,7 @@
             <a:srgbClr val="F7F4EE"/>
           </a:solidFill>
           <a:ln xmlns:a="http://schemas.openxmlformats.org/drawingml/2006/main" w="0">
-            <a:solidFill>
-              <a:srgbClr val="000000">
-                <a:alpha val="0"/>
-              </a:srgbClr>
-            </a:solidFill>
+            <a:noFill/>
             <a:prstDash val="solid"/>
           </a:ln>
         </p:spPr>
@@ -1423,7 +1416,7 @@
           <p:cNvPr id="2" name="">
             <a:extLst xmlns:a="http://schemas.openxmlformats.org/drawingml/2006/main">
               <a:ext uri="{FF2B5EF4-FFF2-40B4-BE49-F238E27FC236}">
-                <a16:creationId xmlns:a16="http://schemas.microsoft.com/office/drawing/2014/main" id="{E60F8CE6-A13A-40EA-BA82-01023C54282E}"/>
+                <a16:creationId xmlns:a16="http://schemas.microsoft.com/office/drawing/2014/main" id="{230621B7-D674-4609-83B5-7521D957C1FD}"/>
               </a:ext>
             </a:extLst>
           </p:cNvPr>
@@ -1444,11 +1437,7 @@
             <a:srgbClr val="1F2933"/>
           </a:solidFill>
           <a:ln xmlns:a="http://schemas.openxmlformats.org/drawingml/2006/main" w="0">
-            <a:solidFill>
-              <a:srgbClr val="000000">
-                <a:alpha val="0"/>
-              </a:srgbClr>
-            </a:solidFill>
+            <a:noFill/>
             <a:prstDash val="solid"/>
           </a:ln>
         </p:spPr>
@@ -1458,7 +1447,7 @@
           <p:cNvPr id="3" name="kicker-01-marker">
             <a:extLst xmlns:a="http://schemas.openxmlformats.org/drawingml/2006/main">
               <a:ext uri="{FF2B5EF4-FFF2-40B4-BE49-F238E27FC236}">
-                <a16:creationId xmlns:a16="http://schemas.microsoft.com/office/drawing/2014/main" id="{1CCC4116-D4C0-4CAC-8A01-91B478C24CAE}"/>
+                <a16:creationId xmlns:a16="http://schemas.microsoft.com/office/drawing/2014/main" id="{A5AB0CD1-5098-44D9-BE5C-3F8851DB2EF5}"/>
               </a:ext>
             </a:extLst>
           </p:cNvPr>
@@ -1479,11 +1468,7 @@
             <a:srgbClr val="2E7D5B"/>
           </a:solidFill>
           <a:ln xmlns:a="http://schemas.openxmlformats.org/drawingml/2006/main" w="0">
-            <a:solidFill>
-              <a:srgbClr val="000000">
-                <a:alpha val="0"/>
-              </a:srgbClr>
-            </a:solidFill>
+            <a:noFill/>
             <a:prstDash val="solid"/>
           </a:ln>
         </p:spPr>
@@ -1493,7 +1478,7 @@
           <p:cNvPr id="4" name="kicker-01-label">
             <a:extLst xmlns:a="http://schemas.openxmlformats.org/drawingml/2006/main">
               <a:ext uri="{FF2B5EF4-FFF2-40B4-BE49-F238E27FC236}">
-                <a16:creationId xmlns:a16="http://schemas.microsoft.com/office/drawing/2014/main" id="{7980927A-7758-48FD-9A44-25AAADED76F1}"/>
+                <a16:creationId xmlns:a16="http://schemas.microsoft.com/office/drawing/2014/main" id="{EDB92705-DE02-4737-9207-951479B2353D}"/>
               </a:ext>
             </a:extLst>
           </p:cNvPr>
@@ -1510,17 +1495,9 @@
           <a:prstGeom xmlns:a="http://schemas.openxmlformats.org/drawingml/2006/main" prst="rect">
             <a:avLst/>
           </a:prstGeom>
-          <a:solidFill xmlns:a="http://schemas.openxmlformats.org/drawingml/2006/main">
-            <a:srgbClr val="000000">
-              <a:alpha val="0"/>
-            </a:srgbClr>
-          </a:solidFill>
-          <a:ln xmlns:a="http://schemas.openxmlformats.org/drawingml/2006/main" w="0">
-            <a:solidFill>
-              <a:srgbClr val="000000">
-                <a:alpha val="0"/>
-              </a:srgbClr>
-            </a:solidFill>
+          <a:noFill xmlns:a="http://schemas.openxmlformats.org/drawingml/2006/main"/>
+          <a:ln xmlns:a="http://schemas.openxmlformats.org/drawingml/2006/main" w="0">
+            <a:noFill/>
             <a:prstDash val="solid"/>
           </a:ln>
         </p:spPr>
@@ -1557,7 +1534,7 @@
           <p:cNvPr id="5" name="">
             <a:extLst xmlns:a="http://schemas.openxmlformats.org/drawingml/2006/main">
               <a:ext uri="{FF2B5EF4-FFF2-40B4-BE49-F238E27FC236}">
-                <a16:creationId xmlns:a16="http://schemas.microsoft.com/office/drawing/2014/main" id="{23842153-0E52-4DF7-BDAB-3840CD7F74AF}"/>
+                <a16:creationId xmlns:a16="http://schemas.microsoft.com/office/drawing/2014/main" id="{BB9462B4-9508-44AD-85D0-065F4805576C}"/>
               </a:ext>
             </a:extLst>
           </p:cNvPr>
@@ -1574,17 +1551,9 @@
           <a:prstGeom xmlns:a="http://schemas.openxmlformats.org/drawingml/2006/main" prst="rect">
             <a:avLst/>
           </a:prstGeom>
-          <a:solidFill xmlns:a="http://schemas.openxmlformats.org/drawingml/2006/main">
-            <a:srgbClr val="000000">
-              <a:alpha val="0"/>
-            </a:srgbClr>
-          </a:solidFill>
-          <a:ln xmlns:a="http://schemas.openxmlformats.org/drawingml/2006/main" w="0">
-            <a:solidFill>
-              <a:srgbClr val="000000">
-                <a:alpha val="0"/>
-              </a:srgbClr>
-            </a:solidFill>
+          <a:noFill xmlns:a="http://schemas.openxmlformats.org/drawingml/2006/main"/>
+          <a:ln xmlns:a="http://schemas.openxmlformats.org/drawingml/2006/main" w="0">
+            <a:noFill/>
             <a:prstDash val="solid"/>
           </a:ln>
         </p:spPr>
@@ -1621,7 +1590,7 @@
           <p:cNvPr id="6" name="">
             <a:extLst xmlns:a="http://schemas.openxmlformats.org/drawingml/2006/main">
               <a:ext uri="{FF2B5EF4-FFF2-40B4-BE49-F238E27FC236}">
-                <a16:creationId xmlns:a16="http://schemas.microsoft.com/office/drawing/2014/main" id="{0B630AF0-A546-4A8B-8FF1-945B73FEAA41}"/>
+                <a16:creationId xmlns:a16="http://schemas.microsoft.com/office/drawing/2014/main" id="{4243E5E0-892B-4D6B-8EE5-97D5509EE2F5}"/>
               </a:ext>
             </a:extLst>
           </p:cNvPr>
@@ -1638,17 +1607,9 @@
           <a:prstGeom xmlns:a="http://schemas.openxmlformats.org/drawingml/2006/main" prst="rect">
             <a:avLst/>
           </a:prstGeom>
-          <a:solidFill xmlns:a="http://schemas.openxmlformats.org/drawingml/2006/main">
-            <a:srgbClr val="000000">
-              <a:alpha val="0"/>
-            </a:srgbClr>
-          </a:solidFill>
-          <a:ln xmlns:a="http://schemas.openxmlformats.org/drawingml/2006/main" w="0">
-            <a:solidFill>
-              <a:srgbClr val="000000">
-                <a:alpha val="0"/>
-              </a:srgbClr>
-            </a:solidFill>
+          <a:noFill xmlns:a="http://schemas.openxmlformats.org/drawingml/2006/main"/>
+          <a:ln xmlns:a="http://schemas.openxmlformats.org/drawingml/2006/main" w="0">
+            <a:noFill/>
             <a:prstDash val="solid"/>
           </a:ln>
         </p:spPr>
@@ -1685,7 +1646,7 @@
           <p:cNvPr id="7" name="">
             <a:extLst xmlns:a="http://schemas.openxmlformats.org/drawingml/2006/main">
               <a:ext uri="{FF2B5EF4-FFF2-40B4-BE49-F238E27FC236}">
-                <a16:creationId xmlns:a16="http://schemas.microsoft.com/office/drawing/2014/main" id="{7490A74C-4B5B-45C2-B345-74E2E89BDBEA}"/>
+                <a16:creationId xmlns:a16="http://schemas.microsoft.com/office/drawing/2014/main" id="{1ED77B17-451B-4F43-A893-80A0CDA70064}"/>
               </a:ext>
             </a:extLst>
           </p:cNvPr>
@@ -1718,7 +1679,7 @@
           <p:cNvPr id="8" name="">
             <a:extLst xmlns:a="http://schemas.openxmlformats.org/drawingml/2006/main">
               <a:ext uri="{FF2B5EF4-FFF2-40B4-BE49-F238E27FC236}">
-                <a16:creationId xmlns:a16="http://schemas.microsoft.com/office/drawing/2014/main" id="{60AF0AFF-162C-4A76-B935-AF4CA9CF70F5}"/>
+                <a16:creationId xmlns:a16="http://schemas.microsoft.com/office/drawing/2014/main" id="{61F2006F-F31B-40AF-8101-8D07AF0D32AE}"/>
               </a:ext>
             </a:extLst>
           </p:cNvPr>
@@ -1735,17 +1696,9 @@
           <a:prstGeom xmlns:a="http://schemas.openxmlformats.org/drawingml/2006/main" prst="rect">
             <a:avLst/>
           </a:prstGeom>
-          <a:solidFill xmlns:a="http://schemas.openxmlformats.org/drawingml/2006/main">
-            <a:srgbClr val="000000">
-              <a:alpha val="0"/>
-            </a:srgbClr>
-          </a:solidFill>
-          <a:ln xmlns:a="http://schemas.openxmlformats.org/drawingml/2006/main" w="0">
-            <a:solidFill>
-              <a:srgbClr val="000000">
-                <a:alpha val="0"/>
-              </a:srgbClr>
-            </a:solidFill>
+          <a:noFill xmlns:a="http://schemas.openxmlformats.org/drawingml/2006/main"/>
+          <a:ln xmlns:a="http://schemas.openxmlformats.org/drawingml/2006/main" w="0">
+            <a:noFill/>
             <a:prstDash val="solid"/>
           </a:ln>
         </p:spPr>
@@ -1782,7 +1735,7 @@
           <p:cNvPr id="9" name="">
             <a:extLst xmlns:a="http://schemas.openxmlformats.org/drawingml/2006/main">
               <a:ext uri="{FF2B5EF4-FFF2-40B4-BE49-F238E27FC236}">
-                <a16:creationId xmlns:a16="http://schemas.microsoft.com/office/drawing/2014/main" id="{5E1911CF-AE4B-43A6-B77D-E2A407007D14}"/>
+                <a16:creationId xmlns:a16="http://schemas.microsoft.com/office/drawing/2014/main" id="{17B9095B-2CD9-4006-BB50-7B4F2B401778}"/>
               </a:ext>
             </a:extLst>
           </p:cNvPr>
@@ -1815,7 +1768,7 @@
           <p:cNvPr id="10" name="">
             <a:extLst xmlns:a="http://schemas.openxmlformats.org/drawingml/2006/main">
               <a:ext uri="{FF2B5EF4-FFF2-40B4-BE49-F238E27FC236}">
-                <a16:creationId xmlns:a16="http://schemas.microsoft.com/office/drawing/2014/main" id="{379D1892-B2D8-4121-BE73-CE82D5585C10}"/>
+                <a16:creationId xmlns:a16="http://schemas.microsoft.com/office/drawing/2014/main" id="{9DD24607-5381-4666-9E13-C2DA1D6362C1}"/>
               </a:ext>
             </a:extLst>
           </p:cNvPr>
@@ -1832,17 +1785,9 @@
           <a:prstGeom xmlns:a="http://schemas.openxmlformats.org/drawingml/2006/main" prst="rect">
             <a:avLst/>
           </a:prstGeom>
-          <a:solidFill xmlns:a="http://schemas.openxmlformats.org/drawingml/2006/main">
-            <a:srgbClr val="000000">
-              <a:alpha val="0"/>
-            </a:srgbClr>
-          </a:solidFill>
-          <a:ln xmlns:a="http://schemas.openxmlformats.org/drawingml/2006/main" w="0">
-            <a:solidFill>
-              <a:srgbClr val="000000">
-                <a:alpha val="0"/>
-              </a:srgbClr>
-            </a:solidFill>
+          <a:noFill xmlns:a="http://schemas.openxmlformats.org/drawingml/2006/main"/>
+          <a:ln xmlns:a="http://schemas.openxmlformats.org/drawingml/2006/main" w="0">
+            <a:noFill/>
             <a:prstDash val="solid"/>
           </a:ln>
         </p:spPr>
@@ -1879,7 +1824,7 @@
           <p:cNvPr id="11" name="">
             <a:extLst xmlns:a="http://schemas.openxmlformats.org/drawingml/2006/main">
               <a:ext uri="{FF2B5EF4-FFF2-40B4-BE49-F238E27FC236}">
-                <a16:creationId xmlns:a16="http://schemas.microsoft.com/office/drawing/2014/main" id="{39F4D0E0-9887-401A-90AB-9782D87751BD}"/>
+                <a16:creationId xmlns:a16="http://schemas.microsoft.com/office/drawing/2014/main" id="{C0983787-AFF0-4169-945E-E9161AF05677}"/>
               </a:ext>
             </a:extLst>
           </p:cNvPr>
@@ -1912,7 +1857,7 @@
           <p:cNvPr id="12" name="">
             <a:extLst xmlns:a="http://schemas.openxmlformats.org/drawingml/2006/main">
               <a:ext uri="{FF2B5EF4-FFF2-40B4-BE49-F238E27FC236}">
-                <a16:creationId xmlns:a16="http://schemas.microsoft.com/office/drawing/2014/main" id="{9056B0F7-F567-40DF-A272-8EE06F3CFD93}"/>
+                <a16:creationId xmlns:a16="http://schemas.microsoft.com/office/drawing/2014/main" id="{F4BBEE3A-EC3E-494B-AB57-BDF84D1AF75D}"/>
               </a:ext>
             </a:extLst>
           </p:cNvPr>
@@ -1929,17 +1874,9 @@
           <a:prstGeom xmlns:a="http://schemas.openxmlformats.org/drawingml/2006/main" prst="rect">
             <a:avLst/>
           </a:prstGeom>
-          <a:solidFill xmlns:a="http://schemas.openxmlformats.org/drawingml/2006/main">
-            <a:srgbClr val="000000">
-              <a:alpha val="0"/>
-            </a:srgbClr>
-          </a:solidFill>
-          <a:ln xmlns:a="http://schemas.openxmlformats.org/drawingml/2006/main" w="0">
-            <a:solidFill>
-              <a:srgbClr val="000000">
-                <a:alpha val="0"/>
-              </a:srgbClr>
-            </a:solidFill>
+          <a:noFill xmlns:a="http://schemas.openxmlformats.org/drawingml/2006/main"/>
+          <a:ln xmlns:a="http://schemas.openxmlformats.org/drawingml/2006/main" w="0">
+            <a:noFill/>
             <a:prstDash val="solid"/>
           </a:ln>
         </p:spPr>
@@ -1976,7 +1913,7 @@
           <p:cNvPr id="13" name="">
             <a:extLst xmlns:a="http://schemas.openxmlformats.org/drawingml/2006/main">
               <a:ext uri="{FF2B5EF4-FFF2-40B4-BE49-F238E27FC236}">
-                <a16:creationId xmlns:a16="http://schemas.microsoft.com/office/drawing/2014/main" id="{28BC6020-13A9-4415-B002-C5C81C0DFA00}"/>
+                <a16:creationId xmlns:a16="http://schemas.microsoft.com/office/drawing/2014/main" id="{FAD007FE-F679-4872-983D-37B651EDE751}"/>
               </a:ext>
             </a:extLst>
           </p:cNvPr>
@@ -2009,7 +1946,7 @@
           <p:cNvPr id="14" name="">
             <a:extLst xmlns:a="http://schemas.openxmlformats.org/drawingml/2006/main">
               <a:ext uri="{FF2B5EF4-FFF2-40B4-BE49-F238E27FC236}">
-                <a16:creationId xmlns:a16="http://schemas.microsoft.com/office/drawing/2014/main" id="{4FEA25C4-9FF8-45C6-A673-5046B5233E64}"/>
+                <a16:creationId xmlns:a16="http://schemas.microsoft.com/office/drawing/2014/main" id="{1D526958-AFC9-456F-ABBA-5822A046E160}"/>
               </a:ext>
             </a:extLst>
           </p:cNvPr>
@@ -2030,11 +1967,7 @@
             <a:srgbClr val="2E7D5B"/>
           </a:solidFill>
           <a:ln xmlns:a="http://schemas.openxmlformats.org/drawingml/2006/main" w="0">
-            <a:solidFill>
-              <a:srgbClr val="000000">
-                <a:alpha val="0"/>
-              </a:srgbClr>
-            </a:solidFill>
+            <a:noFill/>
             <a:prstDash val="solid"/>
           </a:ln>
         </p:spPr>
@@ -2044,7 +1977,7 @@
           <p:cNvPr id="15" name="">
             <a:extLst xmlns:a="http://schemas.openxmlformats.org/drawingml/2006/main">
               <a:ext uri="{FF2B5EF4-FFF2-40B4-BE49-F238E27FC236}">
-                <a16:creationId xmlns:a16="http://schemas.microsoft.com/office/drawing/2014/main" id="{88A4BD18-F1F9-448A-83CC-35A328AEB27D}"/>
+                <a16:creationId xmlns:a16="http://schemas.microsoft.com/office/drawing/2014/main" id="{CF045E7A-2B3A-4CD6-8838-3828BF22A44B}"/>
               </a:ext>
             </a:extLst>
           </p:cNvPr>
@@ -2061,17 +1994,9 @@
           <a:prstGeom xmlns:a="http://schemas.openxmlformats.org/drawingml/2006/main" prst="rect">
             <a:avLst/>
           </a:prstGeom>
-          <a:solidFill xmlns:a="http://schemas.openxmlformats.org/drawingml/2006/main">
-            <a:srgbClr val="000000">
-              <a:alpha val="0"/>
-            </a:srgbClr>
-          </a:solidFill>
-          <a:ln xmlns:a="http://schemas.openxmlformats.org/drawingml/2006/main" w="0">
-            <a:solidFill>
-              <a:srgbClr val="000000">
-                <a:alpha val="0"/>
-              </a:srgbClr>
-            </a:solidFill>
+          <a:noFill xmlns:a="http://schemas.openxmlformats.org/drawingml/2006/main"/>
+          <a:ln xmlns:a="http://schemas.openxmlformats.org/drawingml/2006/main" w="0">
+            <a:noFill/>
             <a:prstDash val="solid"/>
           </a:ln>
         </p:spPr>
@@ -2108,7 +2033,7 @@
           <p:cNvPr id="16" name="">
             <a:extLst xmlns:a="http://schemas.openxmlformats.org/drawingml/2006/main">
               <a:ext uri="{FF2B5EF4-FFF2-40B4-BE49-F238E27FC236}">
-                <a16:creationId xmlns:a16="http://schemas.microsoft.com/office/drawing/2014/main" id="{CEBDB745-F8E3-4908-AA88-7D3C2FD170AD}"/>
+                <a16:creationId xmlns:a16="http://schemas.microsoft.com/office/drawing/2014/main" id="{D5F67982-433E-4711-9CD6-04E4A6A66E7C}"/>
               </a:ext>
             </a:extLst>
           </p:cNvPr>
@@ -2125,17 +2050,9 @@
           <a:prstGeom xmlns:a="http://schemas.openxmlformats.org/drawingml/2006/main" prst="rect">
             <a:avLst/>
           </a:prstGeom>
-          <a:solidFill xmlns:a="http://schemas.openxmlformats.org/drawingml/2006/main">
-            <a:srgbClr val="000000">
-              <a:alpha val="0"/>
-            </a:srgbClr>
-          </a:solidFill>
-          <a:ln xmlns:a="http://schemas.openxmlformats.org/drawingml/2006/main" w="0">
-            <a:solidFill>
-              <a:srgbClr val="000000">
-                <a:alpha val="0"/>
-              </a:srgbClr>
-            </a:solidFill>
+          <a:noFill xmlns:a="http://schemas.openxmlformats.org/drawingml/2006/main"/>
+          <a:ln xmlns:a="http://schemas.openxmlformats.org/drawingml/2006/main" w="0">
+            <a:noFill/>
             <a:prstDash val="solid"/>
           </a:ln>
         </p:spPr>
@@ -2172,7 +2089,7 @@
           <p:cNvPr id="17" name="">
             <a:extLst xmlns:a="http://schemas.openxmlformats.org/drawingml/2006/main">
               <a:ext uri="{FF2B5EF4-FFF2-40B4-BE49-F238E27FC236}">
-                <a16:creationId xmlns:a16="http://schemas.microsoft.com/office/drawing/2014/main" id="{3B8AEC50-2106-4EB5-92D1-0C9EE5315EB9}"/>
+                <a16:creationId xmlns:a16="http://schemas.microsoft.com/office/drawing/2014/main" id="{6DCAEFE0-3B9E-4329-95F9-BE1370B63E5D}"/>
               </a:ext>
             </a:extLst>
           </p:cNvPr>
@@ -2205,7 +2122,7 @@
           <p:cNvPr id="18" name="">
             <a:extLst xmlns:a="http://schemas.openxmlformats.org/drawingml/2006/main">
               <a:ext uri="{FF2B5EF4-FFF2-40B4-BE49-F238E27FC236}">
-                <a16:creationId xmlns:a16="http://schemas.microsoft.com/office/drawing/2014/main" id="{FAD6A0B4-EB7D-4452-9581-B97820AE4001}"/>
+                <a16:creationId xmlns:a16="http://schemas.microsoft.com/office/drawing/2014/main" id="{3274FD93-7F2A-4650-94F5-87B339B634C8}"/>
               </a:ext>
             </a:extLst>
           </p:cNvPr>
@@ -2226,11 +2143,7 @@
             <a:srgbClr val="2F6FAD"/>
           </a:solidFill>
           <a:ln xmlns:a="http://schemas.openxmlformats.org/drawingml/2006/main" w="0">
-            <a:solidFill>
-              <a:srgbClr val="000000">
-                <a:alpha val="0"/>
-              </a:srgbClr>
-            </a:solidFill>
+            <a:noFill/>
             <a:prstDash val="solid"/>
           </a:ln>
         </p:spPr>
@@ -2240,7 +2153,7 @@
           <p:cNvPr id="19" name="">
             <a:extLst xmlns:a="http://schemas.openxmlformats.org/drawingml/2006/main">
               <a:ext uri="{FF2B5EF4-FFF2-40B4-BE49-F238E27FC236}">
-                <a16:creationId xmlns:a16="http://schemas.microsoft.com/office/drawing/2014/main" id="{A4E191FA-ABAD-4B96-93D0-1D6093421CB5}"/>
+                <a16:creationId xmlns:a16="http://schemas.microsoft.com/office/drawing/2014/main" id="{33620469-C1E0-4853-8A5F-F61FF60E832B}"/>
               </a:ext>
             </a:extLst>
           </p:cNvPr>
@@ -2257,17 +2170,9 @@
           <a:prstGeom xmlns:a="http://schemas.openxmlformats.org/drawingml/2006/main" prst="rect">
             <a:avLst/>
           </a:prstGeom>
-          <a:solidFill xmlns:a="http://schemas.openxmlformats.org/drawingml/2006/main">
-            <a:srgbClr val="000000">
-              <a:alpha val="0"/>
-            </a:srgbClr>
-          </a:solidFill>
-          <a:ln xmlns:a="http://schemas.openxmlformats.org/drawingml/2006/main" w="0">
-            <a:solidFill>
-              <a:srgbClr val="000000">
-                <a:alpha val="0"/>
-              </a:srgbClr>
-            </a:solidFill>
+          <a:noFill xmlns:a="http://schemas.openxmlformats.org/drawingml/2006/main"/>
+          <a:ln xmlns:a="http://schemas.openxmlformats.org/drawingml/2006/main" w="0">
+            <a:noFill/>
             <a:prstDash val="solid"/>
           </a:ln>
         </p:spPr>
@@ -2304,7 +2209,7 @@
           <p:cNvPr id="20" name="">
             <a:extLst xmlns:a="http://schemas.openxmlformats.org/drawingml/2006/main">
               <a:ext uri="{FF2B5EF4-FFF2-40B4-BE49-F238E27FC236}">
-                <a16:creationId xmlns:a16="http://schemas.microsoft.com/office/drawing/2014/main" id="{2DC40406-458F-4283-B179-F3FC77744167}"/>
+                <a16:creationId xmlns:a16="http://schemas.microsoft.com/office/drawing/2014/main" id="{81A61317-106B-4181-BD2D-A113FCD93EC9}"/>
               </a:ext>
             </a:extLst>
           </p:cNvPr>
@@ -2321,17 +2226,9 @@
           <a:prstGeom xmlns:a="http://schemas.openxmlformats.org/drawingml/2006/main" prst="rect">
             <a:avLst/>
           </a:prstGeom>
-          <a:solidFill xmlns:a="http://schemas.openxmlformats.org/drawingml/2006/main">
-            <a:srgbClr val="000000">
-              <a:alpha val="0"/>
-            </a:srgbClr>
-          </a:solidFill>
-          <a:ln xmlns:a="http://schemas.openxmlformats.org/drawingml/2006/main" w="0">
-            <a:solidFill>
-              <a:srgbClr val="000000">
-                <a:alpha val="0"/>
-              </a:srgbClr>
-            </a:solidFill>
+          <a:noFill xmlns:a="http://schemas.openxmlformats.org/drawingml/2006/main"/>
+          <a:ln xmlns:a="http://schemas.openxmlformats.org/drawingml/2006/main" w="0">
+            <a:noFill/>
             <a:prstDash val="solid"/>
           </a:ln>
         </p:spPr>
@@ -2368,7 +2265,7 @@
           <p:cNvPr id="21" name="">
             <a:extLst xmlns:a="http://schemas.openxmlformats.org/drawingml/2006/main">
               <a:ext uri="{FF2B5EF4-FFF2-40B4-BE49-F238E27FC236}">
-                <a16:creationId xmlns:a16="http://schemas.microsoft.com/office/drawing/2014/main" id="{AC5DB0C9-233A-43DC-B826-E071A533C1A9}"/>
+                <a16:creationId xmlns:a16="http://schemas.microsoft.com/office/drawing/2014/main" id="{6378623A-B806-4545-94B2-8221B5B3EB3E}"/>
               </a:ext>
             </a:extLst>
           </p:cNvPr>
@@ -2401,7 +2298,7 @@
           <p:cNvPr id="22" name="">
             <a:extLst xmlns:a="http://schemas.openxmlformats.org/drawingml/2006/main">
               <a:ext uri="{FF2B5EF4-FFF2-40B4-BE49-F238E27FC236}">
-                <a16:creationId xmlns:a16="http://schemas.microsoft.com/office/drawing/2014/main" id="{D7286871-01D4-432B-A761-2EEF1CC83413}"/>
+                <a16:creationId xmlns:a16="http://schemas.microsoft.com/office/drawing/2014/main" id="{188D64B4-683D-405D-9C9D-0ECA7EDE3CD4}"/>
               </a:ext>
             </a:extLst>
           </p:cNvPr>
@@ -2422,11 +2319,7 @@
             <a:srgbClr val="C9792B"/>
           </a:solidFill>
           <a:ln xmlns:a="http://schemas.openxmlformats.org/drawingml/2006/main" w="0">
-            <a:solidFill>
-              <a:srgbClr val="000000">
-                <a:alpha val="0"/>
-              </a:srgbClr>
-            </a:solidFill>
+            <a:noFill/>
             <a:prstDash val="solid"/>
           </a:ln>
         </p:spPr>
@@ -2436,7 +2329,7 @@
           <p:cNvPr id="23" name="">
             <a:extLst xmlns:a="http://schemas.openxmlformats.org/drawingml/2006/main">
               <a:ext uri="{FF2B5EF4-FFF2-40B4-BE49-F238E27FC236}">
-                <a16:creationId xmlns:a16="http://schemas.microsoft.com/office/drawing/2014/main" id="{2A848067-9A5A-404C-AF91-67F67C0F5298}"/>
+                <a16:creationId xmlns:a16="http://schemas.microsoft.com/office/drawing/2014/main" id="{F508E8DA-1F6C-4B1D-9B18-E41613EA4562}"/>
               </a:ext>
             </a:extLst>
           </p:cNvPr>
@@ -2453,17 +2346,9 @@
           <a:prstGeom xmlns:a="http://schemas.openxmlformats.org/drawingml/2006/main" prst="rect">
             <a:avLst/>
           </a:prstGeom>
-          <a:solidFill xmlns:a="http://schemas.openxmlformats.org/drawingml/2006/main">
-            <a:srgbClr val="000000">
-              <a:alpha val="0"/>
-            </a:srgbClr>
-          </a:solidFill>
-          <a:ln xmlns:a="http://schemas.openxmlformats.org/drawingml/2006/main" w="0">
-            <a:solidFill>
-              <a:srgbClr val="000000">
-                <a:alpha val="0"/>
-              </a:srgbClr>
-            </a:solidFill>
+          <a:noFill xmlns:a="http://schemas.openxmlformats.org/drawingml/2006/main"/>
+          <a:ln xmlns:a="http://schemas.openxmlformats.org/drawingml/2006/main" w="0">
+            <a:noFill/>
             <a:prstDash val="solid"/>
           </a:ln>
         </p:spPr>
@@ -2500,7 +2385,7 @@
           <p:cNvPr id="24" name="">
             <a:extLst xmlns:a="http://schemas.openxmlformats.org/drawingml/2006/main">
               <a:ext uri="{FF2B5EF4-FFF2-40B4-BE49-F238E27FC236}">
-                <a16:creationId xmlns:a16="http://schemas.microsoft.com/office/drawing/2014/main" id="{1D86E0C0-37B1-4E5C-AC39-46E001BD4C79}"/>
+                <a16:creationId xmlns:a16="http://schemas.microsoft.com/office/drawing/2014/main" id="{D26375A5-5B28-4FFC-BB0D-E14536C100EF}"/>
               </a:ext>
             </a:extLst>
           </p:cNvPr>
@@ -2517,17 +2402,9 @@
           <a:prstGeom xmlns:a="http://schemas.openxmlformats.org/drawingml/2006/main" prst="rect">
             <a:avLst/>
           </a:prstGeom>
-          <a:solidFill xmlns:a="http://schemas.openxmlformats.org/drawingml/2006/main">
-            <a:srgbClr val="000000">
-              <a:alpha val="0"/>
-            </a:srgbClr>
-          </a:solidFill>
-          <a:ln xmlns:a="http://schemas.openxmlformats.org/drawingml/2006/main" w="0">
-            <a:solidFill>
-              <a:srgbClr val="000000">
-                <a:alpha val="0"/>
-              </a:srgbClr>
-            </a:solidFill>
+          <a:noFill xmlns:a="http://schemas.openxmlformats.org/drawingml/2006/main"/>
+          <a:ln xmlns:a="http://schemas.openxmlformats.org/drawingml/2006/main" w="0">
+            <a:noFill/>
             <a:prstDash val="solid"/>
           </a:ln>
         </p:spPr>
@@ -2564,7 +2441,7 @@
           <p:cNvPr id="25" name="">
             <a:extLst xmlns:a="http://schemas.openxmlformats.org/drawingml/2006/main">
               <a:ext uri="{FF2B5EF4-FFF2-40B4-BE49-F238E27FC236}">
-                <a16:creationId xmlns:a16="http://schemas.microsoft.com/office/drawing/2014/main" id="{FA354462-B2CA-4695-92F3-17322C14ED02}"/>
+                <a16:creationId xmlns:a16="http://schemas.microsoft.com/office/drawing/2014/main" id="{84D5AC27-08DC-4111-BE42-5C5FB41C5220}"/>
               </a:ext>
             </a:extLst>
           </p:cNvPr>
@@ -2585,11 +2462,7 @@
             <a:srgbClr val="1F2933"/>
           </a:solidFill>
           <a:ln xmlns:a="http://schemas.openxmlformats.org/drawingml/2006/main" w="0">
-            <a:solidFill>
-              <a:srgbClr val="000000">
-                <a:alpha val="0"/>
-              </a:srgbClr>
-            </a:solidFill>
+            <a:noFill/>
             <a:prstDash val="solid"/>
           </a:ln>
         </p:spPr>
@@ -2599,7 +2472,7 @@
           <p:cNvPr id="26" name="">
             <a:extLst xmlns:a="http://schemas.openxmlformats.org/drawingml/2006/main">
               <a:ext uri="{FF2B5EF4-FFF2-40B4-BE49-F238E27FC236}">
-                <a16:creationId xmlns:a16="http://schemas.microsoft.com/office/drawing/2014/main" id="{DABC4928-F40D-4430-BFD9-4F03EDB23BED}"/>
+                <a16:creationId xmlns:a16="http://schemas.microsoft.com/office/drawing/2014/main" id="{41D13CBC-2D52-4568-8073-533B1FE66466}"/>
               </a:ext>
             </a:extLst>
           </p:cNvPr>
@@ -2616,17 +2489,9 @@
           <a:prstGeom xmlns:a="http://schemas.openxmlformats.org/drawingml/2006/main" prst="rect">
             <a:avLst/>
           </a:prstGeom>
-          <a:solidFill xmlns:a="http://schemas.openxmlformats.org/drawingml/2006/main">
-            <a:srgbClr val="000000">
-              <a:alpha val="0"/>
-            </a:srgbClr>
-          </a:solidFill>
-          <a:ln xmlns:a="http://schemas.openxmlformats.org/drawingml/2006/main" w="0">
-            <a:solidFill>
-              <a:srgbClr val="000000">
-                <a:alpha val="0"/>
-              </a:srgbClr>
-            </a:solidFill>
+          <a:noFill xmlns:a="http://schemas.openxmlformats.org/drawingml/2006/main"/>
+          <a:ln xmlns:a="http://schemas.openxmlformats.org/drawingml/2006/main" w="0">
+            <a:noFill/>
             <a:prstDash val="solid"/>
           </a:ln>
         </p:spPr>
@@ -2663,7 +2528,7 @@
           <p:cNvPr id="27" name="">
             <a:extLst xmlns:a="http://schemas.openxmlformats.org/drawingml/2006/main">
               <a:ext uri="{FF2B5EF4-FFF2-40B4-BE49-F238E27FC236}">
-                <a16:creationId xmlns:a16="http://schemas.microsoft.com/office/drawing/2014/main" id="{B128FA3C-BD95-454E-87D8-2CA00EDCE481}"/>
+                <a16:creationId xmlns:a16="http://schemas.microsoft.com/office/drawing/2014/main" id="{0A1E7D61-317E-40B9-85E0-C0A108FB087E}"/>
               </a:ext>
             </a:extLst>
           </p:cNvPr>
@@ -2684,11 +2549,7 @@
             <a:srgbClr val="D8D3C8"/>
           </a:solidFill>
           <a:ln xmlns:a="http://schemas.openxmlformats.org/drawingml/2006/main" w="0">
-            <a:solidFill>
-              <a:srgbClr val="000000">
-                <a:alpha val="0"/>
-              </a:srgbClr>
-            </a:solidFill>
+            <a:noFill/>
             <a:prstDash val="solid"/>
           </a:ln>
         </p:spPr>
@@ -2698,7 +2559,7 @@
           <p:cNvPr id="28" name="">
             <a:extLst xmlns:a="http://schemas.openxmlformats.org/drawingml/2006/main">
               <a:ext uri="{FF2B5EF4-FFF2-40B4-BE49-F238E27FC236}">
-                <a16:creationId xmlns:a16="http://schemas.microsoft.com/office/drawing/2014/main" id="{1A8F1541-3B86-4768-A91D-7512B1A442B2}"/>
+                <a16:creationId xmlns:a16="http://schemas.microsoft.com/office/drawing/2014/main" id="{C0E822B8-641C-4715-AC8F-0604E4AA9FE3}"/>
               </a:ext>
             </a:extLst>
           </p:cNvPr>
@@ -2715,17 +2576,9 @@
           <a:prstGeom xmlns:a="http://schemas.openxmlformats.org/drawingml/2006/main" prst="rect">
             <a:avLst/>
           </a:prstGeom>
-          <a:solidFill xmlns:a="http://schemas.openxmlformats.org/drawingml/2006/main">
-            <a:srgbClr val="000000">
-              <a:alpha val="0"/>
-            </a:srgbClr>
-          </a:solidFill>
-          <a:ln xmlns:a="http://schemas.openxmlformats.org/drawingml/2006/main" w="0">
-            <a:solidFill>
-              <a:srgbClr val="000000">
-                <a:alpha val="0"/>
-              </a:srgbClr>
-            </a:solidFill>
+          <a:noFill xmlns:a="http://schemas.openxmlformats.org/drawingml/2006/main"/>
+          <a:ln xmlns:a="http://schemas.openxmlformats.org/drawingml/2006/main" w="0">
+            <a:noFill/>
             <a:prstDash val="solid"/>
           </a:ln>
         </p:spPr>
@@ -2762,7 +2615,7 @@
           <p:cNvPr id="29" name="">
             <a:extLst xmlns:a="http://schemas.openxmlformats.org/drawingml/2006/main">
               <a:ext uri="{FF2B5EF4-FFF2-40B4-BE49-F238E27FC236}">
-                <a16:creationId xmlns:a16="http://schemas.microsoft.com/office/drawing/2014/main" id="{8FEACAEB-63A6-43E9-B4CF-FE2D5B56677F}"/>
+                <a16:creationId xmlns:a16="http://schemas.microsoft.com/office/drawing/2014/main" id="{DD14EA8F-886D-4B72-8777-926ECE3D53B7}"/>
               </a:ext>
             </a:extLst>
           </p:cNvPr>
@@ -2779,17 +2632,9 @@
           <a:prstGeom xmlns:a="http://schemas.openxmlformats.org/drawingml/2006/main" prst="rect">
             <a:avLst/>
           </a:prstGeom>
-          <a:solidFill xmlns:a="http://schemas.openxmlformats.org/drawingml/2006/main">
-            <a:srgbClr val="000000">
-              <a:alpha val="0"/>
-            </a:srgbClr>
-          </a:solidFill>
-          <a:ln xmlns:a="http://schemas.openxmlformats.org/drawingml/2006/main" w="0">
-            <a:solidFill>
-              <a:srgbClr val="000000">
-                <a:alpha val="0"/>
-              </a:srgbClr>
-            </a:solidFill>
+          <a:noFill xmlns:a="http://schemas.openxmlformats.org/drawingml/2006/main"/>
+          <a:ln xmlns:a="http://schemas.openxmlformats.org/drawingml/2006/main" w="0">
+            <a:noFill/>
             <a:prstDash val="solid"/>
           </a:ln>
         </p:spPr>
@@ -2824,7 +2669,7 @@
     </p:spTree>
     <p:extLst>
       <p:ext uri="{BB962C8B-B14F-4D97-AF65-F5344CB8AC3E}">
-        <p14:creationId xmlns:p14="http://schemas.microsoft.com/office/powerpoint/2010/main" val="1720518908"/>
+        <p14:creationId xmlns:p14="http://schemas.microsoft.com/office/powerpoint/2010/main" val="842184524"/>
       </p:ext>
     </p:extLst>
   </p:cSld>
@@ -2845,10 +2690,10 @@
       </p:grpSpPr>
       <p:sp>
         <p:nvSpPr>
-          <p:cNvPr id="1" name="">
-            <a:extLst xmlns:a="http://schemas.openxmlformats.org/drawingml/2006/main">
-              <a:ext uri="{FF2B5EF4-FFF2-40B4-BE49-F238E27FC236}">
-                <a16:creationId xmlns:a16="http://schemas.microsoft.com/office/drawing/2014/main" id="{4A8AFD82-ECED-4D55-8884-39A3387DEC58}"/>
+          <p:cNvPr id="18" name="">
+            <a:extLst xmlns:a="http://schemas.openxmlformats.org/drawingml/2006/main">
+              <a:ext uri="{FF2B5EF4-FFF2-40B4-BE49-F238E27FC236}">
+                <a16:creationId xmlns:a16="http://schemas.microsoft.com/office/drawing/2014/main" id="{35CA754A-24D2-4DE7-B27A-80B75B4681C3}"/>
               </a:ext>
             </a:extLst>
           </p:cNvPr>
@@ -2866,59 +2711,20 @@
             <a:avLst/>
           </a:prstGeom>
           <a:solidFill xmlns:a="http://schemas.openxmlformats.org/drawingml/2006/main">
-            <a:srgbClr val="F7F4EE"/>
-          </a:solidFill>
-          <a:ln xmlns:a="http://schemas.openxmlformats.org/drawingml/2006/main" w="0">
-            <a:solidFill>
-              <a:srgbClr val="000000">
-                <a:alpha val="0"/>
-              </a:srgbClr>
-            </a:solidFill>
-            <a:prstDash val="solid"/>
-          </a:ln>
-        </p:spPr>
-      </p:sp>
-      <p:sp>
-        <p:nvSpPr>
-          <p:cNvPr id="2" name="">
-            <a:extLst xmlns:a="http://schemas.openxmlformats.org/drawingml/2006/main">
-              <a:ext uri="{FF2B5EF4-FFF2-40B4-BE49-F238E27FC236}">
-                <a16:creationId xmlns:a16="http://schemas.microsoft.com/office/drawing/2014/main" id="{50FD28DF-7FB2-4361-9038-988F84C7B319}"/>
-              </a:ext>
-            </a:extLst>
-          </p:cNvPr>
-          <p:cNvSpPr>
-            <a:spLocks xmlns:a="http://schemas.openxmlformats.org/drawingml/2006/main" noGrp="1"/>
-          </p:cNvSpPr>
-          <p:nvPr/>
-        </p:nvSpPr>
-        <p:spPr>
-          <a:xfrm xmlns:a="http://schemas.openxmlformats.org/drawingml/2006/main">
-            <a:off x="0" y="0"/>
-            <a:ext cx="171450" cy="6858000"/>
-          </a:xfrm>
-          <a:prstGeom xmlns:a="http://schemas.openxmlformats.org/drawingml/2006/main" prst="rect">
-            <a:avLst/>
-          </a:prstGeom>
-          <a:solidFill xmlns:a="http://schemas.openxmlformats.org/drawingml/2006/main">
-            <a:srgbClr val="1F2933"/>
-          </a:solidFill>
-          <a:ln xmlns:a="http://schemas.openxmlformats.org/drawingml/2006/main" w="0">
-            <a:solidFill>
-              <a:srgbClr val="000000">
-                <a:alpha val="0"/>
-              </a:srgbClr>
-            </a:solidFill>
-            <a:prstDash val="solid"/>
-          </a:ln>
-        </p:spPr>
-      </p:sp>
-      <p:sp>
-        <p:nvSpPr>
-          <p:cNvPr id="3" name="kicker-02-marker">
-            <a:extLst xmlns:a="http://schemas.openxmlformats.org/drawingml/2006/main">
-              <a:ext uri="{FF2B5EF4-FFF2-40B4-BE49-F238E27FC236}">
-                <a16:creationId xmlns:a16="http://schemas.microsoft.com/office/drawing/2014/main" id="{FC2AA038-945E-43EE-AB78-4F46B5F08EA7}"/>
+            <a:srgbClr val="FFFFFF"/>
+          </a:solidFill>
+          <a:ln xmlns:a="http://schemas.openxmlformats.org/drawingml/2006/main" w="0">
+            <a:noFill/>
+            <a:prstDash val="solid"/>
+          </a:ln>
+        </p:spPr>
+      </p:sp>
+      <p:sp>
+        <p:nvSpPr>
+          <p:cNvPr id="2" name="kicker-02-marker">
+            <a:extLst xmlns:a="http://schemas.openxmlformats.org/drawingml/2006/main">
+              <a:ext uri="{FF2B5EF4-FFF2-40B4-BE49-F238E27FC236}">
+                <a16:creationId xmlns:a16="http://schemas.microsoft.com/office/drawing/2014/main" id="{096C82F5-2B0D-4DC3-B742-D46B96A02407}"/>
               </a:ext>
             </a:extLst>
           </p:cNvPr>
@@ -2939,21 +2745,17 @@
             <a:srgbClr val="2E7D5B"/>
           </a:solidFill>
           <a:ln xmlns:a="http://schemas.openxmlformats.org/drawingml/2006/main" w="0">
-            <a:solidFill>
-              <a:srgbClr val="000000">
-                <a:alpha val="0"/>
-              </a:srgbClr>
-            </a:solidFill>
-            <a:prstDash val="solid"/>
-          </a:ln>
-        </p:spPr>
-      </p:sp>
-      <p:sp>
-        <p:nvSpPr>
-          <p:cNvPr id="4" name="kicker-02-label">
-            <a:extLst xmlns:a="http://schemas.openxmlformats.org/drawingml/2006/main">
-              <a:ext uri="{FF2B5EF4-FFF2-40B4-BE49-F238E27FC236}">
-                <a16:creationId xmlns:a16="http://schemas.microsoft.com/office/drawing/2014/main" id="{1D45B0DE-9D0C-405B-9A2E-C4E574DBDDA8}"/>
+            <a:noFill/>
+            <a:prstDash val="solid"/>
+          </a:ln>
+        </p:spPr>
+      </p:sp>
+      <p:sp>
+        <p:nvSpPr>
+          <p:cNvPr id="3" name="kicker-02-label">
+            <a:extLst xmlns:a="http://schemas.openxmlformats.org/drawingml/2006/main">
+              <a:ext uri="{FF2B5EF4-FFF2-40B4-BE49-F238E27FC236}">
+                <a16:creationId xmlns:a16="http://schemas.microsoft.com/office/drawing/2014/main" id="{2173145B-0ED4-49BC-9DA7-147A33ABC71A}"/>
               </a:ext>
             </a:extLst>
           </p:cNvPr>
@@ -2970,17 +2772,9 @@
           <a:prstGeom xmlns:a="http://schemas.openxmlformats.org/drawingml/2006/main" prst="rect">
             <a:avLst/>
           </a:prstGeom>
-          <a:solidFill xmlns:a="http://schemas.openxmlformats.org/drawingml/2006/main">
-            <a:srgbClr val="000000">
-              <a:alpha val="0"/>
-            </a:srgbClr>
-          </a:solidFill>
-          <a:ln xmlns:a="http://schemas.openxmlformats.org/drawingml/2006/main" w="0">
-            <a:solidFill>
-              <a:srgbClr val="000000">
-                <a:alpha val="0"/>
-              </a:srgbClr>
-            </a:solidFill>
+          <a:noFill xmlns:a="http://schemas.openxmlformats.org/drawingml/2006/main"/>
+          <a:ln xmlns:a="http://schemas.openxmlformats.org/drawingml/2006/main" w="0">
+            <a:noFill/>
             <a:prstDash val="solid"/>
           </a:ln>
         </p:spPr>
@@ -3014,37 +2808,29 @@
       </p:sp>
       <p:sp>
         <p:nvSpPr>
-          <p:cNvPr id="5" name="">
-            <a:extLst xmlns:a="http://schemas.openxmlformats.org/drawingml/2006/main">
-              <a:ext uri="{FF2B5EF4-FFF2-40B4-BE49-F238E27FC236}">
-                <a16:creationId xmlns:a16="http://schemas.microsoft.com/office/drawing/2014/main" id="{A829EBF7-0B12-40C6-8D23-8BA3D3FB84D6}"/>
-              </a:ext>
-            </a:extLst>
-          </p:cNvPr>
-          <p:cNvSpPr>
-            <a:spLocks xmlns:a="http://schemas.openxmlformats.org/drawingml/2006/main" noGrp="1"/>
-          </p:cNvSpPr>
-          <p:nvPr/>
-        </p:nvSpPr>
-        <p:spPr>
-          <a:xfrm xmlns:a="http://schemas.openxmlformats.org/drawingml/2006/main">
-            <a:off x="685800" y="876300"/>
-            <a:ext cx="8382000" cy="990600"/>
-          </a:xfrm>
-          <a:prstGeom xmlns:a="http://schemas.openxmlformats.org/drawingml/2006/main" prst="rect">
-            <a:avLst/>
-          </a:prstGeom>
-          <a:solidFill xmlns:a="http://schemas.openxmlformats.org/drawingml/2006/main">
-            <a:srgbClr val="000000">
-              <a:alpha val="0"/>
-            </a:srgbClr>
-          </a:solidFill>
-          <a:ln xmlns:a="http://schemas.openxmlformats.org/drawingml/2006/main" w="0">
-            <a:solidFill>
-              <a:srgbClr val="000000">
-                <a:alpha val="0"/>
-              </a:srgbClr>
-            </a:solidFill>
+          <p:cNvPr id="4" name="">
+            <a:extLst xmlns:a="http://schemas.openxmlformats.org/drawingml/2006/main">
+              <a:ext uri="{FF2B5EF4-FFF2-40B4-BE49-F238E27FC236}">
+                <a16:creationId xmlns:a16="http://schemas.microsoft.com/office/drawing/2014/main" id="{D4EC7968-4D1B-4C1F-8151-FC5C6B52D33A}"/>
+              </a:ext>
+            </a:extLst>
+          </p:cNvPr>
+          <p:cNvSpPr>
+            <a:spLocks xmlns:a="http://schemas.openxmlformats.org/drawingml/2006/main" noGrp="1"/>
+          </p:cNvSpPr>
+          <p:nvPr/>
+        </p:nvSpPr>
+        <p:spPr>
+          <a:xfrm xmlns:a="http://schemas.openxmlformats.org/drawingml/2006/main">
+            <a:off x="685800" y="1066800"/>
+            <a:ext cx="9144000" cy="914400"/>
+          </a:xfrm>
+          <a:prstGeom xmlns:a="http://schemas.openxmlformats.org/drawingml/2006/main" prst="rect">
+            <a:avLst/>
+          </a:prstGeom>
+          <a:noFill xmlns:a="http://schemas.openxmlformats.org/drawingml/2006/main"/>
+          <a:ln xmlns:a="http://schemas.openxmlformats.org/drawingml/2006/main" w="0">
+            <a:noFill/>
             <a:prstDash val="solid"/>
           </a:ln>
         </p:spPr>
@@ -3071,7 +2857,63 @@
                 <a:ea typeface="Aptos Display"/>
                 <a:cs typeface="Aptos Display"/>
               </a:rPr>
-              <a:t>La retouche du programme cleaning doit être validée avec un créneau précis.</a:t>
+              <a:t>À quel moment puis-je faire tourner le programme de cleaning ?</a:t>
+            </a:r>
+          </a:p>
+        </p:txBody>
+      </p:sp>
+      <p:sp>
+        <p:nvSpPr>
+          <p:cNvPr id="5" name="">
+            <a:extLst xmlns:a="http://schemas.openxmlformats.org/drawingml/2006/main">
+              <a:ext uri="{FF2B5EF4-FFF2-40B4-BE49-F238E27FC236}">
+                <a16:creationId xmlns:a16="http://schemas.microsoft.com/office/drawing/2014/main" id="{B941A417-51FD-4BC6-AD6C-AFD2E28692A0}"/>
+              </a:ext>
+            </a:extLst>
+          </p:cNvPr>
+          <p:cNvSpPr>
+            <a:spLocks xmlns:a="http://schemas.openxmlformats.org/drawingml/2006/main" noGrp="1"/>
+          </p:cNvSpPr>
+          <p:nvPr/>
+        </p:nvSpPr>
+        <p:spPr>
+          <a:xfrm xmlns:a="http://schemas.openxmlformats.org/drawingml/2006/main">
+            <a:off x="704850" y="2152650"/>
+            <a:ext cx="8667750" cy="438150"/>
+          </a:xfrm>
+          <a:prstGeom xmlns:a="http://schemas.openxmlformats.org/drawingml/2006/main" prst="rect">
+            <a:avLst/>
+          </a:prstGeom>
+          <a:noFill xmlns:a="http://schemas.openxmlformats.org/drawingml/2006/main"/>
+          <a:ln xmlns:a="http://schemas.openxmlformats.org/drawingml/2006/main" w="0">
+            <a:noFill/>
+            <a:prstDash val="solid"/>
+          </a:ln>
+        </p:spPr>
+        <p:txBody>
+          <a:bodyPr xmlns:a="http://schemas.openxmlformats.org/drawingml/2006/main" lIns="0" tIns="0" rIns="0" bIns="0" anchor="t"/>
+          <a:lstStyle xmlns:a="http://schemas.openxmlformats.org/drawingml/2006/main"/>
+          <a:p xmlns:a="http://schemas.openxmlformats.org/drawingml/2006/main">
+            <a:pPr algn="l">
+              <a:defRPr sz="1650" b="0">
+                <a:solidFill>
+                  <a:srgbClr val="6E7681"/>
+                </a:solidFill>
+                <a:latin typeface="Aptos"/>
+                <a:ea typeface="Aptos"/>
+                <a:cs typeface="Aptos"/>
+              </a:defRPr>
+            </a:pPr>
+            <a:r>
+              <a:rPr sz="1650" b="0">
+                <a:solidFill>
+                  <a:srgbClr val="6E7681"/>
+                </a:solidFill>
+                <a:latin typeface="Aptos"/>
+                <a:ea typeface="Aptos"/>
+                <a:cs typeface="Aptos"/>
+              </a:rPr>
+              <a:t>Demande à valider avec l’IT : choisir le créneau le plus adapté pour lancer la retouche du programme.</a:t>
             </a:r>
           </a:p>
         </p:txBody>
@@ -3081,61 +2923,53 @@
           <p:cNvPr id="6" name="">
             <a:extLst xmlns:a="http://schemas.openxmlformats.org/drawingml/2006/main">
               <a:ext uri="{FF2B5EF4-FFF2-40B4-BE49-F238E27FC236}">
-                <a16:creationId xmlns:a16="http://schemas.microsoft.com/office/drawing/2014/main" id="{D4173D28-4B0A-4DDF-A152-A53D0BACD1C2}"/>
-              </a:ext>
-            </a:extLst>
-          </p:cNvPr>
-          <p:cNvSpPr>
-            <a:spLocks xmlns:a="http://schemas.openxmlformats.org/drawingml/2006/main" noGrp="1"/>
-          </p:cNvSpPr>
-          <p:nvPr/>
-        </p:nvSpPr>
-        <p:spPr>
-          <a:xfrm xmlns:a="http://schemas.openxmlformats.org/drawingml/2006/main">
-            <a:off x="704850" y="1943100"/>
-            <a:ext cx="7905750" cy="457200"/>
-          </a:xfrm>
-          <a:prstGeom xmlns:a="http://schemas.openxmlformats.org/drawingml/2006/main" prst="rect">
-            <a:avLst/>
-          </a:prstGeom>
-          <a:solidFill xmlns:a="http://schemas.openxmlformats.org/drawingml/2006/main">
-            <a:srgbClr val="000000">
-              <a:alpha val="0"/>
-            </a:srgbClr>
-          </a:solidFill>
-          <a:ln xmlns:a="http://schemas.openxmlformats.org/drawingml/2006/main" w="0">
-            <a:solidFill>
-              <a:srgbClr val="000000">
-                <a:alpha val="0"/>
-              </a:srgbClr>
-            </a:solidFill>
-            <a:prstDash val="solid"/>
-          </a:ln>
-        </p:spPr>
-        <p:txBody>
-          <a:bodyPr xmlns:a="http://schemas.openxmlformats.org/drawingml/2006/main" lIns="0" tIns="0" rIns="0" bIns="0" anchor="t"/>
+                <a16:creationId xmlns:a16="http://schemas.microsoft.com/office/drawing/2014/main" id="{DBD35BC1-2F61-49EA-8252-6E425A5A16B9}"/>
+              </a:ext>
+            </a:extLst>
+          </p:cNvPr>
+          <p:cNvSpPr>
+            <a:spLocks xmlns:a="http://schemas.openxmlformats.org/drawingml/2006/main" noGrp="1"/>
+          </p:cNvSpPr>
+          <p:nvPr/>
+        </p:nvSpPr>
+        <p:spPr>
+          <a:xfrm xmlns:a="http://schemas.openxmlformats.org/drawingml/2006/main">
+            <a:off x="1066800" y="3181350"/>
+            <a:ext cx="2095500" cy="323850"/>
+          </a:xfrm>
+          <a:prstGeom xmlns:a="http://schemas.openxmlformats.org/drawingml/2006/main" prst="rect">
+            <a:avLst/>
+          </a:prstGeom>
+          <a:noFill xmlns:a="http://schemas.openxmlformats.org/drawingml/2006/main"/>
+          <a:ln xmlns:a="http://schemas.openxmlformats.org/drawingml/2006/main" w="0">
+            <a:noFill/>
+            <a:prstDash val="solid"/>
+          </a:ln>
+        </p:spPr>
+        <p:txBody>
+          <a:bodyPr xmlns:a="http://schemas.openxmlformats.org/drawingml/2006/main" lIns="0" tIns="0" rIns="0" bIns="0" anchor="ctr"/>
           <a:lstStyle xmlns:a="http://schemas.openxmlformats.org/drawingml/2006/main"/>
           <a:p xmlns:a="http://schemas.openxmlformats.org/drawingml/2006/main">
             <a:pPr algn="l">
-              <a:defRPr sz="1425" b="0">
-                <a:solidFill>
-                  <a:srgbClr val="6E7681"/>
-                </a:solidFill>
-                <a:latin typeface="Aptos"/>
-                <a:ea typeface="Aptos"/>
-                <a:cs typeface="Aptos"/>
-              </a:defRPr>
-            </a:pPr>
-            <a:r>
-              <a:rPr sz="1425" b="0">
-                <a:solidFill>
-                  <a:srgbClr val="6E7681"/>
-                </a:solidFill>
-                <a:latin typeface="Aptos"/>
-                <a:ea typeface="Aptos"/>
-                <a:cs typeface="Aptos"/>
-              </a:rPr>
-              <a:t>Décision demandée à l’IT : confirmer le feu vert, fixer le jour, puis choisir le moment d’intervention le moins risqué.</a:t>
+              <a:defRPr sz="2100" b="1">
+                <a:solidFill>
+                  <a:srgbClr val="2E7D5B"/>
+                </a:solidFill>
+                <a:latin typeface="Aptos"/>
+                <a:ea typeface="Aptos"/>
+                <a:cs typeface="Aptos"/>
+              </a:defRPr>
+            </a:pPr>
+            <a:r>
+              <a:rPr sz="2100" b="1">
+                <a:solidFill>
+                  <a:srgbClr val="2E7D5B"/>
+                </a:solidFill>
+                <a:latin typeface="Aptos"/>
+                <a:ea typeface="Aptos"/>
+                <a:cs typeface="Aptos"/>
+              </a:rPr>
+              <a:t>- Matin</a:t>
             </a:r>
           </a:p>
         </p:txBody>
@@ -3145,34 +2979,26 @@
           <p:cNvPr id="7" name="">
             <a:extLst xmlns:a="http://schemas.openxmlformats.org/drawingml/2006/main">
               <a:ext uri="{FF2B5EF4-FFF2-40B4-BE49-F238E27FC236}">
-                <a16:creationId xmlns:a16="http://schemas.microsoft.com/office/drawing/2014/main" id="{0F5C7032-B506-4702-A20F-A646FF3C3937}"/>
-              </a:ext>
-            </a:extLst>
-          </p:cNvPr>
-          <p:cNvSpPr>
-            <a:spLocks xmlns:a="http://schemas.openxmlformats.org/drawingml/2006/main" noGrp="1"/>
-          </p:cNvSpPr>
-          <p:nvPr/>
-        </p:nvSpPr>
-        <p:spPr>
-          <a:xfrm xmlns:a="http://schemas.openxmlformats.org/drawingml/2006/main">
-            <a:off x="819150" y="2914650"/>
-            <a:ext cx="1809750" cy="247650"/>
-          </a:xfrm>
-          <a:prstGeom xmlns:a="http://schemas.openxmlformats.org/drawingml/2006/main" prst="rect">
-            <a:avLst/>
-          </a:prstGeom>
-          <a:solidFill xmlns:a="http://schemas.openxmlformats.org/drawingml/2006/main">
-            <a:srgbClr val="000000">
-              <a:alpha val="0"/>
-            </a:srgbClr>
-          </a:solidFill>
-          <a:ln xmlns:a="http://schemas.openxmlformats.org/drawingml/2006/main" w="0">
-            <a:solidFill>
-              <a:srgbClr val="000000">
-                <a:alpha val="0"/>
-              </a:srgbClr>
-            </a:solidFill>
+                <a16:creationId xmlns:a16="http://schemas.microsoft.com/office/drawing/2014/main" id="{1E838145-889D-492F-AB07-8A7B07B2179A}"/>
+              </a:ext>
+            </a:extLst>
+          </p:cNvPr>
+          <p:cNvSpPr>
+            <a:spLocks xmlns:a="http://schemas.openxmlformats.org/drawingml/2006/main" noGrp="1"/>
+          </p:cNvSpPr>
+          <p:nvPr/>
+        </p:nvSpPr>
+        <p:spPr>
+          <a:xfrm xmlns:a="http://schemas.openxmlformats.org/drawingml/2006/main">
+            <a:off x="3333750" y="3200400"/>
+            <a:ext cx="6858000" cy="361950"/>
+          </a:xfrm>
+          <a:prstGeom xmlns:a="http://schemas.openxmlformats.org/drawingml/2006/main" prst="rect">
+            <a:avLst/>
+          </a:prstGeom>
+          <a:noFill xmlns:a="http://schemas.openxmlformats.org/drawingml/2006/main"/>
+          <a:ln xmlns:a="http://schemas.openxmlformats.org/drawingml/2006/main" w="0">
+            <a:noFill/>
             <a:prstDash val="solid"/>
           </a:ln>
         </p:spPr>
@@ -3181,25 +3007,25 @@
           <a:lstStyle xmlns:a="http://schemas.openxmlformats.org/drawingml/2006/main"/>
           <a:p xmlns:a="http://schemas.openxmlformats.org/drawingml/2006/main">
             <a:pPr algn="l">
-              <a:defRPr sz="1050" b="1">
-                <a:solidFill>
-                  <a:srgbClr val="6E7681"/>
-                </a:solidFill>
-                <a:latin typeface="Aptos"/>
-                <a:ea typeface="Aptos"/>
-                <a:cs typeface="Aptos"/>
-              </a:defRPr>
-            </a:pPr>
-            <a:r>
-              <a:rPr sz="1050" b="1">
-                <a:solidFill>
-                  <a:srgbClr val="6E7681"/>
-                </a:solidFill>
-                <a:latin typeface="Aptos"/>
-                <a:ea typeface="Aptos"/>
-                <a:cs typeface="Aptos"/>
-              </a:rPr>
-              <a:t>Créneau</a:t>
+              <a:defRPr sz="1575" b="0">
+                <a:solidFill>
+                  <a:srgbClr val="1F2933"/>
+                </a:solidFill>
+                <a:latin typeface="Aptos"/>
+                <a:ea typeface="Aptos"/>
+                <a:cs typeface="Aptos"/>
+              </a:defRPr>
+            </a:pPr>
+            <a:r>
+              <a:rPr sz="1575" b="0">
+                <a:solidFill>
+                  <a:srgbClr val="1F2933"/>
+                </a:solidFill>
+                <a:latin typeface="Aptos"/>
+                <a:ea typeface="Aptos"/>
+                <a:cs typeface="Aptos"/>
+              </a:rPr>
+              <a:t>Possible si aucun traitement critique ne tourne en début de journée.</a:t>
             </a:r>
           </a:p>
         </p:txBody>
@@ -3209,34 +3035,26 @@
           <p:cNvPr id="8" name="">
             <a:extLst xmlns:a="http://schemas.openxmlformats.org/drawingml/2006/main">
               <a:ext uri="{FF2B5EF4-FFF2-40B4-BE49-F238E27FC236}">
-                <a16:creationId xmlns:a16="http://schemas.microsoft.com/office/drawing/2014/main" id="{C335CBFD-9556-49A4-BF8E-264208E93B32}"/>
-              </a:ext>
-            </a:extLst>
-          </p:cNvPr>
-          <p:cNvSpPr>
-            <a:spLocks xmlns:a="http://schemas.openxmlformats.org/drawingml/2006/main" noGrp="1"/>
-          </p:cNvSpPr>
-          <p:nvPr/>
-        </p:nvSpPr>
-        <p:spPr>
-          <a:xfrm xmlns:a="http://schemas.openxmlformats.org/drawingml/2006/main">
-            <a:off x="2952750" y="2914650"/>
-            <a:ext cx="3048000" cy="247650"/>
-          </a:xfrm>
-          <a:prstGeom xmlns:a="http://schemas.openxmlformats.org/drawingml/2006/main" prst="rect">
-            <a:avLst/>
-          </a:prstGeom>
-          <a:solidFill xmlns:a="http://schemas.openxmlformats.org/drawingml/2006/main">
-            <a:srgbClr val="000000">
-              <a:alpha val="0"/>
-            </a:srgbClr>
-          </a:solidFill>
-          <a:ln xmlns:a="http://schemas.openxmlformats.org/drawingml/2006/main" w="0">
-            <a:solidFill>
-              <a:srgbClr val="000000">
-                <a:alpha val="0"/>
-              </a:srgbClr>
-            </a:solidFill>
+                <a16:creationId xmlns:a16="http://schemas.microsoft.com/office/drawing/2014/main" id="{46862880-ECBE-45F4-8EE1-44809102F643}"/>
+              </a:ext>
+            </a:extLst>
+          </p:cNvPr>
+          <p:cNvSpPr>
+            <a:spLocks xmlns:a="http://schemas.openxmlformats.org/drawingml/2006/main" noGrp="1"/>
+          </p:cNvSpPr>
+          <p:nvPr/>
+        </p:nvSpPr>
+        <p:spPr>
+          <a:xfrm xmlns:a="http://schemas.openxmlformats.org/drawingml/2006/main">
+            <a:off x="1066800" y="3962400"/>
+            <a:ext cx="2095500" cy="323850"/>
+          </a:xfrm>
+          <a:prstGeom xmlns:a="http://schemas.openxmlformats.org/drawingml/2006/main" prst="rect">
+            <a:avLst/>
+          </a:prstGeom>
+          <a:noFill xmlns:a="http://schemas.openxmlformats.org/drawingml/2006/main"/>
+          <a:ln xmlns:a="http://schemas.openxmlformats.org/drawingml/2006/main" w="0">
+            <a:noFill/>
             <a:prstDash val="solid"/>
           </a:ln>
         </p:spPr>
@@ -3245,25 +3063,25 @@
           <a:lstStyle xmlns:a="http://schemas.openxmlformats.org/drawingml/2006/main"/>
           <a:p xmlns:a="http://schemas.openxmlformats.org/drawingml/2006/main">
             <a:pPr algn="l">
-              <a:defRPr sz="1050" b="1">
-                <a:solidFill>
-                  <a:srgbClr val="6E7681"/>
-                </a:solidFill>
-                <a:latin typeface="Aptos"/>
-                <a:ea typeface="Aptos"/>
-                <a:cs typeface="Aptos"/>
-              </a:defRPr>
-            </a:pPr>
-            <a:r>
-              <a:rPr sz="1050" b="1">
-                <a:solidFill>
-                  <a:srgbClr val="6E7681"/>
-                </a:solidFill>
-                <a:latin typeface="Aptos"/>
-                <a:ea typeface="Aptos"/>
-                <a:cs typeface="Aptos"/>
-              </a:rPr>
-              <a:t>Impact attendu</a:t>
+              <a:defRPr sz="2100" b="1">
+                <a:solidFill>
+                  <a:srgbClr val="2E7D5B"/>
+                </a:solidFill>
+                <a:latin typeface="Aptos"/>
+                <a:ea typeface="Aptos"/>
+                <a:cs typeface="Aptos"/>
+              </a:defRPr>
+            </a:pPr>
+            <a:r>
+              <a:rPr sz="2100" b="1">
+                <a:solidFill>
+                  <a:srgbClr val="2E7D5B"/>
+                </a:solidFill>
+                <a:latin typeface="Aptos"/>
+                <a:ea typeface="Aptos"/>
+                <a:cs typeface="Aptos"/>
+              </a:rPr>
+              <a:t>- Après-midi</a:t>
             </a:r>
           </a:p>
         </p:txBody>
@@ -3273,34 +3091,26 @@
           <p:cNvPr id="9" name="">
             <a:extLst xmlns:a="http://schemas.openxmlformats.org/drawingml/2006/main">
               <a:ext uri="{FF2B5EF4-FFF2-40B4-BE49-F238E27FC236}">
-                <a16:creationId xmlns:a16="http://schemas.microsoft.com/office/drawing/2014/main" id="{46E830C1-BCA4-48AB-BF70-E7C3F63AEEBA}"/>
-              </a:ext>
-            </a:extLst>
-          </p:cNvPr>
-          <p:cNvSpPr>
-            <a:spLocks xmlns:a="http://schemas.openxmlformats.org/drawingml/2006/main" noGrp="1"/>
-          </p:cNvSpPr>
-          <p:nvPr/>
-        </p:nvSpPr>
-        <p:spPr>
-          <a:xfrm xmlns:a="http://schemas.openxmlformats.org/drawingml/2006/main">
-            <a:off x="6438900" y="2914650"/>
-            <a:ext cx="4267200" cy="247650"/>
-          </a:xfrm>
-          <a:prstGeom xmlns:a="http://schemas.openxmlformats.org/drawingml/2006/main" prst="rect">
-            <a:avLst/>
-          </a:prstGeom>
-          <a:solidFill xmlns:a="http://schemas.openxmlformats.org/drawingml/2006/main">
-            <a:srgbClr val="000000">
-              <a:alpha val="0"/>
-            </a:srgbClr>
-          </a:solidFill>
-          <a:ln xmlns:a="http://schemas.openxmlformats.org/drawingml/2006/main" w="0">
-            <a:solidFill>
-              <a:srgbClr val="000000">
-                <a:alpha val="0"/>
-              </a:srgbClr>
-            </a:solidFill>
+                <a16:creationId xmlns:a16="http://schemas.microsoft.com/office/drawing/2014/main" id="{01232DAA-2EBC-4BC6-A08A-7CFC171C6D73}"/>
+              </a:ext>
+            </a:extLst>
+          </p:cNvPr>
+          <p:cNvSpPr>
+            <a:spLocks xmlns:a="http://schemas.openxmlformats.org/drawingml/2006/main" noGrp="1"/>
+          </p:cNvSpPr>
+          <p:nvPr/>
+        </p:nvSpPr>
+        <p:spPr>
+          <a:xfrm xmlns:a="http://schemas.openxmlformats.org/drawingml/2006/main">
+            <a:off x="3333750" y="3981450"/>
+            <a:ext cx="6858000" cy="361950"/>
+          </a:xfrm>
+          <a:prstGeom xmlns:a="http://schemas.openxmlformats.org/drawingml/2006/main" prst="rect">
+            <a:avLst/>
+          </a:prstGeom>
+          <a:noFill xmlns:a="http://schemas.openxmlformats.org/drawingml/2006/main"/>
+          <a:ln xmlns:a="http://schemas.openxmlformats.org/drawingml/2006/main" w="0">
+            <a:noFill/>
             <a:prstDash val="solid"/>
           </a:ln>
         </p:spPr>
@@ -3309,25 +3119,25 @@
           <a:lstStyle xmlns:a="http://schemas.openxmlformats.org/drawingml/2006/main"/>
           <a:p xmlns:a="http://schemas.openxmlformats.org/drawingml/2006/main">
             <a:pPr algn="l">
-              <a:defRPr sz="1050" b="1">
-                <a:solidFill>
-                  <a:srgbClr val="6E7681"/>
-                </a:solidFill>
-                <a:latin typeface="Aptos"/>
-                <a:ea typeface="Aptos"/>
-                <a:cs typeface="Aptos"/>
-              </a:defRPr>
-            </a:pPr>
-            <a:r>
-              <a:rPr sz="1050" b="1">
-                <a:solidFill>
-                  <a:srgbClr val="6E7681"/>
-                </a:solidFill>
-                <a:latin typeface="Aptos"/>
-                <a:ea typeface="Aptos"/>
-                <a:cs typeface="Aptos"/>
-              </a:rPr>
-              <a:t>Point IT à confirmer</a:t>
+              <a:defRPr sz="1575" b="0">
+                <a:solidFill>
+                  <a:srgbClr val="1F2933"/>
+                </a:solidFill>
+                <a:latin typeface="Aptos"/>
+                <a:ea typeface="Aptos"/>
+                <a:cs typeface="Aptos"/>
+              </a:defRPr>
+            </a:pPr>
+            <a:r>
+              <a:rPr sz="1575" b="0">
+                <a:solidFill>
+                  <a:srgbClr val="1F2933"/>
+                </a:solidFill>
+                <a:latin typeface="Aptos"/>
+                <a:ea typeface="Aptos"/>
+                <a:cs typeface="Aptos"/>
+              </a:rPr>
+              <a:t>Possible si l’IT peut suivre les tests et valider rapidement après exécution.</a:t>
             </a:r>
           </a:p>
         </p:txBody>
@@ -3337,67 +3147,82 @@
           <p:cNvPr id="10" name="">
             <a:extLst xmlns:a="http://schemas.openxmlformats.org/drawingml/2006/main">
               <a:ext uri="{FF2B5EF4-FFF2-40B4-BE49-F238E27FC236}">
-                <a16:creationId xmlns:a16="http://schemas.microsoft.com/office/drawing/2014/main" id="{36F889A5-43CB-4638-A6A0-2A9309EC1A0C}"/>
-              </a:ext>
-            </a:extLst>
-          </p:cNvPr>
-          <p:cNvSpPr>
-            <a:spLocks xmlns:a="http://schemas.openxmlformats.org/drawingml/2006/main" noGrp="1"/>
-          </p:cNvSpPr>
-          <p:nvPr/>
-        </p:nvSpPr>
-        <p:spPr>
-          <a:xfrm xmlns:a="http://schemas.openxmlformats.org/drawingml/2006/main">
-            <a:off x="685800" y="3333750"/>
-            <a:ext cx="10439400" cy="647700"/>
-          </a:xfrm>
-          <a:prstGeom xmlns:a="http://schemas.openxmlformats.org/drawingml/2006/main" prst="rect">
-            <a:avLst/>
-          </a:prstGeom>
-          <a:solidFill xmlns:a="http://schemas.openxmlformats.org/drawingml/2006/main">
-            <a:srgbClr val="FFFFFF"/>
-          </a:solidFill>
-          <a:ln xmlns:a="http://schemas.openxmlformats.org/drawingml/2006/main" w="9525">
-            <a:solidFill>
-              <a:srgbClr val="D8D3C8"/>
-            </a:solidFill>
-            <a:prstDash val="solid"/>
-          </a:ln>
-        </p:spPr>
+                <a16:creationId xmlns:a16="http://schemas.microsoft.com/office/drawing/2014/main" id="{AA8425F1-49E5-4C3F-A976-65E39559D644}"/>
+              </a:ext>
+            </a:extLst>
+          </p:cNvPr>
+          <p:cNvSpPr>
+            <a:spLocks xmlns:a="http://schemas.openxmlformats.org/drawingml/2006/main" noGrp="1"/>
+          </p:cNvSpPr>
+          <p:nvPr/>
+        </p:nvSpPr>
+        <p:spPr>
+          <a:xfrm xmlns:a="http://schemas.openxmlformats.org/drawingml/2006/main">
+            <a:off x="1066800" y="4743450"/>
+            <a:ext cx="2095500" cy="323850"/>
+          </a:xfrm>
+          <a:prstGeom xmlns:a="http://schemas.openxmlformats.org/drawingml/2006/main" prst="rect">
+            <a:avLst/>
+          </a:prstGeom>
+          <a:noFill xmlns:a="http://schemas.openxmlformats.org/drawingml/2006/main"/>
+          <a:ln xmlns:a="http://schemas.openxmlformats.org/drawingml/2006/main" w="0">
+            <a:noFill/>
+            <a:prstDash val="solid"/>
+          </a:ln>
+        </p:spPr>
+        <p:txBody>
+          <a:bodyPr xmlns:a="http://schemas.openxmlformats.org/drawingml/2006/main" lIns="0" tIns="0" rIns="0" bIns="0" anchor="ctr"/>
+          <a:lstStyle xmlns:a="http://schemas.openxmlformats.org/drawingml/2006/main"/>
+          <a:p xmlns:a="http://schemas.openxmlformats.org/drawingml/2006/main">
+            <a:pPr algn="l">
+              <a:defRPr sz="2100" b="1">
+                <a:solidFill>
+                  <a:srgbClr val="2E7D5B"/>
+                </a:solidFill>
+                <a:latin typeface="Aptos"/>
+                <a:ea typeface="Aptos"/>
+                <a:cs typeface="Aptos"/>
+              </a:defRPr>
+            </a:pPr>
+            <a:r>
+              <a:rPr sz="2100" b="1">
+                <a:solidFill>
+                  <a:srgbClr val="2E7D5B"/>
+                </a:solidFill>
+                <a:latin typeface="Aptos"/>
+                <a:ea typeface="Aptos"/>
+                <a:cs typeface="Aptos"/>
+              </a:rPr>
+              <a:t>- Soir</a:t>
+            </a:r>
+          </a:p>
+        </p:txBody>
       </p:sp>
       <p:sp>
         <p:nvSpPr>
           <p:cNvPr id="11" name="">
             <a:extLst xmlns:a="http://schemas.openxmlformats.org/drawingml/2006/main">
               <a:ext uri="{FF2B5EF4-FFF2-40B4-BE49-F238E27FC236}">
-                <a16:creationId xmlns:a16="http://schemas.microsoft.com/office/drawing/2014/main" id="{BF7658B8-CF8F-4339-AFB7-91007F89B8E2}"/>
-              </a:ext>
-            </a:extLst>
-          </p:cNvPr>
-          <p:cNvSpPr>
-            <a:spLocks xmlns:a="http://schemas.openxmlformats.org/drawingml/2006/main" noGrp="1"/>
-          </p:cNvSpPr>
-          <p:nvPr/>
-        </p:nvSpPr>
-        <p:spPr>
-          <a:xfrm xmlns:a="http://schemas.openxmlformats.org/drawingml/2006/main">
-            <a:off x="857250" y="3505200"/>
-            <a:ext cx="1619250" cy="266700"/>
-          </a:xfrm>
-          <a:prstGeom xmlns:a="http://schemas.openxmlformats.org/drawingml/2006/main" prst="rect">
-            <a:avLst/>
-          </a:prstGeom>
-          <a:solidFill xmlns:a="http://schemas.openxmlformats.org/drawingml/2006/main">
-            <a:srgbClr val="000000">
-              <a:alpha val="0"/>
-            </a:srgbClr>
-          </a:solidFill>
-          <a:ln xmlns:a="http://schemas.openxmlformats.org/drawingml/2006/main" w="0">
-            <a:solidFill>
-              <a:srgbClr val="000000">
-                <a:alpha val="0"/>
-              </a:srgbClr>
-            </a:solidFill>
+                <a16:creationId xmlns:a16="http://schemas.microsoft.com/office/drawing/2014/main" id="{2B3F50AB-4EF8-4B6B-AA9C-EED293EF2989}"/>
+              </a:ext>
+            </a:extLst>
+          </p:cNvPr>
+          <p:cNvSpPr>
+            <a:spLocks xmlns:a="http://schemas.openxmlformats.org/drawingml/2006/main" noGrp="1"/>
+          </p:cNvSpPr>
+          <p:nvPr/>
+        </p:nvSpPr>
+        <p:spPr>
+          <a:xfrm xmlns:a="http://schemas.openxmlformats.org/drawingml/2006/main">
+            <a:off x="3333750" y="4762500"/>
+            <a:ext cx="6858000" cy="361950"/>
+          </a:xfrm>
+          <a:prstGeom xmlns:a="http://schemas.openxmlformats.org/drawingml/2006/main" prst="rect">
+            <a:avLst/>
+          </a:prstGeom>
+          <a:noFill xmlns:a="http://schemas.openxmlformats.org/drawingml/2006/main"/>
+          <a:ln xmlns:a="http://schemas.openxmlformats.org/drawingml/2006/main" w="0">
+            <a:noFill/>
             <a:prstDash val="solid"/>
           </a:ln>
         </p:spPr>
@@ -3406,7 +3231,7 @@
           <a:lstStyle xmlns:a="http://schemas.openxmlformats.org/drawingml/2006/main"/>
           <a:p xmlns:a="http://schemas.openxmlformats.org/drawingml/2006/main">
             <a:pPr algn="l">
-              <a:defRPr sz="1575" b="1">
+              <a:defRPr sz="1575" b="0">
                 <a:solidFill>
                   <a:srgbClr val="1F2933"/>
                 </a:solidFill>
@@ -3416,7 +3241,7 @@
               </a:defRPr>
             </a:pPr>
             <a:r>
-              <a:rPr sz="1575" b="1">
+              <a:rPr sz="1575" b="0">
                 <a:solidFill>
                   <a:srgbClr val="1F2933"/>
                 </a:solidFill>
@@ -3424,7 +3249,7 @@
                 <a:ea typeface="Aptos"/>
                 <a:cs typeface="Aptos"/>
               </a:rPr>
-              <a:t>Matinée</a:t>
+              <a:t>Possible si l’on préfère limiter l’impact métier, avec supervision ou astreinte prévue.</a:t>
             </a:r>
           </a:p>
         </p:txBody>
@@ -3434,597 +3259,19 @@
           <p:cNvPr id="12" name="">
             <a:extLst xmlns:a="http://schemas.openxmlformats.org/drawingml/2006/main">
               <a:ext uri="{FF2B5EF4-FFF2-40B4-BE49-F238E27FC236}">
-                <a16:creationId xmlns:a16="http://schemas.microsoft.com/office/drawing/2014/main" id="{7A86F840-1CE2-40D5-8A0A-8CB96E25254A}"/>
-              </a:ext>
-            </a:extLst>
-          </p:cNvPr>
-          <p:cNvSpPr>
-            <a:spLocks xmlns:a="http://schemas.openxmlformats.org/drawingml/2006/main" noGrp="1"/>
-          </p:cNvSpPr>
-          <p:nvPr/>
-        </p:nvSpPr>
-        <p:spPr>
-          <a:xfrm xmlns:a="http://schemas.openxmlformats.org/drawingml/2006/main">
-            <a:off x="2952750" y="3467100"/>
-            <a:ext cx="3048000" cy="381000"/>
-          </a:xfrm>
-          <a:prstGeom xmlns:a="http://schemas.openxmlformats.org/drawingml/2006/main" prst="rect">
-            <a:avLst/>
-          </a:prstGeom>
-          <a:solidFill xmlns:a="http://schemas.openxmlformats.org/drawingml/2006/main">
-            <a:srgbClr val="000000">
-              <a:alpha val="0"/>
-            </a:srgbClr>
-          </a:solidFill>
-          <a:ln xmlns:a="http://schemas.openxmlformats.org/drawingml/2006/main" w="0">
-            <a:solidFill>
-              <a:srgbClr val="000000">
-                <a:alpha val="0"/>
-              </a:srgbClr>
-            </a:solidFill>
-            <a:prstDash val="solid"/>
-          </a:ln>
-        </p:spPr>
-        <p:txBody>
-          <a:bodyPr xmlns:a="http://schemas.openxmlformats.org/drawingml/2006/main" lIns="0" tIns="0" rIns="0" bIns="0" anchor="ctr"/>
-          <a:lstStyle xmlns:a="http://schemas.openxmlformats.org/drawingml/2006/main"/>
-          <a:p xmlns:a="http://schemas.openxmlformats.org/drawingml/2006/main">
-            <a:pPr algn="l">
-              <a:defRPr sz="1125" b="0">
-                <a:solidFill>
-                  <a:srgbClr val="1F2933"/>
-                </a:solidFill>
-                <a:latin typeface="Aptos"/>
-                <a:ea typeface="Aptos"/>
-                <a:cs typeface="Aptos"/>
-              </a:defRPr>
-            </a:pPr>
-            <a:r>
-              <a:rPr sz="1125" b="0">
-                <a:solidFill>
-                  <a:srgbClr val="1F2933"/>
-                </a:solidFill>
-                <a:latin typeface="Aptos"/>
-                <a:ea typeface="Aptos"/>
-                <a:cs typeface="Aptos"/>
-              </a:rPr>
-              <a:t>Fenêtre utile si l’équipe support est disponible dès le début de journée.</a:t>
-            </a:r>
-          </a:p>
-        </p:txBody>
-      </p:sp>
-      <p:sp>
-        <p:nvSpPr>
-          <p:cNvPr id="13" name="">
-            <a:extLst xmlns:a="http://schemas.openxmlformats.org/drawingml/2006/main">
-              <a:ext uri="{FF2B5EF4-FFF2-40B4-BE49-F238E27FC236}">
-                <a16:creationId xmlns:a16="http://schemas.microsoft.com/office/drawing/2014/main" id="{277905F4-68FB-4C98-BAB5-E8EFCFF6E833}"/>
-              </a:ext>
-            </a:extLst>
-          </p:cNvPr>
-          <p:cNvSpPr>
-            <a:spLocks xmlns:a="http://schemas.openxmlformats.org/drawingml/2006/main" noGrp="1"/>
-          </p:cNvSpPr>
-          <p:nvPr/>
-        </p:nvSpPr>
-        <p:spPr>
-          <a:xfrm xmlns:a="http://schemas.openxmlformats.org/drawingml/2006/main">
-            <a:off x="6438900" y="3448050"/>
-            <a:ext cx="4267200" cy="419100"/>
-          </a:xfrm>
-          <a:prstGeom xmlns:a="http://schemas.openxmlformats.org/drawingml/2006/main" prst="rect">
-            <a:avLst/>
-          </a:prstGeom>
-          <a:solidFill xmlns:a="http://schemas.openxmlformats.org/drawingml/2006/main">
-            <a:srgbClr val="000000">
-              <a:alpha val="0"/>
-            </a:srgbClr>
-          </a:solidFill>
-          <a:ln xmlns:a="http://schemas.openxmlformats.org/drawingml/2006/main" w="0">
-            <a:solidFill>
-              <a:srgbClr val="000000">
-                <a:alpha val="0"/>
-              </a:srgbClr>
-            </a:solidFill>
-            <a:prstDash val="solid"/>
-          </a:ln>
-        </p:spPr>
-        <p:txBody>
-          <a:bodyPr xmlns:a="http://schemas.openxmlformats.org/drawingml/2006/main" lIns="0" tIns="0" rIns="0" bIns="0" anchor="ctr"/>
-          <a:lstStyle xmlns:a="http://schemas.openxmlformats.org/drawingml/2006/main"/>
-          <a:p xmlns:a="http://schemas.openxmlformats.org/drawingml/2006/main">
-            <a:pPr algn="l">
-              <a:defRPr sz="1125" b="0">
-                <a:solidFill>
-                  <a:srgbClr val="1F2933"/>
-                </a:solidFill>
-                <a:latin typeface="Aptos"/>
-                <a:ea typeface="Aptos"/>
-                <a:cs typeface="Aptos"/>
-              </a:defRPr>
-            </a:pPr>
-            <a:r>
-              <a:rPr sz="1125" b="0">
-                <a:solidFill>
-                  <a:srgbClr val="1F2933"/>
-                </a:solidFill>
-                <a:latin typeface="Aptos"/>
-                <a:ea typeface="Aptos"/>
-                <a:cs typeface="Aptos"/>
-              </a:rPr>
-              <a:t>Valider absence de traitements critiques et capacité de rollback.</a:t>
-            </a:r>
-          </a:p>
-        </p:txBody>
-      </p:sp>
-      <p:sp>
-        <p:nvSpPr>
-          <p:cNvPr id="14" name="">
-            <a:extLst xmlns:a="http://schemas.openxmlformats.org/drawingml/2006/main">
-              <a:ext uri="{FF2B5EF4-FFF2-40B4-BE49-F238E27FC236}">
-                <a16:creationId xmlns:a16="http://schemas.microsoft.com/office/drawing/2014/main" id="{7AFDC5B4-B0EC-4733-954E-B3929677D8BE}"/>
-              </a:ext>
-            </a:extLst>
-          </p:cNvPr>
-          <p:cNvSpPr>
-            <a:spLocks xmlns:a="http://schemas.openxmlformats.org/drawingml/2006/main" noGrp="1"/>
-          </p:cNvSpPr>
-          <p:nvPr/>
-        </p:nvSpPr>
-        <p:spPr>
-          <a:xfrm xmlns:a="http://schemas.openxmlformats.org/drawingml/2006/main">
-            <a:off x="685800" y="4152900"/>
-            <a:ext cx="10439400" cy="647700"/>
-          </a:xfrm>
-          <a:prstGeom xmlns:a="http://schemas.openxmlformats.org/drawingml/2006/main" prst="rect">
-            <a:avLst/>
-          </a:prstGeom>
-          <a:solidFill xmlns:a="http://schemas.openxmlformats.org/drawingml/2006/main">
-            <a:srgbClr val="DDEBE3"/>
-          </a:solidFill>
-          <a:ln xmlns:a="http://schemas.openxmlformats.org/drawingml/2006/main" w="9525">
-            <a:solidFill>
-              <a:srgbClr val="D8D3C8"/>
-            </a:solidFill>
-            <a:prstDash val="solid"/>
-          </a:ln>
-        </p:spPr>
-      </p:sp>
-      <p:sp>
-        <p:nvSpPr>
-          <p:cNvPr id="15" name="">
-            <a:extLst xmlns:a="http://schemas.openxmlformats.org/drawingml/2006/main">
-              <a:ext uri="{FF2B5EF4-FFF2-40B4-BE49-F238E27FC236}">
-                <a16:creationId xmlns:a16="http://schemas.microsoft.com/office/drawing/2014/main" id="{2B38774D-0F50-435F-8674-1024FF270A56}"/>
-              </a:ext>
-            </a:extLst>
-          </p:cNvPr>
-          <p:cNvSpPr>
-            <a:spLocks xmlns:a="http://schemas.openxmlformats.org/drawingml/2006/main" noGrp="1"/>
-          </p:cNvSpPr>
-          <p:nvPr/>
-        </p:nvSpPr>
-        <p:spPr>
-          <a:xfrm xmlns:a="http://schemas.openxmlformats.org/drawingml/2006/main">
-            <a:off x="857250" y="4324350"/>
-            <a:ext cx="1619250" cy="266700"/>
-          </a:xfrm>
-          <a:prstGeom xmlns:a="http://schemas.openxmlformats.org/drawingml/2006/main" prst="rect">
-            <a:avLst/>
-          </a:prstGeom>
-          <a:solidFill xmlns:a="http://schemas.openxmlformats.org/drawingml/2006/main">
-            <a:srgbClr val="000000">
-              <a:alpha val="0"/>
-            </a:srgbClr>
-          </a:solidFill>
-          <a:ln xmlns:a="http://schemas.openxmlformats.org/drawingml/2006/main" w="0">
-            <a:solidFill>
-              <a:srgbClr val="000000">
-                <a:alpha val="0"/>
-              </a:srgbClr>
-            </a:solidFill>
-            <a:prstDash val="solid"/>
-          </a:ln>
-        </p:spPr>
-        <p:txBody>
-          <a:bodyPr xmlns:a="http://schemas.openxmlformats.org/drawingml/2006/main" lIns="0" tIns="0" rIns="0" bIns="0" anchor="ctr"/>
-          <a:lstStyle xmlns:a="http://schemas.openxmlformats.org/drawingml/2006/main"/>
-          <a:p xmlns:a="http://schemas.openxmlformats.org/drawingml/2006/main">
-            <a:pPr algn="l">
-              <a:defRPr sz="1575" b="1">
-                <a:solidFill>
-                  <a:srgbClr val="2E7D5B"/>
-                </a:solidFill>
-                <a:latin typeface="Aptos"/>
-                <a:ea typeface="Aptos"/>
-                <a:cs typeface="Aptos"/>
-              </a:defRPr>
-            </a:pPr>
-            <a:r>
-              <a:rPr sz="1575" b="1">
-                <a:solidFill>
-                  <a:srgbClr val="2E7D5B"/>
-                </a:solidFill>
-                <a:latin typeface="Aptos"/>
-                <a:ea typeface="Aptos"/>
-                <a:cs typeface="Aptos"/>
-              </a:rPr>
-              <a:t>Après-midi</a:t>
-            </a:r>
-          </a:p>
-        </p:txBody>
-      </p:sp>
-      <p:sp>
-        <p:nvSpPr>
-          <p:cNvPr id="16" name="">
-            <a:extLst xmlns:a="http://schemas.openxmlformats.org/drawingml/2006/main">
-              <a:ext uri="{FF2B5EF4-FFF2-40B4-BE49-F238E27FC236}">
-                <a16:creationId xmlns:a16="http://schemas.microsoft.com/office/drawing/2014/main" id="{BC6F2E13-C931-40E7-97F9-02A2B11A5056}"/>
-              </a:ext>
-            </a:extLst>
-          </p:cNvPr>
-          <p:cNvSpPr>
-            <a:spLocks xmlns:a="http://schemas.openxmlformats.org/drawingml/2006/main" noGrp="1"/>
-          </p:cNvSpPr>
-          <p:nvPr/>
-        </p:nvSpPr>
-        <p:spPr>
-          <a:xfrm xmlns:a="http://schemas.openxmlformats.org/drawingml/2006/main">
-            <a:off x="2952750" y="4286250"/>
-            <a:ext cx="3048000" cy="381000"/>
-          </a:xfrm>
-          <a:prstGeom xmlns:a="http://schemas.openxmlformats.org/drawingml/2006/main" prst="rect">
-            <a:avLst/>
-          </a:prstGeom>
-          <a:solidFill xmlns:a="http://schemas.openxmlformats.org/drawingml/2006/main">
-            <a:srgbClr val="000000">
-              <a:alpha val="0"/>
-            </a:srgbClr>
-          </a:solidFill>
-          <a:ln xmlns:a="http://schemas.openxmlformats.org/drawingml/2006/main" w="0">
-            <a:solidFill>
-              <a:srgbClr val="000000">
-                <a:alpha val="0"/>
-              </a:srgbClr>
-            </a:solidFill>
-            <a:prstDash val="solid"/>
-          </a:ln>
-        </p:spPr>
-        <p:txBody>
-          <a:bodyPr xmlns:a="http://schemas.openxmlformats.org/drawingml/2006/main" lIns="0" tIns="0" rIns="0" bIns="0" anchor="ctr"/>
-          <a:lstStyle xmlns:a="http://schemas.openxmlformats.org/drawingml/2006/main"/>
-          <a:p xmlns:a="http://schemas.openxmlformats.org/drawingml/2006/main">
-            <a:pPr algn="l">
-              <a:defRPr sz="1125" b="0">
-                <a:solidFill>
-                  <a:srgbClr val="1F2933"/>
-                </a:solidFill>
-                <a:latin typeface="Aptos"/>
-                <a:ea typeface="Aptos"/>
-                <a:cs typeface="Aptos"/>
-              </a:defRPr>
-            </a:pPr>
-            <a:r>
-              <a:rPr sz="1125" b="0">
-                <a:solidFill>
-                  <a:srgbClr val="1F2933"/>
-                </a:solidFill>
-                <a:latin typeface="Aptos"/>
-                <a:ea typeface="Aptos"/>
-                <a:cs typeface="Aptos"/>
-              </a:rPr>
-              <a:t>Créneau équilibré pour analyse post-intervention avant la fin de journée.</a:t>
-            </a:r>
-          </a:p>
-        </p:txBody>
-      </p:sp>
-      <p:sp>
-        <p:nvSpPr>
-          <p:cNvPr id="17" name="">
-            <a:extLst xmlns:a="http://schemas.openxmlformats.org/drawingml/2006/main">
-              <a:ext uri="{FF2B5EF4-FFF2-40B4-BE49-F238E27FC236}">
-                <a16:creationId xmlns:a16="http://schemas.microsoft.com/office/drawing/2014/main" id="{86798389-4C52-4A39-8108-735E9CFC0221}"/>
-              </a:ext>
-            </a:extLst>
-          </p:cNvPr>
-          <p:cNvSpPr>
-            <a:spLocks xmlns:a="http://schemas.openxmlformats.org/drawingml/2006/main" noGrp="1"/>
-          </p:cNvSpPr>
-          <p:nvPr/>
-        </p:nvSpPr>
-        <p:spPr>
-          <a:xfrm xmlns:a="http://schemas.openxmlformats.org/drawingml/2006/main">
-            <a:off x="6438900" y="4267200"/>
-            <a:ext cx="4267200" cy="419100"/>
-          </a:xfrm>
-          <a:prstGeom xmlns:a="http://schemas.openxmlformats.org/drawingml/2006/main" prst="rect">
-            <a:avLst/>
-          </a:prstGeom>
-          <a:solidFill xmlns:a="http://schemas.openxmlformats.org/drawingml/2006/main">
-            <a:srgbClr val="000000">
-              <a:alpha val="0"/>
-            </a:srgbClr>
-          </a:solidFill>
-          <a:ln xmlns:a="http://schemas.openxmlformats.org/drawingml/2006/main" w="0">
-            <a:solidFill>
-              <a:srgbClr val="000000">
-                <a:alpha val="0"/>
-              </a:srgbClr>
-            </a:solidFill>
-            <a:prstDash val="solid"/>
-          </a:ln>
-        </p:spPr>
-        <p:txBody>
-          <a:bodyPr xmlns:a="http://schemas.openxmlformats.org/drawingml/2006/main" lIns="0" tIns="0" rIns="0" bIns="0" anchor="ctr"/>
-          <a:lstStyle xmlns:a="http://schemas.openxmlformats.org/drawingml/2006/main"/>
-          <a:p xmlns:a="http://schemas.openxmlformats.org/drawingml/2006/main">
-            <a:pPr algn="l">
-              <a:defRPr sz="1125" b="0">
-                <a:solidFill>
-                  <a:srgbClr val="1F2933"/>
-                </a:solidFill>
-                <a:latin typeface="Aptos"/>
-                <a:ea typeface="Aptos"/>
-                <a:cs typeface="Aptos"/>
-              </a:defRPr>
-            </a:pPr>
-            <a:r>
-              <a:rPr sz="1125" b="0">
-                <a:solidFill>
-                  <a:srgbClr val="1F2933"/>
-                </a:solidFill>
-                <a:latin typeface="Aptos"/>
-                <a:ea typeface="Aptos"/>
-                <a:cs typeface="Aptos"/>
-              </a:rPr>
-              <a:t>Confirmer disponibilité applicative et supervision pendant les tests.</a:t>
-            </a:r>
-          </a:p>
-        </p:txBody>
-      </p:sp>
-      <p:sp>
-        <p:nvSpPr>
-          <p:cNvPr id="18" name="">
-            <a:extLst xmlns:a="http://schemas.openxmlformats.org/drawingml/2006/main">
-              <a:ext uri="{FF2B5EF4-FFF2-40B4-BE49-F238E27FC236}">
-                <a16:creationId xmlns:a16="http://schemas.microsoft.com/office/drawing/2014/main" id="{0BC130B2-9382-40B7-83D0-E6891DF407DB}"/>
-              </a:ext>
-            </a:extLst>
-          </p:cNvPr>
-          <p:cNvSpPr>
-            <a:spLocks xmlns:a="http://schemas.openxmlformats.org/drawingml/2006/main" noGrp="1"/>
-          </p:cNvSpPr>
-          <p:nvPr/>
-        </p:nvSpPr>
-        <p:spPr>
-          <a:xfrm xmlns:a="http://schemas.openxmlformats.org/drawingml/2006/main">
-            <a:off x="685800" y="4972050"/>
-            <a:ext cx="10439400" cy="647700"/>
-          </a:xfrm>
-          <a:prstGeom xmlns:a="http://schemas.openxmlformats.org/drawingml/2006/main" prst="rect">
-            <a:avLst/>
-          </a:prstGeom>
-          <a:solidFill xmlns:a="http://schemas.openxmlformats.org/drawingml/2006/main">
-            <a:srgbClr val="FFFFFF"/>
-          </a:solidFill>
-          <a:ln xmlns:a="http://schemas.openxmlformats.org/drawingml/2006/main" w="9525">
-            <a:solidFill>
-              <a:srgbClr val="D8D3C8"/>
-            </a:solidFill>
-            <a:prstDash val="solid"/>
-          </a:ln>
-        </p:spPr>
-      </p:sp>
-      <p:sp>
-        <p:nvSpPr>
-          <p:cNvPr id="19" name="">
-            <a:extLst xmlns:a="http://schemas.openxmlformats.org/drawingml/2006/main">
-              <a:ext uri="{FF2B5EF4-FFF2-40B4-BE49-F238E27FC236}">
-                <a16:creationId xmlns:a16="http://schemas.microsoft.com/office/drawing/2014/main" id="{EFEE570C-D473-45D7-868E-BEA11C53DE29}"/>
-              </a:ext>
-            </a:extLst>
-          </p:cNvPr>
-          <p:cNvSpPr>
-            <a:spLocks xmlns:a="http://schemas.openxmlformats.org/drawingml/2006/main" noGrp="1"/>
-          </p:cNvSpPr>
-          <p:nvPr/>
-        </p:nvSpPr>
-        <p:spPr>
-          <a:xfrm xmlns:a="http://schemas.openxmlformats.org/drawingml/2006/main">
-            <a:off x="857250" y="5143500"/>
-            <a:ext cx="1619250" cy="266700"/>
-          </a:xfrm>
-          <a:prstGeom xmlns:a="http://schemas.openxmlformats.org/drawingml/2006/main" prst="rect">
-            <a:avLst/>
-          </a:prstGeom>
-          <a:solidFill xmlns:a="http://schemas.openxmlformats.org/drawingml/2006/main">
-            <a:srgbClr val="000000">
-              <a:alpha val="0"/>
-            </a:srgbClr>
-          </a:solidFill>
-          <a:ln xmlns:a="http://schemas.openxmlformats.org/drawingml/2006/main" w="0">
-            <a:solidFill>
-              <a:srgbClr val="000000">
-                <a:alpha val="0"/>
-              </a:srgbClr>
-            </a:solidFill>
-            <a:prstDash val="solid"/>
-          </a:ln>
-        </p:spPr>
-        <p:txBody>
-          <a:bodyPr xmlns:a="http://schemas.openxmlformats.org/drawingml/2006/main" lIns="0" tIns="0" rIns="0" bIns="0" anchor="ctr"/>
-          <a:lstStyle xmlns:a="http://schemas.openxmlformats.org/drawingml/2006/main"/>
-          <a:p xmlns:a="http://schemas.openxmlformats.org/drawingml/2006/main">
-            <a:pPr algn="l">
-              <a:defRPr sz="1575" b="1">
-                <a:solidFill>
-                  <a:srgbClr val="1F2933"/>
-                </a:solidFill>
-                <a:latin typeface="Aptos"/>
-                <a:ea typeface="Aptos"/>
-                <a:cs typeface="Aptos"/>
-              </a:defRPr>
-            </a:pPr>
-            <a:r>
-              <a:rPr sz="1575" b="1">
-                <a:solidFill>
-                  <a:srgbClr val="1F2933"/>
-                </a:solidFill>
-                <a:latin typeface="Aptos"/>
-                <a:ea typeface="Aptos"/>
-                <a:cs typeface="Aptos"/>
-              </a:rPr>
-              <a:t>Soirée</a:t>
-            </a:r>
-          </a:p>
-        </p:txBody>
-      </p:sp>
-      <p:sp>
-        <p:nvSpPr>
-          <p:cNvPr id="20" name="">
-            <a:extLst xmlns:a="http://schemas.openxmlformats.org/drawingml/2006/main">
-              <a:ext uri="{FF2B5EF4-FFF2-40B4-BE49-F238E27FC236}">
-                <a16:creationId xmlns:a16="http://schemas.microsoft.com/office/drawing/2014/main" id="{EE2C815F-FD86-4FC9-815F-DB405D7E9E5A}"/>
-              </a:ext>
-            </a:extLst>
-          </p:cNvPr>
-          <p:cNvSpPr>
-            <a:spLocks xmlns:a="http://schemas.openxmlformats.org/drawingml/2006/main" noGrp="1"/>
-          </p:cNvSpPr>
-          <p:nvPr/>
-        </p:nvSpPr>
-        <p:spPr>
-          <a:xfrm xmlns:a="http://schemas.openxmlformats.org/drawingml/2006/main">
-            <a:off x="2952750" y="5105400"/>
-            <a:ext cx="3048000" cy="381000"/>
-          </a:xfrm>
-          <a:prstGeom xmlns:a="http://schemas.openxmlformats.org/drawingml/2006/main" prst="rect">
-            <a:avLst/>
-          </a:prstGeom>
-          <a:solidFill xmlns:a="http://schemas.openxmlformats.org/drawingml/2006/main">
-            <a:srgbClr val="000000">
-              <a:alpha val="0"/>
-            </a:srgbClr>
-          </a:solidFill>
-          <a:ln xmlns:a="http://schemas.openxmlformats.org/drawingml/2006/main" w="0">
-            <a:solidFill>
-              <a:srgbClr val="000000">
-                <a:alpha val="0"/>
-              </a:srgbClr>
-            </a:solidFill>
-            <a:prstDash val="solid"/>
-          </a:ln>
-        </p:spPr>
-        <p:txBody>
-          <a:bodyPr xmlns:a="http://schemas.openxmlformats.org/drawingml/2006/main" lIns="0" tIns="0" rIns="0" bIns="0" anchor="ctr"/>
-          <a:lstStyle xmlns:a="http://schemas.openxmlformats.org/drawingml/2006/main"/>
-          <a:p xmlns:a="http://schemas.openxmlformats.org/drawingml/2006/main">
-            <a:pPr algn="l">
-              <a:defRPr sz="1125" b="0">
-                <a:solidFill>
-                  <a:srgbClr val="1F2933"/>
-                </a:solidFill>
-                <a:latin typeface="Aptos"/>
-                <a:ea typeface="Aptos"/>
-                <a:cs typeface="Aptos"/>
-              </a:defRPr>
-            </a:pPr>
-            <a:r>
-              <a:rPr sz="1125" b="0">
-                <a:solidFill>
-                  <a:srgbClr val="1F2933"/>
-                </a:solidFill>
-                <a:latin typeface="Aptos"/>
-                <a:ea typeface="Aptos"/>
-                <a:cs typeface="Aptos"/>
-              </a:rPr>
-              <a:t>Option si l’impact métier doit être minimisé hors horaires principaux.</a:t>
-            </a:r>
-          </a:p>
-        </p:txBody>
-      </p:sp>
-      <p:sp>
-        <p:nvSpPr>
-          <p:cNvPr id="21" name="">
-            <a:extLst xmlns:a="http://schemas.openxmlformats.org/drawingml/2006/main">
-              <a:ext uri="{FF2B5EF4-FFF2-40B4-BE49-F238E27FC236}">
-                <a16:creationId xmlns:a16="http://schemas.microsoft.com/office/drawing/2014/main" id="{81B01732-F206-4522-8A0C-7917B54ADE2E}"/>
-              </a:ext>
-            </a:extLst>
-          </p:cNvPr>
-          <p:cNvSpPr>
-            <a:spLocks xmlns:a="http://schemas.openxmlformats.org/drawingml/2006/main" noGrp="1"/>
-          </p:cNvSpPr>
-          <p:nvPr/>
-        </p:nvSpPr>
-        <p:spPr>
-          <a:xfrm xmlns:a="http://schemas.openxmlformats.org/drawingml/2006/main">
-            <a:off x="6438900" y="5086350"/>
-            <a:ext cx="4267200" cy="419100"/>
-          </a:xfrm>
-          <a:prstGeom xmlns:a="http://schemas.openxmlformats.org/drawingml/2006/main" prst="rect">
-            <a:avLst/>
-          </a:prstGeom>
-          <a:solidFill xmlns:a="http://schemas.openxmlformats.org/drawingml/2006/main">
-            <a:srgbClr val="000000">
-              <a:alpha val="0"/>
-            </a:srgbClr>
-          </a:solidFill>
-          <a:ln xmlns:a="http://schemas.openxmlformats.org/drawingml/2006/main" w="0">
-            <a:solidFill>
-              <a:srgbClr val="000000">
-                <a:alpha val="0"/>
-              </a:srgbClr>
-            </a:solidFill>
-            <a:prstDash val="solid"/>
-          </a:ln>
-        </p:spPr>
-        <p:txBody>
-          <a:bodyPr xmlns:a="http://schemas.openxmlformats.org/drawingml/2006/main" lIns="0" tIns="0" rIns="0" bIns="0" anchor="ctr"/>
-          <a:lstStyle xmlns:a="http://schemas.openxmlformats.org/drawingml/2006/main"/>
-          <a:p xmlns:a="http://schemas.openxmlformats.org/drawingml/2006/main">
-            <a:pPr algn="l">
-              <a:defRPr sz="1125" b="0">
-                <a:solidFill>
-                  <a:srgbClr val="1F2933"/>
-                </a:solidFill>
-                <a:latin typeface="Aptos"/>
-                <a:ea typeface="Aptos"/>
-                <a:cs typeface="Aptos"/>
-              </a:defRPr>
-            </a:pPr>
-            <a:r>
-              <a:rPr sz="1125" b="0">
-                <a:solidFill>
-                  <a:srgbClr val="1F2933"/>
-                </a:solidFill>
-                <a:latin typeface="Aptos"/>
-                <a:ea typeface="Aptos"/>
-                <a:cs typeface="Aptos"/>
-              </a:rPr>
-              <a:t>Confirmer astreinte, monitoring et procédure de validation le lendemain.</a:t>
-            </a:r>
-          </a:p>
-        </p:txBody>
-      </p:sp>
-      <p:sp>
-        <p:nvSpPr>
-          <p:cNvPr id="22" name="">
-            <a:extLst xmlns:a="http://schemas.openxmlformats.org/drawingml/2006/main">
-              <a:ext uri="{FF2B5EF4-FFF2-40B4-BE49-F238E27FC236}">
-                <a16:creationId xmlns:a16="http://schemas.microsoft.com/office/drawing/2014/main" id="{964EE878-FBE0-4178-BB7E-8D0B64E82857}"/>
-              </a:ext>
-            </a:extLst>
-          </p:cNvPr>
-          <p:cNvSpPr>
-            <a:spLocks xmlns:a="http://schemas.openxmlformats.org/drawingml/2006/main" noGrp="1"/>
-          </p:cNvSpPr>
-          <p:nvPr/>
-        </p:nvSpPr>
-        <p:spPr>
-          <a:xfrm xmlns:a="http://schemas.openxmlformats.org/drawingml/2006/main">
-            <a:off x="685800" y="5772150"/>
-            <a:ext cx="10439400" cy="419100"/>
+                <a16:creationId xmlns:a16="http://schemas.microsoft.com/office/drawing/2014/main" id="{653E80CB-BA04-4327-B071-5D12FDE1952B}"/>
+              </a:ext>
+            </a:extLst>
+          </p:cNvPr>
+          <p:cNvSpPr>
+            <a:spLocks xmlns:a="http://schemas.openxmlformats.org/drawingml/2006/main" noGrp="1"/>
+          </p:cNvSpPr>
+          <p:nvPr/>
+        </p:nvSpPr>
+        <p:spPr>
+          <a:xfrm xmlns:a="http://schemas.openxmlformats.org/drawingml/2006/main">
+            <a:off x="685800" y="5734050"/>
+            <a:ext cx="10439400" cy="457200"/>
           </a:xfrm>
           <a:prstGeom xmlns:a="http://schemas.openxmlformats.org/drawingml/2006/main" prst="rect">
             <a:avLst/>
@@ -4032,32 +3279,30 @@
           <a:solidFill xmlns:a="http://schemas.openxmlformats.org/drawingml/2006/main">
             <a:srgbClr val="1F2933"/>
           </a:solidFill>
-          <a:ln xmlns:a="http://schemas.openxmlformats.org/drawingml/2006/main" w="9525">
-            <a:solidFill>
-              <a:srgbClr val="1F2933"/>
-            </a:solidFill>
-            <a:prstDash val="solid"/>
-          </a:ln>
-        </p:spPr>
-      </p:sp>
-      <p:sp>
-        <p:nvSpPr>
-          <p:cNvPr id="23" name="">
-            <a:extLst xmlns:a="http://schemas.openxmlformats.org/drawingml/2006/main">
-              <a:ext uri="{FF2B5EF4-FFF2-40B4-BE49-F238E27FC236}">
-                <a16:creationId xmlns:a16="http://schemas.microsoft.com/office/drawing/2014/main" id="{03648F38-F970-4F89-93FD-BECB5BEA3828}"/>
-              </a:ext>
-            </a:extLst>
-          </p:cNvPr>
-          <p:cNvSpPr>
-            <a:spLocks xmlns:a="http://schemas.openxmlformats.org/drawingml/2006/main" noGrp="1"/>
-          </p:cNvSpPr>
-          <p:nvPr/>
-        </p:nvSpPr>
-        <p:spPr>
-          <a:xfrm xmlns:a="http://schemas.openxmlformats.org/drawingml/2006/main">
-            <a:off x="685800" y="5772150"/>
-            <a:ext cx="66675" cy="419100"/>
+          <a:ln xmlns:a="http://schemas.openxmlformats.org/drawingml/2006/main" w="0">
+            <a:noFill/>
+            <a:prstDash val="solid"/>
+          </a:ln>
+        </p:spPr>
+      </p:sp>
+      <p:sp>
+        <p:nvSpPr>
+          <p:cNvPr id="13" name="">
+            <a:extLst xmlns:a="http://schemas.openxmlformats.org/drawingml/2006/main">
+              <a:ext uri="{FF2B5EF4-FFF2-40B4-BE49-F238E27FC236}">
+                <a16:creationId xmlns:a16="http://schemas.microsoft.com/office/drawing/2014/main" id="{200C1141-0C3F-4757-B987-10C1277FEF2F}"/>
+              </a:ext>
+            </a:extLst>
+          </p:cNvPr>
+          <p:cNvSpPr>
+            <a:spLocks xmlns:a="http://schemas.openxmlformats.org/drawingml/2006/main" noGrp="1"/>
+          </p:cNvSpPr>
+          <p:nvPr/>
+        </p:nvSpPr>
+        <p:spPr>
+          <a:xfrm xmlns:a="http://schemas.openxmlformats.org/drawingml/2006/main">
+            <a:off x="685800" y="5734050"/>
+            <a:ext cx="76200" cy="457200"/>
           </a:xfrm>
           <a:prstGeom xmlns:a="http://schemas.openxmlformats.org/drawingml/2006/main" prst="rect">
             <a:avLst/>
@@ -4066,48 +3311,36 @@
             <a:srgbClr val="2E7D5B"/>
           </a:solidFill>
           <a:ln xmlns:a="http://schemas.openxmlformats.org/drawingml/2006/main" w="0">
-            <a:solidFill>
-              <a:srgbClr val="000000">
-                <a:alpha val="0"/>
-              </a:srgbClr>
-            </a:solidFill>
-            <a:prstDash val="solid"/>
-          </a:ln>
-        </p:spPr>
-      </p:sp>
-      <p:sp>
-        <p:nvSpPr>
-          <p:cNvPr id="24" name="">
-            <a:extLst xmlns:a="http://schemas.openxmlformats.org/drawingml/2006/main">
-              <a:ext uri="{FF2B5EF4-FFF2-40B4-BE49-F238E27FC236}">
-                <a16:creationId xmlns:a16="http://schemas.microsoft.com/office/drawing/2014/main" id="{C0F41C3F-F795-4FBF-99E9-D4C73E81B5D9}"/>
-              </a:ext>
-            </a:extLst>
-          </p:cNvPr>
-          <p:cNvSpPr>
-            <a:spLocks xmlns:a="http://schemas.openxmlformats.org/drawingml/2006/main" noGrp="1"/>
-          </p:cNvSpPr>
-          <p:nvPr/>
-        </p:nvSpPr>
-        <p:spPr>
-          <a:xfrm xmlns:a="http://schemas.openxmlformats.org/drawingml/2006/main">
-            <a:off x="914400" y="5876925"/>
-            <a:ext cx="9886950" cy="209550"/>
-          </a:xfrm>
-          <a:prstGeom xmlns:a="http://schemas.openxmlformats.org/drawingml/2006/main" prst="rect">
-            <a:avLst/>
-          </a:prstGeom>
-          <a:solidFill xmlns:a="http://schemas.openxmlformats.org/drawingml/2006/main">
-            <a:srgbClr val="000000">
-              <a:alpha val="0"/>
-            </a:srgbClr>
-          </a:solidFill>
-          <a:ln xmlns:a="http://schemas.openxmlformats.org/drawingml/2006/main" w="0">
-            <a:solidFill>
-              <a:srgbClr val="000000">
-                <a:alpha val="0"/>
-              </a:srgbClr>
-            </a:solidFill>
+            <a:noFill/>
+            <a:prstDash val="solid"/>
+          </a:ln>
+        </p:spPr>
+      </p:sp>
+      <p:sp>
+        <p:nvSpPr>
+          <p:cNvPr id="14" name="">
+            <a:extLst xmlns:a="http://schemas.openxmlformats.org/drawingml/2006/main">
+              <a:ext uri="{FF2B5EF4-FFF2-40B4-BE49-F238E27FC236}">
+                <a16:creationId xmlns:a16="http://schemas.microsoft.com/office/drawing/2014/main" id="{82609FE2-EA9C-4ECA-968F-843E44AFD158}"/>
+              </a:ext>
+            </a:extLst>
+          </p:cNvPr>
+          <p:cNvSpPr>
+            <a:spLocks xmlns:a="http://schemas.openxmlformats.org/drawingml/2006/main" noGrp="1"/>
+          </p:cNvSpPr>
+          <p:nvPr/>
+        </p:nvSpPr>
+        <p:spPr>
+          <a:xfrm xmlns:a="http://schemas.openxmlformats.org/drawingml/2006/main">
+            <a:off x="914400" y="5857875"/>
+            <a:ext cx="9810750" cy="209550"/>
+          </a:xfrm>
+          <a:prstGeom xmlns:a="http://schemas.openxmlformats.org/drawingml/2006/main" prst="rect">
+            <a:avLst/>
+          </a:prstGeom>
+          <a:noFill xmlns:a="http://schemas.openxmlformats.org/drawingml/2006/main"/>
+          <a:ln xmlns:a="http://schemas.openxmlformats.org/drawingml/2006/main" w="0">
+            <a:noFill/>
             <a:prstDash val="solid"/>
           </a:ln>
         </p:spPr>
@@ -4116,35 +3349,35 @@
           <a:lstStyle xmlns:a="http://schemas.openxmlformats.org/drawingml/2006/main"/>
           <a:p xmlns:a="http://schemas.openxmlformats.org/drawingml/2006/main">
             <a:pPr algn="l">
-              <a:defRPr sz="1200" b="1">
-                <a:solidFill>
-                  <a:srgbClr val="F7F4EE"/>
-                </a:solidFill>
-                <a:latin typeface="Aptos"/>
-                <a:ea typeface="Aptos"/>
-                <a:cs typeface="Aptos"/>
-              </a:defRPr>
-            </a:pPr>
-            <a:r>
-              <a:rPr sz="1200" b="1">
-                <a:solidFill>
-                  <a:srgbClr val="F7F4EE"/>
-                </a:solidFill>
-                <a:latin typeface="Aptos"/>
-                <a:ea typeface="Aptos"/>
-                <a:cs typeface="Aptos"/>
-              </a:rPr>
-              <a:t>À obtenir en réunion : feu vert + jour exact + créneau retenu + responsable de validation après retouche.</a:t>
-            </a:r>
-          </a:p>
-        </p:txBody>
-      </p:sp>
-      <p:sp>
-        <p:nvSpPr>
-          <p:cNvPr id="25" name="">
-            <a:extLst xmlns:a="http://schemas.openxmlformats.org/drawingml/2006/main">
-              <a:ext uri="{FF2B5EF4-FFF2-40B4-BE49-F238E27FC236}">
-                <a16:creationId xmlns:a16="http://schemas.microsoft.com/office/drawing/2014/main" id="{283235F2-3ECD-4B8A-A574-8D21FB73EEEC}"/>
+              <a:defRPr sz="1275" b="1">
+                <a:solidFill>
+                  <a:srgbClr val="FFFFFF"/>
+                </a:solidFill>
+                <a:latin typeface="Aptos"/>
+                <a:ea typeface="Aptos"/>
+                <a:cs typeface="Aptos"/>
+              </a:defRPr>
+            </a:pPr>
+            <a:r>
+              <a:rPr sz="1275" b="1">
+                <a:solidFill>
+                  <a:srgbClr val="FFFFFF"/>
+                </a:solidFill>
+                <a:latin typeface="Aptos"/>
+                <a:ea typeface="Aptos"/>
+                <a:cs typeface="Aptos"/>
+              </a:rPr>
+              <a:t>Réponse attendue : matin, après-midi ou soir + jour exact + personne qui valide après lancement.</a:t>
+            </a:r>
+          </a:p>
+        </p:txBody>
+      </p:sp>
+      <p:sp>
+        <p:nvSpPr>
+          <p:cNvPr id="15" name="">
+            <a:extLst xmlns:a="http://schemas.openxmlformats.org/drawingml/2006/main">
+              <a:ext uri="{FF2B5EF4-FFF2-40B4-BE49-F238E27FC236}">
+                <a16:creationId xmlns:a16="http://schemas.microsoft.com/office/drawing/2014/main" id="{61712868-1369-4256-8F39-53F0044D5885}"/>
               </a:ext>
             </a:extLst>
           </p:cNvPr>
@@ -4165,21 +3398,17 @@
             <a:srgbClr val="D8D3C8"/>
           </a:solidFill>
           <a:ln xmlns:a="http://schemas.openxmlformats.org/drawingml/2006/main" w="0">
-            <a:solidFill>
-              <a:srgbClr val="000000">
-                <a:alpha val="0"/>
-              </a:srgbClr>
-            </a:solidFill>
-            <a:prstDash val="solid"/>
-          </a:ln>
-        </p:spPr>
-      </p:sp>
-      <p:sp>
-        <p:nvSpPr>
-          <p:cNvPr id="26" name="">
-            <a:extLst xmlns:a="http://schemas.openxmlformats.org/drawingml/2006/main">
-              <a:ext uri="{FF2B5EF4-FFF2-40B4-BE49-F238E27FC236}">
-                <a16:creationId xmlns:a16="http://schemas.microsoft.com/office/drawing/2014/main" id="{3C8551CD-1006-4668-900C-E0016C37B4BC}"/>
+            <a:noFill/>
+            <a:prstDash val="solid"/>
+          </a:ln>
+        </p:spPr>
+      </p:sp>
+      <p:sp>
+        <p:nvSpPr>
+          <p:cNvPr id="16" name="">
+            <a:extLst xmlns:a="http://schemas.openxmlformats.org/drawingml/2006/main">
+              <a:ext uri="{FF2B5EF4-FFF2-40B4-BE49-F238E27FC236}">
+                <a16:creationId xmlns:a16="http://schemas.microsoft.com/office/drawing/2014/main" id="{4B355055-DD89-465A-B667-1C2FB4F0639A}"/>
               </a:ext>
             </a:extLst>
           </p:cNvPr>
@@ -4196,17 +3425,9 @@
           <a:prstGeom xmlns:a="http://schemas.openxmlformats.org/drawingml/2006/main" prst="rect">
             <a:avLst/>
           </a:prstGeom>
-          <a:solidFill xmlns:a="http://schemas.openxmlformats.org/drawingml/2006/main">
-            <a:srgbClr val="000000">
-              <a:alpha val="0"/>
-            </a:srgbClr>
-          </a:solidFill>
-          <a:ln xmlns:a="http://schemas.openxmlformats.org/drawingml/2006/main" w="0">
-            <a:solidFill>
-              <a:srgbClr val="000000">
-                <a:alpha val="0"/>
-              </a:srgbClr>
-            </a:solidFill>
+          <a:noFill xmlns:a="http://schemas.openxmlformats.org/drawingml/2006/main"/>
+          <a:ln xmlns:a="http://schemas.openxmlformats.org/drawingml/2006/main" w="0">
+            <a:noFill/>
             <a:prstDash val="solid"/>
           </a:ln>
         </p:spPr>
@@ -4240,10 +3461,10 @@
       </p:sp>
       <p:sp>
         <p:nvSpPr>
-          <p:cNvPr id="27" name="">
-            <a:extLst xmlns:a="http://schemas.openxmlformats.org/drawingml/2006/main">
-              <a:ext uri="{FF2B5EF4-FFF2-40B4-BE49-F238E27FC236}">
-                <a16:creationId xmlns:a16="http://schemas.microsoft.com/office/drawing/2014/main" id="{458858CE-BC32-412D-977E-E1576EFE7725}"/>
+          <p:cNvPr id="17" name="">
+            <a:extLst xmlns:a="http://schemas.openxmlformats.org/drawingml/2006/main">
+              <a:ext uri="{FF2B5EF4-FFF2-40B4-BE49-F238E27FC236}">
+                <a16:creationId xmlns:a16="http://schemas.microsoft.com/office/drawing/2014/main" id="{06355AB7-7406-46E6-803E-7BA08AEC060A}"/>
               </a:ext>
             </a:extLst>
           </p:cNvPr>
@@ -4260,17 +3481,9 @@
           <a:prstGeom xmlns:a="http://schemas.openxmlformats.org/drawingml/2006/main" prst="rect">
             <a:avLst/>
           </a:prstGeom>
-          <a:solidFill xmlns:a="http://schemas.openxmlformats.org/drawingml/2006/main">
-            <a:srgbClr val="000000">
-              <a:alpha val="0"/>
-            </a:srgbClr>
-          </a:solidFill>
-          <a:ln xmlns:a="http://schemas.openxmlformats.org/drawingml/2006/main" w="0">
-            <a:solidFill>
-              <a:srgbClr val="000000">
-                <a:alpha val="0"/>
-              </a:srgbClr>
-            </a:solidFill>
+          <a:noFill xmlns:a="http://schemas.openxmlformats.org/drawingml/2006/main"/>
+          <a:ln xmlns:a="http://schemas.openxmlformats.org/drawingml/2006/main" w="0">
+            <a:noFill/>
             <a:prstDash val="solid"/>
           </a:ln>
         </p:spPr>
@@ -4305,7 +3518,7 @@
     </p:spTree>
     <p:extLst>
       <p:ext uri="{BB962C8B-B14F-4D97-AF65-F5344CB8AC3E}">
-        <p14:creationId xmlns:p14="http://schemas.microsoft.com/office/powerpoint/2010/main" val="1703844096"/>
+        <p14:creationId xmlns:p14="http://schemas.microsoft.com/office/powerpoint/2010/main" val="45383286"/>
       </p:ext>
     </p:extLst>
   </p:cSld>
@@ -4326,10 +3539,10 @@
       </p:grpSpPr>
       <p:sp>
         <p:nvSpPr>
-          <p:cNvPr id="1" name="">
-            <a:extLst xmlns:a="http://schemas.openxmlformats.org/drawingml/2006/main">
-              <a:ext uri="{FF2B5EF4-FFF2-40B4-BE49-F238E27FC236}">
-                <a16:creationId xmlns:a16="http://schemas.microsoft.com/office/drawing/2014/main" id="{1F941E3E-9E07-42B9-A9F1-2A648143FAD0}"/>
+          <p:cNvPr id="46" name="">
+            <a:extLst xmlns:a="http://schemas.openxmlformats.org/drawingml/2006/main">
+              <a:ext uri="{FF2B5EF4-FFF2-40B4-BE49-F238E27FC236}">
+                <a16:creationId xmlns:a16="http://schemas.microsoft.com/office/drawing/2014/main" id="{498D3A72-3A6F-409E-80A0-7EB156CDB142}"/>
               </a:ext>
             </a:extLst>
           </p:cNvPr>
@@ -4350,11 +3563,7 @@
             <a:srgbClr val="F7F4EE"/>
           </a:solidFill>
           <a:ln xmlns:a="http://schemas.openxmlformats.org/drawingml/2006/main" w="0">
-            <a:solidFill>
-              <a:srgbClr val="000000">
-                <a:alpha val="0"/>
-              </a:srgbClr>
-            </a:solidFill>
+            <a:noFill/>
             <a:prstDash val="solid"/>
           </a:ln>
         </p:spPr>
@@ -4364,7 +3573,7 @@
           <p:cNvPr id="2" name="">
             <a:extLst xmlns:a="http://schemas.openxmlformats.org/drawingml/2006/main">
               <a:ext uri="{FF2B5EF4-FFF2-40B4-BE49-F238E27FC236}">
-                <a16:creationId xmlns:a16="http://schemas.microsoft.com/office/drawing/2014/main" id="{C3CE4BE5-722D-4F69-B993-3B37F5145BCE}"/>
+                <a16:creationId xmlns:a16="http://schemas.microsoft.com/office/drawing/2014/main" id="{DB751F0A-CBAF-4FE2-BE81-6502886C442D}"/>
               </a:ext>
             </a:extLst>
           </p:cNvPr>
@@ -4385,11 +3594,7 @@
             <a:srgbClr val="1F2933"/>
           </a:solidFill>
           <a:ln xmlns:a="http://schemas.openxmlformats.org/drawingml/2006/main" w="0">
-            <a:solidFill>
-              <a:srgbClr val="000000">
-                <a:alpha val="0"/>
-              </a:srgbClr>
-            </a:solidFill>
+            <a:noFill/>
             <a:prstDash val="solid"/>
           </a:ln>
         </p:spPr>
@@ -4399,7 +3604,7 @@
           <p:cNvPr id="3" name="kicker-03-marker">
             <a:extLst xmlns:a="http://schemas.openxmlformats.org/drawingml/2006/main">
               <a:ext uri="{FF2B5EF4-FFF2-40B4-BE49-F238E27FC236}">
-                <a16:creationId xmlns:a16="http://schemas.microsoft.com/office/drawing/2014/main" id="{DEBB01A8-BDB8-4DC2-8BF4-853D4C4A2170}"/>
+                <a16:creationId xmlns:a16="http://schemas.microsoft.com/office/drawing/2014/main" id="{0F9DE43F-55EA-46CB-B6C8-BEDFCAB16646}"/>
               </a:ext>
             </a:extLst>
           </p:cNvPr>
@@ -4420,11 +3625,7 @@
             <a:srgbClr val="2F6FAD"/>
           </a:solidFill>
           <a:ln xmlns:a="http://schemas.openxmlformats.org/drawingml/2006/main" w="0">
-            <a:solidFill>
-              <a:srgbClr val="000000">
-                <a:alpha val="0"/>
-              </a:srgbClr>
-            </a:solidFill>
+            <a:noFill/>
             <a:prstDash val="solid"/>
           </a:ln>
         </p:spPr>
@@ -4434,7 +3635,7 @@
           <p:cNvPr id="4" name="kicker-03-label">
             <a:extLst xmlns:a="http://schemas.openxmlformats.org/drawingml/2006/main">
               <a:ext uri="{FF2B5EF4-FFF2-40B4-BE49-F238E27FC236}">
-                <a16:creationId xmlns:a16="http://schemas.microsoft.com/office/drawing/2014/main" id="{2032FA41-3F9D-4B9E-B8AD-753CF05B344E}"/>
+                <a16:creationId xmlns:a16="http://schemas.microsoft.com/office/drawing/2014/main" id="{89AF0A15-ED48-4BD5-9D90-7FF6A6FEED97}"/>
               </a:ext>
             </a:extLst>
           </p:cNvPr>
@@ -4451,17 +3652,9 @@
           <a:prstGeom xmlns:a="http://schemas.openxmlformats.org/drawingml/2006/main" prst="rect">
             <a:avLst/>
           </a:prstGeom>
-          <a:solidFill xmlns:a="http://schemas.openxmlformats.org/drawingml/2006/main">
-            <a:srgbClr val="000000">
-              <a:alpha val="0"/>
-            </a:srgbClr>
-          </a:solidFill>
-          <a:ln xmlns:a="http://schemas.openxmlformats.org/drawingml/2006/main" w="0">
-            <a:solidFill>
-              <a:srgbClr val="000000">
-                <a:alpha val="0"/>
-              </a:srgbClr>
-            </a:solidFill>
+          <a:noFill xmlns:a="http://schemas.openxmlformats.org/drawingml/2006/main"/>
+          <a:ln xmlns:a="http://schemas.openxmlformats.org/drawingml/2006/main" w="0">
+            <a:noFill/>
             <a:prstDash val="solid"/>
           </a:ln>
         </p:spPr>
@@ -4498,7 +3691,7 @@
           <p:cNvPr id="5" name="">
             <a:extLst xmlns:a="http://schemas.openxmlformats.org/drawingml/2006/main">
               <a:ext uri="{FF2B5EF4-FFF2-40B4-BE49-F238E27FC236}">
-                <a16:creationId xmlns:a16="http://schemas.microsoft.com/office/drawing/2014/main" id="{BFC36BC3-B612-45D2-8DDE-C82093707C56}"/>
+                <a16:creationId xmlns:a16="http://schemas.microsoft.com/office/drawing/2014/main" id="{11222EF2-EA19-4D6B-8499-BDF2C4B55B6A}"/>
               </a:ext>
             </a:extLst>
           </p:cNvPr>
@@ -4515,17 +3708,9 @@
           <a:prstGeom xmlns:a="http://schemas.openxmlformats.org/drawingml/2006/main" prst="rect">
             <a:avLst/>
           </a:prstGeom>
-          <a:solidFill xmlns:a="http://schemas.openxmlformats.org/drawingml/2006/main">
-            <a:srgbClr val="000000">
-              <a:alpha val="0"/>
-            </a:srgbClr>
-          </a:solidFill>
-          <a:ln xmlns:a="http://schemas.openxmlformats.org/drawingml/2006/main" w="0">
-            <a:solidFill>
-              <a:srgbClr val="000000">
-                <a:alpha val="0"/>
-              </a:srgbClr>
-            </a:solidFill>
+          <a:noFill xmlns:a="http://schemas.openxmlformats.org/drawingml/2006/main"/>
+          <a:ln xmlns:a="http://schemas.openxmlformats.org/drawingml/2006/main" w="0">
+            <a:noFill/>
             <a:prstDash val="solid"/>
           </a:ln>
         </p:spPr>
@@ -4562,7 +3747,7 @@
           <p:cNvPr id="6" name="">
             <a:extLst xmlns:a="http://schemas.openxmlformats.org/drawingml/2006/main">
               <a:ext uri="{FF2B5EF4-FFF2-40B4-BE49-F238E27FC236}">
-                <a16:creationId xmlns:a16="http://schemas.microsoft.com/office/drawing/2014/main" id="{DF5CDF5F-9574-4384-A8F2-C487467D061C}"/>
+                <a16:creationId xmlns:a16="http://schemas.microsoft.com/office/drawing/2014/main" id="{9E146701-7D12-45E2-8322-16BD0F01301E}"/>
               </a:ext>
             </a:extLst>
           </p:cNvPr>
@@ -4579,17 +3764,9 @@
           <a:prstGeom xmlns:a="http://schemas.openxmlformats.org/drawingml/2006/main" prst="rect">
             <a:avLst/>
           </a:prstGeom>
-          <a:solidFill xmlns:a="http://schemas.openxmlformats.org/drawingml/2006/main">
-            <a:srgbClr val="000000">
-              <a:alpha val="0"/>
-            </a:srgbClr>
-          </a:solidFill>
-          <a:ln xmlns:a="http://schemas.openxmlformats.org/drawingml/2006/main" w="0">
-            <a:solidFill>
-              <a:srgbClr val="000000">
-                <a:alpha val="0"/>
-              </a:srgbClr>
-            </a:solidFill>
+          <a:noFill xmlns:a="http://schemas.openxmlformats.org/drawingml/2006/main"/>
+          <a:ln xmlns:a="http://schemas.openxmlformats.org/drawingml/2006/main" w="0">
+            <a:noFill/>
             <a:prstDash val="solid"/>
           </a:ln>
         </p:spPr>
@@ -4626,7 +3803,7 @@
           <p:cNvPr id="7" name="">
             <a:extLst xmlns:a="http://schemas.openxmlformats.org/drawingml/2006/main">
               <a:ext uri="{FF2B5EF4-FFF2-40B4-BE49-F238E27FC236}">
-                <a16:creationId xmlns:a16="http://schemas.microsoft.com/office/drawing/2014/main" id="{891905DD-1F8C-4582-BF0B-AE86D450E753}"/>
+                <a16:creationId xmlns:a16="http://schemas.microsoft.com/office/drawing/2014/main" id="{A773A93D-7B19-4176-BF5F-E074697BFA57}"/>
               </a:ext>
             </a:extLst>
           </p:cNvPr>
@@ -4659,7 +3836,7 @@
           <p:cNvPr id="8" name="">
             <a:extLst xmlns:a="http://schemas.openxmlformats.org/drawingml/2006/main">
               <a:ext uri="{FF2B5EF4-FFF2-40B4-BE49-F238E27FC236}">
-                <a16:creationId xmlns:a16="http://schemas.microsoft.com/office/drawing/2014/main" id="{05D0F8FA-4D35-4844-A76F-20F139E90397}"/>
+                <a16:creationId xmlns:a16="http://schemas.microsoft.com/office/drawing/2014/main" id="{3160ADB9-881E-4EE0-ADED-6EEDA2C50660}"/>
               </a:ext>
             </a:extLst>
           </p:cNvPr>
@@ -4680,11 +3857,7 @@
             <a:srgbClr val="2F6FAD"/>
           </a:solidFill>
           <a:ln xmlns:a="http://schemas.openxmlformats.org/drawingml/2006/main" w="0">
-            <a:solidFill>
-              <a:srgbClr val="000000">
-                <a:alpha val="0"/>
-              </a:srgbClr>
-            </a:solidFill>
+            <a:noFill/>
             <a:prstDash val="solid"/>
           </a:ln>
         </p:spPr>
@@ -4694,7 +3867,7 @@
           <p:cNvPr id="9" name="">
             <a:extLst xmlns:a="http://schemas.openxmlformats.org/drawingml/2006/main">
               <a:ext uri="{FF2B5EF4-FFF2-40B4-BE49-F238E27FC236}">
-                <a16:creationId xmlns:a16="http://schemas.microsoft.com/office/drawing/2014/main" id="{EF46CF02-E428-488F-A855-1BC7C473D5BD}"/>
+                <a16:creationId xmlns:a16="http://schemas.microsoft.com/office/drawing/2014/main" id="{1A1DA759-BB0A-488B-AD02-472FA975B44C}"/>
               </a:ext>
             </a:extLst>
           </p:cNvPr>
@@ -4711,17 +3884,9 @@
           <a:prstGeom xmlns:a="http://schemas.openxmlformats.org/drawingml/2006/main" prst="rect">
             <a:avLst/>
           </a:prstGeom>
-          <a:solidFill xmlns:a="http://schemas.openxmlformats.org/drawingml/2006/main">
-            <a:srgbClr val="000000">
-              <a:alpha val="0"/>
-            </a:srgbClr>
-          </a:solidFill>
-          <a:ln xmlns:a="http://schemas.openxmlformats.org/drawingml/2006/main" w="0">
-            <a:solidFill>
-              <a:srgbClr val="000000">
-                <a:alpha val="0"/>
-              </a:srgbClr>
-            </a:solidFill>
+          <a:noFill xmlns:a="http://schemas.openxmlformats.org/drawingml/2006/main"/>
+          <a:ln xmlns:a="http://schemas.openxmlformats.org/drawingml/2006/main" w="0">
+            <a:noFill/>
             <a:prstDash val="solid"/>
           </a:ln>
         </p:spPr>
@@ -4758,7 +3923,7 @@
           <p:cNvPr id="10" name="">
             <a:extLst xmlns:a="http://schemas.openxmlformats.org/drawingml/2006/main">
               <a:ext uri="{FF2B5EF4-FFF2-40B4-BE49-F238E27FC236}">
-                <a16:creationId xmlns:a16="http://schemas.microsoft.com/office/drawing/2014/main" id="{6CC5F0DD-7347-4837-8D6F-D8A49F5AC697}"/>
+                <a16:creationId xmlns:a16="http://schemas.microsoft.com/office/drawing/2014/main" id="{4ECF24C1-C2F6-4E0F-9736-A543BD85A786}"/>
               </a:ext>
             </a:extLst>
           </p:cNvPr>
@@ -4775,17 +3940,9 @@
           <a:prstGeom xmlns:a="http://schemas.openxmlformats.org/drawingml/2006/main" prst="rect">
             <a:avLst/>
           </a:prstGeom>
-          <a:solidFill xmlns:a="http://schemas.openxmlformats.org/drawingml/2006/main">
-            <a:srgbClr val="000000">
-              <a:alpha val="0"/>
-            </a:srgbClr>
-          </a:solidFill>
-          <a:ln xmlns:a="http://schemas.openxmlformats.org/drawingml/2006/main" w="0">
-            <a:solidFill>
-              <a:srgbClr val="000000">
-                <a:alpha val="0"/>
-              </a:srgbClr>
-            </a:solidFill>
+          <a:noFill xmlns:a="http://schemas.openxmlformats.org/drawingml/2006/main"/>
+          <a:ln xmlns:a="http://schemas.openxmlformats.org/drawingml/2006/main" w="0">
+            <a:noFill/>
             <a:prstDash val="solid"/>
           </a:ln>
         </p:spPr>
@@ -4822,7 +3979,7 @@
           <p:cNvPr id="11" name="">
             <a:extLst xmlns:a="http://schemas.openxmlformats.org/drawingml/2006/main">
               <a:ext uri="{FF2B5EF4-FFF2-40B4-BE49-F238E27FC236}">
-                <a16:creationId xmlns:a16="http://schemas.microsoft.com/office/drawing/2014/main" id="{CE65D634-78EC-4E08-A0CD-998163F9EAAC}"/>
+                <a16:creationId xmlns:a16="http://schemas.microsoft.com/office/drawing/2014/main" id="{96C0A393-B23F-4A6C-8EF5-AAE480799338}"/>
               </a:ext>
             </a:extLst>
           </p:cNvPr>
@@ -4839,17 +3996,9 @@
           <a:prstGeom xmlns:a="http://schemas.openxmlformats.org/drawingml/2006/main" prst="rect">
             <a:avLst/>
           </a:prstGeom>
-          <a:solidFill xmlns:a="http://schemas.openxmlformats.org/drawingml/2006/main">
-            <a:srgbClr val="000000">
-              <a:alpha val="0"/>
-            </a:srgbClr>
-          </a:solidFill>
-          <a:ln xmlns:a="http://schemas.openxmlformats.org/drawingml/2006/main" w="0">
-            <a:solidFill>
-              <a:srgbClr val="000000">
-                <a:alpha val="0"/>
-              </a:srgbClr>
-            </a:solidFill>
+          <a:noFill xmlns:a="http://schemas.openxmlformats.org/drawingml/2006/main"/>
+          <a:ln xmlns:a="http://schemas.openxmlformats.org/drawingml/2006/main" w="0">
+            <a:noFill/>
             <a:prstDash val="solid"/>
           </a:ln>
         </p:spPr>
@@ -4886,7 +4035,7 @@
           <p:cNvPr id="12" name="">
             <a:extLst xmlns:a="http://schemas.openxmlformats.org/drawingml/2006/main">
               <a:ext uri="{FF2B5EF4-FFF2-40B4-BE49-F238E27FC236}">
-                <a16:creationId xmlns:a16="http://schemas.microsoft.com/office/drawing/2014/main" id="{8FD644B0-5D6F-46B2-BF5B-AF3AEC82F5A7}"/>
+                <a16:creationId xmlns:a16="http://schemas.microsoft.com/office/drawing/2014/main" id="{F26BFBC5-FA25-4C2B-8FA1-BFDE38F21C40}"/>
               </a:ext>
             </a:extLst>
           </p:cNvPr>
@@ -4919,7 +4068,7 @@
           <p:cNvPr id="13" name="">
             <a:extLst xmlns:a="http://schemas.openxmlformats.org/drawingml/2006/main">
               <a:ext uri="{FF2B5EF4-FFF2-40B4-BE49-F238E27FC236}">
-                <a16:creationId xmlns:a16="http://schemas.microsoft.com/office/drawing/2014/main" id="{BF5FDC49-522D-4E76-A9F2-20F308127824}"/>
+                <a16:creationId xmlns:a16="http://schemas.microsoft.com/office/drawing/2014/main" id="{934FDD02-3DF6-46F7-8384-0DDBE5B78186}"/>
               </a:ext>
             </a:extLst>
           </p:cNvPr>
@@ -4940,11 +4089,7 @@
             <a:srgbClr val="2E7D5B"/>
           </a:solidFill>
           <a:ln xmlns:a="http://schemas.openxmlformats.org/drawingml/2006/main" w="0">
-            <a:solidFill>
-              <a:srgbClr val="000000">
-                <a:alpha val="0"/>
-              </a:srgbClr>
-            </a:solidFill>
+            <a:noFill/>
             <a:prstDash val="solid"/>
           </a:ln>
         </p:spPr>
@@ -4954,7 +4099,7 @@
           <p:cNvPr id="14" name="">
             <a:extLst xmlns:a="http://schemas.openxmlformats.org/drawingml/2006/main">
               <a:ext uri="{FF2B5EF4-FFF2-40B4-BE49-F238E27FC236}">
-                <a16:creationId xmlns:a16="http://schemas.microsoft.com/office/drawing/2014/main" id="{489CBF86-6DCD-4613-96BF-C897CB32E5DB}"/>
+                <a16:creationId xmlns:a16="http://schemas.microsoft.com/office/drawing/2014/main" id="{FA7D0636-2941-4E71-925F-4F50751CC914}"/>
               </a:ext>
             </a:extLst>
           </p:cNvPr>
@@ -4971,17 +4116,9 @@
           <a:prstGeom xmlns:a="http://schemas.openxmlformats.org/drawingml/2006/main" prst="rect">
             <a:avLst/>
           </a:prstGeom>
-          <a:solidFill xmlns:a="http://schemas.openxmlformats.org/drawingml/2006/main">
-            <a:srgbClr val="000000">
-              <a:alpha val="0"/>
-            </a:srgbClr>
-          </a:solidFill>
-          <a:ln xmlns:a="http://schemas.openxmlformats.org/drawingml/2006/main" w="0">
-            <a:solidFill>
-              <a:srgbClr val="000000">
-                <a:alpha val="0"/>
-              </a:srgbClr>
-            </a:solidFill>
+          <a:noFill xmlns:a="http://schemas.openxmlformats.org/drawingml/2006/main"/>
+          <a:ln xmlns:a="http://schemas.openxmlformats.org/drawingml/2006/main" w="0">
+            <a:noFill/>
             <a:prstDash val="solid"/>
           </a:ln>
         </p:spPr>
@@ -5018,7 +4155,7 @@
           <p:cNvPr id="15" name="">
             <a:extLst xmlns:a="http://schemas.openxmlformats.org/drawingml/2006/main">
               <a:ext uri="{FF2B5EF4-FFF2-40B4-BE49-F238E27FC236}">
-                <a16:creationId xmlns:a16="http://schemas.microsoft.com/office/drawing/2014/main" id="{EFF2FC92-C0D8-4EFD-837E-F6276F7E7BF0}"/>
+                <a16:creationId xmlns:a16="http://schemas.microsoft.com/office/drawing/2014/main" id="{9D4EE6BD-42A5-4522-AA67-3FDAD4B79673}"/>
               </a:ext>
             </a:extLst>
           </p:cNvPr>
@@ -5035,17 +4172,9 @@
           <a:prstGeom xmlns:a="http://schemas.openxmlformats.org/drawingml/2006/main" prst="rect">
             <a:avLst/>
           </a:prstGeom>
-          <a:solidFill xmlns:a="http://schemas.openxmlformats.org/drawingml/2006/main">
-            <a:srgbClr val="000000">
-              <a:alpha val="0"/>
-            </a:srgbClr>
-          </a:solidFill>
-          <a:ln xmlns:a="http://schemas.openxmlformats.org/drawingml/2006/main" w="0">
-            <a:solidFill>
-              <a:srgbClr val="000000">
-                <a:alpha val="0"/>
-              </a:srgbClr>
-            </a:solidFill>
+          <a:noFill xmlns:a="http://schemas.openxmlformats.org/drawingml/2006/main"/>
+          <a:ln xmlns:a="http://schemas.openxmlformats.org/drawingml/2006/main" w="0">
+            <a:noFill/>
             <a:prstDash val="solid"/>
           </a:ln>
         </p:spPr>
@@ -5082,7 +4211,7 @@
           <p:cNvPr id="16" name="">
             <a:extLst xmlns:a="http://schemas.openxmlformats.org/drawingml/2006/main">
               <a:ext uri="{FF2B5EF4-FFF2-40B4-BE49-F238E27FC236}">
-                <a16:creationId xmlns:a16="http://schemas.microsoft.com/office/drawing/2014/main" id="{B0E13895-52AA-4CC0-8B7A-9C60E8180420}"/>
+                <a16:creationId xmlns:a16="http://schemas.microsoft.com/office/drawing/2014/main" id="{9F390C37-386D-442C-9440-B35327181902}"/>
               </a:ext>
             </a:extLst>
           </p:cNvPr>
@@ -5099,17 +4228,9 @@
           <a:prstGeom xmlns:a="http://schemas.openxmlformats.org/drawingml/2006/main" prst="rect">
             <a:avLst/>
           </a:prstGeom>
-          <a:solidFill xmlns:a="http://schemas.openxmlformats.org/drawingml/2006/main">
-            <a:srgbClr val="000000">
-              <a:alpha val="0"/>
-            </a:srgbClr>
-          </a:solidFill>
-          <a:ln xmlns:a="http://schemas.openxmlformats.org/drawingml/2006/main" w="0">
-            <a:solidFill>
-              <a:srgbClr val="000000">
-                <a:alpha val="0"/>
-              </a:srgbClr>
-            </a:solidFill>
+          <a:noFill xmlns:a="http://schemas.openxmlformats.org/drawingml/2006/main"/>
+          <a:ln xmlns:a="http://schemas.openxmlformats.org/drawingml/2006/main" w="0">
+            <a:noFill/>
             <a:prstDash val="solid"/>
           </a:ln>
         </p:spPr>
@@ -5146,7 +4267,7 @@
           <p:cNvPr id="17" name="">
             <a:extLst xmlns:a="http://schemas.openxmlformats.org/drawingml/2006/main">
               <a:ext uri="{FF2B5EF4-FFF2-40B4-BE49-F238E27FC236}">
-                <a16:creationId xmlns:a16="http://schemas.microsoft.com/office/drawing/2014/main" id="{2057019A-1C55-4FC7-A0AC-03D69B5F4E99}"/>
+                <a16:creationId xmlns:a16="http://schemas.microsoft.com/office/drawing/2014/main" id="{EFF0F395-E872-4E60-87FC-E79DC96FBF87}"/>
               </a:ext>
             </a:extLst>
           </p:cNvPr>
@@ -5179,7 +4300,7 @@
           <p:cNvPr id="18" name="">
             <a:extLst xmlns:a="http://schemas.openxmlformats.org/drawingml/2006/main">
               <a:ext uri="{FF2B5EF4-FFF2-40B4-BE49-F238E27FC236}">
-                <a16:creationId xmlns:a16="http://schemas.microsoft.com/office/drawing/2014/main" id="{98581E2C-8385-492D-8ADC-72D87827F99F}"/>
+                <a16:creationId xmlns:a16="http://schemas.microsoft.com/office/drawing/2014/main" id="{0894951B-F9D7-4886-81D2-DA5E6793E12E}"/>
               </a:ext>
             </a:extLst>
           </p:cNvPr>
@@ -5200,11 +4321,7 @@
             <a:srgbClr val="C9792B"/>
           </a:solidFill>
           <a:ln xmlns:a="http://schemas.openxmlformats.org/drawingml/2006/main" w="0">
-            <a:solidFill>
-              <a:srgbClr val="000000">
-                <a:alpha val="0"/>
-              </a:srgbClr>
-            </a:solidFill>
+            <a:noFill/>
             <a:prstDash val="solid"/>
           </a:ln>
         </p:spPr>
@@ -5214,7 +4331,7 @@
           <p:cNvPr id="19" name="">
             <a:extLst xmlns:a="http://schemas.openxmlformats.org/drawingml/2006/main">
               <a:ext uri="{FF2B5EF4-FFF2-40B4-BE49-F238E27FC236}">
-                <a16:creationId xmlns:a16="http://schemas.microsoft.com/office/drawing/2014/main" id="{9153CC8D-1890-4DF4-B79D-20443BFCEFD2}"/>
+                <a16:creationId xmlns:a16="http://schemas.microsoft.com/office/drawing/2014/main" id="{A7364E03-E2DB-4765-991D-AB369630A094}"/>
               </a:ext>
             </a:extLst>
           </p:cNvPr>
@@ -5231,17 +4348,9 @@
           <a:prstGeom xmlns:a="http://schemas.openxmlformats.org/drawingml/2006/main" prst="rect">
             <a:avLst/>
           </a:prstGeom>
-          <a:solidFill xmlns:a="http://schemas.openxmlformats.org/drawingml/2006/main">
-            <a:srgbClr val="000000">
-              <a:alpha val="0"/>
-            </a:srgbClr>
-          </a:solidFill>
-          <a:ln xmlns:a="http://schemas.openxmlformats.org/drawingml/2006/main" w="0">
-            <a:solidFill>
-              <a:srgbClr val="000000">
-                <a:alpha val="0"/>
-              </a:srgbClr>
-            </a:solidFill>
+          <a:noFill xmlns:a="http://schemas.openxmlformats.org/drawingml/2006/main"/>
+          <a:ln xmlns:a="http://schemas.openxmlformats.org/drawingml/2006/main" w="0">
+            <a:noFill/>
             <a:prstDash val="solid"/>
           </a:ln>
         </p:spPr>
@@ -5278,7 +4387,7 @@
           <p:cNvPr id="20" name="">
             <a:extLst xmlns:a="http://schemas.openxmlformats.org/drawingml/2006/main">
               <a:ext uri="{FF2B5EF4-FFF2-40B4-BE49-F238E27FC236}">
-                <a16:creationId xmlns:a16="http://schemas.microsoft.com/office/drawing/2014/main" id="{F103F83B-0F76-4829-9F56-BDB672A0216B}"/>
+                <a16:creationId xmlns:a16="http://schemas.microsoft.com/office/drawing/2014/main" id="{F0A081EB-A4FE-43A9-AD6D-A89C5D466B5C}"/>
               </a:ext>
             </a:extLst>
           </p:cNvPr>
@@ -5295,17 +4404,9 @@
           <a:prstGeom xmlns:a="http://schemas.openxmlformats.org/drawingml/2006/main" prst="rect">
             <a:avLst/>
           </a:prstGeom>
-          <a:solidFill xmlns:a="http://schemas.openxmlformats.org/drawingml/2006/main">
-            <a:srgbClr val="000000">
-              <a:alpha val="0"/>
-            </a:srgbClr>
-          </a:solidFill>
-          <a:ln xmlns:a="http://schemas.openxmlformats.org/drawingml/2006/main" w="0">
-            <a:solidFill>
-              <a:srgbClr val="000000">
-                <a:alpha val="0"/>
-              </a:srgbClr>
-            </a:solidFill>
+          <a:noFill xmlns:a="http://schemas.openxmlformats.org/drawingml/2006/main"/>
+          <a:ln xmlns:a="http://schemas.openxmlformats.org/drawingml/2006/main" w="0">
+            <a:noFill/>
             <a:prstDash val="solid"/>
           </a:ln>
         </p:spPr>
@@ -5342,7 +4443,7 @@
           <p:cNvPr id="21" name="">
             <a:extLst xmlns:a="http://schemas.openxmlformats.org/drawingml/2006/main">
               <a:ext uri="{FF2B5EF4-FFF2-40B4-BE49-F238E27FC236}">
-                <a16:creationId xmlns:a16="http://schemas.microsoft.com/office/drawing/2014/main" id="{8478EB02-7F47-4101-8AE5-8BE531C877E1}"/>
+                <a16:creationId xmlns:a16="http://schemas.microsoft.com/office/drawing/2014/main" id="{3AF74F59-E601-46AA-86F1-2EE1B5E5556E}"/>
               </a:ext>
             </a:extLst>
           </p:cNvPr>
@@ -5359,17 +4460,9 @@
           <a:prstGeom xmlns:a="http://schemas.openxmlformats.org/drawingml/2006/main" prst="rect">
             <a:avLst/>
           </a:prstGeom>
-          <a:solidFill xmlns:a="http://schemas.openxmlformats.org/drawingml/2006/main">
-            <a:srgbClr val="000000">
-              <a:alpha val="0"/>
-            </a:srgbClr>
-          </a:solidFill>
-          <a:ln xmlns:a="http://schemas.openxmlformats.org/drawingml/2006/main" w="0">
-            <a:solidFill>
-              <a:srgbClr val="000000">
-                <a:alpha val="0"/>
-              </a:srgbClr>
-            </a:solidFill>
+          <a:noFill xmlns:a="http://schemas.openxmlformats.org/drawingml/2006/main"/>
+          <a:ln xmlns:a="http://schemas.openxmlformats.org/drawingml/2006/main" w="0">
+            <a:noFill/>
             <a:prstDash val="solid"/>
           </a:ln>
         </p:spPr>
@@ -5406,7 +4499,7 @@
           <p:cNvPr id="22" name="">
             <a:extLst xmlns:a="http://schemas.openxmlformats.org/drawingml/2006/main">
               <a:ext uri="{FF2B5EF4-FFF2-40B4-BE49-F238E27FC236}">
-                <a16:creationId xmlns:a16="http://schemas.microsoft.com/office/drawing/2014/main" id="{47044FC4-EC15-421F-89CC-F220EC0FA2E5}"/>
+                <a16:creationId xmlns:a16="http://schemas.microsoft.com/office/drawing/2014/main" id="{65431879-3B9A-450B-835F-CC30551B4136}"/>
               </a:ext>
             </a:extLst>
           </p:cNvPr>
@@ -5439,7 +4532,7 @@
           <p:cNvPr id="23" name="">
             <a:extLst xmlns:a="http://schemas.openxmlformats.org/drawingml/2006/main">
               <a:ext uri="{FF2B5EF4-FFF2-40B4-BE49-F238E27FC236}">
-                <a16:creationId xmlns:a16="http://schemas.microsoft.com/office/drawing/2014/main" id="{6598ADAC-A5BE-4278-9FE4-30DC2A71936B}"/>
+                <a16:creationId xmlns:a16="http://schemas.microsoft.com/office/drawing/2014/main" id="{1922DB1B-10FE-47C7-A3B0-1CEB0BE42E56}"/>
               </a:ext>
             </a:extLst>
           </p:cNvPr>
@@ -5460,11 +4553,7 @@
             <a:srgbClr val="B94A48"/>
           </a:solidFill>
           <a:ln xmlns:a="http://schemas.openxmlformats.org/drawingml/2006/main" w="0">
-            <a:solidFill>
-              <a:srgbClr val="000000">
-                <a:alpha val="0"/>
-              </a:srgbClr>
-            </a:solidFill>
+            <a:noFill/>
             <a:prstDash val="solid"/>
           </a:ln>
         </p:spPr>
@@ -5474,7 +4563,7 @@
           <p:cNvPr id="24" name="">
             <a:extLst xmlns:a="http://schemas.openxmlformats.org/drawingml/2006/main">
               <a:ext uri="{FF2B5EF4-FFF2-40B4-BE49-F238E27FC236}">
-                <a16:creationId xmlns:a16="http://schemas.microsoft.com/office/drawing/2014/main" id="{23CD5D1A-FE7C-418B-9539-4D6C19586DCF}"/>
+                <a16:creationId xmlns:a16="http://schemas.microsoft.com/office/drawing/2014/main" id="{DE0433F8-5BD8-46AF-A964-E5DA44C1D186}"/>
               </a:ext>
             </a:extLst>
           </p:cNvPr>
@@ -5491,17 +4580,9 @@
           <a:prstGeom xmlns:a="http://schemas.openxmlformats.org/drawingml/2006/main" prst="rect">
             <a:avLst/>
           </a:prstGeom>
-          <a:solidFill xmlns:a="http://schemas.openxmlformats.org/drawingml/2006/main">
-            <a:srgbClr val="000000">
-              <a:alpha val="0"/>
-            </a:srgbClr>
-          </a:solidFill>
-          <a:ln xmlns:a="http://schemas.openxmlformats.org/drawingml/2006/main" w="0">
-            <a:solidFill>
-              <a:srgbClr val="000000">
-                <a:alpha val="0"/>
-              </a:srgbClr>
-            </a:solidFill>
+          <a:noFill xmlns:a="http://schemas.openxmlformats.org/drawingml/2006/main"/>
+          <a:ln xmlns:a="http://schemas.openxmlformats.org/drawingml/2006/main" w="0">
+            <a:noFill/>
             <a:prstDash val="solid"/>
           </a:ln>
         </p:spPr>
@@ -5538,7 +4619,7 @@
           <p:cNvPr id="25" name="">
             <a:extLst xmlns:a="http://schemas.openxmlformats.org/drawingml/2006/main">
               <a:ext uri="{FF2B5EF4-FFF2-40B4-BE49-F238E27FC236}">
-                <a16:creationId xmlns:a16="http://schemas.microsoft.com/office/drawing/2014/main" id="{744C13E5-2F21-41A3-9E2F-5C4E3F2676F4}"/>
+                <a16:creationId xmlns:a16="http://schemas.microsoft.com/office/drawing/2014/main" id="{52EAF75C-D5BE-4C25-97B3-E1DFEA62EF70}"/>
               </a:ext>
             </a:extLst>
           </p:cNvPr>
@@ -5555,17 +4636,9 @@
           <a:prstGeom xmlns:a="http://schemas.openxmlformats.org/drawingml/2006/main" prst="rect">
             <a:avLst/>
           </a:prstGeom>
-          <a:solidFill xmlns:a="http://schemas.openxmlformats.org/drawingml/2006/main">
-            <a:srgbClr val="000000">
-              <a:alpha val="0"/>
-            </a:srgbClr>
-          </a:solidFill>
-          <a:ln xmlns:a="http://schemas.openxmlformats.org/drawingml/2006/main" w="0">
-            <a:solidFill>
-              <a:srgbClr val="000000">
-                <a:alpha val="0"/>
-              </a:srgbClr>
-            </a:solidFill>
+          <a:noFill xmlns:a="http://schemas.openxmlformats.org/drawingml/2006/main"/>
+          <a:ln xmlns:a="http://schemas.openxmlformats.org/drawingml/2006/main" w="0">
+            <a:noFill/>
             <a:prstDash val="solid"/>
           </a:ln>
         </p:spPr>
@@ -5602,7 +4675,7 @@
           <p:cNvPr id="26" name="">
             <a:extLst xmlns:a="http://schemas.openxmlformats.org/drawingml/2006/main">
               <a:ext uri="{FF2B5EF4-FFF2-40B4-BE49-F238E27FC236}">
-                <a16:creationId xmlns:a16="http://schemas.microsoft.com/office/drawing/2014/main" id="{22C82885-92E2-4778-AE10-CE9CDCFD5165}"/>
+                <a16:creationId xmlns:a16="http://schemas.microsoft.com/office/drawing/2014/main" id="{459A390F-C9D5-46F0-A13E-87FCD4784791}"/>
               </a:ext>
             </a:extLst>
           </p:cNvPr>
@@ -5619,17 +4692,9 @@
           <a:prstGeom xmlns:a="http://schemas.openxmlformats.org/drawingml/2006/main" prst="rect">
             <a:avLst/>
           </a:prstGeom>
-          <a:solidFill xmlns:a="http://schemas.openxmlformats.org/drawingml/2006/main">
-            <a:srgbClr val="000000">
-              <a:alpha val="0"/>
-            </a:srgbClr>
-          </a:solidFill>
-          <a:ln xmlns:a="http://schemas.openxmlformats.org/drawingml/2006/main" w="0">
-            <a:solidFill>
-              <a:srgbClr val="000000">
-                <a:alpha val="0"/>
-              </a:srgbClr>
-            </a:solidFill>
+          <a:noFill xmlns:a="http://schemas.openxmlformats.org/drawingml/2006/main"/>
+          <a:ln xmlns:a="http://schemas.openxmlformats.org/drawingml/2006/main" w="0">
+            <a:noFill/>
             <a:prstDash val="solid"/>
           </a:ln>
         </p:spPr>
@@ -5666,7 +4731,7 @@
           <p:cNvPr id="27" name="">
             <a:extLst xmlns:a="http://schemas.openxmlformats.org/drawingml/2006/main">
               <a:ext uri="{FF2B5EF4-FFF2-40B4-BE49-F238E27FC236}">
-                <a16:creationId xmlns:a16="http://schemas.microsoft.com/office/drawing/2014/main" id="{D0E9C1F6-E25B-4959-81D5-77939132C3A3}"/>
+                <a16:creationId xmlns:a16="http://schemas.microsoft.com/office/drawing/2014/main" id="{CEB5A6F6-B180-4FD0-90A5-4FF2E6D1289B}"/>
               </a:ext>
             </a:extLst>
           </p:cNvPr>
@@ -5699,7 +4764,7 @@
           <p:cNvPr id="28" name="">
             <a:extLst xmlns:a="http://schemas.openxmlformats.org/drawingml/2006/main">
               <a:ext uri="{FF2B5EF4-FFF2-40B4-BE49-F238E27FC236}">
-                <a16:creationId xmlns:a16="http://schemas.microsoft.com/office/drawing/2014/main" id="{2826B177-E8E8-4EB8-A86F-E6062E6E7C1E}"/>
+                <a16:creationId xmlns:a16="http://schemas.microsoft.com/office/drawing/2014/main" id="{EFDBB215-3E60-4167-984A-5908F7356DD5}"/>
               </a:ext>
             </a:extLst>
           </p:cNvPr>
@@ -5720,11 +4785,7 @@
             <a:srgbClr val="1F2933"/>
           </a:solidFill>
           <a:ln xmlns:a="http://schemas.openxmlformats.org/drawingml/2006/main" w="0">
-            <a:solidFill>
-              <a:srgbClr val="000000">
-                <a:alpha val="0"/>
-              </a:srgbClr>
-            </a:solidFill>
+            <a:noFill/>
             <a:prstDash val="solid"/>
           </a:ln>
         </p:spPr>
@@ -5734,7 +4795,7 @@
           <p:cNvPr id="29" name="">
             <a:extLst xmlns:a="http://schemas.openxmlformats.org/drawingml/2006/main">
               <a:ext uri="{FF2B5EF4-FFF2-40B4-BE49-F238E27FC236}">
-                <a16:creationId xmlns:a16="http://schemas.microsoft.com/office/drawing/2014/main" id="{467FCE21-944D-4AA8-987C-F9B0905DE1F0}"/>
+                <a16:creationId xmlns:a16="http://schemas.microsoft.com/office/drawing/2014/main" id="{0521C531-6355-40A4-A76F-AADB74AEC402}"/>
               </a:ext>
             </a:extLst>
           </p:cNvPr>
@@ -5751,17 +4812,9 @@
           <a:prstGeom xmlns:a="http://schemas.openxmlformats.org/drawingml/2006/main" prst="rect">
             <a:avLst/>
           </a:prstGeom>
-          <a:solidFill xmlns:a="http://schemas.openxmlformats.org/drawingml/2006/main">
-            <a:srgbClr val="000000">
-              <a:alpha val="0"/>
-            </a:srgbClr>
-          </a:solidFill>
-          <a:ln xmlns:a="http://schemas.openxmlformats.org/drawingml/2006/main" w="0">
-            <a:solidFill>
-              <a:srgbClr val="000000">
-                <a:alpha val="0"/>
-              </a:srgbClr>
-            </a:solidFill>
+          <a:noFill xmlns:a="http://schemas.openxmlformats.org/drawingml/2006/main"/>
+          <a:ln xmlns:a="http://schemas.openxmlformats.org/drawingml/2006/main" w="0">
+            <a:noFill/>
             <a:prstDash val="solid"/>
           </a:ln>
         </p:spPr>
@@ -5798,7 +4851,7 @@
           <p:cNvPr id="30" name="">
             <a:extLst xmlns:a="http://schemas.openxmlformats.org/drawingml/2006/main">
               <a:ext uri="{FF2B5EF4-FFF2-40B4-BE49-F238E27FC236}">
-                <a16:creationId xmlns:a16="http://schemas.microsoft.com/office/drawing/2014/main" id="{BBFDACA4-F93E-418E-AC13-62FE820E55A5}"/>
+                <a16:creationId xmlns:a16="http://schemas.microsoft.com/office/drawing/2014/main" id="{DC1EFAE7-11F9-4B0D-A34B-BD02D0D1CB62}"/>
               </a:ext>
             </a:extLst>
           </p:cNvPr>
@@ -5815,17 +4868,9 @@
           <a:prstGeom xmlns:a="http://schemas.openxmlformats.org/drawingml/2006/main" prst="rect">
             <a:avLst/>
           </a:prstGeom>
-          <a:solidFill xmlns:a="http://schemas.openxmlformats.org/drawingml/2006/main">
-            <a:srgbClr val="000000">
-              <a:alpha val="0"/>
-            </a:srgbClr>
-          </a:solidFill>
-          <a:ln xmlns:a="http://schemas.openxmlformats.org/drawingml/2006/main" w="0">
-            <a:solidFill>
-              <a:srgbClr val="000000">
-                <a:alpha val="0"/>
-              </a:srgbClr>
-            </a:solidFill>
+          <a:noFill xmlns:a="http://schemas.openxmlformats.org/drawingml/2006/main"/>
+          <a:ln xmlns:a="http://schemas.openxmlformats.org/drawingml/2006/main" w="0">
+            <a:noFill/>
             <a:prstDash val="solid"/>
           </a:ln>
         </p:spPr>
@@ -5862,7 +4907,7 @@
           <p:cNvPr id="31" name="">
             <a:extLst xmlns:a="http://schemas.openxmlformats.org/drawingml/2006/main">
               <a:ext uri="{FF2B5EF4-FFF2-40B4-BE49-F238E27FC236}">
-                <a16:creationId xmlns:a16="http://schemas.microsoft.com/office/drawing/2014/main" id="{ABE49F74-3D2B-4975-BA5F-77A3DF96B393}"/>
+                <a16:creationId xmlns:a16="http://schemas.microsoft.com/office/drawing/2014/main" id="{2D9BC5A5-2716-4DAE-BE6B-7D888785884E}"/>
               </a:ext>
             </a:extLst>
           </p:cNvPr>
@@ -5879,17 +4924,9 @@
           <a:prstGeom xmlns:a="http://schemas.openxmlformats.org/drawingml/2006/main" prst="rect">
             <a:avLst/>
           </a:prstGeom>
-          <a:solidFill xmlns:a="http://schemas.openxmlformats.org/drawingml/2006/main">
-            <a:srgbClr val="000000">
-              <a:alpha val="0"/>
-            </a:srgbClr>
-          </a:solidFill>
-          <a:ln xmlns:a="http://schemas.openxmlformats.org/drawingml/2006/main" w="0">
-            <a:solidFill>
-              <a:srgbClr val="000000">
-                <a:alpha val="0"/>
-              </a:srgbClr>
-            </a:solidFill>
+          <a:noFill xmlns:a="http://schemas.openxmlformats.org/drawingml/2006/main"/>
+          <a:ln xmlns:a="http://schemas.openxmlformats.org/drawingml/2006/main" w="0">
+            <a:noFill/>
             <a:prstDash val="solid"/>
           </a:ln>
         </p:spPr>
@@ -5926,7 +4963,7 @@
           <p:cNvPr id="32" name="">
             <a:extLst xmlns:a="http://schemas.openxmlformats.org/drawingml/2006/main">
               <a:ext uri="{FF2B5EF4-FFF2-40B4-BE49-F238E27FC236}">
-                <a16:creationId xmlns:a16="http://schemas.microsoft.com/office/drawing/2014/main" id="{15BB5322-0870-435C-B81F-459986A9BF53}"/>
+                <a16:creationId xmlns:a16="http://schemas.microsoft.com/office/drawing/2014/main" id="{E5A9535F-33EF-4FBD-A765-AC8ADE2946C4}"/>
               </a:ext>
             </a:extLst>
           </p:cNvPr>
@@ -5947,11 +4984,7 @@
             <a:srgbClr val="D8D3C8"/>
           </a:solidFill>
           <a:ln xmlns:a="http://schemas.openxmlformats.org/drawingml/2006/main" w="0">
-            <a:solidFill>
-              <a:srgbClr val="000000">
-                <a:alpha val="0"/>
-              </a:srgbClr>
-            </a:solidFill>
+            <a:noFill/>
             <a:prstDash val="solid"/>
           </a:ln>
         </p:spPr>
@@ -5961,7 +4994,7 @@
           <p:cNvPr id="33" name="">
             <a:extLst xmlns:a="http://schemas.openxmlformats.org/drawingml/2006/main">
               <a:ext uri="{FF2B5EF4-FFF2-40B4-BE49-F238E27FC236}">
-                <a16:creationId xmlns:a16="http://schemas.microsoft.com/office/drawing/2014/main" id="{F4526740-6C7E-48DA-B45D-222E26CDD50E}"/>
+                <a16:creationId xmlns:a16="http://schemas.microsoft.com/office/drawing/2014/main" id="{E4BF930F-1D92-4FEE-A14A-E75DFE70F612}"/>
               </a:ext>
             </a:extLst>
           </p:cNvPr>
@@ -5982,11 +5015,7 @@
             <a:srgbClr val="D8D3C8"/>
           </a:solidFill>
           <a:ln xmlns:a="http://schemas.openxmlformats.org/drawingml/2006/main" w="0">
-            <a:solidFill>
-              <a:srgbClr val="000000">
-                <a:alpha val="0"/>
-              </a:srgbClr>
-            </a:solidFill>
+            <a:noFill/>
             <a:prstDash val="solid"/>
           </a:ln>
         </p:spPr>
@@ -5996,7 +5025,7 @@
           <p:cNvPr id="34" name="">
             <a:extLst xmlns:a="http://schemas.openxmlformats.org/drawingml/2006/main">
               <a:ext uri="{FF2B5EF4-FFF2-40B4-BE49-F238E27FC236}">
-                <a16:creationId xmlns:a16="http://schemas.microsoft.com/office/drawing/2014/main" id="{1BE06BE3-F214-474B-8B89-09E886A82834}"/>
+                <a16:creationId xmlns:a16="http://schemas.microsoft.com/office/drawing/2014/main" id="{6AB23851-419C-4ACB-9A3A-2CE8391301EC}"/>
               </a:ext>
             </a:extLst>
           </p:cNvPr>
@@ -6017,11 +5046,7 @@
             <a:srgbClr val="D8D3C8"/>
           </a:solidFill>
           <a:ln xmlns:a="http://schemas.openxmlformats.org/drawingml/2006/main" w="0">
-            <a:solidFill>
-              <a:srgbClr val="000000">
-                <a:alpha val="0"/>
-              </a:srgbClr>
-            </a:solidFill>
+            <a:noFill/>
             <a:prstDash val="solid"/>
           </a:ln>
         </p:spPr>
@@ -6031,7 +5056,7 @@
           <p:cNvPr id="35" name="">
             <a:extLst xmlns:a="http://schemas.openxmlformats.org/drawingml/2006/main">
               <a:ext uri="{FF2B5EF4-FFF2-40B4-BE49-F238E27FC236}">
-                <a16:creationId xmlns:a16="http://schemas.microsoft.com/office/drawing/2014/main" id="{F81154D3-8A53-4063-B2B2-B736B5070EB7}"/>
+                <a16:creationId xmlns:a16="http://schemas.microsoft.com/office/drawing/2014/main" id="{5FC8282E-D05E-4B49-A7B9-2BC20A348737}"/>
               </a:ext>
             </a:extLst>
           </p:cNvPr>
@@ -6052,11 +5077,7 @@
             <a:srgbClr val="D8D3C8"/>
           </a:solidFill>
           <a:ln xmlns:a="http://schemas.openxmlformats.org/drawingml/2006/main" w="0">
-            <a:solidFill>
-              <a:srgbClr val="000000">
-                <a:alpha val="0"/>
-              </a:srgbClr>
-            </a:solidFill>
+            <a:noFill/>
             <a:prstDash val="solid"/>
           </a:ln>
         </p:spPr>
@@ -6066,7 +5087,7 @@
           <p:cNvPr id="36" name="">
             <a:extLst xmlns:a="http://schemas.openxmlformats.org/drawingml/2006/main">
               <a:ext uri="{FF2B5EF4-FFF2-40B4-BE49-F238E27FC236}">
-                <a16:creationId xmlns:a16="http://schemas.microsoft.com/office/drawing/2014/main" id="{D8DC3677-1DB0-4B35-BA88-A1FE8F176DD4}"/>
+                <a16:creationId xmlns:a16="http://schemas.microsoft.com/office/drawing/2014/main" id="{D262A467-3CBC-4974-B37E-C849467A8186}"/>
               </a:ext>
             </a:extLst>
           </p:cNvPr>
@@ -6087,11 +5108,7 @@
             <a:srgbClr val="D8D3C8"/>
           </a:solidFill>
           <a:ln xmlns:a="http://schemas.openxmlformats.org/drawingml/2006/main" w="0">
-            <a:solidFill>
-              <a:srgbClr val="000000">
-                <a:alpha val="0"/>
-              </a:srgbClr>
-            </a:solidFill>
+            <a:noFill/>
             <a:prstDash val="solid"/>
           </a:ln>
         </p:spPr>
@@ -6101,7 +5118,7 @@
           <p:cNvPr id="37" name="">
             <a:extLst xmlns:a="http://schemas.openxmlformats.org/drawingml/2006/main">
               <a:ext uri="{FF2B5EF4-FFF2-40B4-BE49-F238E27FC236}">
-                <a16:creationId xmlns:a16="http://schemas.microsoft.com/office/drawing/2014/main" id="{42E2ADBE-2C32-42AC-90B7-EE5E6251EA48}"/>
+                <a16:creationId xmlns:a16="http://schemas.microsoft.com/office/drawing/2014/main" id="{C29E7F88-1E27-45A9-AC03-C4076A389BF6}"/>
               </a:ext>
             </a:extLst>
           </p:cNvPr>
@@ -6122,11 +5139,7 @@
             <a:srgbClr val="D8D3C8"/>
           </a:solidFill>
           <a:ln xmlns:a="http://schemas.openxmlformats.org/drawingml/2006/main" w="0">
-            <a:solidFill>
-              <a:srgbClr val="000000">
-                <a:alpha val="0"/>
-              </a:srgbClr>
-            </a:solidFill>
+            <a:noFill/>
             <a:prstDash val="solid"/>
           </a:ln>
         </p:spPr>
@@ -6136,7 +5149,7 @@
           <p:cNvPr id="38" name="">
             <a:extLst xmlns:a="http://schemas.openxmlformats.org/drawingml/2006/main">
               <a:ext uri="{FF2B5EF4-FFF2-40B4-BE49-F238E27FC236}">
-                <a16:creationId xmlns:a16="http://schemas.microsoft.com/office/drawing/2014/main" id="{9D4AA39D-2DAD-48F2-8702-704B694F9700}"/>
+                <a16:creationId xmlns:a16="http://schemas.microsoft.com/office/drawing/2014/main" id="{2D5C58BD-1E2B-49D2-9BBE-D6F046B4F217}"/>
               </a:ext>
             </a:extLst>
           </p:cNvPr>
@@ -6157,11 +5170,7 @@
             <a:srgbClr val="D8D3C8"/>
           </a:solidFill>
           <a:ln xmlns:a="http://schemas.openxmlformats.org/drawingml/2006/main" w="0">
-            <a:solidFill>
-              <a:srgbClr val="000000">
-                <a:alpha val="0"/>
-              </a:srgbClr>
-            </a:solidFill>
+            <a:noFill/>
             <a:prstDash val="solid"/>
           </a:ln>
         </p:spPr>
@@ -6171,7 +5180,7 @@
           <p:cNvPr id="39" name="">
             <a:extLst xmlns:a="http://schemas.openxmlformats.org/drawingml/2006/main">
               <a:ext uri="{FF2B5EF4-FFF2-40B4-BE49-F238E27FC236}">
-                <a16:creationId xmlns:a16="http://schemas.microsoft.com/office/drawing/2014/main" id="{F6FA49FA-B76A-49AE-951F-D493E9167F45}"/>
+                <a16:creationId xmlns:a16="http://schemas.microsoft.com/office/drawing/2014/main" id="{3829642A-080D-4174-ABAC-9171C1176051}"/>
               </a:ext>
             </a:extLst>
           </p:cNvPr>
@@ -6192,11 +5201,7 @@
             <a:srgbClr val="D8D3C8"/>
           </a:solidFill>
           <a:ln xmlns:a="http://schemas.openxmlformats.org/drawingml/2006/main" w="0">
-            <a:solidFill>
-              <a:srgbClr val="000000">
-                <a:alpha val="0"/>
-              </a:srgbClr>
-            </a:solidFill>
+            <a:noFill/>
             <a:prstDash val="solid"/>
           </a:ln>
         </p:spPr>
@@ -6206,7 +5211,7 @@
           <p:cNvPr id="40" name="">
             <a:extLst xmlns:a="http://schemas.openxmlformats.org/drawingml/2006/main">
               <a:ext uri="{FF2B5EF4-FFF2-40B4-BE49-F238E27FC236}">
-                <a16:creationId xmlns:a16="http://schemas.microsoft.com/office/drawing/2014/main" id="{A24889E9-2C31-4FC7-AA5A-8AE723013E57}"/>
+                <a16:creationId xmlns:a16="http://schemas.microsoft.com/office/drawing/2014/main" id="{CB16FF1B-E31D-4198-B554-EF866A56CDD5}"/>
               </a:ext>
             </a:extLst>
           </p:cNvPr>
@@ -6239,7 +5244,7 @@
           <p:cNvPr id="41" name="">
             <a:extLst xmlns:a="http://schemas.openxmlformats.org/drawingml/2006/main">
               <a:ext uri="{FF2B5EF4-FFF2-40B4-BE49-F238E27FC236}">
-                <a16:creationId xmlns:a16="http://schemas.microsoft.com/office/drawing/2014/main" id="{FA9BE2AF-230D-4F8E-B4A4-F27E5C87745D}"/>
+                <a16:creationId xmlns:a16="http://schemas.microsoft.com/office/drawing/2014/main" id="{5AF818BD-71B3-4D41-80A5-BD48C7C32874}"/>
               </a:ext>
             </a:extLst>
           </p:cNvPr>
@@ -6256,17 +5261,9 @@
           <a:prstGeom xmlns:a="http://schemas.openxmlformats.org/drawingml/2006/main" prst="rect">
             <a:avLst/>
           </a:prstGeom>
-          <a:solidFill xmlns:a="http://schemas.openxmlformats.org/drawingml/2006/main">
-            <a:srgbClr val="000000">
-              <a:alpha val="0"/>
-            </a:srgbClr>
-          </a:solidFill>
-          <a:ln xmlns:a="http://schemas.openxmlformats.org/drawingml/2006/main" w="0">
-            <a:solidFill>
-              <a:srgbClr val="000000">
-                <a:alpha val="0"/>
-              </a:srgbClr>
-            </a:solidFill>
+          <a:noFill xmlns:a="http://schemas.openxmlformats.org/drawingml/2006/main"/>
+          <a:ln xmlns:a="http://schemas.openxmlformats.org/drawingml/2006/main" w="0">
+            <a:noFill/>
             <a:prstDash val="solid"/>
           </a:ln>
         </p:spPr>
@@ -6303,7 +5300,7 @@
           <p:cNvPr id="42" name="">
             <a:extLst xmlns:a="http://schemas.openxmlformats.org/drawingml/2006/main">
               <a:ext uri="{FF2B5EF4-FFF2-40B4-BE49-F238E27FC236}">
-                <a16:creationId xmlns:a16="http://schemas.microsoft.com/office/drawing/2014/main" id="{3629D981-F1F3-4541-89F0-2B79E24A05D2}"/>
+                <a16:creationId xmlns:a16="http://schemas.microsoft.com/office/drawing/2014/main" id="{0E657F46-82B8-4E04-B206-680BCAD0C9EC}"/>
               </a:ext>
             </a:extLst>
           </p:cNvPr>
@@ -6320,17 +5317,9 @@
           <a:prstGeom xmlns:a="http://schemas.openxmlformats.org/drawingml/2006/main" prst="rect">
             <a:avLst/>
           </a:prstGeom>
-          <a:solidFill xmlns:a="http://schemas.openxmlformats.org/drawingml/2006/main">
-            <a:srgbClr val="000000">
-              <a:alpha val="0"/>
-            </a:srgbClr>
-          </a:solidFill>
-          <a:ln xmlns:a="http://schemas.openxmlformats.org/drawingml/2006/main" w="0">
-            <a:solidFill>
-              <a:srgbClr val="000000">
-                <a:alpha val="0"/>
-              </a:srgbClr>
-            </a:solidFill>
+          <a:noFill xmlns:a="http://schemas.openxmlformats.org/drawingml/2006/main"/>
+          <a:ln xmlns:a="http://schemas.openxmlformats.org/drawingml/2006/main" w="0">
+            <a:noFill/>
             <a:prstDash val="solid"/>
           </a:ln>
         </p:spPr>
@@ -6367,7 +5356,7 @@
           <p:cNvPr id="43" name="">
             <a:extLst xmlns:a="http://schemas.openxmlformats.org/drawingml/2006/main">
               <a:ext uri="{FF2B5EF4-FFF2-40B4-BE49-F238E27FC236}">
-                <a16:creationId xmlns:a16="http://schemas.microsoft.com/office/drawing/2014/main" id="{33BB70FB-7F2E-4DBD-8B8C-75F4987BB333}"/>
+                <a16:creationId xmlns:a16="http://schemas.microsoft.com/office/drawing/2014/main" id="{DACABFB7-CEB8-47BA-AB39-5D5568EC7C9C}"/>
               </a:ext>
             </a:extLst>
           </p:cNvPr>
@@ -6388,11 +5377,7 @@
             <a:srgbClr val="D8D3C8"/>
           </a:solidFill>
           <a:ln xmlns:a="http://schemas.openxmlformats.org/drawingml/2006/main" w="0">
-            <a:solidFill>
-              <a:srgbClr val="000000">
-                <a:alpha val="0"/>
-              </a:srgbClr>
-            </a:solidFill>
+            <a:noFill/>
             <a:prstDash val="solid"/>
           </a:ln>
         </p:spPr>
@@ -6402,7 +5387,7 @@
           <p:cNvPr id="44" name="">
             <a:extLst xmlns:a="http://schemas.openxmlformats.org/drawingml/2006/main">
               <a:ext uri="{FF2B5EF4-FFF2-40B4-BE49-F238E27FC236}">
-                <a16:creationId xmlns:a16="http://schemas.microsoft.com/office/drawing/2014/main" id="{693B829B-92C9-4196-BC51-A0AC3A953890}"/>
+                <a16:creationId xmlns:a16="http://schemas.microsoft.com/office/drawing/2014/main" id="{7DF20371-0100-43B4-B30A-0FD62029C41F}"/>
               </a:ext>
             </a:extLst>
           </p:cNvPr>
@@ -6419,17 +5404,9 @@
           <a:prstGeom xmlns:a="http://schemas.openxmlformats.org/drawingml/2006/main" prst="rect">
             <a:avLst/>
           </a:prstGeom>
-          <a:solidFill xmlns:a="http://schemas.openxmlformats.org/drawingml/2006/main">
-            <a:srgbClr val="000000">
-              <a:alpha val="0"/>
-            </a:srgbClr>
-          </a:solidFill>
-          <a:ln xmlns:a="http://schemas.openxmlformats.org/drawingml/2006/main" w="0">
-            <a:solidFill>
-              <a:srgbClr val="000000">
-                <a:alpha val="0"/>
-              </a:srgbClr>
-            </a:solidFill>
+          <a:noFill xmlns:a="http://schemas.openxmlformats.org/drawingml/2006/main"/>
+          <a:ln xmlns:a="http://schemas.openxmlformats.org/drawingml/2006/main" w="0">
+            <a:noFill/>
             <a:prstDash val="solid"/>
           </a:ln>
         </p:spPr>
@@ -6466,7 +5443,7 @@
           <p:cNvPr id="45" name="">
             <a:extLst xmlns:a="http://schemas.openxmlformats.org/drawingml/2006/main">
               <a:ext uri="{FF2B5EF4-FFF2-40B4-BE49-F238E27FC236}">
-                <a16:creationId xmlns:a16="http://schemas.microsoft.com/office/drawing/2014/main" id="{B0161F67-FAC6-4245-8637-3DE34A8811DE}"/>
+                <a16:creationId xmlns:a16="http://schemas.microsoft.com/office/drawing/2014/main" id="{EF4F5C1D-A847-42A6-8CCA-C26B2F23D299}"/>
               </a:ext>
             </a:extLst>
           </p:cNvPr>
@@ -6483,17 +5460,9 @@
           <a:prstGeom xmlns:a="http://schemas.openxmlformats.org/drawingml/2006/main" prst="rect">
             <a:avLst/>
           </a:prstGeom>
-          <a:solidFill xmlns:a="http://schemas.openxmlformats.org/drawingml/2006/main">
-            <a:srgbClr val="000000">
-              <a:alpha val="0"/>
-            </a:srgbClr>
-          </a:solidFill>
-          <a:ln xmlns:a="http://schemas.openxmlformats.org/drawingml/2006/main" w="0">
-            <a:solidFill>
-              <a:srgbClr val="000000">
-                <a:alpha val="0"/>
-              </a:srgbClr>
-            </a:solidFill>
+          <a:noFill xmlns:a="http://schemas.openxmlformats.org/drawingml/2006/main"/>
+          <a:ln xmlns:a="http://schemas.openxmlformats.org/drawingml/2006/main" w="0">
+            <a:noFill/>
             <a:prstDash val="solid"/>
           </a:ln>
         </p:spPr>
@@ -6528,7 +5497,7 @@
     </p:spTree>
     <p:extLst>
       <p:ext uri="{BB962C8B-B14F-4D97-AF65-F5344CB8AC3E}">
-        <p14:creationId xmlns:p14="http://schemas.microsoft.com/office/powerpoint/2010/main" val="166070805"/>
+        <p14:creationId xmlns:p14="http://schemas.microsoft.com/office/powerpoint/2010/main" val="212212600"/>
       </p:ext>
     </p:extLst>
   </p:cSld>
@@ -6549,10 +5518,10 @@
       </p:grpSpPr>
       <p:sp>
         <p:nvSpPr>
-          <p:cNvPr id="1" name="">
-            <a:extLst xmlns:a="http://schemas.openxmlformats.org/drawingml/2006/main">
-              <a:ext uri="{FF2B5EF4-FFF2-40B4-BE49-F238E27FC236}">
-                <a16:creationId xmlns:a16="http://schemas.microsoft.com/office/drawing/2014/main" id="{07C62E00-E413-4629-A887-5FF17624C1CA}"/>
+          <p:cNvPr id="37" name="">
+            <a:extLst xmlns:a="http://schemas.openxmlformats.org/drawingml/2006/main">
+              <a:ext uri="{FF2B5EF4-FFF2-40B4-BE49-F238E27FC236}">
+                <a16:creationId xmlns:a16="http://schemas.microsoft.com/office/drawing/2014/main" id="{F811B826-F6B9-424E-A4F5-BD8A6CDD7372}"/>
               </a:ext>
             </a:extLst>
           </p:cNvPr>
@@ -6573,11 +5542,7 @@
             <a:srgbClr val="F7F4EE"/>
           </a:solidFill>
           <a:ln xmlns:a="http://schemas.openxmlformats.org/drawingml/2006/main" w="0">
-            <a:solidFill>
-              <a:srgbClr val="000000">
-                <a:alpha val="0"/>
-              </a:srgbClr>
-            </a:solidFill>
+            <a:noFill/>
             <a:prstDash val="solid"/>
           </a:ln>
         </p:spPr>
@@ -6587,7 +5552,7 @@
           <p:cNvPr id="2" name="">
             <a:extLst xmlns:a="http://schemas.openxmlformats.org/drawingml/2006/main">
               <a:ext uri="{FF2B5EF4-FFF2-40B4-BE49-F238E27FC236}">
-                <a16:creationId xmlns:a16="http://schemas.microsoft.com/office/drawing/2014/main" id="{923AB5ED-A808-4614-9F96-82D92ADFC4A6}"/>
+                <a16:creationId xmlns:a16="http://schemas.microsoft.com/office/drawing/2014/main" id="{CF623CA4-7C70-47A3-863C-361B693B4A4A}"/>
               </a:ext>
             </a:extLst>
           </p:cNvPr>
@@ -6608,11 +5573,7 @@
             <a:srgbClr val="1F2933"/>
           </a:solidFill>
           <a:ln xmlns:a="http://schemas.openxmlformats.org/drawingml/2006/main" w="0">
-            <a:solidFill>
-              <a:srgbClr val="000000">
-                <a:alpha val="0"/>
-              </a:srgbClr>
-            </a:solidFill>
+            <a:noFill/>
             <a:prstDash val="solid"/>
           </a:ln>
         </p:spPr>
@@ -6622,7 +5583,7 @@
           <p:cNvPr id="3" name="kicker-04-marker">
             <a:extLst xmlns:a="http://schemas.openxmlformats.org/drawingml/2006/main">
               <a:ext uri="{FF2B5EF4-FFF2-40B4-BE49-F238E27FC236}">
-                <a16:creationId xmlns:a16="http://schemas.microsoft.com/office/drawing/2014/main" id="{1F1E7E98-68C4-4D43-944E-AAF644168E98}"/>
+                <a16:creationId xmlns:a16="http://schemas.microsoft.com/office/drawing/2014/main" id="{9BBDF921-C11D-4364-A1E9-9ED3777CA1EC}"/>
               </a:ext>
             </a:extLst>
           </p:cNvPr>
@@ -6643,11 +5604,7 @@
             <a:srgbClr val="2F6FAD"/>
           </a:solidFill>
           <a:ln xmlns:a="http://schemas.openxmlformats.org/drawingml/2006/main" w="0">
-            <a:solidFill>
-              <a:srgbClr val="000000">
-                <a:alpha val="0"/>
-              </a:srgbClr>
-            </a:solidFill>
+            <a:noFill/>
             <a:prstDash val="solid"/>
           </a:ln>
         </p:spPr>
@@ -6657,7 +5614,7 @@
           <p:cNvPr id="4" name="kicker-04-label">
             <a:extLst xmlns:a="http://schemas.openxmlformats.org/drawingml/2006/main">
               <a:ext uri="{FF2B5EF4-FFF2-40B4-BE49-F238E27FC236}">
-                <a16:creationId xmlns:a16="http://schemas.microsoft.com/office/drawing/2014/main" id="{6871DE1C-DBA8-4F4D-9C42-AF6EF67FA4A1}"/>
+                <a16:creationId xmlns:a16="http://schemas.microsoft.com/office/drawing/2014/main" id="{2D11054E-9C9F-4688-8BDF-86B36ED3D620}"/>
               </a:ext>
             </a:extLst>
           </p:cNvPr>
@@ -6674,17 +5631,9 @@
           <a:prstGeom xmlns:a="http://schemas.openxmlformats.org/drawingml/2006/main" prst="rect">
             <a:avLst/>
           </a:prstGeom>
-          <a:solidFill xmlns:a="http://schemas.openxmlformats.org/drawingml/2006/main">
-            <a:srgbClr val="000000">
-              <a:alpha val="0"/>
-            </a:srgbClr>
-          </a:solidFill>
-          <a:ln xmlns:a="http://schemas.openxmlformats.org/drawingml/2006/main" w="0">
-            <a:solidFill>
-              <a:srgbClr val="000000">
-                <a:alpha val="0"/>
-              </a:srgbClr>
-            </a:solidFill>
+          <a:noFill xmlns:a="http://schemas.openxmlformats.org/drawingml/2006/main"/>
+          <a:ln xmlns:a="http://schemas.openxmlformats.org/drawingml/2006/main" w="0">
+            <a:noFill/>
             <a:prstDash val="solid"/>
           </a:ln>
         </p:spPr>
@@ -6721,7 +5670,7 @@
           <p:cNvPr id="5" name="">
             <a:extLst xmlns:a="http://schemas.openxmlformats.org/drawingml/2006/main">
               <a:ext uri="{FF2B5EF4-FFF2-40B4-BE49-F238E27FC236}">
-                <a16:creationId xmlns:a16="http://schemas.microsoft.com/office/drawing/2014/main" id="{7D1D1835-4836-4B15-8116-7895CFEA444B}"/>
+                <a16:creationId xmlns:a16="http://schemas.microsoft.com/office/drawing/2014/main" id="{5A92CC4C-08D8-48DC-9122-9B9CDBA49B94}"/>
               </a:ext>
             </a:extLst>
           </p:cNvPr>
@@ -6738,17 +5687,9 @@
           <a:prstGeom xmlns:a="http://schemas.openxmlformats.org/drawingml/2006/main" prst="rect">
             <a:avLst/>
           </a:prstGeom>
-          <a:solidFill xmlns:a="http://schemas.openxmlformats.org/drawingml/2006/main">
-            <a:srgbClr val="000000">
-              <a:alpha val="0"/>
-            </a:srgbClr>
-          </a:solidFill>
-          <a:ln xmlns:a="http://schemas.openxmlformats.org/drawingml/2006/main" w="0">
-            <a:solidFill>
-              <a:srgbClr val="000000">
-                <a:alpha val="0"/>
-              </a:srgbClr>
-            </a:solidFill>
+          <a:noFill xmlns:a="http://schemas.openxmlformats.org/drawingml/2006/main"/>
+          <a:ln xmlns:a="http://schemas.openxmlformats.org/drawingml/2006/main" w="0">
+            <a:noFill/>
             <a:prstDash val="solid"/>
           </a:ln>
         </p:spPr>
@@ -6785,7 +5726,7 @@
           <p:cNvPr id="6" name="">
             <a:extLst xmlns:a="http://schemas.openxmlformats.org/drawingml/2006/main">
               <a:ext uri="{FF2B5EF4-FFF2-40B4-BE49-F238E27FC236}">
-                <a16:creationId xmlns:a16="http://schemas.microsoft.com/office/drawing/2014/main" id="{2C8FA4B5-A2C7-4C51-A00C-947BD3260074}"/>
+                <a16:creationId xmlns:a16="http://schemas.microsoft.com/office/drawing/2014/main" id="{D3FDD00C-BF13-411C-B5C0-00AAAE5BDDA7}"/>
               </a:ext>
             </a:extLst>
           </p:cNvPr>
@@ -6802,17 +5743,9 @@
           <a:prstGeom xmlns:a="http://schemas.openxmlformats.org/drawingml/2006/main" prst="rect">
             <a:avLst/>
           </a:prstGeom>
-          <a:solidFill xmlns:a="http://schemas.openxmlformats.org/drawingml/2006/main">
-            <a:srgbClr val="000000">
-              <a:alpha val="0"/>
-            </a:srgbClr>
-          </a:solidFill>
-          <a:ln xmlns:a="http://schemas.openxmlformats.org/drawingml/2006/main" w="0">
-            <a:solidFill>
-              <a:srgbClr val="000000">
-                <a:alpha val="0"/>
-              </a:srgbClr>
-            </a:solidFill>
+          <a:noFill xmlns:a="http://schemas.openxmlformats.org/drawingml/2006/main"/>
+          <a:ln xmlns:a="http://schemas.openxmlformats.org/drawingml/2006/main" w="0">
+            <a:noFill/>
             <a:prstDash val="solid"/>
           </a:ln>
         </p:spPr>
@@ -6849,7 +5782,7 @@
           <p:cNvPr id="7" name="">
             <a:extLst xmlns:a="http://schemas.openxmlformats.org/drawingml/2006/main">
               <a:ext uri="{FF2B5EF4-FFF2-40B4-BE49-F238E27FC236}">
-                <a16:creationId xmlns:a16="http://schemas.microsoft.com/office/drawing/2014/main" id="{524D474B-96E0-42CB-965C-EB17A9CEBF3A}"/>
+                <a16:creationId xmlns:a16="http://schemas.microsoft.com/office/drawing/2014/main" id="{DF8C9BE4-B21A-486D-A491-D9BE948A061B}"/>
               </a:ext>
             </a:extLst>
           </p:cNvPr>
@@ -6866,17 +5799,9 @@
           <a:prstGeom xmlns:a="http://schemas.openxmlformats.org/drawingml/2006/main" prst="rect">
             <a:avLst/>
           </a:prstGeom>
-          <a:solidFill xmlns:a="http://schemas.openxmlformats.org/drawingml/2006/main">
-            <a:srgbClr val="000000">
-              <a:alpha val="0"/>
-            </a:srgbClr>
-          </a:solidFill>
-          <a:ln xmlns:a="http://schemas.openxmlformats.org/drawingml/2006/main" w="0">
-            <a:solidFill>
-              <a:srgbClr val="000000">
-                <a:alpha val="0"/>
-              </a:srgbClr>
-            </a:solidFill>
+          <a:noFill xmlns:a="http://schemas.openxmlformats.org/drawingml/2006/main"/>
+          <a:ln xmlns:a="http://schemas.openxmlformats.org/drawingml/2006/main" w="0">
+            <a:noFill/>
             <a:prstDash val="solid"/>
           </a:ln>
         </p:spPr>
@@ -6913,7 +5838,7 @@
           <p:cNvPr id="8" name="">
             <a:extLst xmlns:a="http://schemas.openxmlformats.org/drawingml/2006/main">
               <a:ext uri="{FF2B5EF4-FFF2-40B4-BE49-F238E27FC236}">
-                <a16:creationId xmlns:a16="http://schemas.microsoft.com/office/drawing/2014/main" id="{A9E9C353-40AC-4A5F-9EA7-72358B062312}"/>
+                <a16:creationId xmlns:a16="http://schemas.microsoft.com/office/drawing/2014/main" id="{438F6617-40EC-4EA0-B73E-860902035081}"/>
               </a:ext>
             </a:extLst>
           </p:cNvPr>
@@ -6930,17 +5855,9 @@
           <a:prstGeom xmlns:a="http://schemas.openxmlformats.org/drawingml/2006/main" prst="rect">
             <a:avLst/>
           </a:prstGeom>
-          <a:solidFill xmlns:a="http://schemas.openxmlformats.org/drawingml/2006/main">
-            <a:srgbClr val="000000">
-              <a:alpha val="0"/>
-            </a:srgbClr>
-          </a:solidFill>
-          <a:ln xmlns:a="http://schemas.openxmlformats.org/drawingml/2006/main" w="0">
-            <a:solidFill>
-              <a:srgbClr val="000000">
-                <a:alpha val="0"/>
-              </a:srgbClr>
-            </a:solidFill>
+          <a:noFill xmlns:a="http://schemas.openxmlformats.org/drawingml/2006/main"/>
+          <a:ln xmlns:a="http://schemas.openxmlformats.org/drawingml/2006/main" w="0">
+            <a:noFill/>
             <a:prstDash val="solid"/>
           </a:ln>
         </p:spPr>
@@ -6977,7 +5894,7 @@
           <p:cNvPr id="9" name="">
             <a:extLst xmlns:a="http://schemas.openxmlformats.org/drawingml/2006/main">
               <a:ext uri="{FF2B5EF4-FFF2-40B4-BE49-F238E27FC236}">
-                <a16:creationId xmlns:a16="http://schemas.microsoft.com/office/drawing/2014/main" id="{568A267D-7A09-42F4-B214-FC21FD1B39BF}"/>
+                <a16:creationId xmlns:a16="http://schemas.microsoft.com/office/drawing/2014/main" id="{217E53C7-C112-4E59-B1BA-DB7DC4020B75}"/>
               </a:ext>
             </a:extLst>
           </p:cNvPr>
@@ -6998,11 +5915,7 @@
             <a:srgbClr val="D8D3C8"/>
           </a:solidFill>
           <a:ln xmlns:a="http://schemas.openxmlformats.org/drawingml/2006/main" w="0">
-            <a:solidFill>
-              <a:srgbClr val="000000">
-                <a:alpha val="0"/>
-              </a:srgbClr>
-            </a:solidFill>
+            <a:noFill/>
             <a:prstDash val="solid"/>
           </a:ln>
         </p:spPr>
@@ -7012,7 +5925,7 @@
           <p:cNvPr id="10" name="">
             <a:extLst xmlns:a="http://schemas.openxmlformats.org/drawingml/2006/main">
               <a:ext uri="{FF2B5EF4-FFF2-40B4-BE49-F238E27FC236}">
-                <a16:creationId xmlns:a16="http://schemas.microsoft.com/office/drawing/2014/main" id="{35893DBD-1187-4AD0-ACC7-4F0DA7D11464}"/>
+                <a16:creationId xmlns:a16="http://schemas.microsoft.com/office/drawing/2014/main" id="{EB93838E-28C6-4263-9CBC-F10F7CE11D36}"/>
               </a:ext>
             </a:extLst>
           </p:cNvPr>
@@ -7045,7 +5958,7 @@
           <p:cNvPr id="11" name="">
             <a:extLst xmlns:a="http://schemas.openxmlformats.org/drawingml/2006/main">
               <a:ext uri="{FF2B5EF4-FFF2-40B4-BE49-F238E27FC236}">
-                <a16:creationId xmlns:a16="http://schemas.microsoft.com/office/drawing/2014/main" id="{814C16A0-2061-45ED-974B-503E3C33ECF3}"/>
+                <a16:creationId xmlns:a16="http://schemas.microsoft.com/office/drawing/2014/main" id="{4E76F1CE-D2F5-403E-B564-919B485DEEDC}"/>
               </a:ext>
             </a:extLst>
           </p:cNvPr>
@@ -7066,11 +5979,7 @@
             <a:srgbClr val="B94A48"/>
           </a:solidFill>
           <a:ln xmlns:a="http://schemas.openxmlformats.org/drawingml/2006/main" w="0">
-            <a:solidFill>
-              <a:srgbClr val="000000">
-                <a:alpha val="0"/>
-              </a:srgbClr>
-            </a:solidFill>
+            <a:noFill/>
             <a:prstDash val="solid"/>
           </a:ln>
         </p:spPr>
@@ -7080,7 +5989,7 @@
           <p:cNvPr id="12" name="">
             <a:extLst xmlns:a="http://schemas.openxmlformats.org/drawingml/2006/main">
               <a:ext uri="{FF2B5EF4-FFF2-40B4-BE49-F238E27FC236}">
-                <a16:creationId xmlns:a16="http://schemas.microsoft.com/office/drawing/2014/main" id="{ECB58F66-9C9A-4D5D-81F1-B768BBD75104}"/>
+                <a16:creationId xmlns:a16="http://schemas.microsoft.com/office/drawing/2014/main" id="{12BACEB6-6FBB-4A4E-95F2-49B21AC6D129}"/>
               </a:ext>
             </a:extLst>
           </p:cNvPr>
@@ -7097,17 +6006,9 @@
           <a:prstGeom xmlns:a="http://schemas.openxmlformats.org/drawingml/2006/main" prst="rect">
             <a:avLst/>
           </a:prstGeom>
-          <a:solidFill xmlns:a="http://schemas.openxmlformats.org/drawingml/2006/main">
-            <a:srgbClr val="000000">
-              <a:alpha val="0"/>
-            </a:srgbClr>
-          </a:solidFill>
-          <a:ln xmlns:a="http://schemas.openxmlformats.org/drawingml/2006/main" w="0">
-            <a:solidFill>
-              <a:srgbClr val="000000">
-                <a:alpha val="0"/>
-              </a:srgbClr>
-            </a:solidFill>
+          <a:noFill xmlns:a="http://schemas.openxmlformats.org/drawingml/2006/main"/>
+          <a:ln xmlns:a="http://schemas.openxmlformats.org/drawingml/2006/main" w="0">
+            <a:noFill/>
             <a:prstDash val="solid"/>
           </a:ln>
         </p:spPr>
@@ -7144,7 +6045,7 @@
           <p:cNvPr id="13" name="">
             <a:extLst xmlns:a="http://schemas.openxmlformats.org/drawingml/2006/main">
               <a:ext uri="{FF2B5EF4-FFF2-40B4-BE49-F238E27FC236}">
-                <a16:creationId xmlns:a16="http://schemas.microsoft.com/office/drawing/2014/main" id="{606E23C4-D80E-4D6B-B049-967F47E221D8}"/>
+                <a16:creationId xmlns:a16="http://schemas.microsoft.com/office/drawing/2014/main" id="{342ABBA8-12B8-4543-BBD6-0522C17CD30B}"/>
               </a:ext>
             </a:extLst>
           </p:cNvPr>
@@ -7161,17 +6062,9 @@
           <a:prstGeom xmlns:a="http://schemas.openxmlformats.org/drawingml/2006/main" prst="rect">
             <a:avLst/>
           </a:prstGeom>
-          <a:solidFill xmlns:a="http://schemas.openxmlformats.org/drawingml/2006/main">
-            <a:srgbClr val="000000">
-              <a:alpha val="0"/>
-            </a:srgbClr>
-          </a:solidFill>
-          <a:ln xmlns:a="http://schemas.openxmlformats.org/drawingml/2006/main" w="0">
-            <a:solidFill>
-              <a:srgbClr val="000000">
-                <a:alpha val="0"/>
-              </a:srgbClr>
-            </a:solidFill>
+          <a:noFill xmlns:a="http://schemas.openxmlformats.org/drawingml/2006/main"/>
+          <a:ln xmlns:a="http://schemas.openxmlformats.org/drawingml/2006/main" w="0">
+            <a:noFill/>
             <a:prstDash val="solid"/>
           </a:ln>
         </p:spPr>
@@ -7208,7 +6101,7 @@
           <p:cNvPr id="14" name="">
             <a:extLst xmlns:a="http://schemas.openxmlformats.org/drawingml/2006/main">
               <a:ext uri="{FF2B5EF4-FFF2-40B4-BE49-F238E27FC236}">
-                <a16:creationId xmlns:a16="http://schemas.microsoft.com/office/drawing/2014/main" id="{4889FCB6-307C-4D58-B6EE-DF07959228F4}"/>
+                <a16:creationId xmlns:a16="http://schemas.microsoft.com/office/drawing/2014/main" id="{2F5749BA-EADF-4E7F-BC67-3C46C584F7DA}"/>
               </a:ext>
             </a:extLst>
           </p:cNvPr>
@@ -7241,7 +6134,7 @@
           <p:cNvPr id="15" name="">
             <a:extLst xmlns:a="http://schemas.openxmlformats.org/drawingml/2006/main">
               <a:ext uri="{FF2B5EF4-FFF2-40B4-BE49-F238E27FC236}">
-                <a16:creationId xmlns:a16="http://schemas.microsoft.com/office/drawing/2014/main" id="{CA532FBA-7CFB-412D-BEE8-3C6B42312C5B}"/>
+                <a16:creationId xmlns:a16="http://schemas.microsoft.com/office/drawing/2014/main" id="{CCA3480F-5090-4918-8C23-802B6769B698}"/>
               </a:ext>
             </a:extLst>
           </p:cNvPr>
@@ -7262,11 +6155,7 @@
             <a:srgbClr val="B94A48"/>
           </a:solidFill>
           <a:ln xmlns:a="http://schemas.openxmlformats.org/drawingml/2006/main" w="0">
-            <a:solidFill>
-              <a:srgbClr val="000000">
-                <a:alpha val="0"/>
-              </a:srgbClr>
-            </a:solidFill>
+            <a:noFill/>
             <a:prstDash val="solid"/>
           </a:ln>
         </p:spPr>
@@ -7276,7 +6165,7 @@
           <p:cNvPr id="16" name="">
             <a:extLst xmlns:a="http://schemas.openxmlformats.org/drawingml/2006/main">
               <a:ext uri="{FF2B5EF4-FFF2-40B4-BE49-F238E27FC236}">
-                <a16:creationId xmlns:a16="http://schemas.microsoft.com/office/drawing/2014/main" id="{B349855A-ED1B-4807-81A7-1F6C3C1FE6E0}"/>
+                <a16:creationId xmlns:a16="http://schemas.microsoft.com/office/drawing/2014/main" id="{6A554B2D-8011-46DA-8424-81CAB8BDF223}"/>
               </a:ext>
             </a:extLst>
           </p:cNvPr>
@@ -7293,17 +6182,9 @@
           <a:prstGeom xmlns:a="http://schemas.openxmlformats.org/drawingml/2006/main" prst="rect">
             <a:avLst/>
           </a:prstGeom>
-          <a:solidFill xmlns:a="http://schemas.openxmlformats.org/drawingml/2006/main">
-            <a:srgbClr val="000000">
-              <a:alpha val="0"/>
-            </a:srgbClr>
-          </a:solidFill>
-          <a:ln xmlns:a="http://schemas.openxmlformats.org/drawingml/2006/main" w="0">
-            <a:solidFill>
-              <a:srgbClr val="000000">
-                <a:alpha val="0"/>
-              </a:srgbClr>
-            </a:solidFill>
+          <a:noFill xmlns:a="http://schemas.openxmlformats.org/drawingml/2006/main"/>
+          <a:ln xmlns:a="http://schemas.openxmlformats.org/drawingml/2006/main" w="0">
+            <a:noFill/>
             <a:prstDash val="solid"/>
           </a:ln>
         </p:spPr>
@@ -7340,7 +6221,7 @@
           <p:cNvPr id="17" name="">
             <a:extLst xmlns:a="http://schemas.openxmlformats.org/drawingml/2006/main">
               <a:ext uri="{FF2B5EF4-FFF2-40B4-BE49-F238E27FC236}">
-                <a16:creationId xmlns:a16="http://schemas.microsoft.com/office/drawing/2014/main" id="{FA01EF8C-DB91-420A-819E-0DACC875CFB8}"/>
+                <a16:creationId xmlns:a16="http://schemas.microsoft.com/office/drawing/2014/main" id="{FC1FEE9F-09E4-4FD0-B517-D64B399D153A}"/>
               </a:ext>
             </a:extLst>
           </p:cNvPr>
@@ -7357,17 +6238,9 @@
           <a:prstGeom xmlns:a="http://schemas.openxmlformats.org/drawingml/2006/main" prst="rect">
             <a:avLst/>
           </a:prstGeom>
-          <a:solidFill xmlns:a="http://schemas.openxmlformats.org/drawingml/2006/main">
-            <a:srgbClr val="000000">
-              <a:alpha val="0"/>
-            </a:srgbClr>
-          </a:solidFill>
-          <a:ln xmlns:a="http://schemas.openxmlformats.org/drawingml/2006/main" w="0">
-            <a:solidFill>
-              <a:srgbClr val="000000">
-                <a:alpha val="0"/>
-              </a:srgbClr>
-            </a:solidFill>
+          <a:noFill xmlns:a="http://schemas.openxmlformats.org/drawingml/2006/main"/>
+          <a:ln xmlns:a="http://schemas.openxmlformats.org/drawingml/2006/main" w="0">
+            <a:noFill/>
             <a:prstDash val="solid"/>
           </a:ln>
         </p:spPr>
@@ -7404,7 +6277,7 @@
           <p:cNvPr id="18" name="">
             <a:extLst xmlns:a="http://schemas.openxmlformats.org/drawingml/2006/main">
               <a:ext uri="{FF2B5EF4-FFF2-40B4-BE49-F238E27FC236}">
-                <a16:creationId xmlns:a16="http://schemas.microsoft.com/office/drawing/2014/main" id="{C0F2002A-8279-4D33-84B4-7770A424F376}"/>
+                <a16:creationId xmlns:a16="http://schemas.microsoft.com/office/drawing/2014/main" id="{B9F06889-2AD0-429D-8AB0-876B482BBB5E}"/>
               </a:ext>
             </a:extLst>
           </p:cNvPr>
@@ -7437,7 +6310,7 @@
           <p:cNvPr id="19" name="">
             <a:extLst xmlns:a="http://schemas.openxmlformats.org/drawingml/2006/main">
               <a:ext uri="{FF2B5EF4-FFF2-40B4-BE49-F238E27FC236}">
-                <a16:creationId xmlns:a16="http://schemas.microsoft.com/office/drawing/2014/main" id="{ACD3B0B6-8764-473C-B09C-599930EA43FB}"/>
+                <a16:creationId xmlns:a16="http://schemas.microsoft.com/office/drawing/2014/main" id="{F38A8744-AF24-4852-B545-1DC6004B76E5}"/>
               </a:ext>
             </a:extLst>
           </p:cNvPr>
@@ -7458,11 +6331,7 @@
             <a:srgbClr val="B94A48"/>
           </a:solidFill>
           <a:ln xmlns:a="http://schemas.openxmlformats.org/drawingml/2006/main" w="0">
-            <a:solidFill>
-              <a:srgbClr val="000000">
-                <a:alpha val="0"/>
-              </a:srgbClr>
-            </a:solidFill>
+            <a:noFill/>
             <a:prstDash val="solid"/>
           </a:ln>
         </p:spPr>
@@ -7472,7 +6341,7 @@
           <p:cNvPr id="20" name="">
             <a:extLst xmlns:a="http://schemas.openxmlformats.org/drawingml/2006/main">
               <a:ext uri="{FF2B5EF4-FFF2-40B4-BE49-F238E27FC236}">
-                <a16:creationId xmlns:a16="http://schemas.microsoft.com/office/drawing/2014/main" id="{59B1A6C3-5B10-478B-BAFE-EBD3932E9A03}"/>
+                <a16:creationId xmlns:a16="http://schemas.microsoft.com/office/drawing/2014/main" id="{A0F856A2-9CF2-46F8-9EF1-5A3DDBCB84BE}"/>
               </a:ext>
             </a:extLst>
           </p:cNvPr>
@@ -7489,17 +6358,9 @@
           <a:prstGeom xmlns:a="http://schemas.openxmlformats.org/drawingml/2006/main" prst="rect">
             <a:avLst/>
           </a:prstGeom>
-          <a:solidFill xmlns:a="http://schemas.openxmlformats.org/drawingml/2006/main">
-            <a:srgbClr val="000000">
-              <a:alpha val="0"/>
-            </a:srgbClr>
-          </a:solidFill>
-          <a:ln xmlns:a="http://schemas.openxmlformats.org/drawingml/2006/main" w="0">
-            <a:solidFill>
-              <a:srgbClr val="000000">
-                <a:alpha val="0"/>
-              </a:srgbClr>
-            </a:solidFill>
+          <a:noFill xmlns:a="http://schemas.openxmlformats.org/drawingml/2006/main"/>
+          <a:ln xmlns:a="http://schemas.openxmlformats.org/drawingml/2006/main" w="0">
+            <a:noFill/>
             <a:prstDash val="solid"/>
           </a:ln>
         </p:spPr>
@@ -7536,7 +6397,7 @@
           <p:cNvPr id="21" name="">
             <a:extLst xmlns:a="http://schemas.openxmlformats.org/drawingml/2006/main">
               <a:ext uri="{FF2B5EF4-FFF2-40B4-BE49-F238E27FC236}">
-                <a16:creationId xmlns:a16="http://schemas.microsoft.com/office/drawing/2014/main" id="{8F5DBAB6-4E05-4AD3-A973-080EF289EEF2}"/>
+                <a16:creationId xmlns:a16="http://schemas.microsoft.com/office/drawing/2014/main" id="{450F8261-1282-44DD-9C9D-C01B498495CD}"/>
               </a:ext>
             </a:extLst>
           </p:cNvPr>
@@ -7553,17 +6414,9 @@
           <a:prstGeom xmlns:a="http://schemas.openxmlformats.org/drawingml/2006/main" prst="rect">
             <a:avLst/>
           </a:prstGeom>
-          <a:solidFill xmlns:a="http://schemas.openxmlformats.org/drawingml/2006/main">
-            <a:srgbClr val="000000">
-              <a:alpha val="0"/>
-            </a:srgbClr>
-          </a:solidFill>
-          <a:ln xmlns:a="http://schemas.openxmlformats.org/drawingml/2006/main" w="0">
-            <a:solidFill>
-              <a:srgbClr val="000000">
-                <a:alpha val="0"/>
-              </a:srgbClr>
-            </a:solidFill>
+          <a:noFill xmlns:a="http://schemas.openxmlformats.org/drawingml/2006/main"/>
+          <a:ln xmlns:a="http://schemas.openxmlformats.org/drawingml/2006/main" w="0">
+            <a:noFill/>
             <a:prstDash val="solid"/>
           </a:ln>
         </p:spPr>
@@ -7600,7 +6453,7 @@
           <p:cNvPr id="22" name="">
             <a:extLst xmlns:a="http://schemas.openxmlformats.org/drawingml/2006/main">
               <a:ext uri="{FF2B5EF4-FFF2-40B4-BE49-F238E27FC236}">
-                <a16:creationId xmlns:a16="http://schemas.microsoft.com/office/drawing/2014/main" id="{90CD84B8-3904-4A87-815A-3DC5B5CF2A90}"/>
+                <a16:creationId xmlns:a16="http://schemas.microsoft.com/office/drawing/2014/main" id="{E6C08D78-C59A-45CF-A940-C4CA2DF9B069}"/>
               </a:ext>
             </a:extLst>
           </p:cNvPr>
@@ -7633,7 +6486,7 @@
           <p:cNvPr id="23" name="">
             <a:extLst xmlns:a="http://schemas.openxmlformats.org/drawingml/2006/main">
               <a:ext uri="{FF2B5EF4-FFF2-40B4-BE49-F238E27FC236}">
-                <a16:creationId xmlns:a16="http://schemas.microsoft.com/office/drawing/2014/main" id="{4A31BFD4-0BC4-4831-9FA0-5104BF9C456C}"/>
+                <a16:creationId xmlns:a16="http://schemas.microsoft.com/office/drawing/2014/main" id="{B7F24CB4-C358-4D19-86E4-183B1680CBE1}"/>
               </a:ext>
             </a:extLst>
           </p:cNvPr>
@@ -7654,11 +6507,7 @@
             <a:srgbClr val="2E7D5B"/>
           </a:solidFill>
           <a:ln xmlns:a="http://schemas.openxmlformats.org/drawingml/2006/main" w="0">
-            <a:solidFill>
-              <a:srgbClr val="000000">
-                <a:alpha val="0"/>
-              </a:srgbClr>
-            </a:solidFill>
+            <a:noFill/>
             <a:prstDash val="solid"/>
           </a:ln>
         </p:spPr>
@@ -7668,7 +6517,7 @@
           <p:cNvPr id="24" name="">
             <a:extLst xmlns:a="http://schemas.openxmlformats.org/drawingml/2006/main">
               <a:ext uri="{FF2B5EF4-FFF2-40B4-BE49-F238E27FC236}">
-                <a16:creationId xmlns:a16="http://schemas.microsoft.com/office/drawing/2014/main" id="{A618FE5C-D95C-4CF4-A495-9E98B35266E9}"/>
+                <a16:creationId xmlns:a16="http://schemas.microsoft.com/office/drawing/2014/main" id="{2895C2D4-3AEE-40EE-9701-F55A2B591CFD}"/>
               </a:ext>
             </a:extLst>
           </p:cNvPr>
@@ -7685,17 +6534,9 @@
           <a:prstGeom xmlns:a="http://schemas.openxmlformats.org/drawingml/2006/main" prst="rect">
             <a:avLst/>
           </a:prstGeom>
-          <a:solidFill xmlns:a="http://schemas.openxmlformats.org/drawingml/2006/main">
-            <a:srgbClr val="000000">
-              <a:alpha val="0"/>
-            </a:srgbClr>
-          </a:solidFill>
-          <a:ln xmlns:a="http://schemas.openxmlformats.org/drawingml/2006/main" w="0">
-            <a:solidFill>
-              <a:srgbClr val="000000">
-                <a:alpha val="0"/>
-              </a:srgbClr>
-            </a:solidFill>
+          <a:noFill xmlns:a="http://schemas.openxmlformats.org/drawingml/2006/main"/>
+          <a:ln xmlns:a="http://schemas.openxmlformats.org/drawingml/2006/main" w="0">
+            <a:noFill/>
             <a:prstDash val="solid"/>
           </a:ln>
         </p:spPr>
@@ -7732,7 +6573,7 @@
           <p:cNvPr id="25" name="">
             <a:extLst xmlns:a="http://schemas.openxmlformats.org/drawingml/2006/main">
               <a:ext uri="{FF2B5EF4-FFF2-40B4-BE49-F238E27FC236}">
-                <a16:creationId xmlns:a16="http://schemas.microsoft.com/office/drawing/2014/main" id="{83237970-B31E-4394-A798-37305F779C9E}"/>
+                <a16:creationId xmlns:a16="http://schemas.microsoft.com/office/drawing/2014/main" id="{640BFFDA-703D-4581-BEC9-241F86794948}"/>
               </a:ext>
             </a:extLst>
           </p:cNvPr>
@@ -7749,17 +6590,9 @@
           <a:prstGeom xmlns:a="http://schemas.openxmlformats.org/drawingml/2006/main" prst="rect">
             <a:avLst/>
           </a:prstGeom>
-          <a:solidFill xmlns:a="http://schemas.openxmlformats.org/drawingml/2006/main">
-            <a:srgbClr val="000000">
-              <a:alpha val="0"/>
-            </a:srgbClr>
-          </a:solidFill>
-          <a:ln xmlns:a="http://schemas.openxmlformats.org/drawingml/2006/main" w="0">
-            <a:solidFill>
-              <a:srgbClr val="000000">
-                <a:alpha val="0"/>
-              </a:srgbClr>
-            </a:solidFill>
+          <a:noFill xmlns:a="http://schemas.openxmlformats.org/drawingml/2006/main"/>
+          <a:ln xmlns:a="http://schemas.openxmlformats.org/drawingml/2006/main" w="0">
+            <a:noFill/>
             <a:prstDash val="solid"/>
           </a:ln>
         </p:spPr>
@@ -7796,7 +6629,7 @@
           <p:cNvPr id="26" name="">
             <a:extLst xmlns:a="http://schemas.openxmlformats.org/drawingml/2006/main">
               <a:ext uri="{FF2B5EF4-FFF2-40B4-BE49-F238E27FC236}">
-                <a16:creationId xmlns:a16="http://schemas.microsoft.com/office/drawing/2014/main" id="{85404803-0918-4527-A432-E07B058C397D}"/>
+                <a16:creationId xmlns:a16="http://schemas.microsoft.com/office/drawing/2014/main" id="{644E65B3-B117-490D-9CCE-08711914441F}"/>
               </a:ext>
             </a:extLst>
           </p:cNvPr>
@@ -7829,7 +6662,7 @@
           <p:cNvPr id="27" name="">
             <a:extLst xmlns:a="http://schemas.openxmlformats.org/drawingml/2006/main">
               <a:ext uri="{FF2B5EF4-FFF2-40B4-BE49-F238E27FC236}">
-                <a16:creationId xmlns:a16="http://schemas.microsoft.com/office/drawing/2014/main" id="{5DE2B421-A1CF-4045-80A2-D901260FA8FC}"/>
+                <a16:creationId xmlns:a16="http://schemas.microsoft.com/office/drawing/2014/main" id="{0D3F47C0-400E-444B-95D3-D3E72351AF2A}"/>
               </a:ext>
             </a:extLst>
           </p:cNvPr>
@@ -7850,11 +6683,7 @@
             <a:srgbClr val="2E7D5B"/>
           </a:solidFill>
           <a:ln xmlns:a="http://schemas.openxmlformats.org/drawingml/2006/main" w="0">
-            <a:solidFill>
-              <a:srgbClr val="000000">
-                <a:alpha val="0"/>
-              </a:srgbClr>
-            </a:solidFill>
+            <a:noFill/>
             <a:prstDash val="solid"/>
           </a:ln>
         </p:spPr>
@@ -7864,7 +6693,7 @@
           <p:cNvPr id="28" name="">
             <a:extLst xmlns:a="http://schemas.openxmlformats.org/drawingml/2006/main">
               <a:ext uri="{FF2B5EF4-FFF2-40B4-BE49-F238E27FC236}">
-                <a16:creationId xmlns:a16="http://schemas.microsoft.com/office/drawing/2014/main" id="{D3F0052C-887C-4E18-9F4D-FAB81D751184}"/>
+                <a16:creationId xmlns:a16="http://schemas.microsoft.com/office/drawing/2014/main" id="{11D092D9-A324-457A-8130-31C6B5FA7B00}"/>
               </a:ext>
             </a:extLst>
           </p:cNvPr>
@@ -7881,17 +6710,9 @@
           <a:prstGeom xmlns:a="http://schemas.openxmlformats.org/drawingml/2006/main" prst="rect">
             <a:avLst/>
           </a:prstGeom>
-          <a:solidFill xmlns:a="http://schemas.openxmlformats.org/drawingml/2006/main">
-            <a:srgbClr val="000000">
-              <a:alpha val="0"/>
-            </a:srgbClr>
-          </a:solidFill>
-          <a:ln xmlns:a="http://schemas.openxmlformats.org/drawingml/2006/main" w="0">
-            <a:solidFill>
-              <a:srgbClr val="000000">
-                <a:alpha val="0"/>
-              </a:srgbClr>
-            </a:solidFill>
+          <a:noFill xmlns:a="http://schemas.openxmlformats.org/drawingml/2006/main"/>
+          <a:ln xmlns:a="http://schemas.openxmlformats.org/drawingml/2006/main" w="0">
+            <a:noFill/>
             <a:prstDash val="solid"/>
           </a:ln>
         </p:spPr>
@@ -7928,7 +6749,7 @@
           <p:cNvPr id="29" name="">
             <a:extLst xmlns:a="http://schemas.openxmlformats.org/drawingml/2006/main">
               <a:ext uri="{FF2B5EF4-FFF2-40B4-BE49-F238E27FC236}">
-                <a16:creationId xmlns:a16="http://schemas.microsoft.com/office/drawing/2014/main" id="{6C30DF6A-D370-4A4C-B721-1CF27DF427CC}"/>
+                <a16:creationId xmlns:a16="http://schemas.microsoft.com/office/drawing/2014/main" id="{CC001C73-367E-4E57-A119-A28DFECF605E}"/>
               </a:ext>
             </a:extLst>
           </p:cNvPr>
@@ -7945,17 +6766,9 @@
           <a:prstGeom xmlns:a="http://schemas.openxmlformats.org/drawingml/2006/main" prst="rect">
             <a:avLst/>
           </a:prstGeom>
-          <a:solidFill xmlns:a="http://schemas.openxmlformats.org/drawingml/2006/main">
-            <a:srgbClr val="000000">
-              <a:alpha val="0"/>
-            </a:srgbClr>
-          </a:solidFill>
-          <a:ln xmlns:a="http://schemas.openxmlformats.org/drawingml/2006/main" w="0">
-            <a:solidFill>
-              <a:srgbClr val="000000">
-                <a:alpha val="0"/>
-              </a:srgbClr>
-            </a:solidFill>
+          <a:noFill xmlns:a="http://schemas.openxmlformats.org/drawingml/2006/main"/>
+          <a:ln xmlns:a="http://schemas.openxmlformats.org/drawingml/2006/main" w="0">
+            <a:noFill/>
             <a:prstDash val="solid"/>
           </a:ln>
         </p:spPr>
@@ -7992,7 +6805,7 @@
           <p:cNvPr id="30" name="">
             <a:extLst xmlns:a="http://schemas.openxmlformats.org/drawingml/2006/main">
               <a:ext uri="{FF2B5EF4-FFF2-40B4-BE49-F238E27FC236}">
-                <a16:creationId xmlns:a16="http://schemas.microsoft.com/office/drawing/2014/main" id="{EB0F33BD-E068-4A87-BB74-92F35F3FF291}"/>
+                <a16:creationId xmlns:a16="http://schemas.microsoft.com/office/drawing/2014/main" id="{1BDF5BFE-BF6A-4DA3-B260-BA4A26111360}"/>
               </a:ext>
             </a:extLst>
           </p:cNvPr>
@@ -8025,7 +6838,7 @@
           <p:cNvPr id="31" name="">
             <a:extLst xmlns:a="http://schemas.openxmlformats.org/drawingml/2006/main">
               <a:ext uri="{FF2B5EF4-FFF2-40B4-BE49-F238E27FC236}">
-                <a16:creationId xmlns:a16="http://schemas.microsoft.com/office/drawing/2014/main" id="{61EB3EA7-B17A-439B-B0E3-78479ADDC1C4}"/>
+                <a16:creationId xmlns:a16="http://schemas.microsoft.com/office/drawing/2014/main" id="{E27B8AAE-D652-44FA-9845-F67F063DA5A8}"/>
               </a:ext>
             </a:extLst>
           </p:cNvPr>
@@ -8046,11 +6859,7 @@
             <a:srgbClr val="2E7D5B"/>
           </a:solidFill>
           <a:ln xmlns:a="http://schemas.openxmlformats.org/drawingml/2006/main" w="0">
-            <a:solidFill>
-              <a:srgbClr val="000000">
-                <a:alpha val="0"/>
-              </a:srgbClr>
-            </a:solidFill>
+            <a:noFill/>
             <a:prstDash val="solid"/>
           </a:ln>
         </p:spPr>
@@ -8060,7 +6869,7 @@
           <p:cNvPr id="32" name="">
             <a:extLst xmlns:a="http://schemas.openxmlformats.org/drawingml/2006/main">
               <a:ext uri="{FF2B5EF4-FFF2-40B4-BE49-F238E27FC236}">
-                <a16:creationId xmlns:a16="http://schemas.microsoft.com/office/drawing/2014/main" id="{A011FA29-00DA-4DD6-BB98-625AF5E482AC}"/>
+                <a16:creationId xmlns:a16="http://schemas.microsoft.com/office/drawing/2014/main" id="{1330CDAF-45DE-4C58-AFAC-699739429FBC}"/>
               </a:ext>
             </a:extLst>
           </p:cNvPr>
@@ -8077,17 +6886,9 @@
           <a:prstGeom xmlns:a="http://schemas.openxmlformats.org/drawingml/2006/main" prst="rect">
             <a:avLst/>
           </a:prstGeom>
-          <a:solidFill xmlns:a="http://schemas.openxmlformats.org/drawingml/2006/main">
-            <a:srgbClr val="000000">
-              <a:alpha val="0"/>
-            </a:srgbClr>
-          </a:solidFill>
-          <a:ln xmlns:a="http://schemas.openxmlformats.org/drawingml/2006/main" w="0">
-            <a:solidFill>
-              <a:srgbClr val="000000">
-                <a:alpha val="0"/>
-              </a:srgbClr>
-            </a:solidFill>
+          <a:noFill xmlns:a="http://schemas.openxmlformats.org/drawingml/2006/main"/>
+          <a:ln xmlns:a="http://schemas.openxmlformats.org/drawingml/2006/main" w="0">
+            <a:noFill/>
             <a:prstDash val="solid"/>
           </a:ln>
         </p:spPr>
@@ -8124,7 +6925,7 @@
           <p:cNvPr id="33" name="">
             <a:extLst xmlns:a="http://schemas.openxmlformats.org/drawingml/2006/main">
               <a:ext uri="{FF2B5EF4-FFF2-40B4-BE49-F238E27FC236}">
-                <a16:creationId xmlns:a16="http://schemas.microsoft.com/office/drawing/2014/main" id="{71D8D451-42A6-45D7-AC5F-49C7EBFDCD83}"/>
+                <a16:creationId xmlns:a16="http://schemas.microsoft.com/office/drawing/2014/main" id="{55080E69-3BE2-4359-AFDD-74F8813F6C11}"/>
               </a:ext>
             </a:extLst>
           </p:cNvPr>
@@ -8141,17 +6942,9 @@
           <a:prstGeom xmlns:a="http://schemas.openxmlformats.org/drawingml/2006/main" prst="rect">
             <a:avLst/>
           </a:prstGeom>
-          <a:solidFill xmlns:a="http://schemas.openxmlformats.org/drawingml/2006/main">
-            <a:srgbClr val="000000">
-              <a:alpha val="0"/>
-            </a:srgbClr>
-          </a:solidFill>
-          <a:ln xmlns:a="http://schemas.openxmlformats.org/drawingml/2006/main" w="0">
-            <a:solidFill>
-              <a:srgbClr val="000000">
-                <a:alpha val="0"/>
-              </a:srgbClr>
-            </a:solidFill>
+          <a:noFill xmlns:a="http://schemas.openxmlformats.org/drawingml/2006/main"/>
+          <a:ln xmlns:a="http://schemas.openxmlformats.org/drawingml/2006/main" w="0">
+            <a:noFill/>
             <a:prstDash val="solid"/>
           </a:ln>
         </p:spPr>
@@ -8188,7 +6981,7 @@
           <p:cNvPr id="34" name="">
             <a:extLst xmlns:a="http://schemas.openxmlformats.org/drawingml/2006/main">
               <a:ext uri="{FF2B5EF4-FFF2-40B4-BE49-F238E27FC236}">
-                <a16:creationId xmlns:a16="http://schemas.microsoft.com/office/drawing/2014/main" id="{A994950A-BAF0-4C53-B739-32B6B5FBDED0}"/>
+                <a16:creationId xmlns:a16="http://schemas.microsoft.com/office/drawing/2014/main" id="{938AE257-518C-40D1-B7D5-3DCD3E15C595}"/>
               </a:ext>
             </a:extLst>
           </p:cNvPr>
@@ -8209,11 +7002,7 @@
             <a:srgbClr val="D8D3C8"/>
           </a:solidFill>
           <a:ln xmlns:a="http://schemas.openxmlformats.org/drawingml/2006/main" w="0">
-            <a:solidFill>
-              <a:srgbClr val="000000">
-                <a:alpha val="0"/>
-              </a:srgbClr>
-            </a:solidFill>
+            <a:noFill/>
             <a:prstDash val="solid"/>
           </a:ln>
         </p:spPr>
@@ -8223,7 +7012,7 @@
           <p:cNvPr id="35" name="">
             <a:extLst xmlns:a="http://schemas.openxmlformats.org/drawingml/2006/main">
               <a:ext uri="{FF2B5EF4-FFF2-40B4-BE49-F238E27FC236}">
-                <a16:creationId xmlns:a16="http://schemas.microsoft.com/office/drawing/2014/main" id="{CB292A71-8607-4C4D-84EA-3167E49187CE}"/>
+                <a16:creationId xmlns:a16="http://schemas.microsoft.com/office/drawing/2014/main" id="{41F5787C-E128-46DE-BCE6-C29795F96BD7}"/>
               </a:ext>
             </a:extLst>
           </p:cNvPr>
@@ -8240,17 +7029,9 @@
           <a:prstGeom xmlns:a="http://schemas.openxmlformats.org/drawingml/2006/main" prst="rect">
             <a:avLst/>
           </a:prstGeom>
-          <a:solidFill xmlns:a="http://schemas.openxmlformats.org/drawingml/2006/main">
-            <a:srgbClr val="000000">
-              <a:alpha val="0"/>
-            </a:srgbClr>
-          </a:solidFill>
-          <a:ln xmlns:a="http://schemas.openxmlformats.org/drawingml/2006/main" w="0">
-            <a:solidFill>
-              <a:srgbClr val="000000">
-                <a:alpha val="0"/>
-              </a:srgbClr>
-            </a:solidFill>
+          <a:noFill xmlns:a="http://schemas.openxmlformats.org/drawingml/2006/main"/>
+          <a:ln xmlns:a="http://schemas.openxmlformats.org/drawingml/2006/main" w="0">
+            <a:noFill/>
             <a:prstDash val="solid"/>
           </a:ln>
         </p:spPr>
@@ -8287,7 +7068,7 @@
           <p:cNvPr id="36" name="">
             <a:extLst xmlns:a="http://schemas.openxmlformats.org/drawingml/2006/main">
               <a:ext uri="{FF2B5EF4-FFF2-40B4-BE49-F238E27FC236}">
-                <a16:creationId xmlns:a16="http://schemas.microsoft.com/office/drawing/2014/main" id="{99A5F91F-DBE0-44FC-BFDF-E356F63BC304}"/>
+                <a16:creationId xmlns:a16="http://schemas.microsoft.com/office/drawing/2014/main" id="{8A95857A-3931-40CA-B83B-3E06954524F1}"/>
               </a:ext>
             </a:extLst>
           </p:cNvPr>
@@ -8304,17 +7085,9 @@
           <a:prstGeom xmlns:a="http://schemas.openxmlformats.org/drawingml/2006/main" prst="rect">
             <a:avLst/>
           </a:prstGeom>
-          <a:solidFill xmlns:a="http://schemas.openxmlformats.org/drawingml/2006/main">
-            <a:srgbClr val="000000">
-              <a:alpha val="0"/>
-            </a:srgbClr>
-          </a:solidFill>
-          <a:ln xmlns:a="http://schemas.openxmlformats.org/drawingml/2006/main" w="0">
-            <a:solidFill>
-              <a:srgbClr val="000000">
-                <a:alpha val="0"/>
-              </a:srgbClr>
-            </a:solidFill>
+          <a:noFill xmlns:a="http://schemas.openxmlformats.org/drawingml/2006/main"/>
+          <a:ln xmlns:a="http://schemas.openxmlformats.org/drawingml/2006/main" w="0">
+            <a:noFill/>
             <a:prstDash val="solid"/>
           </a:ln>
         </p:spPr>
@@ -8349,7 +7122,7 @@
     </p:spTree>
     <p:extLst>
       <p:ext uri="{BB962C8B-B14F-4D97-AF65-F5344CB8AC3E}">
-        <p14:creationId xmlns:p14="http://schemas.microsoft.com/office/powerpoint/2010/main" val="298830075"/>
+        <p14:creationId xmlns:p14="http://schemas.microsoft.com/office/powerpoint/2010/main" val="801660995"/>
       </p:ext>
     </p:extLst>
   </p:cSld>
@@ -8370,10 +7143,10 @@
       </p:grpSpPr>
       <p:sp>
         <p:nvSpPr>
-          <p:cNvPr id="1" name="">
-            <a:extLst xmlns:a="http://schemas.openxmlformats.org/drawingml/2006/main">
-              <a:ext uri="{FF2B5EF4-FFF2-40B4-BE49-F238E27FC236}">
-                <a16:creationId xmlns:a16="http://schemas.microsoft.com/office/drawing/2014/main" id="{9A6F0993-9A33-48CB-AB84-1EF588E315B0}"/>
+          <p:cNvPr id="18" name="">
+            <a:extLst xmlns:a="http://schemas.openxmlformats.org/drawingml/2006/main">
+              <a:ext uri="{FF2B5EF4-FFF2-40B4-BE49-F238E27FC236}">
+                <a16:creationId xmlns:a16="http://schemas.microsoft.com/office/drawing/2014/main" id="{45CE404E-8DDB-4EDC-902A-9F97DCEF431B}"/>
               </a:ext>
             </a:extLst>
           </p:cNvPr>
@@ -8391,59 +7164,20 @@
             <a:avLst/>
           </a:prstGeom>
           <a:solidFill xmlns:a="http://schemas.openxmlformats.org/drawingml/2006/main">
-            <a:srgbClr val="F7F4EE"/>
-          </a:solidFill>
-          <a:ln xmlns:a="http://schemas.openxmlformats.org/drawingml/2006/main" w="0">
-            <a:solidFill>
-              <a:srgbClr val="000000">
-                <a:alpha val="0"/>
-              </a:srgbClr>
-            </a:solidFill>
-            <a:prstDash val="solid"/>
-          </a:ln>
-        </p:spPr>
-      </p:sp>
-      <p:sp>
-        <p:nvSpPr>
-          <p:cNvPr id="2" name="">
-            <a:extLst xmlns:a="http://schemas.openxmlformats.org/drawingml/2006/main">
-              <a:ext uri="{FF2B5EF4-FFF2-40B4-BE49-F238E27FC236}">
-                <a16:creationId xmlns:a16="http://schemas.microsoft.com/office/drawing/2014/main" id="{EBFB4B21-D6CC-4906-8EB7-54D02DAF5E4F}"/>
-              </a:ext>
-            </a:extLst>
-          </p:cNvPr>
-          <p:cNvSpPr>
-            <a:spLocks xmlns:a="http://schemas.openxmlformats.org/drawingml/2006/main" noGrp="1"/>
-          </p:cNvSpPr>
-          <p:nvPr/>
-        </p:nvSpPr>
-        <p:spPr>
-          <a:xfrm xmlns:a="http://schemas.openxmlformats.org/drawingml/2006/main">
-            <a:off x="0" y="0"/>
-            <a:ext cx="171450" cy="6858000"/>
-          </a:xfrm>
-          <a:prstGeom xmlns:a="http://schemas.openxmlformats.org/drawingml/2006/main" prst="rect">
-            <a:avLst/>
-          </a:prstGeom>
-          <a:solidFill xmlns:a="http://schemas.openxmlformats.org/drawingml/2006/main">
-            <a:srgbClr val="1F2933"/>
-          </a:solidFill>
-          <a:ln xmlns:a="http://schemas.openxmlformats.org/drawingml/2006/main" w="0">
-            <a:solidFill>
-              <a:srgbClr val="000000">
-                <a:alpha val="0"/>
-              </a:srgbClr>
-            </a:solidFill>
-            <a:prstDash val="solid"/>
-          </a:ln>
-        </p:spPr>
-      </p:sp>
-      <p:sp>
-        <p:nvSpPr>
-          <p:cNvPr id="3" name="kicker-05-marker">
-            <a:extLst xmlns:a="http://schemas.openxmlformats.org/drawingml/2006/main">
-              <a:ext uri="{FF2B5EF4-FFF2-40B4-BE49-F238E27FC236}">
-                <a16:creationId xmlns:a16="http://schemas.microsoft.com/office/drawing/2014/main" id="{7DF5A1C0-53DB-4368-970F-9542CC8B39CE}"/>
+            <a:srgbClr val="FFFFFF"/>
+          </a:solidFill>
+          <a:ln xmlns:a="http://schemas.openxmlformats.org/drawingml/2006/main" w="0">
+            <a:noFill/>
+            <a:prstDash val="solid"/>
+          </a:ln>
+        </p:spPr>
+      </p:sp>
+      <p:sp>
+        <p:nvSpPr>
+          <p:cNvPr id="2" name="kicker-05-marker">
+            <a:extLst xmlns:a="http://schemas.openxmlformats.org/drawingml/2006/main">
+              <a:ext uri="{FF2B5EF4-FFF2-40B4-BE49-F238E27FC236}">
+                <a16:creationId xmlns:a16="http://schemas.microsoft.com/office/drawing/2014/main" id="{4FCE4884-CFBE-49CB-B430-864C481BFD31}"/>
               </a:ext>
             </a:extLst>
           </p:cNvPr>
@@ -8464,21 +7198,17 @@
             <a:srgbClr val="C9792B"/>
           </a:solidFill>
           <a:ln xmlns:a="http://schemas.openxmlformats.org/drawingml/2006/main" w="0">
-            <a:solidFill>
-              <a:srgbClr val="000000">
-                <a:alpha val="0"/>
-              </a:srgbClr>
-            </a:solidFill>
-            <a:prstDash val="solid"/>
-          </a:ln>
-        </p:spPr>
-      </p:sp>
-      <p:sp>
-        <p:nvSpPr>
-          <p:cNvPr id="4" name="kicker-05-label">
-            <a:extLst xmlns:a="http://schemas.openxmlformats.org/drawingml/2006/main">
-              <a:ext uri="{FF2B5EF4-FFF2-40B4-BE49-F238E27FC236}">
-                <a16:creationId xmlns:a16="http://schemas.microsoft.com/office/drawing/2014/main" id="{07704CAB-3AEB-496A-8596-4689E5FF05E5}"/>
+            <a:noFill/>
+            <a:prstDash val="solid"/>
+          </a:ln>
+        </p:spPr>
+      </p:sp>
+      <p:sp>
+        <p:nvSpPr>
+          <p:cNvPr id="3" name="kicker-05-label">
+            <a:extLst xmlns:a="http://schemas.openxmlformats.org/drawingml/2006/main">
+              <a:ext uri="{FF2B5EF4-FFF2-40B4-BE49-F238E27FC236}">
+                <a16:creationId xmlns:a16="http://schemas.microsoft.com/office/drawing/2014/main" id="{F13A8683-EA01-42CB-866C-6D39C3F05B5D}"/>
               </a:ext>
             </a:extLst>
           </p:cNvPr>
@@ -8495,17 +7225,9 @@
           <a:prstGeom xmlns:a="http://schemas.openxmlformats.org/drawingml/2006/main" prst="rect">
             <a:avLst/>
           </a:prstGeom>
-          <a:solidFill xmlns:a="http://schemas.openxmlformats.org/drawingml/2006/main">
-            <a:srgbClr val="000000">
-              <a:alpha val="0"/>
-            </a:srgbClr>
-          </a:solidFill>
-          <a:ln xmlns:a="http://schemas.openxmlformats.org/drawingml/2006/main" w="0">
-            <a:solidFill>
-              <a:srgbClr val="000000">
-                <a:alpha val="0"/>
-              </a:srgbClr>
-            </a:solidFill>
+          <a:noFill xmlns:a="http://schemas.openxmlformats.org/drawingml/2006/main"/>
+          <a:ln xmlns:a="http://schemas.openxmlformats.org/drawingml/2006/main" w="0">
+            <a:noFill/>
             <a:prstDash val="solid"/>
           </a:ln>
         </p:spPr>
@@ -8539,37 +7261,29 @@
       </p:sp>
       <p:sp>
         <p:nvSpPr>
-          <p:cNvPr id="5" name="">
-            <a:extLst xmlns:a="http://schemas.openxmlformats.org/drawingml/2006/main">
-              <a:ext uri="{FF2B5EF4-FFF2-40B4-BE49-F238E27FC236}">
-                <a16:creationId xmlns:a16="http://schemas.microsoft.com/office/drawing/2014/main" id="{46F0D29D-01DA-40D8-87AB-6FF1B8C022DA}"/>
-              </a:ext>
-            </a:extLst>
-          </p:cNvPr>
-          <p:cNvSpPr>
-            <a:spLocks xmlns:a="http://schemas.openxmlformats.org/drawingml/2006/main" noGrp="1"/>
-          </p:cNvSpPr>
-          <p:nvPr/>
-        </p:nvSpPr>
-        <p:spPr>
-          <a:xfrm xmlns:a="http://schemas.openxmlformats.org/drawingml/2006/main">
-            <a:off x="685800" y="876300"/>
-            <a:ext cx="8191500" cy="990600"/>
-          </a:xfrm>
-          <a:prstGeom xmlns:a="http://schemas.openxmlformats.org/drawingml/2006/main" prst="rect">
-            <a:avLst/>
-          </a:prstGeom>
-          <a:solidFill xmlns:a="http://schemas.openxmlformats.org/drawingml/2006/main">
-            <a:srgbClr val="000000">
-              <a:alpha val="0"/>
-            </a:srgbClr>
-          </a:solidFill>
-          <a:ln xmlns:a="http://schemas.openxmlformats.org/drawingml/2006/main" w="0">
-            <a:solidFill>
-              <a:srgbClr val="000000">
-                <a:alpha val="0"/>
-              </a:srgbClr>
-            </a:solidFill>
+          <p:cNvPr id="4" name="">
+            <a:extLst xmlns:a="http://schemas.openxmlformats.org/drawingml/2006/main">
+              <a:ext uri="{FF2B5EF4-FFF2-40B4-BE49-F238E27FC236}">
+                <a16:creationId xmlns:a16="http://schemas.microsoft.com/office/drawing/2014/main" id="{FA04549E-36CD-4FAE-816C-3F0F63596236}"/>
+              </a:ext>
+            </a:extLst>
+          </p:cNvPr>
+          <p:cNvSpPr>
+            <a:spLocks xmlns:a="http://schemas.openxmlformats.org/drawingml/2006/main" noGrp="1"/>
+          </p:cNvSpPr>
+          <p:nvPr/>
+        </p:nvSpPr>
+        <p:spPr>
+          <a:xfrm xmlns:a="http://schemas.openxmlformats.org/drawingml/2006/main">
+            <a:off x="685800" y="1066800"/>
+            <a:ext cx="8953500" cy="914400"/>
+          </a:xfrm>
+          <a:prstGeom xmlns:a="http://schemas.openxmlformats.org/drawingml/2006/main" prst="rect">
+            <a:avLst/>
+          </a:prstGeom>
+          <a:noFill xmlns:a="http://schemas.openxmlformats.org/drawingml/2006/main"/>
+          <a:ln xmlns:a="http://schemas.openxmlformats.org/drawingml/2006/main" w="0">
+            <a:noFill/>
             <a:prstDash val="solid"/>
           </a:ln>
         </p:spPr>
@@ -8596,7 +7310,63 @@
                 <a:ea typeface="Aptos Display"/>
                 <a:cs typeface="Aptos Display"/>
               </a:rPr>
-              <a:t>La mise en prod des ETL Python doit être pilotée comme une release.</a:t>
+              <a:t>Où en est la mise en production de mon ETL Python ?</a:t>
+            </a:r>
+          </a:p>
+        </p:txBody>
+      </p:sp>
+      <p:sp>
+        <p:nvSpPr>
+          <p:cNvPr id="5" name="">
+            <a:extLst xmlns:a="http://schemas.openxmlformats.org/drawingml/2006/main">
+              <a:ext uri="{FF2B5EF4-FFF2-40B4-BE49-F238E27FC236}">
+                <a16:creationId xmlns:a16="http://schemas.microsoft.com/office/drawing/2014/main" id="{973C4304-8B92-44B7-A73E-E691ED767335}"/>
+              </a:ext>
+            </a:extLst>
+          </p:cNvPr>
+          <p:cNvSpPr>
+            <a:spLocks xmlns:a="http://schemas.openxmlformats.org/drawingml/2006/main" noGrp="1"/>
+          </p:cNvSpPr>
+          <p:nvPr/>
+        </p:nvSpPr>
+        <p:spPr>
+          <a:xfrm xmlns:a="http://schemas.openxmlformats.org/drawingml/2006/main">
+            <a:off x="704850" y="2152650"/>
+            <a:ext cx="9144000" cy="533400"/>
+          </a:xfrm>
+          <a:prstGeom xmlns:a="http://schemas.openxmlformats.org/drawingml/2006/main" prst="rect">
+            <a:avLst/>
+          </a:prstGeom>
+          <a:noFill xmlns:a="http://schemas.openxmlformats.org/drawingml/2006/main"/>
+          <a:ln xmlns:a="http://schemas.openxmlformats.org/drawingml/2006/main" w="0">
+            <a:noFill/>
+            <a:prstDash val="solid"/>
+          </a:ln>
+        </p:spPr>
+        <p:txBody>
+          <a:bodyPr xmlns:a="http://schemas.openxmlformats.org/drawingml/2006/main" lIns="0" tIns="0" rIns="0" bIns="0" anchor="t"/>
+          <a:lstStyle xmlns:a="http://schemas.openxmlformats.org/drawingml/2006/main"/>
+          <a:p xmlns:a="http://schemas.openxmlformats.org/drawingml/2006/main">
+            <a:pPr algn="l">
+              <a:defRPr sz="1650" b="0">
+                <a:solidFill>
+                  <a:srgbClr val="6E7681"/>
+                </a:solidFill>
+                <a:latin typeface="Aptos"/>
+                <a:ea typeface="Aptos"/>
+                <a:cs typeface="Aptos"/>
+              </a:defRPr>
+            </a:pPr>
+            <a:r>
+              <a:rPr sz="1650" b="0">
+                <a:solidFill>
+                  <a:srgbClr val="6E7681"/>
+                </a:solidFill>
+                <a:latin typeface="Aptos"/>
+                <a:ea typeface="Aptos"/>
+                <a:cs typeface="Aptos"/>
+              </a:rPr>
+              <a:t>Contexte à partager avec l’IT : nous avons une nouvelle machine Python et la mise en production de l’ETL est demandée depuis plusieurs mois.</a:t>
             </a:r>
           </a:p>
         </p:txBody>
@@ -8606,354 +7376,364 @@
           <p:cNvPr id="6" name="">
             <a:extLst xmlns:a="http://schemas.openxmlformats.org/drawingml/2006/main">
               <a:ext uri="{FF2B5EF4-FFF2-40B4-BE49-F238E27FC236}">
-                <a16:creationId xmlns:a16="http://schemas.microsoft.com/office/drawing/2014/main" id="{70559D49-38A5-4AE3-AAAA-56CA9E2788A2}"/>
-              </a:ext>
-            </a:extLst>
-          </p:cNvPr>
-          <p:cNvSpPr>
-            <a:spLocks xmlns:a="http://schemas.openxmlformats.org/drawingml/2006/main" noGrp="1"/>
-          </p:cNvSpPr>
-          <p:nvPr/>
-        </p:nvSpPr>
-        <p:spPr>
-          <a:xfrm xmlns:a="http://schemas.openxmlformats.org/drawingml/2006/main">
-            <a:off x="704850" y="1943100"/>
-            <a:ext cx="8001000" cy="457200"/>
+                <a16:creationId xmlns:a16="http://schemas.microsoft.com/office/drawing/2014/main" id="{85BB1894-B4C4-43BE-908F-E228C10FA60D}"/>
+              </a:ext>
+            </a:extLst>
+          </p:cNvPr>
+          <p:cNvSpPr>
+            <a:spLocks xmlns:a="http://schemas.openxmlformats.org/drawingml/2006/main" noGrp="1"/>
+          </p:cNvSpPr>
+          <p:nvPr/>
+        </p:nvSpPr>
+        <p:spPr>
+          <a:xfrm xmlns:a="http://schemas.openxmlformats.org/drawingml/2006/main">
+            <a:off x="1066800" y="3181350"/>
+            <a:ext cx="3238500" cy="323850"/>
+          </a:xfrm>
+          <a:prstGeom xmlns:a="http://schemas.openxmlformats.org/drawingml/2006/main" prst="rect">
+            <a:avLst/>
+          </a:prstGeom>
+          <a:noFill xmlns:a="http://schemas.openxmlformats.org/drawingml/2006/main"/>
+          <a:ln xmlns:a="http://schemas.openxmlformats.org/drawingml/2006/main" w="0">
+            <a:noFill/>
+            <a:prstDash val="solid"/>
+          </a:ln>
+        </p:spPr>
+        <p:txBody>
+          <a:bodyPr xmlns:a="http://schemas.openxmlformats.org/drawingml/2006/main" lIns="0" tIns="0" rIns="0" bIns="0" anchor="ctr"/>
+          <a:lstStyle xmlns:a="http://schemas.openxmlformats.org/drawingml/2006/main"/>
+          <a:p xmlns:a="http://schemas.openxmlformats.org/drawingml/2006/main">
+            <a:pPr algn="l">
+              <a:defRPr sz="2100" b="1">
+                <a:solidFill>
+                  <a:srgbClr val="C9792B"/>
+                </a:solidFill>
+                <a:latin typeface="Aptos"/>
+                <a:ea typeface="Aptos"/>
+                <a:cs typeface="Aptos"/>
+              </a:defRPr>
+            </a:pPr>
+            <a:r>
+              <a:rPr sz="2100" b="1">
+                <a:solidFill>
+                  <a:srgbClr val="C9792B"/>
+                </a:solidFill>
+                <a:latin typeface="Aptos"/>
+                <a:ea typeface="Aptos"/>
+                <a:cs typeface="Aptos"/>
+              </a:rPr>
+              <a:t>- Nouvelle machine Python</a:t>
+            </a:r>
+          </a:p>
+        </p:txBody>
+      </p:sp>
+      <p:sp>
+        <p:nvSpPr>
+          <p:cNvPr id="7" name="">
+            <a:extLst xmlns:a="http://schemas.openxmlformats.org/drawingml/2006/main">
+              <a:ext uri="{FF2B5EF4-FFF2-40B4-BE49-F238E27FC236}">
+                <a16:creationId xmlns:a16="http://schemas.microsoft.com/office/drawing/2014/main" id="{3AF5BE26-59A1-47FD-B70C-D0C885E77048}"/>
+              </a:ext>
+            </a:extLst>
+          </p:cNvPr>
+          <p:cNvSpPr>
+            <a:spLocks xmlns:a="http://schemas.openxmlformats.org/drawingml/2006/main" noGrp="1"/>
+          </p:cNvSpPr>
+          <p:nvPr/>
+        </p:nvSpPr>
+        <p:spPr>
+          <a:xfrm xmlns:a="http://schemas.openxmlformats.org/drawingml/2006/main">
+            <a:off x="4572000" y="3200400"/>
+            <a:ext cx="5810250" cy="361950"/>
+          </a:xfrm>
+          <a:prstGeom xmlns:a="http://schemas.openxmlformats.org/drawingml/2006/main" prst="rect">
+            <a:avLst/>
+          </a:prstGeom>
+          <a:noFill xmlns:a="http://schemas.openxmlformats.org/drawingml/2006/main"/>
+          <a:ln xmlns:a="http://schemas.openxmlformats.org/drawingml/2006/main" w="0">
+            <a:noFill/>
+            <a:prstDash val="solid"/>
+          </a:ln>
+        </p:spPr>
+        <p:txBody>
+          <a:bodyPr xmlns:a="http://schemas.openxmlformats.org/drawingml/2006/main" lIns="0" tIns="0" rIns="0" bIns="0" anchor="ctr"/>
+          <a:lstStyle xmlns:a="http://schemas.openxmlformats.org/drawingml/2006/main"/>
+          <a:p xmlns:a="http://schemas.openxmlformats.org/drawingml/2006/main">
+            <a:pPr algn="l">
+              <a:defRPr sz="1575" b="0">
+                <a:solidFill>
+                  <a:srgbClr val="1F2933"/>
+                </a:solidFill>
+                <a:latin typeface="Aptos"/>
+                <a:ea typeface="Aptos"/>
+                <a:cs typeface="Aptos"/>
+              </a:defRPr>
+            </a:pPr>
+            <a:r>
+              <a:rPr sz="1575" b="0">
+                <a:solidFill>
+                  <a:srgbClr val="1F2933"/>
+                </a:solidFill>
+                <a:latin typeface="Aptos"/>
+                <a:ea typeface="Aptos"/>
+                <a:cs typeface="Aptos"/>
+              </a:rPr>
+              <a:t>Confirmer que l’environnement est prêt pour exécuter l’ETL.</a:t>
+            </a:r>
+          </a:p>
+        </p:txBody>
+      </p:sp>
+      <p:sp>
+        <p:nvSpPr>
+          <p:cNvPr id="8" name="">
+            <a:extLst xmlns:a="http://schemas.openxmlformats.org/drawingml/2006/main">
+              <a:ext uri="{FF2B5EF4-FFF2-40B4-BE49-F238E27FC236}">
+                <a16:creationId xmlns:a16="http://schemas.microsoft.com/office/drawing/2014/main" id="{83597A1F-2254-426C-8CCB-4CFA57F06786}"/>
+              </a:ext>
+            </a:extLst>
+          </p:cNvPr>
+          <p:cNvSpPr>
+            <a:spLocks xmlns:a="http://schemas.openxmlformats.org/drawingml/2006/main" noGrp="1"/>
+          </p:cNvSpPr>
+          <p:nvPr/>
+        </p:nvSpPr>
+        <p:spPr>
+          <a:xfrm xmlns:a="http://schemas.openxmlformats.org/drawingml/2006/main">
+            <a:off x="1066800" y="3962400"/>
+            <a:ext cx="3238500" cy="323850"/>
+          </a:xfrm>
+          <a:prstGeom xmlns:a="http://schemas.openxmlformats.org/drawingml/2006/main" prst="rect">
+            <a:avLst/>
+          </a:prstGeom>
+          <a:noFill xmlns:a="http://schemas.openxmlformats.org/drawingml/2006/main"/>
+          <a:ln xmlns:a="http://schemas.openxmlformats.org/drawingml/2006/main" w="0">
+            <a:noFill/>
+            <a:prstDash val="solid"/>
+          </a:ln>
+        </p:spPr>
+        <p:txBody>
+          <a:bodyPr xmlns:a="http://schemas.openxmlformats.org/drawingml/2006/main" lIns="0" tIns="0" rIns="0" bIns="0" anchor="ctr"/>
+          <a:lstStyle xmlns:a="http://schemas.openxmlformats.org/drawingml/2006/main"/>
+          <a:p xmlns:a="http://schemas.openxmlformats.org/drawingml/2006/main">
+            <a:pPr algn="l">
+              <a:defRPr sz="2100" b="1">
+                <a:solidFill>
+                  <a:srgbClr val="C9792B"/>
+                </a:solidFill>
+                <a:latin typeface="Aptos"/>
+                <a:ea typeface="Aptos"/>
+                <a:cs typeface="Aptos"/>
+              </a:defRPr>
+            </a:pPr>
+            <a:r>
+              <a:rPr sz="2100" b="1">
+                <a:solidFill>
+                  <a:srgbClr val="C9792B"/>
+                </a:solidFill>
+                <a:latin typeface="Aptos"/>
+                <a:ea typeface="Aptos"/>
+                <a:cs typeface="Aptos"/>
+              </a:rPr>
+              <a:t>- Proposition mise en prod</a:t>
+            </a:r>
+          </a:p>
+        </p:txBody>
+      </p:sp>
+      <p:sp>
+        <p:nvSpPr>
+          <p:cNvPr id="9" name="">
+            <a:extLst xmlns:a="http://schemas.openxmlformats.org/drawingml/2006/main">
+              <a:ext uri="{FF2B5EF4-FFF2-40B4-BE49-F238E27FC236}">
+                <a16:creationId xmlns:a16="http://schemas.microsoft.com/office/drawing/2014/main" id="{31C88D18-07B2-41F0-B62D-C7C99D6B832C}"/>
+              </a:ext>
+            </a:extLst>
+          </p:cNvPr>
+          <p:cNvSpPr>
+            <a:spLocks xmlns:a="http://schemas.openxmlformats.org/drawingml/2006/main" noGrp="1"/>
+          </p:cNvSpPr>
+          <p:nvPr/>
+        </p:nvSpPr>
+        <p:spPr>
+          <a:xfrm xmlns:a="http://schemas.openxmlformats.org/drawingml/2006/main">
+            <a:off x="4572000" y="3981450"/>
+            <a:ext cx="5810250" cy="361950"/>
+          </a:xfrm>
+          <a:prstGeom xmlns:a="http://schemas.openxmlformats.org/drawingml/2006/main" prst="rect">
+            <a:avLst/>
+          </a:prstGeom>
+          <a:noFill xmlns:a="http://schemas.openxmlformats.org/drawingml/2006/main"/>
+          <a:ln xmlns:a="http://schemas.openxmlformats.org/drawingml/2006/main" w="0">
+            <a:noFill/>
+            <a:prstDash val="solid"/>
+          </a:ln>
+        </p:spPr>
+        <p:txBody>
+          <a:bodyPr xmlns:a="http://schemas.openxmlformats.org/drawingml/2006/main" lIns="0" tIns="0" rIns="0" bIns="0" anchor="ctr"/>
+          <a:lstStyle xmlns:a="http://schemas.openxmlformats.org/drawingml/2006/main"/>
+          <a:p xmlns:a="http://schemas.openxmlformats.org/drawingml/2006/main">
+            <a:pPr algn="l">
+              <a:defRPr sz="1575" b="0">
+                <a:solidFill>
+                  <a:srgbClr val="1F2933"/>
+                </a:solidFill>
+                <a:latin typeface="Aptos"/>
+                <a:ea typeface="Aptos"/>
+                <a:cs typeface="Aptos"/>
+              </a:defRPr>
+            </a:pPr>
+            <a:r>
+              <a:rPr sz="1575" b="0">
+                <a:solidFill>
+                  <a:srgbClr val="1F2933"/>
+                </a:solidFill>
+                <a:latin typeface="Aptos"/>
+                <a:ea typeface="Aptos"/>
+                <a:cs typeface="Aptos"/>
+              </a:rPr>
+              <a:t>Présenter une version simple de passage en production.</a:t>
+            </a:r>
+          </a:p>
+        </p:txBody>
+      </p:sp>
+      <p:sp>
+        <p:nvSpPr>
+          <p:cNvPr id="10" name="">
+            <a:extLst xmlns:a="http://schemas.openxmlformats.org/drawingml/2006/main">
+              <a:ext uri="{FF2B5EF4-FFF2-40B4-BE49-F238E27FC236}">
+                <a16:creationId xmlns:a16="http://schemas.microsoft.com/office/drawing/2014/main" id="{2314B5E2-7BEF-4642-8973-74185B6217E8}"/>
+              </a:ext>
+            </a:extLst>
+          </p:cNvPr>
+          <p:cNvSpPr>
+            <a:spLocks xmlns:a="http://schemas.openxmlformats.org/drawingml/2006/main" noGrp="1"/>
+          </p:cNvSpPr>
+          <p:nvPr/>
+        </p:nvSpPr>
+        <p:spPr>
+          <a:xfrm xmlns:a="http://schemas.openxmlformats.org/drawingml/2006/main">
+            <a:off x="1066800" y="4743450"/>
+            <a:ext cx="3238500" cy="323850"/>
+          </a:xfrm>
+          <a:prstGeom xmlns:a="http://schemas.openxmlformats.org/drawingml/2006/main" prst="rect">
+            <a:avLst/>
+          </a:prstGeom>
+          <a:noFill xmlns:a="http://schemas.openxmlformats.org/drawingml/2006/main"/>
+          <a:ln xmlns:a="http://schemas.openxmlformats.org/drawingml/2006/main" w="0">
+            <a:noFill/>
+            <a:prstDash val="solid"/>
+          </a:ln>
+        </p:spPr>
+        <p:txBody>
+          <a:bodyPr xmlns:a="http://schemas.openxmlformats.org/drawingml/2006/main" lIns="0" tIns="0" rIns="0" bIns="0" anchor="ctr"/>
+          <a:lstStyle xmlns:a="http://schemas.openxmlformats.org/drawingml/2006/main"/>
+          <a:p xmlns:a="http://schemas.openxmlformats.org/drawingml/2006/main">
+            <a:pPr algn="l">
+              <a:defRPr sz="2100" b="1">
+                <a:solidFill>
+                  <a:srgbClr val="C9792B"/>
+                </a:solidFill>
+                <a:latin typeface="Aptos"/>
+                <a:ea typeface="Aptos"/>
+                <a:cs typeface="Aptos"/>
+              </a:defRPr>
+            </a:pPr>
+            <a:r>
+              <a:rPr sz="2100" b="1">
+                <a:solidFill>
+                  <a:srgbClr val="C9792B"/>
+                </a:solidFill>
+                <a:latin typeface="Aptos"/>
+                <a:ea typeface="Aptos"/>
+                <a:cs typeface="Aptos"/>
+              </a:rPr>
+              <a:t>- État d’avancement</a:t>
+            </a:r>
+          </a:p>
+        </p:txBody>
+      </p:sp>
+      <p:sp>
+        <p:nvSpPr>
+          <p:cNvPr id="11" name="">
+            <a:extLst xmlns:a="http://schemas.openxmlformats.org/drawingml/2006/main">
+              <a:ext uri="{FF2B5EF4-FFF2-40B4-BE49-F238E27FC236}">
+                <a16:creationId xmlns:a16="http://schemas.microsoft.com/office/drawing/2014/main" id="{57420F9E-E476-4831-90CE-1EA365D94E03}"/>
+              </a:ext>
+            </a:extLst>
+          </p:cNvPr>
+          <p:cNvSpPr>
+            <a:spLocks xmlns:a="http://schemas.openxmlformats.org/drawingml/2006/main" noGrp="1"/>
+          </p:cNvSpPr>
+          <p:nvPr/>
+        </p:nvSpPr>
+        <p:spPr>
+          <a:xfrm xmlns:a="http://schemas.openxmlformats.org/drawingml/2006/main">
+            <a:off x="4572000" y="4762500"/>
+            <a:ext cx="5810250" cy="361950"/>
+          </a:xfrm>
+          <a:prstGeom xmlns:a="http://schemas.openxmlformats.org/drawingml/2006/main" prst="rect">
+            <a:avLst/>
+          </a:prstGeom>
+          <a:noFill xmlns:a="http://schemas.openxmlformats.org/drawingml/2006/main"/>
+          <a:ln xmlns:a="http://schemas.openxmlformats.org/drawingml/2006/main" w="0">
+            <a:noFill/>
+            <a:prstDash val="solid"/>
+          </a:ln>
+        </p:spPr>
+        <p:txBody>
+          <a:bodyPr xmlns:a="http://schemas.openxmlformats.org/drawingml/2006/main" lIns="0" tIns="0" rIns="0" bIns="0" anchor="ctr"/>
+          <a:lstStyle xmlns:a="http://schemas.openxmlformats.org/drawingml/2006/main"/>
+          <a:p xmlns:a="http://schemas.openxmlformats.org/drawingml/2006/main">
+            <a:pPr algn="l">
+              <a:defRPr sz="1575" b="0">
+                <a:solidFill>
+                  <a:srgbClr val="1F2933"/>
+                </a:solidFill>
+                <a:latin typeface="Aptos"/>
+                <a:ea typeface="Aptos"/>
+                <a:cs typeface="Aptos"/>
+              </a:defRPr>
+            </a:pPr>
+            <a:r>
+              <a:rPr sz="1575" b="0">
+                <a:solidFill>
+                  <a:srgbClr val="1F2933"/>
+                </a:solidFill>
+                <a:latin typeface="Aptos"/>
+                <a:ea typeface="Aptos"/>
+                <a:cs typeface="Aptos"/>
+              </a:rPr>
+              <a:t>Demander ce qui est déjà validé et ce qui bloque encore.</a:t>
+            </a:r>
+          </a:p>
+        </p:txBody>
+      </p:sp>
+      <p:sp>
+        <p:nvSpPr>
+          <p:cNvPr id="12" name="">
+            <a:extLst xmlns:a="http://schemas.openxmlformats.org/drawingml/2006/main">
+              <a:ext uri="{FF2B5EF4-FFF2-40B4-BE49-F238E27FC236}">
+                <a16:creationId xmlns:a16="http://schemas.microsoft.com/office/drawing/2014/main" id="{3815B52A-F07E-4EAC-9729-1900E6E04C2A}"/>
+              </a:ext>
+            </a:extLst>
+          </p:cNvPr>
+          <p:cNvSpPr>
+            <a:spLocks xmlns:a="http://schemas.openxmlformats.org/drawingml/2006/main" noGrp="1"/>
+          </p:cNvSpPr>
+          <p:nvPr/>
+        </p:nvSpPr>
+        <p:spPr>
+          <a:xfrm xmlns:a="http://schemas.openxmlformats.org/drawingml/2006/main">
+            <a:off x="685800" y="5734050"/>
+            <a:ext cx="10439400" cy="457200"/>
           </a:xfrm>
           <a:prstGeom xmlns:a="http://schemas.openxmlformats.org/drawingml/2006/main" prst="rect">
             <a:avLst/>
           </a:prstGeom>
           <a:solidFill xmlns:a="http://schemas.openxmlformats.org/drawingml/2006/main">
-            <a:srgbClr val="000000">
-              <a:alpha val="0"/>
-            </a:srgbClr>
-          </a:solidFill>
-          <a:ln xmlns:a="http://schemas.openxmlformats.org/drawingml/2006/main" w="0">
-            <a:solidFill>
-              <a:srgbClr val="000000">
-                <a:alpha val="0"/>
-              </a:srgbClr>
-            </a:solidFill>
-            <a:prstDash val="solid"/>
-          </a:ln>
-        </p:spPr>
-        <p:txBody>
-          <a:bodyPr xmlns:a="http://schemas.openxmlformats.org/drawingml/2006/main" lIns="0" tIns="0" rIns="0" bIns="0" anchor="t"/>
-          <a:lstStyle xmlns:a="http://schemas.openxmlformats.org/drawingml/2006/main"/>
-          <a:p xmlns:a="http://schemas.openxmlformats.org/drawingml/2006/main">
-            <a:pPr algn="l">
-              <a:defRPr sz="1425" b="0">
-                <a:solidFill>
-                  <a:srgbClr val="6E7681"/>
-                </a:solidFill>
-                <a:latin typeface="Aptos"/>
-                <a:ea typeface="Aptos"/>
-                <a:cs typeface="Aptos"/>
-              </a:defRPr>
-            </a:pPr>
-            <a:r>
-              <a:rPr sz="1425" b="0">
-                <a:solidFill>
-                  <a:srgbClr val="6E7681"/>
-                </a:solidFill>
-                <a:latin typeface="Aptos"/>
-                <a:ea typeface="Aptos"/>
-                <a:cs typeface="Aptos"/>
-              </a:rPr>
-              <a:t>À présenter : ce qui est prêt, ce qui reste à sécuriser, et ce que l’IT doit valider pour passer en production.</a:t>
-            </a:r>
-          </a:p>
-        </p:txBody>
-      </p:sp>
-      <p:sp>
-        <p:nvSpPr>
-          <p:cNvPr id="7" name="">
-            <a:extLst xmlns:a="http://schemas.openxmlformats.org/drawingml/2006/main">
-              <a:ext uri="{FF2B5EF4-FFF2-40B4-BE49-F238E27FC236}">
-                <a16:creationId xmlns:a16="http://schemas.microsoft.com/office/drawing/2014/main" id="{5E04DF64-D180-4419-9737-61041E3DB447}"/>
-              </a:ext>
-            </a:extLst>
-          </p:cNvPr>
-          <p:cNvSpPr>
-            <a:spLocks xmlns:a="http://schemas.openxmlformats.org/drawingml/2006/main" noGrp="1"/>
-          </p:cNvSpPr>
-          <p:nvPr/>
-        </p:nvSpPr>
-        <p:spPr>
-          <a:xfrm xmlns:a="http://schemas.openxmlformats.org/drawingml/2006/main">
-            <a:off x="685800" y="3067050"/>
-            <a:ext cx="2381250" cy="2152650"/>
-          </a:xfrm>
-          <a:prstGeom xmlns:a="http://schemas.openxmlformats.org/drawingml/2006/main" prst="rect">
-            <a:avLst/>
-          </a:prstGeom>
-          <a:solidFill xmlns:a="http://schemas.openxmlformats.org/drawingml/2006/main">
-            <a:srgbClr val="DDEAF5"/>
-          </a:solidFill>
-          <a:ln xmlns:a="http://schemas.openxmlformats.org/drawingml/2006/main" w="11430">
-            <a:solidFill>
-              <a:srgbClr val="2F6FAD"/>
-            </a:solidFill>
-            <a:prstDash val="solid"/>
-          </a:ln>
-        </p:spPr>
-      </p:sp>
-      <p:sp>
-        <p:nvSpPr>
-          <p:cNvPr id="8" name="">
-            <a:extLst xmlns:a="http://schemas.openxmlformats.org/drawingml/2006/main">
-              <a:ext uri="{FF2B5EF4-FFF2-40B4-BE49-F238E27FC236}">
-                <a16:creationId xmlns:a16="http://schemas.microsoft.com/office/drawing/2014/main" id="{93378983-64EA-4C60-89D1-390FE4AC863C}"/>
-              </a:ext>
-            </a:extLst>
-          </p:cNvPr>
-          <p:cNvSpPr>
-            <a:spLocks xmlns:a="http://schemas.openxmlformats.org/drawingml/2006/main" noGrp="1"/>
-          </p:cNvSpPr>
-          <p:nvPr/>
-        </p:nvSpPr>
-        <p:spPr>
-          <a:xfrm xmlns:a="http://schemas.openxmlformats.org/drawingml/2006/main">
-            <a:off x="876300" y="3276600"/>
-            <a:ext cx="2000250" cy="323850"/>
-          </a:xfrm>
-          <a:prstGeom xmlns:a="http://schemas.openxmlformats.org/drawingml/2006/main" prst="rect">
-            <a:avLst/>
-          </a:prstGeom>
-          <a:solidFill xmlns:a="http://schemas.openxmlformats.org/drawingml/2006/main">
-            <a:srgbClr val="000000">
-              <a:alpha val="0"/>
-            </a:srgbClr>
-          </a:solidFill>
-          <a:ln xmlns:a="http://schemas.openxmlformats.org/drawingml/2006/main" w="0">
-            <a:solidFill>
-              <a:srgbClr val="000000">
-                <a:alpha val="0"/>
-              </a:srgbClr>
-            </a:solidFill>
-            <a:prstDash val="solid"/>
-          </a:ln>
-        </p:spPr>
-        <p:txBody>
-          <a:bodyPr xmlns:a="http://schemas.openxmlformats.org/drawingml/2006/main" lIns="0" tIns="0" rIns="0" bIns="0" anchor="ctr"/>
-          <a:lstStyle xmlns:a="http://schemas.openxmlformats.org/drawingml/2006/main"/>
-          <a:p xmlns:a="http://schemas.openxmlformats.org/drawingml/2006/main">
-            <a:pPr algn="l">
-              <a:defRPr sz="1575" b="1">
-                <a:solidFill>
-                  <a:srgbClr val="1F2933"/>
-                </a:solidFill>
-                <a:latin typeface="Aptos"/>
-                <a:ea typeface="Aptos"/>
-                <a:cs typeface="Aptos"/>
-              </a:defRPr>
-            </a:pPr>
-            <a:r>
-              <a:rPr sz="1575" b="1">
-                <a:solidFill>
-                  <a:srgbClr val="1F2933"/>
-                </a:solidFill>
-                <a:latin typeface="Aptos"/>
-                <a:ea typeface="Aptos"/>
-                <a:cs typeface="Aptos"/>
-              </a:rPr>
-              <a:t>Code ETL</a:t>
-            </a:r>
-          </a:p>
-        </p:txBody>
-      </p:sp>
-      <p:sp>
-        <p:nvSpPr>
-          <p:cNvPr id="9" name="">
-            <a:extLst xmlns:a="http://schemas.openxmlformats.org/drawingml/2006/main">
-              <a:ext uri="{FF2B5EF4-FFF2-40B4-BE49-F238E27FC236}">
-                <a16:creationId xmlns:a16="http://schemas.microsoft.com/office/drawing/2014/main" id="{94E63F81-D0B8-46B4-A895-F29DB12E9919}"/>
-              </a:ext>
-            </a:extLst>
-          </p:cNvPr>
-          <p:cNvSpPr>
-            <a:spLocks xmlns:a="http://schemas.openxmlformats.org/drawingml/2006/main" noGrp="1"/>
-          </p:cNvSpPr>
-          <p:nvPr/>
-        </p:nvSpPr>
-        <p:spPr>
-          <a:xfrm xmlns:a="http://schemas.openxmlformats.org/drawingml/2006/main">
-            <a:off x="876300" y="3733800"/>
-            <a:ext cx="2000250" cy="304800"/>
-          </a:xfrm>
-          <a:prstGeom xmlns:a="http://schemas.openxmlformats.org/drawingml/2006/main" prst="rect">
-            <a:avLst/>
-          </a:prstGeom>
-          <a:solidFill xmlns:a="http://schemas.openxmlformats.org/drawingml/2006/main">
-            <a:srgbClr val="000000">
-              <a:alpha val="0"/>
-            </a:srgbClr>
-          </a:solidFill>
-          <a:ln xmlns:a="http://schemas.openxmlformats.org/drawingml/2006/main" w="0">
-            <a:solidFill>
-              <a:srgbClr val="000000">
-                <a:alpha val="0"/>
-              </a:srgbClr>
-            </a:solidFill>
-            <a:prstDash val="solid"/>
-          </a:ln>
-        </p:spPr>
-        <p:txBody>
-          <a:bodyPr xmlns:a="http://schemas.openxmlformats.org/drawingml/2006/main" lIns="0" tIns="0" rIns="0" bIns="0" anchor="ctr"/>
-          <a:lstStyle xmlns:a="http://schemas.openxmlformats.org/drawingml/2006/main"/>
-          <a:p xmlns:a="http://schemas.openxmlformats.org/drawingml/2006/main">
-            <a:pPr algn="l">
-              <a:defRPr sz="1350" b="1">
-                <a:solidFill>
-                  <a:srgbClr val="2F6FAD"/>
-                </a:solidFill>
-                <a:latin typeface="Aptos"/>
-                <a:ea typeface="Aptos"/>
-                <a:cs typeface="Aptos"/>
-              </a:defRPr>
-            </a:pPr>
-            <a:r>
-              <a:rPr sz="1350" b="1">
-                <a:solidFill>
-                  <a:srgbClr val="2F6FAD"/>
-                </a:solidFill>
-                <a:latin typeface="Aptos"/>
-                <a:ea typeface="Aptos"/>
-                <a:cs typeface="Aptos"/>
-              </a:rPr>
-              <a:t>À confirmer</a:t>
-            </a:r>
-          </a:p>
-        </p:txBody>
-      </p:sp>
-      <p:sp>
-        <p:nvSpPr>
-          <p:cNvPr id="10" name="">
-            <a:extLst xmlns:a="http://schemas.openxmlformats.org/drawingml/2006/main">
-              <a:ext uri="{FF2B5EF4-FFF2-40B4-BE49-F238E27FC236}">
-                <a16:creationId xmlns:a16="http://schemas.microsoft.com/office/drawing/2014/main" id="{71F22A45-DEB5-4AA0-904B-0E7AA1E0D8BC}"/>
-              </a:ext>
-            </a:extLst>
-          </p:cNvPr>
-          <p:cNvSpPr>
-            <a:spLocks xmlns:a="http://schemas.openxmlformats.org/drawingml/2006/main" noGrp="1"/>
-          </p:cNvSpPr>
-          <p:nvPr/>
-        </p:nvSpPr>
-        <p:spPr>
-          <a:xfrm xmlns:a="http://schemas.openxmlformats.org/drawingml/2006/main">
-            <a:off x="876300" y="4229100"/>
-            <a:ext cx="2000250" cy="11430"/>
-          </a:xfrm>
-          <a:prstGeom xmlns:a="http://schemas.openxmlformats.org/drawingml/2006/main" prst="rect">
-            <a:avLst/>
-          </a:prstGeom>
-          <a:solidFill xmlns:a="http://schemas.openxmlformats.org/drawingml/2006/main">
-            <a:srgbClr val="2F6FAD"/>
-          </a:solidFill>
-          <a:ln xmlns:a="http://schemas.openxmlformats.org/drawingml/2006/main" w="0">
-            <a:solidFill>
-              <a:srgbClr val="000000">
-                <a:alpha val="0"/>
-              </a:srgbClr>
-            </a:solidFill>
-            <a:prstDash val="solid"/>
-          </a:ln>
-        </p:spPr>
-      </p:sp>
-      <p:sp>
-        <p:nvSpPr>
-          <p:cNvPr id="11" name="">
-            <a:extLst xmlns:a="http://schemas.openxmlformats.org/drawingml/2006/main">
-              <a:ext uri="{FF2B5EF4-FFF2-40B4-BE49-F238E27FC236}">
-                <a16:creationId xmlns:a16="http://schemas.microsoft.com/office/drawing/2014/main" id="{B7963A6E-C433-4D2F-9E2F-A32021B3A1DB}"/>
-              </a:ext>
-            </a:extLst>
-          </p:cNvPr>
-          <p:cNvSpPr>
-            <a:spLocks xmlns:a="http://schemas.openxmlformats.org/drawingml/2006/main" noGrp="1"/>
-          </p:cNvSpPr>
-          <p:nvPr/>
-        </p:nvSpPr>
-        <p:spPr>
-          <a:xfrm xmlns:a="http://schemas.openxmlformats.org/drawingml/2006/main">
-            <a:off x="876300" y="4438650"/>
-            <a:ext cx="2000250" cy="514350"/>
-          </a:xfrm>
-          <a:prstGeom xmlns:a="http://schemas.openxmlformats.org/drawingml/2006/main" prst="rect">
-            <a:avLst/>
-          </a:prstGeom>
-          <a:solidFill xmlns:a="http://schemas.openxmlformats.org/drawingml/2006/main">
-            <a:srgbClr val="000000">
-              <a:alpha val="0"/>
-            </a:srgbClr>
-          </a:solidFill>
-          <a:ln xmlns:a="http://schemas.openxmlformats.org/drawingml/2006/main" w="0">
-            <a:solidFill>
-              <a:srgbClr val="000000">
-                <a:alpha val="0"/>
-              </a:srgbClr>
-            </a:solidFill>
-            <a:prstDash val="solid"/>
-          </a:ln>
-        </p:spPr>
-        <p:txBody>
-          <a:bodyPr xmlns:a="http://schemas.openxmlformats.org/drawingml/2006/main" lIns="0" tIns="0" rIns="0" bIns="0" anchor="ctr"/>
-          <a:lstStyle xmlns:a="http://schemas.openxmlformats.org/drawingml/2006/main"/>
-          <a:p xmlns:a="http://schemas.openxmlformats.org/drawingml/2006/main">
-            <a:pPr algn="l">
-              <a:defRPr sz="1125" b="0">
-                <a:solidFill>
-                  <a:srgbClr val="6E7681"/>
-                </a:solidFill>
-                <a:latin typeface="Aptos"/>
-                <a:ea typeface="Aptos"/>
-                <a:cs typeface="Aptos"/>
-              </a:defRPr>
-            </a:pPr>
-            <a:r>
-              <a:rPr sz="1125" b="0">
-                <a:solidFill>
-                  <a:srgbClr val="6E7681"/>
-                </a:solidFill>
-                <a:latin typeface="Aptos"/>
-                <a:ea typeface="Aptos"/>
-                <a:cs typeface="Aptos"/>
-              </a:rPr>
-              <a:t>Scripts Python, paramètres, dépendances et packaging.</a:t>
-            </a:r>
-          </a:p>
-        </p:txBody>
-      </p:sp>
-      <p:sp>
-        <p:nvSpPr>
-          <p:cNvPr id="12" name="">
-            <a:extLst xmlns:a="http://schemas.openxmlformats.org/drawingml/2006/main">
-              <a:ext uri="{FF2B5EF4-FFF2-40B4-BE49-F238E27FC236}">
-                <a16:creationId xmlns:a16="http://schemas.microsoft.com/office/drawing/2014/main" id="{77DF6E7A-F32B-48F4-A6D7-4CE53E8A6155}"/>
-              </a:ext>
-            </a:extLst>
-          </p:cNvPr>
-          <p:cNvSpPr>
-            <a:spLocks xmlns:a="http://schemas.openxmlformats.org/drawingml/2006/main" noGrp="1"/>
-          </p:cNvSpPr>
-          <p:nvPr/>
-        </p:nvSpPr>
-        <p:spPr>
-          <a:xfrm xmlns:a="http://schemas.openxmlformats.org/drawingml/2006/main">
-            <a:off x="3276600" y="3067050"/>
-            <a:ext cx="2381250" cy="2152650"/>
-          </a:xfrm>
-          <a:prstGeom xmlns:a="http://schemas.openxmlformats.org/drawingml/2006/main" prst="rect">
-            <a:avLst/>
-          </a:prstGeom>
-          <a:solidFill xmlns:a="http://schemas.openxmlformats.org/drawingml/2006/main">
-            <a:srgbClr val="F2E1CF"/>
-          </a:solidFill>
-          <a:ln xmlns:a="http://schemas.openxmlformats.org/drawingml/2006/main" w="11430">
-            <a:solidFill>
-              <a:srgbClr val="C9792B"/>
-            </a:solidFill>
+            <a:srgbClr val="1F2933"/>
+          </a:solidFill>
+          <a:ln xmlns:a="http://schemas.openxmlformats.org/drawingml/2006/main" w="0">
+            <a:noFill/>
             <a:prstDash val="solid"/>
           </a:ln>
         </p:spPr>
@@ -8963,147 +7743,19 @@
           <p:cNvPr id="13" name="">
             <a:extLst xmlns:a="http://schemas.openxmlformats.org/drawingml/2006/main">
               <a:ext uri="{FF2B5EF4-FFF2-40B4-BE49-F238E27FC236}">
-                <a16:creationId xmlns:a16="http://schemas.microsoft.com/office/drawing/2014/main" id="{C9ED855D-51E3-4CE8-91DD-70F0B519CCF0}"/>
-              </a:ext>
-            </a:extLst>
-          </p:cNvPr>
-          <p:cNvSpPr>
-            <a:spLocks xmlns:a="http://schemas.openxmlformats.org/drawingml/2006/main" noGrp="1"/>
-          </p:cNvSpPr>
-          <p:nvPr/>
-        </p:nvSpPr>
-        <p:spPr>
-          <a:xfrm xmlns:a="http://schemas.openxmlformats.org/drawingml/2006/main">
-            <a:off x="3467100" y="3276600"/>
-            <a:ext cx="2000250" cy="323850"/>
-          </a:xfrm>
-          <a:prstGeom xmlns:a="http://schemas.openxmlformats.org/drawingml/2006/main" prst="rect">
-            <a:avLst/>
-          </a:prstGeom>
-          <a:solidFill xmlns:a="http://schemas.openxmlformats.org/drawingml/2006/main">
-            <a:srgbClr val="000000">
-              <a:alpha val="0"/>
-            </a:srgbClr>
-          </a:solidFill>
-          <a:ln xmlns:a="http://schemas.openxmlformats.org/drawingml/2006/main" w="0">
-            <a:solidFill>
-              <a:srgbClr val="000000">
-                <a:alpha val="0"/>
-              </a:srgbClr>
-            </a:solidFill>
-            <a:prstDash val="solid"/>
-          </a:ln>
-        </p:spPr>
-        <p:txBody>
-          <a:bodyPr xmlns:a="http://schemas.openxmlformats.org/drawingml/2006/main" lIns="0" tIns="0" rIns="0" bIns="0" anchor="ctr"/>
-          <a:lstStyle xmlns:a="http://schemas.openxmlformats.org/drawingml/2006/main"/>
-          <a:p xmlns:a="http://schemas.openxmlformats.org/drawingml/2006/main">
-            <a:pPr algn="l">
-              <a:defRPr sz="1575" b="1">
-                <a:solidFill>
-                  <a:srgbClr val="1F2933"/>
-                </a:solidFill>
-                <a:latin typeface="Aptos"/>
-                <a:ea typeface="Aptos"/>
-                <a:cs typeface="Aptos"/>
-              </a:defRPr>
-            </a:pPr>
-            <a:r>
-              <a:rPr sz="1575" b="1">
-                <a:solidFill>
-                  <a:srgbClr val="1F2933"/>
-                </a:solidFill>
-                <a:latin typeface="Aptos"/>
-                <a:ea typeface="Aptos"/>
-                <a:cs typeface="Aptos"/>
-              </a:rPr>
-              <a:t>Environnements</a:t>
-            </a:r>
-          </a:p>
-        </p:txBody>
-      </p:sp>
-      <p:sp>
-        <p:nvSpPr>
-          <p:cNvPr id="14" name="">
-            <a:extLst xmlns:a="http://schemas.openxmlformats.org/drawingml/2006/main">
-              <a:ext uri="{FF2B5EF4-FFF2-40B4-BE49-F238E27FC236}">
-                <a16:creationId xmlns:a16="http://schemas.microsoft.com/office/drawing/2014/main" id="{D3C12DC6-D460-4E47-B870-6F2414242E43}"/>
-              </a:ext>
-            </a:extLst>
-          </p:cNvPr>
-          <p:cNvSpPr>
-            <a:spLocks xmlns:a="http://schemas.openxmlformats.org/drawingml/2006/main" noGrp="1"/>
-          </p:cNvSpPr>
-          <p:nvPr/>
-        </p:nvSpPr>
-        <p:spPr>
-          <a:xfrm xmlns:a="http://schemas.openxmlformats.org/drawingml/2006/main">
-            <a:off x="3467100" y="3733800"/>
-            <a:ext cx="2000250" cy="304800"/>
-          </a:xfrm>
-          <a:prstGeom xmlns:a="http://schemas.openxmlformats.org/drawingml/2006/main" prst="rect">
-            <a:avLst/>
-          </a:prstGeom>
-          <a:solidFill xmlns:a="http://schemas.openxmlformats.org/drawingml/2006/main">
-            <a:srgbClr val="000000">
-              <a:alpha val="0"/>
-            </a:srgbClr>
-          </a:solidFill>
-          <a:ln xmlns:a="http://schemas.openxmlformats.org/drawingml/2006/main" w="0">
-            <a:solidFill>
-              <a:srgbClr val="000000">
-                <a:alpha val="0"/>
-              </a:srgbClr>
-            </a:solidFill>
-            <a:prstDash val="solid"/>
-          </a:ln>
-        </p:spPr>
-        <p:txBody>
-          <a:bodyPr xmlns:a="http://schemas.openxmlformats.org/drawingml/2006/main" lIns="0" tIns="0" rIns="0" bIns="0" anchor="ctr"/>
-          <a:lstStyle xmlns:a="http://schemas.openxmlformats.org/drawingml/2006/main"/>
-          <a:p xmlns:a="http://schemas.openxmlformats.org/drawingml/2006/main">
-            <a:pPr algn="l">
-              <a:defRPr sz="1350" b="1">
-                <a:solidFill>
-                  <a:srgbClr val="C9792B"/>
-                </a:solidFill>
-                <a:latin typeface="Aptos"/>
-                <a:ea typeface="Aptos"/>
-                <a:cs typeface="Aptos"/>
-              </a:defRPr>
-            </a:pPr>
-            <a:r>
-              <a:rPr sz="1350" b="1">
-                <a:solidFill>
-                  <a:srgbClr val="C9792B"/>
-                </a:solidFill>
-                <a:latin typeface="Aptos"/>
-                <a:ea typeface="Aptos"/>
-                <a:cs typeface="Aptos"/>
-              </a:rPr>
-              <a:t>En validation IT</a:t>
-            </a:r>
-          </a:p>
-        </p:txBody>
-      </p:sp>
-      <p:sp>
-        <p:nvSpPr>
-          <p:cNvPr id="15" name="">
-            <a:extLst xmlns:a="http://schemas.openxmlformats.org/drawingml/2006/main">
-              <a:ext uri="{FF2B5EF4-FFF2-40B4-BE49-F238E27FC236}">
-                <a16:creationId xmlns:a16="http://schemas.microsoft.com/office/drawing/2014/main" id="{A36CFE00-7354-4AC5-B2A4-3400AEA1829D}"/>
-              </a:ext>
-            </a:extLst>
-          </p:cNvPr>
-          <p:cNvSpPr>
-            <a:spLocks xmlns:a="http://schemas.openxmlformats.org/drawingml/2006/main" noGrp="1"/>
-          </p:cNvSpPr>
-          <p:nvPr/>
-        </p:nvSpPr>
-        <p:spPr>
-          <a:xfrm xmlns:a="http://schemas.openxmlformats.org/drawingml/2006/main">
-            <a:off x="3467100" y="4229100"/>
-            <a:ext cx="2000250" cy="11430"/>
+                <a16:creationId xmlns:a16="http://schemas.microsoft.com/office/drawing/2014/main" id="{65D3E3FF-1F8C-46FF-B0E1-9071F5D8EB2A}"/>
+              </a:ext>
+            </a:extLst>
+          </p:cNvPr>
+          <p:cNvSpPr>
+            <a:spLocks xmlns:a="http://schemas.openxmlformats.org/drawingml/2006/main" noGrp="1"/>
+          </p:cNvSpPr>
+          <p:nvPr/>
+        </p:nvSpPr>
+        <p:spPr>
+          <a:xfrm xmlns:a="http://schemas.openxmlformats.org/drawingml/2006/main">
+            <a:off x="685800" y="5734050"/>
+            <a:ext cx="76200" cy="457200"/>
           </a:xfrm>
           <a:prstGeom xmlns:a="http://schemas.openxmlformats.org/drawingml/2006/main" prst="rect">
             <a:avLst/>
@@ -9112,48 +7764,36 @@
             <a:srgbClr val="C9792B"/>
           </a:solidFill>
           <a:ln xmlns:a="http://schemas.openxmlformats.org/drawingml/2006/main" w="0">
-            <a:solidFill>
-              <a:srgbClr val="000000">
-                <a:alpha val="0"/>
-              </a:srgbClr>
-            </a:solidFill>
-            <a:prstDash val="solid"/>
-          </a:ln>
-        </p:spPr>
-      </p:sp>
-      <p:sp>
-        <p:nvSpPr>
-          <p:cNvPr id="16" name="">
-            <a:extLst xmlns:a="http://schemas.openxmlformats.org/drawingml/2006/main">
-              <a:ext uri="{FF2B5EF4-FFF2-40B4-BE49-F238E27FC236}">
-                <a16:creationId xmlns:a16="http://schemas.microsoft.com/office/drawing/2014/main" id="{4A7CBEC9-2114-4545-8A5B-E0F63BCE4BF6}"/>
-              </a:ext>
-            </a:extLst>
-          </p:cNvPr>
-          <p:cNvSpPr>
-            <a:spLocks xmlns:a="http://schemas.openxmlformats.org/drawingml/2006/main" noGrp="1"/>
-          </p:cNvSpPr>
-          <p:nvPr/>
-        </p:nvSpPr>
-        <p:spPr>
-          <a:xfrm xmlns:a="http://schemas.openxmlformats.org/drawingml/2006/main">
-            <a:off x="3467100" y="4438650"/>
-            <a:ext cx="2000250" cy="514350"/>
-          </a:xfrm>
-          <a:prstGeom xmlns:a="http://schemas.openxmlformats.org/drawingml/2006/main" prst="rect">
-            <a:avLst/>
-          </a:prstGeom>
-          <a:solidFill xmlns:a="http://schemas.openxmlformats.org/drawingml/2006/main">
-            <a:srgbClr val="000000">
-              <a:alpha val="0"/>
-            </a:srgbClr>
-          </a:solidFill>
-          <a:ln xmlns:a="http://schemas.openxmlformats.org/drawingml/2006/main" w="0">
-            <a:solidFill>
-              <a:srgbClr val="000000">
-                <a:alpha val="0"/>
-              </a:srgbClr>
-            </a:solidFill>
+            <a:noFill/>
+            <a:prstDash val="solid"/>
+          </a:ln>
+        </p:spPr>
+      </p:sp>
+      <p:sp>
+        <p:nvSpPr>
+          <p:cNvPr id="14" name="">
+            <a:extLst xmlns:a="http://schemas.openxmlformats.org/drawingml/2006/main">
+              <a:ext uri="{FF2B5EF4-FFF2-40B4-BE49-F238E27FC236}">
+                <a16:creationId xmlns:a16="http://schemas.microsoft.com/office/drawing/2014/main" id="{92CE2CF1-3092-4AB9-84E1-D66C1E87BCCC}"/>
+              </a:ext>
+            </a:extLst>
+          </p:cNvPr>
+          <p:cNvSpPr>
+            <a:spLocks xmlns:a="http://schemas.openxmlformats.org/drawingml/2006/main" noGrp="1"/>
+          </p:cNvSpPr>
+          <p:nvPr/>
+        </p:nvSpPr>
+        <p:spPr>
+          <a:xfrm xmlns:a="http://schemas.openxmlformats.org/drawingml/2006/main">
+            <a:off x="914400" y="5857875"/>
+            <a:ext cx="9810750" cy="209550"/>
+          </a:xfrm>
+          <a:prstGeom xmlns:a="http://schemas.openxmlformats.org/drawingml/2006/main" prst="rect">
+            <a:avLst/>
+          </a:prstGeom>
+          <a:noFill xmlns:a="http://schemas.openxmlformats.org/drawingml/2006/main"/>
+          <a:ln xmlns:a="http://schemas.openxmlformats.org/drawingml/2006/main" w="0">
+            <a:noFill/>
             <a:prstDash val="solid"/>
           </a:ln>
         </p:spPr>
@@ -9162,626 +7802,7 @@
           <a:lstStyle xmlns:a="http://schemas.openxmlformats.org/drawingml/2006/main"/>
           <a:p xmlns:a="http://schemas.openxmlformats.org/drawingml/2006/main">
             <a:pPr algn="l">
-              <a:defRPr sz="1125" b="0">
-                <a:solidFill>
-                  <a:srgbClr val="6E7681"/>
-                </a:solidFill>
-                <a:latin typeface="Aptos"/>
-                <a:ea typeface="Aptos"/>
-                <a:cs typeface="Aptos"/>
-              </a:defRPr>
-            </a:pPr>
-            <a:r>
-              <a:rPr sz="1125" b="0">
-                <a:solidFill>
-                  <a:srgbClr val="6E7681"/>
-                </a:solidFill>
-                <a:latin typeface="Aptos"/>
-                <a:ea typeface="Aptos"/>
-                <a:cs typeface="Aptos"/>
-              </a:rPr>
-              <a:t>Accès, variables, droits fichiers, connexions et secrets.</a:t>
-            </a:r>
-          </a:p>
-        </p:txBody>
-      </p:sp>
-      <p:sp>
-        <p:nvSpPr>
-          <p:cNvPr id="17" name="">
-            <a:extLst xmlns:a="http://schemas.openxmlformats.org/drawingml/2006/main">
-              <a:ext uri="{FF2B5EF4-FFF2-40B4-BE49-F238E27FC236}">
-                <a16:creationId xmlns:a16="http://schemas.microsoft.com/office/drawing/2014/main" id="{922E4D93-FDB8-4EF9-B04C-59A1F949302B}"/>
-              </a:ext>
-            </a:extLst>
-          </p:cNvPr>
-          <p:cNvSpPr>
-            <a:spLocks xmlns:a="http://schemas.openxmlformats.org/drawingml/2006/main" noGrp="1"/>
-          </p:cNvSpPr>
-          <p:nvPr/>
-        </p:nvSpPr>
-        <p:spPr>
-          <a:xfrm xmlns:a="http://schemas.openxmlformats.org/drawingml/2006/main">
-            <a:off x="5867400" y="3067050"/>
-            <a:ext cx="2381250" cy="2152650"/>
-          </a:xfrm>
-          <a:prstGeom xmlns:a="http://schemas.openxmlformats.org/drawingml/2006/main" prst="rect">
-            <a:avLst/>
-          </a:prstGeom>
-          <a:solidFill xmlns:a="http://schemas.openxmlformats.org/drawingml/2006/main">
-            <a:srgbClr val="DDEBE3"/>
-          </a:solidFill>
-          <a:ln xmlns:a="http://schemas.openxmlformats.org/drawingml/2006/main" w="11430">
-            <a:solidFill>
-              <a:srgbClr val="2E7D5B"/>
-            </a:solidFill>
-            <a:prstDash val="solid"/>
-          </a:ln>
-        </p:spPr>
-      </p:sp>
-      <p:sp>
-        <p:nvSpPr>
-          <p:cNvPr id="18" name="">
-            <a:extLst xmlns:a="http://schemas.openxmlformats.org/drawingml/2006/main">
-              <a:ext uri="{FF2B5EF4-FFF2-40B4-BE49-F238E27FC236}">
-                <a16:creationId xmlns:a16="http://schemas.microsoft.com/office/drawing/2014/main" id="{5EE799AF-6723-476C-ACE6-AABD361986E0}"/>
-              </a:ext>
-            </a:extLst>
-          </p:cNvPr>
-          <p:cNvSpPr>
-            <a:spLocks xmlns:a="http://schemas.openxmlformats.org/drawingml/2006/main" noGrp="1"/>
-          </p:cNvSpPr>
-          <p:nvPr/>
-        </p:nvSpPr>
-        <p:spPr>
-          <a:xfrm xmlns:a="http://schemas.openxmlformats.org/drawingml/2006/main">
-            <a:off x="6057900" y="3276600"/>
-            <a:ext cx="2000250" cy="323850"/>
-          </a:xfrm>
-          <a:prstGeom xmlns:a="http://schemas.openxmlformats.org/drawingml/2006/main" prst="rect">
-            <a:avLst/>
-          </a:prstGeom>
-          <a:solidFill xmlns:a="http://schemas.openxmlformats.org/drawingml/2006/main">
-            <a:srgbClr val="000000">
-              <a:alpha val="0"/>
-            </a:srgbClr>
-          </a:solidFill>
-          <a:ln xmlns:a="http://schemas.openxmlformats.org/drawingml/2006/main" w="0">
-            <a:solidFill>
-              <a:srgbClr val="000000">
-                <a:alpha val="0"/>
-              </a:srgbClr>
-            </a:solidFill>
-            <a:prstDash val="solid"/>
-          </a:ln>
-        </p:spPr>
-        <p:txBody>
-          <a:bodyPr xmlns:a="http://schemas.openxmlformats.org/drawingml/2006/main" lIns="0" tIns="0" rIns="0" bIns="0" anchor="ctr"/>
-          <a:lstStyle xmlns:a="http://schemas.openxmlformats.org/drawingml/2006/main"/>
-          <a:p xmlns:a="http://schemas.openxmlformats.org/drawingml/2006/main">
-            <a:pPr algn="l">
-              <a:defRPr sz="1575" b="1">
-                <a:solidFill>
-                  <a:srgbClr val="1F2933"/>
-                </a:solidFill>
-                <a:latin typeface="Aptos"/>
-                <a:ea typeface="Aptos"/>
-                <a:cs typeface="Aptos"/>
-              </a:defRPr>
-            </a:pPr>
-            <a:r>
-              <a:rPr sz="1575" b="1">
-                <a:solidFill>
-                  <a:srgbClr val="1F2933"/>
-                </a:solidFill>
-                <a:latin typeface="Aptos"/>
-                <a:ea typeface="Aptos"/>
-                <a:cs typeface="Aptos"/>
-              </a:rPr>
-              <a:t>Supervision</a:t>
-            </a:r>
-          </a:p>
-        </p:txBody>
-      </p:sp>
-      <p:sp>
-        <p:nvSpPr>
-          <p:cNvPr id="19" name="">
-            <a:extLst xmlns:a="http://schemas.openxmlformats.org/drawingml/2006/main">
-              <a:ext uri="{FF2B5EF4-FFF2-40B4-BE49-F238E27FC236}">
-                <a16:creationId xmlns:a16="http://schemas.microsoft.com/office/drawing/2014/main" id="{A36DA90B-0538-4531-92D5-682EEAE6450F}"/>
-              </a:ext>
-            </a:extLst>
-          </p:cNvPr>
-          <p:cNvSpPr>
-            <a:spLocks xmlns:a="http://schemas.openxmlformats.org/drawingml/2006/main" noGrp="1"/>
-          </p:cNvSpPr>
-          <p:nvPr/>
-        </p:nvSpPr>
-        <p:spPr>
-          <a:xfrm xmlns:a="http://schemas.openxmlformats.org/drawingml/2006/main">
-            <a:off x="6057900" y="3733800"/>
-            <a:ext cx="2000250" cy="304800"/>
-          </a:xfrm>
-          <a:prstGeom xmlns:a="http://schemas.openxmlformats.org/drawingml/2006/main" prst="rect">
-            <a:avLst/>
-          </a:prstGeom>
-          <a:solidFill xmlns:a="http://schemas.openxmlformats.org/drawingml/2006/main">
-            <a:srgbClr val="000000">
-              <a:alpha val="0"/>
-            </a:srgbClr>
-          </a:solidFill>
-          <a:ln xmlns:a="http://schemas.openxmlformats.org/drawingml/2006/main" w="0">
-            <a:solidFill>
-              <a:srgbClr val="000000">
-                <a:alpha val="0"/>
-              </a:srgbClr>
-            </a:solidFill>
-            <a:prstDash val="solid"/>
-          </a:ln>
-        </p:spPr>
-        <p:txBody>
-          <a:bodyPr xmlns:a="http://schemas.openxmlformats.org/drawingml/2006/main" lIns="0" tIns="0" rIns="0" bIns="0" anchor="ctr"/>
-          <a:lstStyle xmlns:a="http://schemas.openxmlformats.org/drawingml/2006/main"/>
-          <a:p xmlns:a="http://schemas.openxmlformats.org/drawingml/2006/main">
-            <a:pPr algn="l">
-              <a:defRPr sz="1350" b="1">
-                <a:solidFill>
-                  <a:srgbClr val="2E7D5B"/>
-                </a:solidFill>
-                <a:latin typeface="Aptos"/>
-                <a:ea typeface="Aptos"/>
-                <a:cs typeface="Aptos"/>
-              </a:defRPr>
-            </a:pPr>
-            <a:r>
-              <a:rPr sz="1350" b="1">
-                <a:solidFill>
-                  <a:srgbClr val="2E7D5B"/>
-                </a:solidFill>
-                <a:latin typeface="Aptos"/>
-                <a:ea typeface="Aptos"/>
-                <a:cs typeface="Aptos"/>
-              </a:rPr>
-              <a:t>À cadrer</a:t>
-            </a:r>
-          </a:p>
-        </p:txBody>
-      </p:sp>
-      <p:sp>
-        <p:nvSpPr>
-          <p:cNvPr id="20" name="">
-            <a:extLst xmlns:a="http://schemas.openxmlformats.org/drawingml/2006/main">
-              <a:ext uri="{FF2B5EF4-FFF2-40B4-BE49-F238E27FC236}">
-                <a16:creationId xmlns:a16="http://schemas.microsoft.com/office/drawing/2014/main" id="{B8CC8E19-48D6-4D78-A7F9-6007D2620353}"/>
-              </a:ext>
-            </a:extLst>
-          </p:cNvPr>
-          <p:cNvSpPr>
-            <a:spLocks xmlns:a="http://schemas.openxmlformats.org/drawingml/2006/main" noGrp="1"/>
-          </p:cNvSpPr>
-          <p:nvPr/>
-        </p:nvSpPr>
-        <p:spPr>
-          <a:xfrm xmlns:a="http://schemas.openxmlformats.org/drawingml/2006/main">
-            <a:off x="6057900" y="4229100"/>
-            <a:ext cx="2000250" cy="11430"/>
-          </a:xfrm>
-          <a:prstGeom xmlns:a="http://schemas.openxmlformats.org/drawingml/2006/main" prst="rect">
-            <a:avLst/>
-          </a:prstGeom>
-          <a:solidFill xmlns:a="http://schemas.openxmlformats.org/drawingml/2006/main">
-            <a:srgbClr val="2E7D5B"/>
-          </a:solidFill>
-          <a:ln xmlns:a="http://schemas.openxmlformats.org/drawingml/2006/main" w="0">
-            <a:solidFill>
-              <a:srgbClr val="000000">
-                <a:alpha val="0"/>
-              </a:srgbClr>
-            </a:solidFill>
-            <a:prstDash val="solid"/>
-          </a:ln>
-        </p:spPr>
-      </p:sp>
-      <p:sp>
-        <p:nvSpPr>
-          <p:cNvPr id="21" name="">
-            <a:extLst xmlns:a="http://schemas.openxmlformats.org/drawingml/2006/main">
-              <a:ext uri="{FF2B5EF4-FFF2-40B4-BE49-F238E27FC236}">
-                <a16:creationId xmlns:a16="http://schemas.microsoft.com/office/drawing/2014/main" id="{064078DB-1328-4BB3-AF1C-284031D2C2A9}"/>
-              </a:ext>
-            </a:extLst>
-          </p:cNvPr>
-          <p:cNvSpPr>
-            <a:spLocks xmlns:a="http://schemas.openxmlformats.org/drawingml/2006/main" noGrp="1"/>
-          </p:cNvSpPr>
-          <p:nvPr/>
-        </p:nvSpPr>
-        <p:spPr>
-          <a:xfrm xmlns:a="http://schemas.openxmlformats.org/drawingml/2006/main">
-            <a:off x="6057900" y="4438650"/>
-            <a:ext cx="2000250" cy="514350"/>
-          </a:xfrm>
-          <a:prstGeom xmlns:a="http://schemas.openxmlformats.org/drawingml/2006/main" prst="rect">
-            <a:avLst/>
-          </a:prstGeom>
-          <a:solidFill xmlns:a="http://schemas.openxmlformats.org/drawingml/2006/main">
-            <a:srgbClr val="000000">
-              <a:alpha val="0"/>
-            </a:srgbClr>
-          </a:solidFill>
-          <a:ln xmlns:a="http://schemas.openxmlformats.org/drawingml/2006/main" w="0">
-            <a:solidFill>
-              <a:srgbClr val="000000">
-                <a:alpha val="0"/>
-              </a:srgbClr>
-            </a:solidFill>
-            <a:prstDash val="solid"/>
-          </a:ln>
-        </p:spPr>
-        <p:txBody>
-          <a:bodyPr xmlns:a="http://schemas.openxmlformats.org/drawingml/2006/main" lIns="0" tIns="0" rIns="0" bIns="0" anchor="ctr"/>
-          <a:lstStyle xmlns:a="http://schemas.openxmlformats.org/drawingml/2006/main"/>
-          <a:p xmlns:a="http://schemas.openxmlformats.org/drawingml/2006/main">
-            <a:pPr algn="l">
-              <a:defRPr sz="1125" b="0">
-                <a:solidFill>
-                  <a:srgbClr val="6E7681"/>
-                </a:solidFill>
-                <a:latin typeface="Aptos"/>
-                <a:ea typeface="Aptos"/>
-                <a:cs typeface="Aptos"/>
-              </a:defRPr>
-            </a:pPr>
-            <a:r>
-              <a:rPr sz="1125" b="0">
-                <a:solidFill>
-                  <a:srgbClr val="6E7681"/>
-                </a:solidFill>
-                <a:latin typeface="Aptos"/>
-                <a:ea typeface="Aptos"/>
-                <a:cs typeface="Aptos"/>
-              </a:rPr>
-              <a:t>Logs, alertes, retry, historique et tableau de suivi.</a:t>
-            </a:r>
-          </a:p>
-        </p:txBody>
-      </p:sp>
-      <p:sp>
-        <p:nvSpPr>
-          <p:cNvPr id="22" name="">
-            <a:extLst xmlns:a="http://schemas.openxmlformats.org/drawingml/2006/main">
-              <a:ext uri="{FF2B5EF4-FFF2-40B4-BE49-F238E27FC236}">
-                <a16:creationId xmlns:a16="http://schemas.microsoft.com/office/drawing/2014/main" id="{F0D3512C-7A90-4132-B4CF-125B66A05647}"/>
-              </a:ext>
-            </a:extLst>
-          </p:cNvPr>
-          <p:cNvSpPr>
-            <a:spLocks xmlns:a="http://schemas.openxmlformats.org/drawingml/2006/main" noGrp="1"/>
-          </p:cNvSpPr>
-          <p:nvPr/>
-        </p:nvSpPr>
-        <p:spPr>
-          <a:xfrm xmlns:a="http://schemas.openxmlformats.org/drawingml/2006/main">
-            <a:off x="8458200" y="3067050"/>
-            <a:ext cx="2381250" cy="2152650"/>
-          </a:xfrm>
-          <a:prstGeom xmlns:a="http://schemas.openxmlformats.org/drawingml/2006/main" prst="rect">
-            <a:avLst/>
-          </a:prstGeom>
-          <a:solidFill xmlns:a="http://schemas.openxmlformats.org/drawingml/2006/main">
-            <a:srgbClr val="F3D9D6"/>
-          </a:solidFill>
-          <a:ln xmlns:a="http://schemas.openxmlformats.org/drawingml/2006/main" w="11430">
-            <a:solidFill>
-              <a:srgbClr val="B94A48"/>
-            </a:solidFill>
-            <a:prstDash val="solid"/>
-          </a:ln>
-        </p:spPr>
-      </p:sp>
-      <p:sp>
-        <p:nvSpPr>
-          <p:cNvPr id="23" name="">
-            <a:extLst xmlns:a="http://schemas.openxmlformats.org/drawingml/2006/main">
-              <a:ext uri="{FF2B5EF4-FFF2-40B4-BE49-F238E27FC236}">
-                <a16:creationId xmlns:a16="http://schemas.microsoft.com/office/drawing/2014/main" id="{F97B372D-4D7C-41D4-B95B-525B1C9212DF}"/>
-              </a:ext>
-            </a:extLst>
-          </p:cNvPr>
-          <p:cNvSpPr>
-            <a:spLocks xmlns:a="http://schemas.openxmlformats.org/drawingml/2006/main" noGrp="1"/>
-          </p:cNvSpPr>
-          <p:nvPr/>
-        </p:nvSpPr>
-        <p:spPr>
-          <a:xfrm xmlns:a="http://schemas.openxmlformats.org/drawingml/2006/main">
-            <a:off x="8648700" y="3276600"/>
-            <a:ext cx="2000250" cy="323850"/>
-          </a:xfrm>
-          <a:prstGeom xmlns:a="http://schemas.openxmlformats.org/drawingml/2006/main" prst="rect">
-            <a:avLst/>
-          </a:prstGeom>
-          <a:solidFill xmlns:a="http://schemas.openxmlformats.org/drawingml/2006/main">
-            <a:srgbClr val="000000">
-              <a:alpha val="0"/>
-            </a:srgbClr>
-          </a:solidFill>
-          <a:ln xmlns:a="http://schemas.openxmlformats.org/drawingml/2006/main" w="0">
-            <a:solidFill>
-              <a:srgbClr val="000000">
-                <a:alpha val="0"/>
-              </a:srgbClr>
-            </a:solidFill>
-            <a:prstDash val="solid"/>
-          </a:ln>
-        </p:spPr>
-        <p:txBody>
-          <a:bodyPr xmlns:a="http://schemas.openxmlformats.org/drawingml/2006/main" lIns="0" tIns="0" rIns="0" bIns="0" anchor="ctr"/>
-          <a:lstStyle xmlns:a="http://schemas.openxmlformats.org/drawingml/2006/main"/>
-          <a:p xmlns:a="http://schemas.openxmlformats.org/drawingml/2006/main">
-            <a:pPr algn="l">
-              <a:defRPr sz="1575" b="1">
-                <a:solidFill>
-                  <a:srgbClr val="1F2933"/>
-                </a:solidFill>
-                <a:latin typeface="Aptos"/>
-                <a:ea typeface="Aptos"/>
-                <a:cs typeface="Aptos"/>
-              </a:defRPr>
-            </a:pPr>
-            <a:r>
-              <a:rPr sz="1575" b="1">
-                <a:solidFill>
-                  <a:srgbClr val="1F2933"/>
-                </a:solidFill>
-                <a:latin typeface="Aptos"/>
-                <a:ea typeface="Aptos"/>
-                <a:cs typeface="Aptos"/>
-              </a:rPr>
-              <a:t>Go-live</a:t>
-            </a:r>
-          </a:p>
-        </p:txBody>
-      </p:sp>
-      <p:sp>
-        <p:nvSpPr>
-          <p:cNvPr id="24" name="">
-            <a:extLst xmlns:a="http://schemas.openxmlformats.org/drawingml/2006/main">
-              <a:ext uri="{FF2B5EF4-FFF2-40B4-BE49-F238E27FC236}">
-                <a16:creationId xmlns:a16="http://schemas.microsoft.com/office/drawing/2014/main" id="{03661579-16DE-40CC-B697-300449CDD6A7}"/>
-              </a:ext>
-            </a:extLst>
-          </p:cNvPr>
-          <p:cNvSpPr>
-            <a:spLocks xmlns:a="http://schemas.openxmlformats.org/drawingml/2006/main" noGrp="1"/>
-          </p:cNvSpPr>
-          <p:nvPr/>
-        </p:nvSpPr>
-        <p:spPr>
-          <a:xfrm xmlns:a="http://schemas.openxmlformats.org/drawingml/2006/main">
-            <a:off x="8648700" y="3733800"/>
-            <a:ext cx="2000250" cy="304800"/>
-          </a:xfrm>
-          <a:prstGeom xmlns:a="http://schemas.openxmlformats.org/drawingml/2006/main" prst="rect">
-            <a:avLst/>
-          </a:prstGeom>
-          <a:solidFill xmlns:a="http://schemas.openxmlformats.org/drawingml/2006/main">
-            <a:srgbClr val="000000">
-              <a:alpha val="0"/>
-            </a:srgbClr>
-          </a:solidFill>
-          <a:ln xmlns:a="http://schemas.openxmlformats.org/drawingml/2006/main" w="0">
-            <a:solidFill>
-              <a:srgbClr val="000000">
-                <a:alpha val="0"/>
-              </a:srgbClr>
-            </a:solidFill>
-            <a:prstDash val="solid"/>
-          </a:ln>
-        </p:spPr>
-        <p:txBody>
-          <a:bodyPr xmlns:a="http://schemas.openxmlformats.org/drawingml/2006/main" lIns="0" tIns="0" rIns="0" bIns="0" anchor="ctr"/>
-          <a:lstStyle xmlns:a="http://schemas.openxmlformats.org/drawingml/2006/main"/>
-          <a:p xmlns:a="http://schemas.openxmlformats.org/drawingml/2006/main">
-            <a:pPr algn="l">
-              <a:defRPr sz="1350" b="1">
-                <a:solidFill>
-                  <a:srgbClr val="B94A48"/>
-                </a:solidFill>
-                <a:latin typeface="Aptos"/>
-                <a:ea typeface="Aptos"/>
-                <a:cs typeface="Aptos"/>
-              </a:defRPr>
-            </a:pPr>
-            <a:r>
-              <a:rPr sz="1350" b="1">
-                <a:solidFill>
-                  <a:srgbClr val="B94A48"/>
-                </a:solidFill>
-                <a:latin typeface="Aptos"/>
-                <a:ea typeface="Aptos"/>
-                <a:cs typeface="Aptos"/>
-              </a:rPr>
-              <a:t>Dépend du feu vert</a:t>
-            </a:r>
-          </a:p>
-        </p:txBody>
-      </p:sp>
-      <p:sp>
-        <p:nvSpPr>
-          <p:cNvPr id="25" name="">
-            <a:extLst xmlns:a="http://schemas.openxmlformats.org/drawingml/2006/main">
-              <a:ext uri="{FF2B5EF4-FFF2-40B4-BE49-F238E27FC236}">
-                <a16:creationId xmlns:a16="http://schemas.microsoft.com/office/drawing/2014/main" id="{E2DDC9CD-BB2C-4F07-AC01-148A13892CEC}"/>
-              </a:ext>
-            </a:extLst>
-          </p:cNvPr>
-          <p:cNvSpPr>
-            <a:spLocks xmlns:a="http://schemas.openxmlformats.org/drawingml/2006/main" noGrp="1"/>
-          </p:cNvSpPr>
-          <p:nvPr/>
-        </p:nvSpPr>
-        <p:spPr>
-          <a:xfrm xmlns:a="http://schemas.openxmlformats.org/drawingml/2006/main">
-            <a:off x="8648700" y="4229100"/>
-            <a:ext cx="2000250" cy="11430"/>
-          </a:xfrm>
-          <a:prstGeom xmlns:a="http://schemas.openxmlformats.org/drawingml/2006/main" prst="rect">
-            <a:avLst/>
-          </a:prstGeom>
-          <a:solidFill xmlns:a="http://schemas.openxmlformats.org/drawingml/2006/main">
-            <a:srgbClr val="B94A48"/>
-          </a:solidFill>
-          <a:ln xmlns:a="http://schemas.openxmlformats.org/drawingml/2006/main" w="0">
-            <a:solidFill>
-              <a:srgbClr val="000000">
-                <a:alpha val="0"/>
-              </a:srgbClr>
-            </a:solidFill>
-            <a:prstDash val="solid"/>
-          </a:ln>
-        </p:spPr>
-      </p:sp>
-      <p:sp>
-        <p:nvSpPr>
-          <p:cNvPr id="26" name="">
-            <a:extLst xmlns:a="http://schemas.openxmlformats.org/drawingml/2006/main">
-              <a:ext uri="{FF2B5EF4-FFF2-40B4-BE49-F238E27FC236}">
-                <a16:creationId xmlns:a16="http://schemas.microsoft.com/office/drawing/2014/main" id="{289148D8-F0A6-44DC-B7A4-0653A2F62078}"/>
-              </a:ext>
-            </a:extLst>
-          </p:cNvPr>
-          <p:cNvSpPr>
-            <a:spLocks xmlns:a="http://schemas.openxmlformats.org/drawingml/2006/main" noGrp="1"/>
-          </p:cNvSpPr>
-          <p:nvPr/>
-        </p:nvSpPr>
-        <p:spPr>
-          <a:xfrm xmlns:a="http://schemas.openxmlformats.org/drawingml/2006/main">
-            <a:off x="8648700" y="4438650"/>
-            <a:ext cx="2000250" cy="514350"/>
-          </a:xfrm>
-          <a:prstGeom xmlns:a="http://schemas.openxmlformats.org/drawingml/2006/main" prst="rect">
-            <a:avLst/>
-          </a:prstGeom>
-          <a:solidFill xmlns:a="http://schemas.openxmlformats.org/drawingml/2006/main">
-            <a:srgbClr val="000000">
-              <a:alpha val="0"/>
-            </a:srgbClr>
-          </a:solidFill>
-          <a:ln xmlns:a="http://schemas.openxmlformats.org/drawingml/2006/main" w="0">
-            <a:solidFill>
-              <a:srgbClr val="000000">
-                <a:alpha val="0"/>
-              </a:srgbClr>
-            </a:solidFill>
-            <a:prstDash val="solid"/>
-          </a:ln>
-        </p:spPr>
-        <p:txBody>
-          <a:bodyPr xmlns:a="http://schemas.openxmlformats.org/drawingml/2006/main" lIns="0" tIns="0" rIns="0" bIns="0" anchor="ctr"/>
-          <a:lstStyle xmlns:a="http://schemas.openxmlformats.org/drawingml/2006/main"/>
-          <a:p xmlns:a="http://schemas.openxmlformats.org/drawingml/2006/main">
-            <a:pPr algn="l">
-              <a:defRPr sz="1125" b="0">
-                <a:solidFill>
-                  <a:srgbClr val="6E7681"/>
-                </a:solidFill>
-                <a:latin typeface="Aptos"/>
-                <a:ea typeface="Aptos"/>
-                <a:cs typeface="Aptos"/>
-              </a:defRPr>
-            </a:pPr>
-            <a:r>
-              <a:rPr sz="1125" b="0">
-                <a:solidFill>
-                  <a:srgbClr val="6E7681"/>
-                </a:solidFill>
-                <a:latin typeface="Aptos"/>
-                <a:ea typeface="Aptos"/>
-                <a:cs typeface="Aptos"/>
-              </a:rPr>
-              <a:t>Date cible, rollback, support post-déploiement et critères de succès.</a:t>
-            </a:r>
-          </a:p>
-        </p:txBody>
-      </p:sp>
-      <p:sp>
-        <p:nvSpPr>
-          <p:cNvPr id="27" name="">
-            <a:extLst xmlns:a="http://schemas.openxmlformats.org/drawingml/2006/main">
-              <a:ext uri="{FF2B5EF4-FFF2-40B4-BE49-F238E27FC236}">
-                <a16:creationId xmlns:a16="http://schemas.microsoft.com/office/drawing/2014/main" id="{4D6D1880-3332-4CF8-B7F7-FF6061A02EC7}"/>
-              </a:ext>
-            </a:extLst>
-          </p:cNvPr>
-          <p:cNvSpPr>
-            <a:spLocks xmlns:a="http://schemas.openxmlformats.org/drawingml/2006/main" noGrp="1"/>
-          </p:cNvSpPr>
-          <p:nvPr/>
-        </p:nvSpPr>
-        <p:spPr>
-          <a:xfrm xmlns:a="http://schemas.openxmlformats.org/drawingml/2006/main">
-            <a:off x="685800" y="5543550"/>
-            <a:ext cx="10439400" cy="438150"/>
-          </a:xfrm>
-          <a:prstGeom xmlns:a="http://schemas.openxmlformats.org/drawingml/2006/main" prst="rect">
-            <a:avLst/>
-          </a:prstGeom>
-          <a:solidFill xmlns:a="http://schemas.openxmlformats.org/drawingml/2006/main">
-            <a:srgbClr val="1F2933"/>
-          </a:solidFill>
-          <a:ln xmlns:a="http://schemas.openxmlformats.org/drawingml/2006/main" w="0">
-            <a:solidFill>
-              <a:srgbClr val="000000">
-                <a:alpha val="0"/>
-              </a:srgbClr>
-            </a:solidFill>
-            <a:prstDash val="solid"/>
-          </a:ln>
-        </p:spPr>
-      </p:sp>
-      <p:sp>
-        <p:nvSpPr>
-          <p:cNvPr id="28" name="">
-            <a:extLst xmlns:a="http://schemas.openxmlformats.org/drawingml/2006/main">
-              <a:ext uri="{FF2B5EF4-FFF2-40B4-BE49-F238E27FC236}">
-                <a16:creationId xmlns:a16="http://schemas.microsoft.com/office/drawing/2014/main" id="{38414C4D-9C37-4253-9D4F-723C2C07BFB9}"/>
-              </a:ext>
-            </a:extLst>
-          </p:cNvPr>
-          <p:cNvSpPr>
-            <a:spLocks xmlns:a="http://schemas.openxmlformats.org/drawingml/2006/main" noGrp="1"/>
-          </p:cNvSpPr>
-          <p:nvPr/>
-        </p:nvSpPr>
-        <p:spPr>
-          <a:xfrm xmlns:a="http://schemas.openxmlformats.org/drawingml/2006/main">
-            <a:off x="933450" y="5657850"/>
-            <a:ext cx="9944100" cy="228600"/>
-          </a:xfrm>
-          <a:prstGeom xmlns:a="http://schemas.openxmlformats.org/drawingml/2006/main" prst="rect">
-            <a:avLst/>
-          </a:prstGeom>
-          <a:solidFill xmlns:a="http://schemas.openxmlformats.org/drawingml/2006/main">
-            <a:srgbClr val="000000">
-              <a:alpha val="0"/>
-            </a:srgbClr>
-          </a:solidFill>
-          <a:ln xmlns:a="http://schemas.openxmlformats.org/drawingml/2006/main" w="0">
-            <a:solidFill>
-              <a:srgbClr val="000000">
-                <a:alpha val="0"/>
-              </a:srgbClr>
-            </a:solidFill>
-            <a:prstDash val="solid"/>
-          </a:ln>
-        </p:spPr>
-        <p:txBody>
-          <a:bodyPr xmlns:a="http://schemas.openxmlformats.org/drawingml/2006/main" lIns="0" tIns="0" rIns="0" bIns="0" anchor="ctr"/>
-          <a:lstStyle xmlns:a="http://schemas.openxmlformats.org/drawingml/2006/main"/>
-          <a:p xmlns:a="http://schemas.openxmlformats.org/drawingml/2006/main">
-            <a:pPr algn="ctr">
-              <a:defRPr sz="1425" b="1">
+              <a:defRPr sz="1275" b="1">
                 <a:solidFill>
                   <a:srgbClr val="F7F4EE"/>
                 </a:solidFill>
@@ -9791,7 +7812,7 @@
               </a:defRPr>
             </a:pPr>
             <a:r>
-              <a:rPr sz="1425" b="1">
+              <a:rPr sz="1275" b="1">
                 <a:solidFill>
                   <a:srgbClr val="F7F4EE"/>
                 </a:solidFill>
@@ -9799,17 +7820,17 @@
                 <a:ea typeface="Aptos"/>
                 <a:cs typeface="Aptos"/>
               </a:rPr>
-              <a:t>Décision attendue : valider la checklist de prod et identifier les points bloquants restants.</a:t>
-            </a:r>
-          </a:p>
-        </p:txBody>
-      </p:sp>
-      <p:sp>
-        <p:nvSpPr>
-          <p:cNvPr id="29" name="">
-            <a:extLst xmlns:a="http://schemas.openxmlformats.org/drawingml/2006/main">
-              <a:ext uri="{FF2B5EF4-FFF2-40B4-BE49-F238E27FC236}">
-                <a16:creationId xmlns:a16="http://schemas.microsoft.com/office/drawing/2014/main" id="{210DB430-A87C-46EB-9E35-FD23E7E38E7A}"/>
+              <a:t>Réponse attendue : état d’avancement + étapes restantes + date cible de mise en production.</a:t>
+            </a:r>
+          </a:p>
+        </p:txBody>
+      </p:sp>
+      <p:sp>
+        <p:nvSpPr>
+          <p:cNvPr id="15" name="">
+            <a:extLst xmlns:a="http://schemas.openxmlformats.org/drawingml/2006/main">
+              <a:ext uri="{FF2B5EF4-FFF2-40B4-BE49-F238E27FC236}">
+                <a16:creationId xmlns:a16="http://schemas.microsoft.com/office/drawing/2014/main" id="{099F6745-586A-4453-B57A-61D29425C3FC}"/>
               </a:ext>
             </a:extLst>
           </p:cNvPr>
@@ -9830,21 +7851,17 @@
             <a:srgbClr val="D8D3C8"/>
           </a:solidFill>
           <a:ln xmlns:a="http://schemas.openxmlformats.org/drawingml/2006/main" w="0">
-            <a:solidFill>
-              <a:srgbClr val="000000">
-                <a:alpha val="0"/>
-              </a:srgbClr>
-            </a:solidFill>
-            <a:prstDash val="solid"/>
-          </a:ln>
-        </p:spPr>
-      </p:sp>
-      <p:sp>
-        <p:nvSpPr>
-          <p:cNvPr id="30" name="">
-            <a:extLst xmlns:a="http://schemas.openxmlformats.org/drawingml/2006/main">
-              <a:ext uri="{FF2B5EF4-FFF2-40B4-BE49-F238E27FC236}">
-                <a16:creationId xmlns:a16="http://schemas.microsoft.com/office/drawing/2014/main" id="{386CEA9F-B0E8-405B-8EBE-A06F5BA0A655}"/>
+            <a:noFill/>
+            <a:prstDash val="solid"/>
+          </a:ln>
+        </p:spPr>
+      </p:sp>
+      <p:sp>
+        <p:nvSpPr>
+          <p:cNvPr id="16" name="">
+            <a:extLst xmlns:a="http://schemas.openxmlformats.org/drawingml/2006/main">
+              <a:ext uri="{FF2B5EF4-FFF2-40B4-BE49-F238E27FC236}">
+                <a16:creationId xmlns:a16="http://schemas.microsoft.com/office/drawing/2014/main" id="{FC678589-E69E-433B-BF9A-DFE2DF54A603}"/>
               </a:ext>
             </a:extLst>
           </p:cNvPr>
@@ -9861,17 +7878,9 @@
           <a:prstGeom xmlns:a="http://schemas.openxmlformats.org/drawingml/2006/main" prst="rect">
             <a:avLst/>
           </a:prstGeom>
-          <a:solidFill xmlns:a="http://schemas.openxmlformats.org/drawingml/2006/main">
-            <a:srgbClr val="000000">
-              <a:alpha val="0"/>
-            </a:srgbClr>
-          </a:solidFill>
-          <a:ln xmlns:a="http://schemas.openxmlformats.org/drawingml/2006/main" w="0">
-            <a:solidFill>
-              <a:srgbClr val="000000">
-                <a:alpha val="0"/>
-              </a:srgbClr>
-            </a:solidFill>
+          <a:noFill xmlns:a="http://schemas.openxmlformats.org/drawingml/2006/main"/>
+          <a:ln xmlns:a="http://schemas.openxmlformats.org/drawingml/2006/main" w="0">
+            <a:noFill/>
             <a:prstDash val="solid"/>
           </a:ln>
         </p:spPr>
@@ -9905,10 +7914,10 @@
       </p:sp>
       <p:sp>
         <p:nvSpPr>
-          <p:cNvPr id="31" name="">
-            <a:extLst xmlns:a="http://schemas.openxmlformats.org/drawingml/2006/main">
-              <a:ext uri="{FF2B5EF4-FFF2-40B4-BE49-F238E27FC236}">
-                <a16:creationId xmlns:a16="http://schemas.microsoft.com/office/drawing/2014/main" id="{361AF5F6-6740-4520-8ACB-BDAAAFE35135}"/>
+          <p:cNvPr id="17" name="">
+            <a:extLst xmlns:a="http://schemas.openxmlformats.org/drawingml/2006/main">
+              <a:ext uri="{FF2B5EF4-FFF2-40B4-BE49-F238E27FC236}">
+                <a16:creationId xmlns:a16="http://schemas.microsoft.com/office/drawing/2014/main" id="{412F3E48-07FE-42BB-AF6B-42C922A896A5}"/>
               </a:ext>
             </a:extLst>
           </p:cNvPr>
@@ -9925,17 +7934,9 @@
           <a:prstGeom xmlns:a="http://schemas.openxmlformats.org/drawingml/2006/main" prst="rect">
             <a:avLst/>
           </a:prstGeom>
-          <a:solidFill xmlns:a="http://schemas.openxmlformats.org/drawingml/2006/main">
-            <a:srgbClr val="000000">
-              <a:alpha val="0"/>
-            </a:srgbClr>
-          </a:solidFill>
-          <a:ln xmlns:a="http://schemas.openxmlformats.org/drawingml/2006/main" w="0">
-            <a:solidFill>
-              <a:srgbClr val="000000">
-                <a:alpha val="0"/>
-              </a:srgbClr>
-            </a:solidFill>
+          <a:noFill xmlns:a="http://schemas.openxmlformats.org/drawingml/2006/main"/>
+          <a:ln xmlns:a="http://schemas.openxmlformats.org/drawingml/2006/main" w="0">
+            <a:noFill/>
             <a:prstDash val="solid"/>
           </a:ln>
         </p:spPr>
@@ -9970,7 +7971,7 @@
     </p:spTree>
     <p:extLst>
       <p:ext uri="{BB962C8B-B14F-4D97-AF65-F5344CB8AC3E}">
-        <p14:creationId xmlns:p14="http://schemas.microsoft.com/office/powerpoint/2010/main" val="2128617420"/>
+        <p14:creationId xmlns:p14="http://schemas.microsoft.com/office/powerpoint/2010/main" val="569192196"/>
       </p:ext>
     </p:extLst>
   </p:cSld>
@@ -9991,10 +7992,10 @@
       </p:grpSpPr>
       <p:sp>
         <p:nvSpPr>
-          <p:cNvPr id="1" name="">
-            <a:extLst xmlns:a="http://schemas.openxmlformats.org/drawingml/2006/main">
-              <a:ext uri="{FF2B5EF4-FFF2-40B4-BE49-F238E27FC236}">
-                <a16:creationId xmlns:a16="http://schemas.microsoft.com/office/drawing/2014/main" id="{9D4268A3-4B66-4DFD-9F67-F34E3E70DB75}"/>
+          <p:cNvPr id="61" name="">
+            <a:extLst xmlns:a="http://schemas.openxmlformats.org/drawingml/2006/main">
+              <a:ext uri="{FF2B5EF4-FFF2-40B4-BE49-F238E27FC236}">
+                <a16:creationId xmlns:a16="http://schemas.microsoft.com/office/drawing/2014/main" id="{982F6119-2FFE-4009-889C-435BF18B9D57}"/>
               </a:ext>
             </a:extLst>
           </p:cNvPr>
@@ -10015,11 +8016,7 @@
             <a:srgbClr val="F7F4EE"/>
           </a:solidFill>
           <a:ln xmlns:a="http://schemas.openxmlformats.org/drawingml/2006/main" w="0">
-            <a:solidFill>
-              <a:srgbClr val="000000">
-                <a:alpha val="0"/>
-              </a:srgbClr>
-            </a:solidFill>
+            <a:noFill/>
             <a:prstDash val="solid"/>
           </a:ln>
         </p:spPr>
@@ -10029,7 +8026,7 @@
           <p:cNvPr id="2" name="">
             <a:extLst xmlns:a="http://schemas.openxmlformats.org/drawingml/2006/main">
               <a:ext uri="{FF2B5EF4-FFF2-40B4-BE49-F238E27FC236}">
-                <a16:creationId xmlns:a16="http://schemas.microsoft.com/office/drawing/2014/main" id="{AAF1B9EA-C617-43ED-A81A-E838B14CE486}"/>
+                <a16:creationId xmlns:a16="http://schemas.microsoft.com/office/drawing/2014/main" id="{F82C4269-24E6-4646-86B7-0912B02CB61E}"/>
               </a:ext>
             </a:extLst>
           </p:cNvPr>
@@ -10050,11 +8047,7 @@
             <a:srgbClr val="1F2933"/>
           </a:solidFill>
           <a:ln xmlns:a="http://schemas.openxmlformats.org/drawingml/2006/main" w="0">
-            <a:solidFill>
-              <a:srgbClr val="000000">
-                <a:alpha val="0"/>
-              </a:srgbClr>
-            </a:solidFill>
+            <a:noFill/>
             <a:prstDash val="solid"/>
           </a:ln>
         </p:spPr>
@@ -10064,7 +8057,7 @@
           <p:cNvPr id="3" name="kicker-06-marker">
             <a:extLst xmlns:a="http://schemas.openxmlformats.org/drawingml/2006/main">
               <a:ext uri="{FF2B5EF4-FFF2-40B4-BE49-F238E27FC236}">
-                <a16:creationId xmlns:a16="http://schemas.microsoft.com/office/drawing/2014/main" id="{0C0E97D8-C202-4D62-B160-F5133F541EFC}"/>
+                <a16:creationId xmlns:a16="http://schemas.microsoft.com/office/drawing/2014/main" id="{9B00D2AF-CF4B-4A04-8C3D-4EF1F2046B28}"/>
               </a:ext>
             </a:extLst>
           </p:cNvPr>
@@ -10085,11 +8078,7 @@
             <a:srgbClr val="2E7D5B"/>
           </a:solidFill>
           <a:ln xmlns:a="http://schemas.openxmlformats.org/drawingml/2006/main" w="0">
-            <a:solidFill>
-              <a:srgbClr val="000000">
-                <a:alpha val="0"/>
-              </a:srgbClr>
-            </a:solidFill>
+            <a:noFill/>
             <a:prstDash val="solid"/>
           </a:ln>
         </p:spPr>
@@ -10099,7 +8088,7 @@
           <p:cNvPr id="4" name="kicker-06-label">
             <a:extLst xmlns:a="http://schemas.openxmlformats.org/drawingml/2006/main">
               <a:ext uri="{FF2B5EF4-FFF2-40B4-BE49-F238E27FC236}">
-                <a16:creationId xmlns:a16="http://schemas.microsoft.com/office/drawing/2014/main" id="{117D565E-BE64-443A-B076-AC2BCAED3399}"/>
+                <a16:creationId xmlns:a16="http://schemas.microsoft.com/office/drawing/2014/main" id="{B04C006A-5CFA-4B4E-A07F-5BD37F9E2F5A}"/>
               </a:ext>
             </a:extLst>
           </p:cNvPr>
@@ -10116,17 +8105,9 @@
           <a:prstGeom xmlns:a="http://schemas.openxmlformats.org/drawingml/2006/main" prst="rect">
             <a:avLst/>
           </a:prstGeom>
-          <a:solidFill xmlns:a="http://schemas.openxmlformats.org/drawingml/2006/main">
-            <a:srgbClr val="000000">
-              <a:alpha val="0"/>
-            </a:srgbClr>
-          </a:solidFill>
-          <a:ln xmlns:a="http://schemas.openxmlformats.org/drawingml/2006/main" w="0">
-            <a:solidFill>
-              <a:srgbClr val="000000">
-                <a:alpha val="0"/>
-              </a:srgbClr>
-            </a:solidFill>
+          <a:noFill xmlns:a="http://schemas.openxmlformats.org/drawingml/2006/main"/>
+          <a:ln xmlns:a="http://schemas.openxmlformats.org/drawingml/2006/main" w="0">
+            <a:noFill/>
             <a:prstDash val="solid"/>
           </a:ln>
         </p:spPr>
@@ -10163,7 +8144,7 @@
           <p:cNvPr id="5" name="">
             <a:extLst xmlns:a="http://schemas.openxmlformats.org/drawingml/2006/main">
               <a:ext uri="{FF2B5EF4-FFF2-40B4-BE49-F238E27FC236}">
-                <a16:creationId xmlns:a16="http://schemas.microsoft.com/office/drawing/2014/main" id="{87105B63-93DB-4673-AFFB-B07CB9FA810C}"/>
+                <a16:creationId xmlns:a16="http://schemas.microsoft.com/office/drawing/2014/main" id="{42BC174D-F992-4CE8-BF55-503CFF4F1579}"/>
               </a:ext>
             </a:extLst>
           </p:cNvPr>
@@ -10180,17 +8161,9 @@
           <a:prstGeom xmlns:a="http://schemas.openxmlformats.org/drawingml/2006/main" prst="rect">
             <a:avLst/>
           </a:prstGeom>
-          <a:solidFill xmlns:a="http://schemas.openxmlformats.org/drawingml/2006/main">
-            <a:srgbClr val="000000">
-              <a:alpha val="0"/>
-            </a:srgbClr>
-          </a:solidFill>
-          <a:ln xmlns:a="http://schemas.openxmlformats.org/drawingml/2006/main" w="0">
-            <a:solidFill>
-              <a:srgbClr val="000000">
-                <a:alpha val="0"/>
-              </a:srgbClr>
-            </a:solidFill>
+          <a:noFill xmlns:a="http://schemas.openxmlformats.org/drawingml/2006/main"/>
+          <a:ln xmlns:a="http://schemas.openxmlformats.org/drawingml/2006/main" w="0">
+            <a:noFill/>
             <a:prstDash val="solid"/>
           </a:ln>
         </p:spPr>
@@ -10227,7 +8200,7 @@
           <p:cNvPr id="6" name="">
             <a:extLst xmlns:a="http://schemas.openxmlformats.org/drawingml/2006/main">
               <a:ext uri="{FF2B5EF4-FFF2-40B4-BE49-F238E27FC236}">
-                <a16:creationId xmlns:a16="http://schemas.microsoft.com/office/drawing/2014/main" id="{75D7D231-EF1D-4E83-BF78-2DC5F8072F2B}"/>
+                <a16:creationId xmlns:a16="http://schemas.microsoft.com/office/drawing/2014/main" id="{B6B3F79B-9736-44EC-A5E5-3A0764808BFB}"/>
               </a:ext>
             </a:extLst>
           </p:cNvPr>
@@ -10244,17 +8217,9 @@
           <a:prstGeom xmlns:a="http://schemas.openxmlformats.org/drawingml/2006/main" prst="rect">
             <a:avLst/>
           </a:prstGeom>
-          <a:solidFill xmlns:a="http://schemas.openxmlformats.org/drawingml/2006/main">
-            <a:srgbClr val="000000">
-              <a:alpha val="0"/>
-            </a:srgbClr>
-          </a:solidFill>
-          <a:ln xmlns:a="http://schemas.openxmlformats.org/drawingml/2006/main" w="0">
-            <a:solidFill>
-              <a:srgbClr val="000000">
-                <a:alpha val="0"/>
-              </a:srgbClr>
-            </a:solidFill>
+          <a:noFill xmlns:a="http://schemas.openxmlformats.org/drawingml/2006/main"/>
+          <a:ln xmlns:a="http://schemas.openxmlformats.org/drawingml/2006/main" w="0">
+            <a:noFill/>
             <a:prstDash val="solid"/>
           </a:ln>
         </p:spPr>
@@ -10291,7 +8256,7 @@
           <p:cNvPr id="7" name="">
             <a:extLst xmlns:a="http://schemas.openxmlformats.org/drawingml/2006/main">
               <a:ext uri="{FF2B5EF4-FFF2-40B4-BE49-F238E27FC236}">
-                <a16:creationId xmlns:a16="http://schemas.microsoft.com/office/drawing/2014/main" id="{DDBB1798-1D93-4968-BE8C-32498013D7A6}"/>
+                <a16:creationId xmlns:a16="http://schemas.microsoft.com/office/drawing/2014/main" id="{148DFA87-7E9F-444F-8824-EEC428A5D855}"/>
               </a:ext>
             </a:extLst>
           </p:cNvPr>
@@ -10324,7 +8289,7 @@
           <p:cNvPr id="8" name="">
             <a:extLst xmlns:a="http://schemas.openxmlformats.org/drawingml/2006/main">
               <a:ext uri="{FF2B5EF4-FFF2-40B4-BE49-F238E27FC236}">
-                <a16:creationId xmlns:a16="http://schemas.microsoft.com/office/drawing/2014/main" id="{A39381AF-FD51-40E1-ACBF-24BE308E8269}"/>
+                <a16:creationId xmlns:a16="http://schemas.microsoft.com/office/drawing/2014/main" id="{21BA2642-572F-4B1C-A086-ABBCA96135FA}"/>
               </a:ext>
             </a:extLst>
           </p:cNvPr>
@@ -10341,17 +8306,9 @@
           <a:prstGeom xmlns:a="http://schemas.openxmlformats.org/drawingml/2006/main" prst="rect">
             <a:avLst/>
           </a:prstGeom>
-          <a:solidFill xmlns:a="http://schemas.openxmlformats.org/drawingml/2006/main">
-            <a:srgbClr val="000000">
-              <a:alpha val="0"/>
-            </a:srgbClr>
-          </a:solidFill>
-          <a:ln xmlns:a="http://schemas.openxmlformats.org/drawingml/2006/main" w="0">
-            <a:solidFill>
-              <a:srgbClr val="000000">
-                <a:alpha val="0"/>
-              </a:srgbClr>
-            </a:solidFill>
+          <a:noFill xmlns:a="http://schemas.openxmlformats.org/drawingml/2006/main"/>
+          <a:ln xmlns:a="http://schemas.openxmlformats.org/drawingml/2006/main" w="0">
+            <a:noFill/>
             <a:prstDash val="solid"/>
           </a:ln>
         </p:spPr>
@@ -10388,7 +8345,7 @@
           <p:cNvPr id="9" name="">
             <a:extLst xmlns:a="http://schemas.openxmlformats.org/drawingml/2006/main">
               <a:ext uri="{FF2B5EF4-FFF2-40B4-BE49-F238E27FC236}">
-                <a16:creationId xmlns:a16="http://schemas.microsoft.com/office/drawing/2014/main" id="{4BE073AE-A395-4EEC-84BC-1D135D997E79}"/>
+                <a16:creationId xmlns:a16="http://schemas.microsoft.com/office/drawing/2014/main" id="{77F9B1B7-AED4-41B9-A7B5-C71A08872D0A}"/>
               </a:ext>
             </a:extLst>
           </p:cNvPr>
@@ -10421,7 +8378,7 @@
           <p:cNvPr id="10" name="">
             <a:extLst xmlns:a="http://schemas.openxmlformats.org/drawingml/2006/main">
               <a:ext uri="{FF2B5EF4-FFF2-40B4-BE49-F238E27FC236}">
-                <a16:creationId xmlns:a16="http://schemas.microsoft.com/office/drawing/2014/main" id="{D82036C1-ACB6-45E1-B850-7A755832D47D}"/>
+                <a16:creationId xmlns:a16="http://schemas.microsoft.com/office/drawing/2014/main" id="{E8897480-766A-4CD9-BC35-3343BC6053E9}"/>
               </a:ext>
             </a:extLst>
           </p:cNvPr>
@@ -10438,17 +8395,9 @@
           <a:prstGeom xmlns:a="http://schemas.openxmlformats.org/drawingml/2006/main" prst="rect">
             <a:avLst/>
           </a:prstGeom>
-          <a:solidFill xmlns:a="http://schemas.openxmlformats.org/drawingml/2006/main">
-            <a:srgbClr val="000000">
-              <a:alpha val="0"/>
-            </a:srgbClr>
-          </a:solidFill>
-          <a:ln xmlns:a="http://schemas.openxmlformats.org/drawingml/2006/main" w="0">
-            <a:solidFill>
-              <a:srgbClr val="000000">
-                <a:alpha val="0"/>
-              </a:srgbClr>
-            </a:solidFill>
+          <a:noFill xmlns:a="http://schemas.openxmlformats.org/drawingml/2006/main"/>
+          <a:ln xmlns:a="http://schemas.openxmlformats.org/drawingml/2006/main" w="0">
+            <a:noFill/>
             <a:prstDash val="solid"/>
           </a:ln>
         </p:spPr>
@@ -10485,7 +8434,7 @@
           <p:cNvPr id="11" name="">
             <a:extLst xmlns:a="http://schemas.openxmlformats.org/drawingml/2006/main">
               <a:ext uri="{FF2B5EF4-FFF2-40B4-BE49-F238E27FC236}">
-                <a16:creationId xmlns:a16="http://schemas.microsoft.com/office/drawing/2014/main" id="{4F8E5425-CC30-40E2-A965-A15CAD51CB97}"/>
+                <a16:creationId xmlns:a16="http://schemas.microsoft.com/office/drawing/2014/main" id="{A6889B82-D366-4368-A136-CB42FC4DB10D}"/>
               </a:ext>
             </a:extLst>
           </p:cNvPr>
@@ -10518,7 +8467,7 @@
           <p:cNvPr id="12" name="">
             <a:extLst xmlns:a="http://schemas.openxmlformats.org/drawingml/2006/main">
               <a:ext uri="{FF2B5EF4-FFF2-40B4-BE49-F238E27FC236}">
-                <a16:creationId xmlns:a16="http://schemas.microsoft.com/office/drawing/2014/main" id="{824CD98F-1AB5-4875-A9B5-C90ADF9113B3}"/>
+                <a16:creationId xmlns:a16="http://schemas.microsoft.com/office/drawing/2014/main" id="{A7AE76E5-5EB4-44B7-84E0-C58AB3F8D7D5}"/>
               </a:ext>
             </a:extLst>
           </p:cNvPr>
@@ -10535,17 +8484,9 @@
           <a:prstGeom xmlns:a="http://schemas.openxmlformats.org/drawingml/2006/main" prst="rect">
             <a:avLst/>
           </a:prstGeom>
-          <a:solidFill xmlns:a="http://schemas.openxmlformats.org/drawingml/2006/main">
-            <a:srgbClr val="000000">
-              <a:alpha val="0"/>
-            </a:srgbClr>
-          </a:solidFill>
-          <a:ln xmlns:a="http://schemas.openxmlformats.org/drawingml/2006/main" w="0">
-            <a:solidFill>
-              <a:srgbClr val="000000">
-                <a:alpha val="0"/>
-              </a:srgbClr>
-            </a:solidFill>
+          <a:noFill xmlns:a="http://schemas.openxmlformats.org/drawingml/2006/main"/>
+          <a:ln xmlns:a="http://schemas.openxmlformats.org/drawingml/2006/main" w="0">
+            <a:noFill/>
             <a:prstDash val="solid"/>
           </a:ln>
         </p:spPr>
@@ -10582,7 +8523,7 @@
           <p:cNvPr id="13" name="">
             <a:extLst xmlns:a="http://schemas.openxmlformats.org/drawingml/2006/main">
               <a:ext uri="{FF2B5EF4-FFF2-40B4-BE49-F238E27FC236}">
-                <a16:creationId xmlns:a16="http://schemas.microsoft.com/office/drawing/2014/main" id="{44F21672-B81A-4104-AAB8-E50D2F916F1D}"/>
+                <a16:creationId xmlns:a16="http://schemas.microsoft.com/office/drawing/2014/main" id="{AFBAE019-D1EF-4A1A-AA23-61311778A6E6}"/>
               </a:ext>
             </a:extLst>
           </p:cNvPr>
@@ -10615,7 +8556,7 @@
           <p:cNvPr id="14" name="">
             <a:extLst xmlns:a="http://schemas.openxmlformats.org/drawingml/2006/main">
               <a:ext uri="{FF2B5EF4-FFF2-40B4-BE49-F238E27FC236}">
-                <a16:creationId xmlns:a16="http://schemas.microsoft.com/office/drawing/2014/main" id="{75EA2229-25E1-4886-8431-A6BC95749752}"/>
+                <a16:creationId xmlns:a16="http://schemas.microsoft.com/office/drawing/2014/main" id="{CD461DC4-0C43-4861-BE62-EBF06ECE877A}"/>
               </a:ext>
             </a:extLst>
           </p:cNvPr>
@@ -10632,17 +8573,9 @@
           <a:prstGeom xmlns:a="http://schemas.openxmlformats.org/drawingml/2006/main" prst="rect">
             <a:avLst/>
           </a:prstGeom>
-          <a:solidFill xmlns:a="http://schemas.openxmlformats.org/drawingml/2006/main">
-            <a:srgbClr val="000000">
-              <a:alpha val="0"/>
-            </a:srgbClr>
-          </a:solidFill>
-          <a:ln xmlns:a="http://schemas.openxmlformats.org/drawingml/2006/main" w="0">
-            <a:solidFill>
-              <a:srgbClr val="000000">
-                <a:alpha val="0"/>
-              </a:srgbClr>
-            </a:solidFill>
+          <a:noFill xmlns:a="http://schemas.openxmlformats.org/drawingml/2006/main"/>
+          <a:ln xmlns:a="http://schemas.openxmlformats.org/drawingml/2006/main" w="0">
+            <a:noFill/>
             <a:prstDash val="solid"/>
           </a:ln>
         </p:spPr>
@@ -10679,7 +8612,7 @@
           <p:cNvPr id="15" name="">
             <a:extLst xmlns:a="http://schemas.openxmlformats.org/drawingml/2006/main">
               <a:ext uri="{FF2B5EF4-FFF2-40B4-BE49-F238E27FC236}">
-                <a16:creationId xmlns:a16="http://schemas.microsoft.com/office/drawing/2014/main" id="{23D100E4-2E86-43B4-99EB-CC9EB1531704}"/>
+                <a16:creationId xmlns:a16="http://schemas.microsoft.com/office/drawing/2014/main" id="{959EEB38-AA17-4751-B5AF-9561D417DC3E}"/>
               </a:ext>
             </a:extLst>
           </p:cNvPr>
@@ -10712,7 +8645,7 @@
           <p:cNvPr id="16" name="">
             <a:extLst xmlns:a="http://schemas.openxmlformats.org/drawingml/2006/main">
               <a:ext uri="{FF2B5EF4-FFF2-40B4-BE49-F238E27FC236}">
-                <a16:creationId xmlns:a16="http://schemas.microsoft.com/office/drawing/2014/main" id="{AB8EC882-47D9-4E41-9518-8AD7F629467D}"/>
+                <a16:creationId xmlns:a16="http://schemas.microsoft.com/office/drawing/2014/main" id="{2253419A-BCD5-4639-9546-72CA63C1DE5B}"/>
               </a:ext>
             </a:extLst>
           </p:cNvPr>
@@ -10729,17 +8662,9 @@
           <a:prstGeom xmlns:a="http://schemas.openxmlformats.org/drawingml/2006/main" prst="rect">
             <a:avLst/>
           </a:prstGeom>
-          <a:solidFill xmlns:a="http://schemas.openxmlformats.org/drawingml/2006/main">
-            <a:srgbClr val="000000">
-              <a:alpha val="0"/>
-            </a:srgbClr>
-          </a:solidFill>
-          <a:ln xmlns:a="http://schemas.openxmlformats.org/drawingml/2006/main" w="0">
-            <a:solidFill>
-              <a:srgbClr val="000000">
-                <a:alpha val="0"/>
-              </a:srgbClr>
-            </a:solidFill>
+          <a:noFill xmlns:a="http://schemas.openxmlformats.org/drawingml/2006/main"/>
+          <a:ln xmlns:a="http://schemas.openxmlformats.org/drawingml/2006/main" w="0">
+            <a:noFill/>
             <a:prstDash val="solid"/>
           </a:ln>
         </p:spPr>
@@ -10776,7 +8701,7 @@
           <p:cNvPr id="17" name="">
             <a:extLst xmlns:a="http://schemas.openxmlformats.org/drawingml/2006/main">
               <a:ext uri="{FF2B5EF4-FFF2-40B4-BE49-F238E27FC236}">
-                <a16:creationId xmlns:a16="http://schemas.microsoft.com/office/drawing/2014/main" id="{D0601A6A-C6E6-4D81-860E-E5D40DBFD054}"/>
+                <a16:creationId xmlns:a16="http://schemas.microsoft.com/office/drawing/2014/main" id="{DDE67F64-8951-407C-85AB-90D2082EB841}"/>
               </a:ext>
             </a:extLst>
           </p:cNvPr>
@@ -10809,7 +8734,7 @@
           <p:cNvPr id="18" name="">
             <a:extLst xmlns:a="http://schemas.openxmlformats.org/drawingml/2006/main">
               <a:ext uri="{FF2B5EF4-FFF2-40B4-BE49-F238E27FC236}">
-                <a16:creationId xmlns:a16="http://schemas.microsoft.com/office/drawing/2014/main" id="{0F71B34B-1DE4-4B01-937D-8C5F374377A0}"/>
+                <a16:creationId xmlns:a16="http://schemas.microsoft.com/office/drawing/2014/main" id="{99FD9DEA-F1B9-43FD-A19F-2058D6F2EBD4}"/>
               </a:ext>
             </a:extLst>
           </p:cNvPr>
@@ -10826,17 +8751,9 @@
           <a:prstGeom xmlns:a="http://schemas.openxmlformats.org/drawingml/2006/main" prst="rect">
             <a:avLst/>
           </a:prstGeom>
-          <a:solidFill xmlns:a="http://schemas.openxmlformats.org/drawingml/2006/main">
-            <a:srgbClr val="000000">
-              <a:alpha val="0"/>
-            </a:srgbClr>
-          </a:solidFill>
-          <a:ln xmlns:a="http://schemas.openxmlformats.org/drawingml/2006/main" w="0">
-            <a:solidFill>
-              <a:srgbClr val="000000">
-                <a:alpha val="0"/>
-              </a:srgbClr>
-            </a:solidFill>
+          <a:noFill xmlns:a="http://schemas.openxmlformats.org/drawingml/2006/main"/>
+          <a:ln xmlns:a="http://schemas.openxmlformats.org/drawingml/2006/main" w="0">
+            <a:noFill/>
             <a:prstDash val="solid"/>
           </a:ln>
         </p:spPr>
@@ -10873,7 +8790,7 @@
           <p:cNvPr id="19" name="">
             <a:extLst xmlns:a="http://schemas.openxmlformats.org/drawingml/2006/main">
               <a:ext uri="{FF2B5EF4-FFF2-40B4-BE49-F238E27FC236}">
-                <a16:creationId xmlns:a16="http://schemas.microsoft.com/office/drawing/2014/main" id="{90A95E73-CD3C-4691-A14C-A199978242BD}"/>
+                <a16:creationId xmlns:a16="http://schemas.microsoft.com/office/drawing/2014/main" id="{006359E4-86F3-4B0E-AD1D-40596AEA53A8}"/>
               </a:ext>
             </a:extLst>
           </p:cNvPr>
@@ -10906,7 +8823,7 @@
           <p:cNvPr id="20" name="">
             <a:extLst xmlns:a="http://schemas.openxmlformats.org/drawingml/2006/main">
               <a:ext uri="{FF2B5EF4-FFF2-40B4-BE49-F238E27FC236}">
-                <a16:creationId xmlns:a16="http://schemas.microsoft.com/office/drawing/2014/main" id="{A4EE8061-5B73-44CB-AE88-6D79E6983781}"/>
+                <a16:creationId xmlns:a16="http://schemas.microsoft.com/office/drawing/2014/main" id="{01BFF6AC-9911-49BB-89DC-434CE9DCCEDF}"/>
               </a:ext>
             </a:extLst>
           </p:cNvPr>
@@ -10923,17 +8840,9 @@
           <a:prstGeom xmlns:a="http://schemas.openxmlformats.org/drawingml/2006/main" prst="rect">
             <a:avLst/>
           </a:prstGeom>
-          <a:solidFill xmlns:a="http://schemas.openxmlformats.org/drawingml/2006/main">
-            <a:srgbClr val="000000">
-              <a:alpha val="0"/>
-            </a:srgbClr>
-          </a:solidFill>
-          <a:ln xmlns:a="http://schemas.openxmlformats.org/drawingml/2006/main" w="0">
-            <a:solidFill>
-              <a:srgbClr val="000000">
-                <a:alpha val="0"/>
-              </a:srgbClr>
-            </a:solidFill>
+          <a:noFill xmlns:a="http://schemas.openxmlformats.org/drawingml/2006/main"/>
+          <a:ln xmlns:a="http://schemas.openxmlformats.org/drawingml/2006/main" w="0">
+            <a:noFill/>
             <a:prstDash val="solid"/>
           </a:ln>
         </p:spPr>
@@ -10970,7 +8879,7 @@
           <p:cNvPr id="21" name="">
             <a:extLst xmlns:a="http://schemas.openxmlformats.org/drawingml/2006/main">
               <a:ext uri="{FF2B5EF4-FFF2-40B4-BE49-F238E27FC236}">
-                <a16:creationId xmlns:a16="http://schemas.microsoft.com/office/drawing/2014/main" id="{789B22AA-EF0C-49B0-95A4-A65D1B2EEA2D}"/>
+                <a16:creationId xmlns:a16="http://schemas.microsoft.com/office/drawing/2014/main" id="{9F3CE271-446A-49C8-B943-2882995A1148}"/>
               </a:ext>
             </a:extLst>
           </p:cNvPr>
@@ -11003,7 +8912,7 @@
           <p:cNvPr id="22" name="">
             <a:extLst xmlns:a="http://schemas.openxmlformats.org/drawingml/2006/main">
               <a:ext uri="{FF2B5EF4-FFF2-40B4-BE49-F238E27FC236}">
-                <a16:creationId xmlns:a16="http://schemas.microsoft.com/office/drawing/2014/main" id="{AB22BE51-5CB8-443E-AA74-35A6E77CBB04}"/>
+                <a16:creationId xmlns:a16="http://schemas.microsoft.com/office/drawing/2014/main" id="{6C6DEEAE-BF61-4F47-942A-50F206C1F96D}"/>
               </a:ext>
             </a:extLst>
           </p:cNvPr>
@@ -11020,17 +8929,9 @@
           <a:prstGeom xmlns:a="http://schemas.openxmlformats.org/drawingml/2006/main" prst="rect">
             <a:avLst/>
           </a:prstGeom>
-          <a:solidFill xmlns:a="http://schemas.openxmlformats.org/drawingml/2006/main">
-            <a:srgbClr val="000000">
-              <a:alpha val="0"/>
-            </a:srgbClr>
-          </a:solidFill>
-          <a:ln xmlns:a="http://schemas.openxmlformats.org/drawingml/2006/main" w="0">
-            <a:solidFill>
-              <a:srgbClr val="000000">
-                <a:alpha val="0"/>
-              </a:srgbClr>
-            </a:solidFill>
+          <a:noFill xmlns:a="http://schemas.openxmlformats.org/drawingml/2006/main"/>
+          <a:ln xmlns:a="http://schemas.openxmlformats.org/drawingml/2006/main" w="0">
+            <a:noFill/>
             <a:prstDash val="solid"/>
           </a:ln>
         </p:spPr>
@@ -11067,7 +8968,7 @@
           <p:cNvPr id="23" name="">
             <a:extLst xmlns:a="http://schemas.openxmlformats.org/drawingml/2006/main">
               <a:ext uri="{FF2B5EF4-FFF2-40B4-BE49-F238E27FC236}">
-                <a16:creationId xmlns:a16="http://schemas.microsoft.com/office/drawing/2014/main" id="{4A3E38A5-44B3-4153-AB97-D527B820A52C}"/>
+                <a16:creationId xmlns:a16="http://schemas.microsoft.com/office/drawing/2014/main" id="{F15C2857-3113-4AA1-B03A-121F1A92F675}"/>
               </a:ext>
             </a:extLst>
           </p:cNvPr>
@@ -11100,7 +9001,7 @@
           <p:cNvPr id="24" name="">
             <a:extLst xmlns:a="http://schemas.openxmlformats.org/drawingml/2006/main">
               <a:ext uri="{FF2B5EF4-FFF2-40B4-BE49-F238E27FC236}">
-                <a16:creationId xmlns:a16="http://schemas.microsoft.com/office/drawing/2014/main" id="{8F0A6900-BD45-45D4-BB40-6345D878FE5C}"/>
+                <a16:creationId xmlns:a16="http://schemas.microsoft.com/office/drawing/2014/main" id="{421A853C-EA0D-4BB8-BE9E-962606DBDA84}"/>
               </a:ext>
             </a:extLst>
           </p:cNvPr>
@@ -11117,17 +9018,9 @@
           <a:prstGeom xmlns:a="http://schemas.openxmlformats.org/drawingml/2006/main" prst="rect">
             <a:avLst/>
           </a:prstGeom>
-          <a:solidFill xmlns:a="http://schemas.openxmlformats.org/drawingml/2006/main">
-            <a:srgbClr val="000000">
-              <a:alpha val="0"/>
-            </a:srgbClr>
-          </a:solidFill>
-          <a:ln xmlns:a="http://schemas.openxmlformats.org/drawingml/2006/main" w="0">
-            <a:solidFill>
-              <a:srgbClr val="000000">
-                <a:alpha val="0"/>
-              </a:srgbClr>
-            </a:solidFill>
+          <a:noFill xmlns:a="http://schemas.openxmlformats.org/drawingml/2006/main"/>
+          <a:ln xmlns:a="http://schemas.openxmlformats.org/drawingml/2006/main" w="0">
+            <a:noFill/>
             <a:prstDash val="solid"/>
           </a:ln>
         </p:spPr>
@@ -11164,7 +9057,7 @@
           <p:cNvPr id="25" name="">
             <a:extLst xmlns:a="http://schemas.openxmlformats.org/drawingml/2006/main">
               <a:ext uri="{FF2B5EF4-FFF2-40B4-BE49-F238E27FC236}">
-                <a16:creationId xmlns:a16="http://schemas.microsoft.com/office/drawing/2014/main" id="{282BDBB2-6D69-4177-BB8E-F89514A1EF04}"/>
+                <a16:creationId xmlns:a16="http://schemas.microsoft.com/office/drawing/2014/main" id="{C02ADD66-087D-4F61-AA27-92B468CE8A28}"/>
               </a:ext>
             </a:extLst>
           </p:cNvPr>
@@ -11197,7 +9090,7 @@
           <p:cNvPr id="26" name="">
             <a:extLst xmlns:a="http://schemas.openxmlformats.org/drawingml/2006/main">
               <a:ext uri="{FF2B5EF4-FFF2-40B4-BE49-F238E27FC236}">
-                <a16:creationId xmlns:a16="http://schemas.microsoft.com/office/drawing/2014/main" id="{AFE75FAD-9F06-4F69-97C5-445A00B0195B}"/>
+                <a16:creationId xmlns:a16="http://schemas.microsoft.com/office/drawing/2014/main" id="{488530E8-571B-4A27-BA28-AE8FA33EDC8E}"/>
               </a:ext>
             </a:extLst>
           </p:cNvPr>
@@ -11214,17 +9107,9 @@
           <a:prstGeom xmlns:a="http://schemas.openxmlformats.org/drawingml/2006/main" prst="rect">
             <a:avLst/>
           </a:prstGeom>
-          <a:solidFill xmlns:a="http://schemas.openxmlformats.org/drawingml/2006/main">
-            <a:srgbClr val="000000">
-              <a:alpha val="0"/>
-            </a:srgbClr>
-          </a:solidFill>
-          <a:ln xmlns:a="http://schemas.openxmlformats.org/drawingml/2006/main" w="0">
-            <a:solidFill>
-              <a:srgbClr val="000000">
-                <a:alpha val="0"/>
-              </a:srgbClr>
-            </a:solidFill>
+          <a:noFill xmlns:a="http://schemas.openxmlformats.org/drawingml/2006/main"/>
+          <a:ln xmlns:a="http://schemas.openxmlformats.org/drawingml/2006/main" w="0">
+            <a:noFill/>
             <a:prstDash val="solid"/>
           </a:ln>
         </p:spPr>
@@ -11261,7 +9146,7 @@
           <p:cNvPr id="27" name="">
             <a:extLst xmlns:a="http://schemas.openxmlformats.org/drawingml/2006/main">
               <a:ext uri="{FF2B5EF4-FFF2-40B4-BE49-F238E27FC236}">
-                <a16:creationId xmlns:a16="http://schemas.microsoft.com/office/drawing/2014/main" id="{A0BE4495-F887-4B1C-BE9C-186209CBC6E7}"/>
+                <a16:creationId xmlns:a16="http://schemas.microsoft.com/office/drawing/2014/main" id="{4CAC062E-9CDA-4612-A710-50DB6CBDDE07}"/>
               </a:ext>
             </a:extLst>
           </p:cNvPr>
@@ -11294,7 +9179,7 @@
           <p:cNvPr id="28" name="">
             <a:extLst xmlns:a="http://schemas.openxmlformats.org/drawingml/2006/main">
               <a:ext uri="{FF2B5EF4-FFF2-40B4-BE49-F238E27FC236}">
-                <a16:creationId xmlns:a16="http://schemas.microsoft.com/office/drawing/2014/main" id="{9275CE6A-91C8-4973-A969-BEFD639AB76A}"/>
+                <a16:creationId xmlns:a16="http://schemas.microsoft.com/office/drawing/2014/main" id="{1ED5D1E4-C8D8-4C87-B32C-62ADB6533B05}"/>
               </a:ext>
             </a:extLst>
           </p:cNvPr>
@@ -11311,17 +9196,9 @@
           <a:prstGeom xmlns:a="http://schemas.openxmlformats.org/drawingml/2006/main" prst="rect">
             <a:avLst/>
           </a:prstGeom>
-          <a:solidFill xmlns:a="http://schemas.openxmlformats.org/drawingml/2006/main">
-            <a:srgbClr val="000000">
-              <a:alpha val="0"/>
-            </a:srgbClr>
-          </a:solidFill>
-          <a:ln xmlns:a="http://schemas.openxmlformats.org/drawingml/2006/main" w="0">
-            <a:solidFill>
-              <a:srgbClr val="000000">
-                <a:alpha val="0"/>
-              </a:srgbClr>
-            </a:solidFill>
+          <a:noFill xmlns:a="http://schemas.openxmlformats.org/drawingml/2006/main"/>
+          <a:ln xmlns:a="http://schemas.openxmlformats.org/drawingml/2006/main" w="0">
+            <a:noFill/>
             <a:prstDash val="solid"/>
           </a:ln>
         </p:spPr>
@@ -11358,7 +9235,7 @@
           <p:cNvPr id="29" name="">
             <a:extLst xmlns:a="http://schemas.openxmlformats.org/drawingml/2006/main">
               <a:ext uri="{FF2B5EF4-FFF2-40B4-BE49-F238E27FC236}">
-                <a16:creationId xmlns:a16="http://schemas.microsoft.com/office/drawing/2014/main" id="{6DBEF3FD-6F3C-4D68-A10B-D3163E3A8A3B}"/>
+                <a16:creationId xmlns:a16="http://schemas.microsoft.com/office/drawing/2014/main" id="{95CA06D8-65C2-4C47-A6F2-CF9C8F838DBD}"/>
               </a:ext>
             </a:extLst>
           </p:cNvPr>
@@ -11391,7 +9268,7 @@
           <p:cNvPr id="30" name="">
             <a:extLst xmlns:a="http://schemas.openxmlformats.org/drawingml/2006/main">
               <a:ext uri="{FF2B5EF4-FFF2-40B4-BE49-F238E27FC236}">
-                <a16:creationId xmlns:a16="http://schemas.microsoft.com/office/drawing/2014/main" id="{840E70EC-5B85-4314-8EB5-13D1F73AF4E3}"/>
+                <a16:creationId xmlns:a16="http://schemas.microsoft.com/office/drawing/2014/main" id="{FB74FEBB-E396-41CB-9F9F-E6A50F4033D4}"/>
               </a:ext>
             </a:extLst>
           </p:cNvPr>
@@ -11408,17 +9285,9 @@
           <a:prstGeom xmlns:a="http://schemas.openxmlformats.org/drawingml/2006/main" prst="rect">
             <a:avLst/>
           </a:prstGeom>
-          <a:solidFill xmlns:a="http://schemas.openxmlformats.org/drawingml/2006/main">
-            <a:srgbClr val="000000">
-              <a:alpha val="0"/>
-            </a:srgbClr>
-          </a:solidFill>
-          <a:ln xmlns:a="http://schemas.openxmlformats.org/drawingml/2006/main" w="0">
-            <a:solidFill>
-              <a:srgbClr val="000000">
-                <a:alpha val="0"/>
-              </a:srgbClr>
-            </a:solidFill>
+          <a:noFill xmlns:a="http://schemas.openxmlformats.org/drawingml/2006/main"/>
+          <a:ln xmlns:a="http://schemas.openxmlformats.org/drawingml/2006/main" w="0">
+            <a:noFill/>
             <a:prstDash val="solid"/>
           </a:ln>
         </p:spPr>
@@ -11455,7 +9324,7 @@
           <p:cNvPr id="31" name="">
             <a:extLst xmlns:a="http://schemas.openxmlformats.org/drawingml/2006/main">
               <a:ext uri="{FF2B5EF4-FFF2-40B4-BE49-F238E27FC236}">
-                <a16:creationId xmlns:a16="http://schemas.microsoft.com/office/drawing/2014/main" id="{A9D4A77A-8CB9-4713-BED9-46D22E9CF700}"/>
+                <a16:creationId xmlns:a16="http://schemas.microsoft.com/office/drawing/2014/main" id="{F6EEC8A3-252A-4DAD-9B1B-E362F72B9B9A}"/>
               </a:ext>
             </a:extLst>
           </p:cNvPr>
@@ -11488,7 +9357,7 @@
           <p:cNvPr id="32" name="">
             <a:extLst xmlns:a="http://schemas.openxmlformats.org/drawingml/2006/main">
               <a:ext uri="{FF2B5EF4-FFF2-40B4-BE49-F238E27FC236}">
-                <a16:creationId xmlns:a16="http://schemas.microsoft.com/office/drawing/2014/main" id="{CB3C5396-A575-427B-AA04-9FAEA0FC223A}"/>
+                <a16:creationId xmlns:a16="http://schemas.microsoft.com/office/drawing/2014/main" id="{ABE7FE50-ACD3-48CC-8FEA-B2E418D0A6E3}"/>
               </a:ext>
             </a:extLst>
           </p:cNvPr>
@@ -11505,17 +9374,9 @@
           <a:prstGeom xmlns:a="http://schemas.openxmlformats.org/drawingml/2006/main" prst="rect">
             <a:avLst/>
           </a:prstGeom>
-          <a:solidFill xmlns:a="http://schemas.openxmlformats.org/drawingml/2006/main">
-            <a:srgbClr val="000000">
-              <a:alpha val="0"/>
-            </a:srgbClr>
-          </a:solidFill>
-          <a:ln xmlns:a="http://schemas.openxmlformats.org/drawingml/2006/main" w="0">
-            <a:solidFill>
-              <a:srgbClr val="000000">
-                <a:alpha val="0"/>
-              </a:srgbClr>
-            </a:solidFill>
+          <a:noFill xmlns:a="http://schemas.openxmlformats.org/drawingml/2006/main"/>
+          <a:ln xmlns:a="http://schemas.openxmlformats.org/drawingml/2006/main" w="0">
+            <a:noFill/>
             <a:prstDash val="solid"/>
           </a:ln>
         </p:spPr>
@@ -11552,7 +9413,7 @@
           <p:cNvPr id="33" name="">
             <a:extLst xmlns:a="http://schemas.openxmlformats.org/drawingml/2006/main">
               <a:ext uri="{FF2B5EF4-FFF2-40B4-BE49-F238E27FC236}">
-                <a16:creationId xmlns:a16="http://schemas.microsoft.com/office/drawing/2014/main" id="{2F2FB318-CB6C-4CAD-9527-583136666D5D}"/>
+                <a16:creationId xmlns:a16="http://schemas.microsoft.com/office/drawing/2014/main" id="{A0A2CE49-924F-44A9-987A-C7152F497BC8}"/>
               </a:ext>
             </a:extLst>
           </p:cNvPr>
@@ -11585,7 +9446,7 @@
           <p:cNvPr id="34" name="">
             <a:extLst xmlns:a="http://schemas.openxmlformats.org/drawingml/2006/main">
               <a:ext uri="{FF2B5EF4-FFF2-40B4-BE49-F238E27FC236}">
-                <a16:creationId xmlns:a16="http://schemas.microsoft.com/office/drawing/2014/main" id="{DF583877-15DF-43D3-87EF-A5172D8F62BB}"/>
+                <a16:creationId xmlns:a16="http://schemas.microsoft.com/office/drawing/2014/main" id="{04EB2967-B260-423D-A43A-A6645DDF778C}"/>
               </a:ext>
             </a:extLst>
           </p:cNvPr>
@@ -11602,17 +9463,9 @@
           <a:prstGeom xmlns:a="http://schemas.openxmlformats.org/drawingml/2006/main" prst="rect">
             <a:avLst/>
           </a:prstGeom>
-          <a:solidFill xmlns:a="http://schemas.openxmlformats.org/drawingml/2006/main">
-            <a:srgbClr val="000000">
-              <a:alpha val="0"/>
-            </a:srgbClr>
-          </a:solidFill>
-          <a:ln xmlns:a="http://schemas.openxmlformats.org/drawingml/2006/main" w="0">
-            <a:solidFill>
-              <a:srgbClr val="000000">
-                <a:alpha val="0"/>
-              </a:srgbClr>
-            </a:solidFill>
+          <a:noFill xmlns:a="http://schemas.openxmlformats.org/drawingml/2006/main"/>
+          <a:ln xmlns:a="http://schemas.openxmlformats.org/drawingml/2006/main" w="0">
+            <a:noFill/>
             <a:prstDash val="solid"/>
           </a:ln>
         </p:spPr>
@@ -11649,7 +9502,7 @@
           <p:cNvPr id="35" name="">
             <a:extLst xmlns:a="http://schemas.openxmlformats.org/drawingml/2006/main">
               <a:ext uri="{FF2B5EF4-FFF2-40B4-BE49-F238E27FC236}">
-                <a16:creationId xmlns:a16="http://schemas.microsoft.com/office/drawing/2014/main" id="{E810E5BD-EC3C-4C83-8E02-61823CCE2942}"/>
+                <a16:creationId xmlns:a16="http://schemas.microsoft.com/office/drawing/2014/main" id="{77223408-E52A-44B6-BE76-E0C395715A5A}"/>
               </a:ext>
             </a:extLst>
           </p:cNvPr>
@@ -11682,7 +9535,7 @@
           <p:cNvPr id="36" name="">
             <a:extLst xmlns:a="http://schemas.openxmlformats.org/drawingml/2006/main">
               <a:ext uri="{FF2B5EF4-FFF2-40B4-BE49-F238E27FC236}">
-                <a16:creationId xmlns:a16="http://schemas.microsoft.com/office/drawing/2014/main" id="{078FD5C7-77BD-4BB9-9179-C5E35A8D5354}"/>
+                <a16:creationId xmlns:a16="http://schemas.microsoft.com/office/drawing/2014/main" id="{AEBDAC27-F61C-4150-BFD8-702AA7695462}"/>
               </a:ext>
             </a:extLst>
           </p:cNvPr>
@@ -11699,17 +9552,9 @@
           <a:prstGeom xmlns:a="http://schemas.openxmlformats.org/drawingml/2006/main" prst="rect">
             <a:avLst/>
           </a:prstGeom>
-          <a:solidFill xmlns:a="http://schemas.openxmlformats.org/drawingml/2006/main">
-            <a:srgbClr val="000000">
-              <a:alpha val="0"/>
-            </a:srgbClr>
-          </a:solidFill>
-          <a:ln xmlns:a="http://schemas.openxmlformats.org/drawingml/2006/main" w="0">
-            <a:solidFill>
-              <a:srgbClr val="000000">
-                <a:alpha val="0"/>
-              </a:srgbClr>
-            </a:solidFill>
+          <a:noFill xmlns:a="http://schemas.openxmlformats.org/drawingml/2006/main"/>
+          <a:ln xmlns:a="http://schemas.openxmlformats.org/drawingml/2006/main" w="0">
+            <a:noFill/>
             <a:prstDash val="solid"/>
           </a:ln>
         </p:spPr>
@@ -11746,7 +9591,7 @@
           <p:cNvPr id="37" name="">
             <a:extLst xmlns:a="http://schemas.openxmlformats.org/drawingml/2006/main">
               <a:ext uri="{FF2B5EF4-FFF2-40B4-BE49-F238E27FC236}">
-                <a16:creationId xmlns:a16="http://schemas.microsoft.com/office/drawing/2014/main" id="{848EED4A-FD51-4CB7-B9BD-A0CB14138201}"/>
+                <a16:creationId xmlns:a16="http://schemas.microsoft.com/office/drawing/2014/main" id="{8325D023-EDF6-4769-B861-42275B88DEA7}"/>
               </a:ext>
             </a:extLst>
           </p:cNvPr>
@@ -11779,7 +9624,7 @@
           <p:cNvPr id="38" name="">
             <a:extLst xmlns:a="http://schemas.openxmlformats.org/drawingml/2006/main">
               <a:ext uri="{FF2B5EF4-FFF2-40B4-BE49-F238E27FC236}">
-                <a16:creationId xmlns:a16="http://schemas.microsoft.com/office/drawing/2014/main" id="{62F5E8BF-04BA-410A-8054-5D4673B263B9}"/>
+                <a16:creationId xmlns:a16="http://schemas.microsoft.com/office/drawing/2014/main" id="{6CCFD675-9D6B-4926-8CA1-B3A39FF5E3B6}"/>
               </a:ext>
             </a:extLst>
           </p:cNvPr>
@@ -11796,17 +9641,9 @@
           <a:prstGeom xmlns:a="http://schemas.openxmlformats.org/drawingml/2006/main" prst="rect">
             <a:avLst/>
           </a:prstGeom>
-          <a:solidFill xmlns:a="http://schemas.openxmlformats.org/drawingml/2006/main">
-            <a:srgbClr val="000000">
-              <a:alpha val="0"/>
-            </a:srgbClr>
-          </a:solidFill>
-          <a:ln xmlns:a="http://schemas.openxmlformats.org/drawingml/2006/main" w="0">
-            <a:solidFill>
-              <a:srgbClr val="000000">
-                <a:alpha val="0"/>
-              </a:srgbClr>
-            </a:solidFill>
+          <a:noFill xmlns:a="http://schemas.openxmlformats.org/drawingml/2006/main"/>
+          <a:ln xmlns:a="http://schemas.openxmlformats.org/drawingml/2006/main" w="0">
+            <a:noFill/>
             <a:prstDash val="solid"/>
           </a:ln>
         </p:spPr>
@@ -11843,7 +9680,7 @@
           <p:cNvPr id="39" name="">
             <a:extLst xmlns:a="http://schemas.openxmlformats.org/drawingml/2006/main">
               <a:ext uri="{FF2B5EF4-FFF2-40B4-BE49-F238E27FC236}">
-                <a16:creationId xmlns:a16="http://schemas.microsoft.com/office/drawing/2014/main" id="{C95D0676-20E2-43A8-B8A6-8BF2F5F06847}"/>
+                <a16:creationId xmlns:a16="http://schemas.microsoft.com/office/drawing/2014/main" id="{24E9E10C-F83C-4FD9-A3FE-723119D26847}"/>
               </a:ext>
             </a:extLst>
           </p:cNvPr>
@@ -11876,7 +9713,7 @@
           <p:cNvPr id="40" name="">
             <a:extLst xmlns:a="http://schemas.openxmlformats.org/drawingml/2006/main">
               <a:ext uri="{FF2B5EF4-FFF2-40B4-BE49-F238E27FC236}">
-                <a16:creationId xmlns:a16="http://schemas.microsoft.com/office/drawing/2014/main" id="{55F71048-F733-418D-93F2-D705D4DE5439}"/>
+                <a16:creationId xmlns:a16="http://schemas.microsoft.com/office/drawing/2014/main" id="{CE158083-D474-4B28-BAFD-62B0A8FB5A02}"/>
               </a:ext>
             </a:extLst>
           </p:cNvPr>
@@ -11893,17 +9730,9 @@
           <a:prstGeom xmlns:a="http://schemas.openxmlformats.org/drawingml/2006/main" prst="rect">
             <a:avLst/>
           </a:prstGeom>
-          <a:solidFill xmlns:a="http://schemas.openxmlformats.org/drawingml/2006/main">
-            <a:srgbClr val="000000">
-              <a:alpha val="0"/>
-            </a:srgbClr>
-          </a:solidFill>
-          <a:ln xmlns:a="http://schemas.openxmlformats.org/drawingml/2006/main" w="0">
-            <a:solidFill>
-              <a:srgbClr val="000000">
-                <a:alpha val="0"/>
-              </a:srgbClr>
-            </a:solidFill>
+          <a:noFill xmlns:a="http://schemas.openxmlformats.org/drawingml/2006/main"/>
+          <a:ln xmlns:a="http://schemas.openxmlformats.org/drawingml/2006/main" w="0">
+            <a:noFill/>
             <a:prstDash val="solid"/>
           </a:ln>
         </p:spPr>
@@ -11940,7 +9769,7 @@
           <p:cNvPr id="41" name="">
             <a:extLst xmlns:a="http://schemas.openxmlformats.org/drawingml/2006/main">
               <a:ext uri="{FF2B5EF4-FFF2-40B4-BE49-F238E27FC236}">
-                <a16:creationId xmlns:a16="http://schemas.microsoft.com/office/drawing/2014/main" id="{4449AA4C-7436-4CA0-AABA-BB084FED0458}"/>
+                <a16:creationId xmlns:a16="http://schemas.microsoft.com/office/drawing/2014/main" id="{B4AC2A33-A9A7-4174-9F12-D737B1082058}"/>
               </a:ext>
             </a:extLst>
           </p:cNvPr>
@@ -11973,7 +9802,7 @@
           <p:cNvPr id="42" name="">
             <a:extLst xmlns:a="http://schemas.openxmlformats.org/drawingml/2006/main">
               <a:ext uri="{FF2B5EF4-FFF2-40B4-BE49-F238E27FC236}">
-                <a16:creationId xmlns:a16="http://schemas.microsoft.com/office/drawing/2014/main" id="{D4F24521-24A0-495A-9018-77AD0851181F}"/>
+                <a16:creationId xmlns:a16="http://schemas.microsoft.com/office/drawing/2014/main" id="{029943BD-CFBE-4482-A902-0A5BCF2335FC}"/>
               </a:ext>
             </a:extLst>
           </p:cNvPr>
@@ -11990,17 +9819,9 @@
           <a:prstGeom xmlns:a="http://schemas.openxmlformats.org/drawingml/2006/main" prst="rect">
             <a:avLst/>
           </a:prstGeom>
-          <a:solidFill xmlns:a="http://schemas.openxmlformats.org/drawingml/2006/main">
-            <a:srgbClr val="000000">
-              <a:alpha val="0"/>
-            </a:srgbClr>
-          </a:solidFill>
-          <a:ln xmlns:a="http://schemas.openxmlformats.org/drawingml/2006/main" w="0">
-            <a:solidFill>
-              <a:srgbClr val="000000">
-                <a:alpha val="0"/>
-              </a:srgbClr>
-            </a:solidFill>
+          <a:noFill xmlns:a="http://schemas.openxmlformats.org/drawingml/2006/main"/>
+          <a:ln xmlns:a="http://schemas.openxmlformats.org/drawingml/2006/main" w="0">
+            <a:noFill/>
             <a:prstDash val="solid"/>
           </a:ln>
         </p:spPr>
@@ -12037,7 +9858,7 @@
           <p:cNvPr id="43" name="">
             <a:extLst xmlns:a="http://schemas.openxmlformats.org/drawingml/2006/main">
               <a:ext uri="{FF2B5EF4-FFF2-40B4-BE49-F238E27FC236}">
-                <a16:creationId xmlns:a16="http://schemas.microsoft.com/office/drawing/2014/main" id="{B0478ADC-2872-485F-984B-865AE40F157D}"/>
+                <a16:creationId xmlns:a16="http://schemas.microsoft.com/office/drawing/2014/main" id="{2FB36348-4C96-4C38-9A9F-5A3C5A88B7C7}"/>
               </a:ext>
             </a:extLst>
           </p:cNvPr>
@@ -12070,7 +9891,7 @@
           <p:cNvPr id="44" name="">
             <a:extLst xmlns:a="http://schemas.openxmlformats.org/drawingml/2006/main">
               <a:ext uri="{FF2B5EF4-FFF2-40B4-BE49-F238E27FC236}">
-                <a16:creationId xmlns:a16="http://schemas.microsoft.com/office/drawing/2014/main" id="{7D08612D-3E39-4C7A-906A-512A91021D2B}"/>
+                <a16:creationId xmlns:a16="http://schemas.microsoft.com/office/drawing/2014/main" id="{842DC336-2C29-47EA-9C06-DB38248E4B3D}"/>
               </a:ext>
             </a:extLst>
           </p:cNvPr>
@@ -12087,17 +9908,9 @@
           <a:prstGeom xmlns:a="http://schemas.openxmlformats.org/drawingml/2006/main" prst="rect">
             <a:avLst/>
           </a:prstGeom>
-          <a:solidFill xmlns:a="http://schemas.openxmlformats.org/drawingml/2006/main">
-            <a:srgbClr val="000000">
-              <a:alpha val="0"/>
-            </a:srgbClr>
-          </a:solidFill>
-          <a:ln xmlns:a="http://schemas.openxmlformats.org/drawingml/2006/main" w="0">
-            <a:solidFill>
-              <a:srgbClr val="000000">
-                <a:alpha val="0"/>
-              </a:srgbClr>
-            </a:solidFill>
+          <a:noFill xmlns:a="http://schemas.openxmlformats.org/drawingml/2006/main"/>
+          <a:ln xmlns:a="http://schemas.openxmlformats.org/drawingml/2006/main" w="0">
+            <a:noFill/>
             <a:prstDash val="solid"/>
           </a:ln>
         </p:spPr>
@@ -12134,7 +9947,7 @@
           <p:cNvPr id="45" name="">
             <a:extLst xmlns:a="http://schemas.openxmlformats.org/drawingml/2006/main">
               <a:ext uri="{FF2B5EF4-FFF2-40B4-BE49-F238E27FC236}">
-                <a16:creationId xmlns:a16="http://schemas.microsoft.com/office/drawing/2014/main" id="{CEFAF866-3748-4399-A403-099CCDD1ABC0}"/>
+                <a16:creationId xmlns:a16="http://schemas.microsoft.com/office/drawing/2014/main" id="{28E4BFBE-2054-4C02-BBEC-B6C49890AF11}"/>
               </a:ext>
             </a:extLst>
           </p:cNvPr>
@@ -12167,7 +9980,7 @@
           <p:cNvPr id="46" name="">
             <a:extLst xmlns:a="http://schemas.openxmlformats.org/drawingml/2006/main">
               <a:ext uri="{FF2B5EF4-FFF2-40B4-BE49-F238E27FC236}">
-                <a16:creationId xmlns:a16="http://schemas.microsoft.com/office/drawing/2014/main" id="{9A084D76-D221-41C6-B14D-F89F86F278AB}"/>
+                <a16:creationId xmlns:a16="http://schemas.microsoft.com/office/drawing/2014/main" id="{F4A25F1B-A26F-4B20-9719-0C8358BAC50D}"/>
               </a:ext>
             </a:extLst>
           </p:cNvPr>
@@ -12184,17 +9997,9 @@
           <a:prstGeom xmlns:a="http://schemas.openxmlformats.org/drawingml/2006/main" prst="rect">
             <a:avLst/>
           </a:prstGeom>
-          <a:solidFill xmlns:a="http://schemas.openxmlformats.org/drawingml/2006/main">
-            <a:srgbClr val="000000">
-              <a:alpha val="0"/>
-            </a:srgbClr>
-          </a:solidFill>
-          <a:ln xmlns:a="http://schemas.openxmlformats.org/drawingml/2006/main" w="0">
-            <a:solidFill>
-              <a:srgbClr val="000000">
-                <a:alpha val="0"/>
-              </a:srgbClr>
-            </a:solidFill>
+          <a:noFill xmlns:a="http://schemas.openxmlformats.org/drawingml/2006/main"/>
+          <a:ln xmlns:a="http://schemas.openxmlformats.org/drawingml/2006/main" w="0">
+            <a:noFill/>
             <a:prstDash val="solid"/>
           </a:ln>
         </p:spPr>
@@ -12231,7 +10036,7 @@
           <p:cNvPr id="47" name="">
             <a:extLst xmlns:a="http://schemas.openxmlformats.org/drawingml/2006/main">
               <a:ext uri="{FF2B5EF4-FFF2-40B4-BE49-F238E27FC236}">
-                <a16:creationId xmlns:a16="http://schemas.microsoft.com/office/drawing/2014/main" id="{83F54EE1-E4DB-409B-9484-FBEDC33FF53D}"/>
+                <a16:creationId xmlns:a16="http://schemas.microsoft.com/office/drawing/2014/main" id="{7D4F1B43-779B-43B2-A228-DFD68A71CCE1}"/>
               </a:ext>
             </a:extLst>
           </p:cNvPr>
@@ -12264,7 +10069,7 @@
           <p:cNvPr id="48" name="">
             <a:extLst xmlns:a="http://schemas.openxmlformats.org/drawingml/2006/main">
               <a:ext uri="{FF2B5EF4-FFF2-40B4-BE49-F238E27FC236}">
-                <a16:creationId xmlns:a16="http://schemas.microsoft.com/office/drawing/2014/main" id="{1990A521-5D75-48A7-A5C9-117A6CE0E133}"/>
+                <a16:creationId xmlns:a16="http://schemas.microsoft.com/office/drawing/2014/main" id="{C56E8B58-D28B-4688-A74A-7FB3A80A5327}"/>
               </a:ext>
             </a:extLst>
           </p:cNvPr>
@@ -12281,17 +10086,9 @@
           <a:prstGeom xmlns:a="http://schemas.openxmlformats.org/drawingml/2006/main" prst="rect">
             <a:avLst/>
           </a:prstGeom>
-          <a:solidFill xmlns:a="http://schemas.openxmlformats.org/drawingml/2006/main">
-            <a:srgbClr val="000000">
-              <a:alpha val="0"/>
-            </a:srgbClr>
-          </a:solidFill>
-          <a:ln xmlns:a="http://schemas.openxmlformats.org/drawingml/2006/main" w="0">
-            <a:solidFill>
-              <a:srgbClr val="000000">
-                <a:alpha val="0"/>
-              </a:srgbClr>
-            </a:solidFill>
+          <a:noFill xmlns:a="http://schemas.openxmlformats.org/drawingml/2006/main"/>
+          <a:ln xmlns:a="http://schemas.openxmlformats.org/drawingml/2006/main" w="0">
+            <a:noFill/>
             <a:prstDash val="solid"/>
           </a:ln>
         </p:spPr>
@@ -12328,7 +10125,7 @@
           <p:cNvPr id="49" name="">
             <a:extLst xmlns:a="http://schemas.openxmlformats.org/drawingml/2006/main">
               <a:ext uri="{FF2B5EF4-FFF2-40B4-BE49-F238E27FC236}">
-                <a16:creationId xmlns:a16="http://schemas.microsoft.com/office/drawing/2014/main" id="{8BA770C6-ED64-4AE8-A17A-9D6DC5AD2604}"/>
+                <a16:creationId xmlns:a16="http://schemas.microsoft.com/office/drawing/2014/main" id="{1124C983-BB25-4B68-BDAB-723564ADC5DC}"/>
               </a:ext>
             </a:extLst>
           </p:cNvPr>
@@ -12361,7 +10158,7 @@
           <p:cNvPr id="50" name="">
             <a:extLst xmlns:a="http://schemas.openxmlformats.org/drawingml/2006/main">
               <a:ext uri="{FF2B5EF4-FFF2-40B4-BE49-F238E27FC236}">
-                <a16:creationId xmlns:a16="http://schemas.microsoft.com/office/drawing/2014/main" id="{330FF7AA-0B89-45AF-8C74-C2C500C24555}"/>
+                <a16:creationId xmlns:a16="http://schemas.microsoft.com/office/drawing/2014/main" id="{88CF62F7-4381-4D89-B4D9-A7CF60A844AF}"/>
               </a:ext>
             </a:extLst>
           </p:cNvPr>
@@ -12378,17 +10175,9 @@
           <a:prstGeom xmlns:a="http://schemas.openxmlformats.org/drawingml/2006/main" prst="rect">
             <a:avLst/>
           </a:prstGeom>
-          <a:solidFill xmlns:a="http://schemas.openxmlformats.org/drawingml/2006/main">
-            <a:srgbClr val="000000">
-              <a:alpha val="0"/>
-            </a:srgbClr>
-          </a:solidFill>
-          <a:ln xmlns:a="http://schemas.openxmlformats.org/drawingml/2006/main" w="0">
-            <a:solidFill>
-              <a:srgbClr val="000000">
-                <a:alpha val="0"/>
-              </a:srgbClr>
-            </a:solidFill>
+          <a:noFill xmlns:a="http://schemas.openxmlformats.org/drawingml/2006/main"/>
+          <a:ln xmlns:a="http://schemas.openxmlformats.org/drawingml/2006/main" w="0">
+            <a:noFill/>
             <a:prstDash val="solid"/>
           </a:ln>
         </p:spPr>
@@ -12425,7 +10214,7 @@
           <p:cNvPr id="51" name="">
             <a:extLst xmlns:a="http://schemas.openxmlformats.org/drawingml/2006/main">
               <a:ext uri="{FF2B5EF4-FFF2-40B4-BE49-F238E27FC236}">
-                <a16:creationId xmlns:a16="http://schemas.microsoft.com/office/drawing/2014/main" id="{F0D541DC-8810-4E0A-81D7-D737896AD9B8}"/>
+                <a16:creationId xmlns:a16="http://schemas.microsoft.com/office/drawing/2014/main" id="{06DCCCE8-0663-4984-ACCA-2912EBE2A652}"/>
               </a:ext>
             </a:extLst>
           </p:cNvPr>
@@ -12458,7 +10247,7 @@
           <p:cNvPr id="52" name="">
             <a:extLst xmlns:a="http://schemas.openxmlformats.org/drawingml/2006/main">
               <a:ext uri="{FF2B5EF4-FFF2-40B4-BE49-F238E27FC236}">
-                <a16:creationId xmlns:a16="http://schemas.microsoft.com/office/drawing/2014/main" id="{59A9BC25-1C79-44FE-8B50-18A3DE3C3031}"/>
+                <a16:creationId xmlns:a16="http://schemas.microsoft.com/office/drawing/2014/main" id="{B83BD688-533A-4551-8E5E-40F3A9D35BE9}"/>
               </a:ext>
             </a:extLst>
           </p:cNvPr>
@@ -12475,17 +10264,9 @@
           <a:prstGeom xmlns:a="http://schemas.openxmlformats.org/drawingml/2006/main" prst="rect">
             <a:avLst/>
           </a:prstGeom>
-          <a:solidFill xmlns:a="http://schemas.openxmlformats.org/drawingml/2006/main">
-            <a:srgbClr val="000000">
-              <a:alpha val="0"/>
-            </a:srgbClr>
-          </a:solidFill>
-          <a:ln xmlns:a="http://schemas.openxmlformats.org/drawingml/2006/main" w="0">
-            <a:solidFill>
-              <a:srgbClr val="000000">
-                <a:alpha val="0"/>
-              </a:srgbClr>
-            </a:solidFill>
+          <a:noFill xmlns:a="http://schemas.openxmlformats.org/drawingml/2006/main"/>
+          <a:ln xmlns:a="http://schemas.openxmlformats.org/drawingml/2006/main" w="0">
+            <a:noFill/>
             <a:prstDash val="solid"/>
           </a:ln>
         </p:spPr>
@@ -12522,7 +10303,7 @@
           <p:cNvPr id="53" name="">
             <a:extLst xmlns:a="http://schemas.openxmlformats.org/drawingml/2006/main">
               <a:ext uri="{FF2B5EF4-FFF2-40B4-BE49-F238E27FC236}">
-                <a16:creationId xmlns:a16="http://schemas.microsoft.com/office/drawing/2014/main" id="{3D3DAFFC-08C0-4A44-90F7-F2952C722F0E}"/>
+                <a16:creationId xmlns:a16="http://schemas.microsoft.com/office/drawing/2014/main" id="{A1B519DE-47B1-4F09-83BD-12FE0D6BD640}"/>
               </a:ext>
             </a:extLst>
           </p:cNvPr>
@@ -12555,7 +10336,7 @@
           <p:cNvPr id="54" name="">
             <a:extLst xmlns:a="http://schemas.openxmlformats.org/drawingml/2006/main">
               <a:ext uri="{FF2B5EF4-FFF2-40B4-BE49-F238E27FC236}">
-                <a16:creationId xmlns:a16="http://schemas.microsoft.com/office/drawing/2014/main" id="{5E9BC31C-004E-40EB-BE4F-FA4F92E01C69}"/>
+                <a16:creationId xmlns:a16="http://schemas.microsoft.com/office/drawing/2014/main" id="{5ECBFDF9-4DE0-4C57-8C82-E27878B153AE}"/>
               </a:ext>
             </a:extLst>
           </p:cNvPr>
@@ -12572,17 +10353,9 @@
           <a:prstGeom xmlns:a="http://schemas.openxmlformats.org/drawingml/2006/main" prst="rect">
             <a:avLst/>
           </a:prstGeom>
-          <a:solidFill xmlns:a="http://schemas.openxmlformats.org/drawingml/2006/main">
-            <a:srgbClr val="000000">
-              <a:alpha val="0"/>
-            </a:srgbClr>
-          </a:solidFill>
-          <a:ln xmlns:a="http://schemas.openxmlformats.org/drawingml/2006/main" w="0">
-            <a:solidFill>
-              <a:srgbClr val="000000">
-                <a:alpha val="0"/>
-              </a:srgbClr>
-            </a:solidFill>
+          <a:noFill xmlns:a="http://schemas.openxmlformats.org/drawingml/2006/main"/>
+          <a:ln xmlns:a="http://schemas.openxmlformats.org/drawingml/2006/main" w="0">
+            <a:noFill/>
             <a:prstDash val="solid"/>
           </a:ln>
         </p:spPr>
@@ -12619,7 +10392,7 @@
           <p:cNvPr id="55" name="">
             <a:extLst xmlns:a="http://schemas.openxmlformats.org/drawingml/2006/main">
               <a:ext uri="{FF2B5EF4-FFF2-40B4-BE49-F238E27FC236}">
-                <a16:creationId xmlns:a16="http://schemas.microsoft.com/office/drawing/2014/main" id="{19018825-F05F-4CDF-8573-F5543BE08DED}"/>
+                <a16:creationId xmlns:a16="http://schemas.microsoft.com/office/drawing/2014/main" id="{D91289A4-C085-4D71-949E-6EAED7AD4DBB}"/>
               </a:ext>
             </a:extLst>
           </p:cNvPr>
@@ -12652,7 +10425,7 @@
           <p:cNvPr id="56" name="">
             <a:extLst xmlns:a="http://schemas.openxmlformats.org/drawingml/2006/main">
               <a:ext uri="{FF2B5EF4-FFF2-40B4-BE49-F238E27FC236}">
-                <a16:creationId xmlns:a16="http://schemas.microsoft.com/office/drawing/2014/main" id="{CE1A6187-0734-4E84-AD88-50DECB83EC54}"/>
+                <a16:creationId xmlns:a16="http://schemas.microsoft.com/office/drawing/2014/main" id="{9C7B4A88-FD7E-4257-824D-9F3D862BD0A9}"/>
               </a:ext>
             </a:extLst>
           </p:cNvPr>
@@ -12669,17 +10442,9 @@
           <a:prstGeom xmlns:a="http://schemas.openxmlformats.org/drawingml/2006/main" prst="rect">
             <a:avLst/>
           </a:prstGeom>
-          <a:solidFill xmlns:a="http://schemas.openxmlformats.org/drawingml/2006/main">
-            <a:srgbClr val="000000">
-              <a:alpha val="0"/>
-            </a:srgbClr>
-          </a:solidFill>
-          <a:ln xmlns:a="http://schemas.openxmlformats.org/drawingml/2006/main" w="0">
-            <a:solidFill>
-              <a:srgbClr val="000000">
-                <a:alpha val="0"/>
-              </a:srgbClr>
-            </a:solidFill>
+          <a:noFill xmlns:a="http://schemas.openxmlformats.org/drawingml/2006/main"/>
+          <a:ln xmlns:a="http://schemas.openxmlformats.org/drawingml/2006/main" w="0">
+            <a:noFill/>
             <a:prstDash val="solid"/>
           </a:ln>
         </p:spPr>
@@ -12716,7 +10481,7 @@
           <p:cNvPr id="57" name="">
             <a:extLst xmlns:a="http://schemas.openxmlformats.org/drawingml/2006/main">
               <a:ext uri="{FF2B5EF4-FFF2-40B4-BE49-F238E27FC236}">
-                <a16:creationId xmlns:a16="http://schemas.microsoft.com/office/drawing/2014/main" id="{19108CCC-3C38-42D0-BB25-4AF4256C9A16}"/>
+                <a16:creationId xmlns:a16="http://schemas.microsoft.com/office/drawing/2014/main" id="{BBEE5711-96FD-45EC-BA97-EAEAF26944D0}"/>
               </a:ext>
             </a:extLst>
           </p:cNvPr>
@@ -12733,17 +10498,9 @@
           <a:prstGeom xmlns:a="http://schemas.openxmlformats.org/drawingml/2006/main" prst="rect">
             <a:avLst/>
           </a:prstGeom>
-          <a:solidFill xmlns:a="http://schemas.openxmlformats.org/drawingml/2006/main">
-            <a:srgbClr val="000000">
-              <a:alpha val="0"/>
-            </a:srgbClr>
-          </a:solidFill>
-          <a:ln xmlns:a="http://schemas.openxmlformats.org/drawingml/2006/main" w="0">
-            <a:solidFill>
-              <a:srgbClr val="000000">
-                <a:alpha val="0"/>
-              </a:srgbClr>
-            </a:solidFill>
+          <a:noFill xmlns:a="http://schemas.openxmlformats.org/drawingml/2006/main"/>
+          <a:ln xmlns:a="http://schemas.openxmlformats.org/drawingml/2006/main" w="0">
+            <a:noFill/>
             <a:prstDash val="solid"/>
           </a:ln>
         </p:spPr>
@@ -12780,7 +10537,7 @@
           <p:cNvPr id="58" name="">
             <a:extLst xmlns:a="http://schemas.openxmlformats.org/drawingml/2006/main">
               <a:ext uri="{FF2B5EF4-FFF2-40B4-BE49-F238E27FC236}">
-                <a16:creationId xmlns:a16="http://schemas.microsoft.com/office/drawing/2014/main" id="{DECA32BE-9927-4888-9A1D-DDACEABACAB9}"/>
+                <a16:creationId xmlns:a16="http://schemas.microsoft.com/office/drawing/2014/main" id="{98EAA2F7-3677-4A91-B3C5-EF86E479F110}"/>
               </a:ext>
             </a:extLst>
           </p:cNvPr>
@@ -12801,11 +10558,7 @@
             <a:srgbClr val="D8D3C8"/>
           </a:solidFill>
           <a:ln xmlns:a="http://schemas.openxmlformats.org/drawingml/2006/main" w="0">
-            <a:solidFill>
-              <a:srgbClr val="000000">
-                <a:alpha val="0"/>
-              </a:srgbClr>
-            </a:solidFill>
+            <a:noFill/>
             <a:prstDash val="solid"/>
           </a:ln>
         </p:spPr>
@@ -12815,7 +10568,7 @@
           <p:cNvPr id="59" name="">
             <a:extLst xmlns:a="http://schemas.openxmlformats.org/drawingml/2006/main">
               <a:ext uri="{FF2B5EF4-FFF2-40B4-BE49-F238E27FC236}">
-                <a16:creationId xmlns:a16="http://schemas.microsoft.com/office/drawing/2014/main" id="{60CD6600-F667-4F94-A260-8C1914498B18}"/>
+                <a16:creationId xmlns:a16="http://schemas.microsoft.com/office/drawing/2014/main" id="{409595E1-C0DB-407A-B854-4A5D4A093BAE}"/>
               </a:ext>
             </a:extLst>
           </p:cNvPr>
@@ -12832,17 +10585,9 @@
           <a:prstGeom xmlns:a="http://schemas.openxmlformats.org/drawingml/2006/main" prst="rect">
             <a:avLst/>
           </a:prstGeom>
-          <a:solidFill xmlns:a="http://schemas.openxmlformats.org/drawingml/2006/main">
-            <a:srgbClr val="000000">
-              <a:alpha val="0"/>
-            </a:srgbClr>
-          </a:solidFill>
-          <a:ln xmlns:a="http://schemas.openxmlformats.org/drawingml/2006/main" w="0">
-            <a:solidFill>
-              <a:srgbClr val="000000">
-                <a:alpha val="0"/>
-              </a:srgbClr>
-            </a:solidFill>
+          <a:noFill xmlns:a="http://schemas.openxmlformats.org/drawingml/2006/main"/>
+          <a:ln xmlns:a="http://schemas.openxmlformats.org/drawingml/2006/main" w="0">
+            <a:noFill/>
             <a:prstDash val="solid"/>
           </a:ln>
         </p:spPr>
@@ -12879,7 +10624,7 @@
           <p:cNvPr id="60" name="">
             <a:extLst xmlns:a="http://schemas.openxmlformats.org/drawingml/2006/main">
               <a:ext uri="{FF2B5EF4-FFF2-40B4-BE49-F238E27FC236}">
-                <a16:creationId xmlns:a16="http://schemas.microsoft.com/office/drawing/2014/main" id="{0E3332FD-9155-440F-82C4-47971CD2BB3F}"/>
+                <a16:creationId xmlns:a16="http://schemas.microsoft.com/office/drawing/2014/main" id="{BA76463C-07BA-4BDD-87C0-38CE40EB4F8A}"/>
               </a:ext>
             </a:extLst>
           </p:cNvPr>
@@ -12896,17 +10641,9 @@
           <a:prstGeom xmlns:a="http://schemas.openxmlformats.org/drawingml/2006/main" prst="rect">
             <a:avLst/>
           </a:prstGeom>
-          <a:solidFill xmlns:a="http://schemas.openxmlformats.org/drawingml/2006/main">
-            <a:srgbClr val="000000">
-              <a:alpha val="0"/>
-            </a:srgbClr>
-          </a:solidFill>
-          <a:ln xmlns:a="http://schemas.openxmlformats.org/drawingml/2006/main" w="0">
-            <a:solidFill>
-              <a:srgbClr val="000000">
-                <a:alpha val="0"/>
-              </a:srgbClr>
-            </a:solidFill>
+          <a:noFill xmlns:a="http://schemas.openxmlformats.org/drawingml/2006/main"/>
+          <a:ln xmlns:a="http://schemas.openxmlformats.org/drawingml/2006/main" w="0">
+            <a:noFill/>
             <a:prstDash val="solid"/>
           </a:ln>
         </p:spPr>
@@ -12941,7 +10678,7 @@
     </p:spTree>
     <p:extLst>
       <p:ext uri="{BB962C8B-B14F-4D97-AF65-F5344CB8AC3E}">
-        <p14:creationId xmlns:p14="http://schemas.microsoft.com/office/powerpoint/2010/main" val="1800007687"/>
+        <p14:creationId xmlns:p14="http://schemas.microsoft.com/office/powerpoint/2010/main" val="1058667873"/>
       </p:ext>
     </p:extLst>
   </p:cSld>
@@ -13006,12 +10743,58 @@
         <a:solidFill>
           <a:schemeClr val="phClr"/>
         </a:solidFill>
-        <a:solidFill>
-          <a:schemeClr val="dk1"/>
-        </a:solidFill>
-        <a:solidFill>
-          <a:schemeClr val="accent1"/>
-        </a:solidFill>
+        <a:gradFill>
+          <a:gsLst>
+            <a:gs pos="0">
+              <a:schemeClr val="phClr">
+                <a:tint val="67000"/>
+                <a:lumMod val="110000"/>
+                <a:satMod val="105000"/>
+              </a:schemeClr>
+            </a:gs>
+            <a:gs pos="50000">
+              <a:schemeClr val="phClr">
+                <a:tint val="73000"/>
+                <a:lumMod val="105000"/>
+                <a:satMod val="103000"/>
+              </a:schemeClr>
+            </a:gs>
+            <a:gs pos="100000">
+              <a:schemeClr val="phClr">
+                <a:tint val="81000"/>
+                <a:lumMod val="105000"/>
+                <a:satMod val="109000"/>
+              </a:schemeClr>
+            </a:gs>
+          </a:gsLst>
+          <a:lin ang="5400000" scaled="0"/>
+        </a:gradFill>
+        <a:gradFill>
+          <a:gsLst>
+            <a:gs pos="0">
+              <a:schemeClr val="phClr">
+                <a:tint val="94000"/>
+                <a:lumMod val="102000"/>
+                <a:satMod val="103000"/>
+              </a:schemeClr>
+            </a:gs>
+            <a:gs pos="50000">
+              <a:schemeClr val="phClr">
+                <a:shade val="100000"/>
+                <a:lumMod val="100000"/>
+                <a:satMod val="110000"/>
+              </a:schemeClr>
+            </a:gs>
+            <a:gs pos="100000">
+              <a:schemeClr val="phClr">
+                <a:shade val="78000"/>
+                <a:lumMod val="99000"/>
+                <a:satMod val="120000"/>
+              </a:schemeClr>
+            </a:gs>
+          </a:gsLst>
+          <a:lin ang="5400000" scaled="0"/>
+        </a:gradFill>
       </a:fillStyleLst>
       <a:lnStyleLst>
         <a:ln w="12700">
